--- a/01-foundations-scenarios-and-tools/00-pre-session/slides-welcome-and-setup.pptx
+++ b/01-foundations-scenarios-and-tools/00-pre-session/slides-welcome-and-setup.pptx
@@ -53,6 +53,17 @@
     <p:sldId id="301" r:id="rId47"/>
     <p:sldId id="302" r:id="rId48"/>
     <p:sldId id="303" r:id="rId49"/>
+    <p:sldId id="304" r:id="rId50"/>
+    <p:sldId id="305" r:id="rId51"/>
+    <p:sldId id="306" r:id="rId52"/>
+    <p:sldId id="307" r:id="rId53"/>
+    <p:sldId id="308" r:id="rId54"/>
+    <p:sldId id="309" r:id="rId55"/>
+    <p:sldId id="310" r:id="rId56"/>
+    <p:sldId id="311" r:id="rId57"/>
+    <p:sldId id="312" r:id="rId58"/>
+    <p:sldId id="313" r:id="rId59"/>
+    <p:sldId id="314" r:id="rId60"/>
   </p:sldIdLst>
   <p:sldSz cx="9144000" cy="5143500" type="screen16x9"/>
   <p:notesSz cx="6858000" cy="9144000"/>
@@ -3270,7 +3281,7 @@
             </a:pPr>
             <a:r>
               <a:rPr/>
-              <a:t>Before you start</a:t>
+              <a:t>Where do I type this?</a:t>
             </a:r>
           </a:p>
         </p:txBody>
@@ -3294,65 +3305,65 @@
               <a:buNone/>
             </a:pPr>
             <a:r>
-              <a:rPr/>
-              <a:t>You need:</a:t>
-            </a:r>
-          </a:p>
-          <a:p>
-            <a:pPr lvl="0"/>
-            <a:r>
-              <a:rPr/>
-              <a:t>A laptop with </a:t>
-            </a:r>
-            <a:r>
               <a:rPr b="1"/>
-              <a:t>8 GB RAM minimum</a:t>
-            </a:r>
-            <a:r>
-              <a:rPr/>
-              <a:t> (16 GB is much more comfortable)</a:t>
-            </a:r>
-          </a:p>
-          <a:p>
-            <a:pPr lvl="0"/>
+              <a:t>Read this slide before you type anything.</a:t>
+            </a:r>
+            <a:r>
+              <a:rPr/>
+              <a:t> It is the single most common source of lost time.</a:t>
+            </a:r>
+          </a:p>
+          <a:p>
+            <a:pPr lvl="0" indent="0" marL="0">
+              <a:buNone/>
+            </a:pPr>
+            <a:r>
+              <a:rPr/>
+              <a:t>Two kinds of instruction appear in these slides, and they are always labelled:</a:t>
+            </a:r>
+          </a:p>
+          <a:p>
+            <a:pPr lvl="0" indent="0" marL="0">
+              <a:buNone/>
+            </a:pPr>
+            <a:r>
+              <a:rPr/>
+              <a:t>download</a:t>
+            </a:r>
+          </a:p>
+          <a:p>
+            <a:pPr lvl="0" indent="0" marL="0">
+              <a:buNone/>
+            </a:pPr>
+            <a:r>
+              <a:rPr/>
+              <a:t>Go to a website in your browser and run an installer. No typing.</a:t>
+            </a:r>
+          </a:p>
+          <a:p>
+            <a:pPr lvl="0" indent="0" marL="0">
+              <a:buNone/>
+            </a:pPr>
+            <a:r>
+              <a:rPr/>
+              <a:t>VS Codium terminal</a:t>
+            </a:r>
+          </a:p>
+          <a:p>
+            <a:pPr lvl="0" indent="0" marL="0">
+              <a:buNone/>
+            </a:pPr>
+            <a:r>
+              <a:rPr/>
+              <a:t>Type it in the terminal </a:t>
+            </a:r>
             <a:r>
               <a:rPr b="1"/>
-              <a:t>Administrator rights</a:t>
-            </a:r>
-            <a:r>
-              <a:rPr/>
-              <a:t> to install software</a:t>
-            </a:r>
-          </a:p>
-          <a:p>
-            <a:pPr lvl="0"/>
-            <a:r>
-              <a:rPr/>
-              <a:t>About </a:t>
-            </a:r>
-            <a:r>
-              <a:rPr b="1"/>
-              <a:t>10 GB free disk space</a:t>
-            </a:r>
-            <a:r>
-              <a:rPr/>
-              <a:t> — the model files are large</a:t>
-            </a:r>
-          </a:p>
-          <a:p>
-            <a:pPr lvl="0"/>
-            <a:r>
-              <a:rPr/>
-              <a:t>60–90 minutes, uninterrupted</a:t>
-            </a:r>
-          </a:p>
-          <a:p>
-            <a:pPr lvl="0" indent="0" marL="0">
-              <a:buNone/>
-            </a:pPr>
-            <a:r>
-              <a:rPr/>
-              <a:t>Do this on the machine you will actually bring to class. A working setup on a desktop at home is of no use in the lab.</a:t>
+              <a:t>inside VS Codium</a:t>
+            </a:r>
+            <a:r>
+              <a:rPr/>
+              <a:t> — never the macOS Terminal app, never PowerShell on its own.</a:t>
             </a:r>
           </a:p>
         </p:txBody>
@@ -3389,22 +3400,142 @@
             <p:ph type="title"/>
           </p:nvPr>
         </p:nvSpPr>
-        <p:spPr>
-          <a:xfrm>
-            <a:off x="722313" y="3305176"/>
-            <a:ext cx="7772400" cy="1021556"/>
-          </a:xfrm>
-        </p:spPr>
-        <p:txBody>
-          <a:bodyPr/>
-          <a:lstStyle/>
-          <a:p>
-            <a:pPr lvl="0" indent="0" marL="0">
-              <a:buNone/>
-            </a:pPr>
-            <a:r>
-              <a:rPr/>
-              <a:t>Step 1 — VS Codium</a:t>
+        <p:spPr/>
+        <p:txBody>
+          <a:bodyPr/>
+          <a:lstStyle/>
+          <a:p>
+            <a:pPr lvl="0" indent="0" marL="0">
+              <a:buNone/>
+            </a:pPr>
+            <a:r>
+              <a:rPr/>
+              <a:t>Why always the VS Codium terminal</a:t>
+            </a:r>
+          </a:p>
+        </p:txBody>
+      </p:sp>
+      <p:sp>
+        <p:nvSpPr>
+          <p:cNvPr id="3" name="Content Placeholder 2"/>
+          <p:cNvSpPr>
+            <a:spLocks noGrp="1"/>
+          </p:cNvSpPr>
+          <p:nvPr>
+            <p:ph idx="1"/>
+          </p:nvPr>
+        </p:nvSpPr>
+        <p:spPr/>
+        <p:txBody>
+          <a:bodyPr/>
+          <a:lstStyle/>
+          <a:p>
+            <a:pPr lvl="0"/>
+            <a:r>
+              <a:rPr/>
+              <a:t>It opens </a:t>
+            </a:r>
+            <a:r>
+              <a:rPr b="1"/>
+              <a:t>in your project folder</a:t>
+            </a:r>
+            <a:r>
+              <a:rPr/>
+              <a:t>, so </a:t>
+            </a:r>
+            <a:r>
+              <a:rPr>
+                <a:latin typeface="Courier"/>
+              </a:rPr>
+              <a:t>git</a:t>
+            </a:r>
+            <a:r>
+              <a:rPr/>
+              <a:t> and </a:t>
+            </a:r>
+            <a:r>
+              <a:rPr>
+                <a:latin typeface="Courier"/>
+              </a:rPr>
+              <a:t>python</a:t>
+            </a:r>
+            <a:r>
+              <a:rPr/>
+              <a:t> act on the right files</a:t>
+            </a:r>
+          </a:p>
+          <a:p>
+            <a:pPr lvl="0"/>
+            <a:r>
+              <a:rPr/>
+              <a:t>It sees the </a:t>
+            </a:r>
+            <a:r>
+              <a:rPr>
+                <a:latin typeface="Courier"/>
+              </a:rPr>
+              <a:t>.venv</a:t>
+            </a:r>
+            <a:r>
+              <a:rPr/>
+              <a:t> you activate; a separate Terminal window does not</a:t>
+            </a:r>
+          </a:p>
+          <a:p>
+            <a:pPr lvl="0"/>
+            <a:r>
+              <a:rPr/>
+              <a:t>It is the same on macOS, Windows and Linux, so these slides work for everyone</a:t>
+            </a:r>
+          </a:p>
+          <a:p>
+            <a:pPr lvl="0" indent="0" marL="0">
+              <a:buNone/>
+            </a:pPr>
+            <a:r>
+              <a:rPr b="1"/>
+              <a:t>Open it now:</a:t>
+            </a:r>
+            <a:r>
+              <a:rPr/>
+              <a:t> </a:t>
+            </a:r>
+            <a:r>
+              <a:rPr>
+                <a:latin typeface="Courier"/>
+              </a:rPr>
+              <a:t>View → Terminal</a:t>
+            </a:r>
+            <a:r>
+              <a:rPr/>
+              <a:t>, or </a:t>
+            </a:r>
+            <a:r>
+              <a:rPr>
+                <a:latin typeface="Courier"/>
+              </a:rPr>
+              <a:t>Ctrl+`</a:t>
+            </a:r>
+            <a:r>
+              <a:rPr/>
+              <a:t> (the backtick key, above Tab). A panel appears at the bottom. That panel is where every command below goes.</a:t>
+            </a:r>
+          </a:p>
+          <a:p>
+            <a:pPr lvl="0" indent="0" marL="0">
+              <a:buNone/>
+            </a:pPr>
+            <a:r>
+              <a:rPr/>
+              <a:t>If a command fails, check </a:t>
+            </a:r>
+            <a:r>
+              <a:rPr i="1"/>
+              <a:t>where you typed it</a:t>
+            </a:r>
+            <a:r>
+              <a:rPr/>
+              <a:t> before you check anything else.</a:t>
             </a:r>
           </a:p>
         </p:txBody>
@@ -3451,7 +3582,7 @@
             </a:pPr>
             <a:r>
               <a:rPr/>
-              <a:t>Install VS Codium</a:t>
+              <a:t>Before you start</a:t>
             </a:r>
           </a:p>
         </p:txBody>
@@ -3476,175 +3607,64 @@
             </a:pPr>
             <a:r>
               <a:rPr/>
-              <a:t>Go to </a:t>
+              <a:t>You need:</a:t>
+            </a:r>
+          </a:p>
+          <a:p>
+            <a:pPr lvl="0"/>
+            <a:r>
+              <a:rPr/>
+              <a:t>A laptop with </a:t>
             </a:r>
             <a:r>
               <a:rPr b="1"/>
-              <a:t>vscodium.com</a:t>
-            </a:r>
-            <a:r>
-              <a:rPr/>
-              <a:t> and download the build for your operating system.</a:t>
-            </a:r>
-          </a:p>
-          <a:p>
-            <a:pPr lvl="0" indent="0" marL="0">
-              <a:buNone/>
-            </a:pPr>
+              <a:t>8 GB RAM minimum</a:t>
+            </a:r>
+            <a:r>
+              <a:rPr/>
+              <a:t> (16 GB is much more comfortable)</a:t>
+            </a:r>
+          </a:p>
+          <a:p>
+            <a:pPr lvl="0"/>
             <a:r>
               <a:rPr b="1"/>
-              <a:t>macOS</a:t>
-            </a:r>
-          </a:p>
-          <a:p>
-            <a:pPr lvl="0" indent="0" marL="0">
-              <a:buNone/>
-            </a:pPr>
-            <a:r>
-              <a:rPr/>
-              <a:t>Download the </a:t>
-            </a:r>
-            <a:r>
-              <a:rPr>
-                <a:latin typeface="Courier"/>
-              </a:rPr>
-              <a:t>.dmg</a:t>
-            </a:r>
-            <a:r>
-              <a:rPr/>
-              <a:t>, open it, drag </a:t>
+              <a:t>Administrator rights</a:t>
+            </a:r>
+            <a:r>
+              <a:rPr/>
+              <a:t> to install software</a:t>
+            </a:r>
+          </a:p>
+          <a:p>
+            <a:pPr lvl="0"/>
+            <a:r>
+              <a:rPr/>
+              <a:t>About </a:t>
             </a:r>
             <a:r>
               <a:rPr b="1"/>
-              <a:t>VSCodium</a:t>
-            </a:r>
-            <a:r>
-              <a:rPr/>
-              <a:t> to Applications.</a:t>
-            </a:r>
-          </a:p>
-          <a:p>
-            <a:pPr lvl="0" indent="0" marL="0">
-              <a:buNone/>
-            </a:pPr>
-            <a:r>
-              <a:rPr/>
-              <a:t>If macOS refuses to open it: right-click the app → </a:t>
-            </a:r>
-            <a:r>
-              <a:rPr b="1"/>
-              <a:t>Open</a:t>
-            </a:r>
-            <a:r>
-              <a:rPr/>
-              <a:t> → </a:t>
-            </a:r>
-            <a:r>
-              <a:rPr b="1"/>
-              <a:t>Open</a:t>
-            </a:r>
-            <a:r>
-              <a:rPr/>
-              <a:t>.</a:t>
-            </a:r>
-          </a:p>
-          <a:p>
-            <a:pPr lvl="0" indent="0" marL="0">
-              <a:buNone/>
-            </a:pPr>
-            <a:r>
-              <a:rPr b="1"/>
-              <a:t>Windows</a:t>
-            </a:r>
-          </a:p>
-          <a:p>
-            <a:pPr lvl="0" indent="0" marL="0">
-              <a:buNone/>
-            </a:pPr>
-            <a:r>
-              <a:rPr/>
-              <a:t>Download the </a:t>
-            </a:r>
-            <a:r>
-              <a:rPr i="1"/>
-              <a:t>User Installer</a:t>
-            </a:r>
-            <a:r>
-              <a:rPr/>
-              <a:t> </a:t>
-            </a:r>
-            <a:r>
-              <a:rPr>
-                <a:latin typeface="Courier"/>
-              </a:rPr>
-              <a:t>.exe</a:t>
-            </a:r>
-            <a:r>
-              <a:rPr/>
-              <a:t> and run it.</a:t>
-            </a:r>
-          </a:p>
-          <a:p>
-            <a:pPr lvl="0" indent="0" marL="0">
-              <a:buNone/>
-            </a:pPr>
-            <a:r>
-              <a:rPr/>
-              <a:t>Tick </a:t>
-            </a:r>
-            <a:r>
-              <a:rPr b="1"/>
-              <a:t>“Add to PATH”</a:t>
-            </a:r>
-            <a:r>
-              <a:rPr/>
-              <a:t> when the installer offers it.</a:t>
-            </a:r>
-          </a:p>
-          <a:p>
-            <a:pPr lvl="0" indent="0" marL="0">
-              <a:buNone/>
-            </a:pPr>
-            <a:r>
-              <a:rPr b="1"/>
-              <a:t>Linux:</a:t>
-            </a:r>
-            <a:r>
-              <a:rPr/>
-              <a:t> use your package manager, or the </a:t>
-            </a:r>
-            <a:r>
-              <a:rPr>
-                <a:latin typeface="Courier"/>
-              </a:rPr>
-              <a:t>.deb</a:t>
-            </a:r>
-            <a:r>
-              <a:rPr/>
-              <a:t> / </a:t>
-            </a:r>
-            <a:r>
-              <a:rPr>
-                <a:latin typeface="Courier"/>
-              </a:rPr>
-              <a:t>.rpm</a:t>
-            </a:r>
-            <a:r>
-              <a:rPr/>
-              <a:t> from the same page.</a:t>
-            </a:r>
-          </a:p>
-          <a:p>
-            <a:pPr lvl="0" indent="0" marL="0">
-              <a:buNone/>
-            </a:pPr>
-            <a:r>
-              <a:rPr b="1"/>
-              <a:t>Check.</a:t>
-            </a:r>
-            <a:r>
-              <a:rPr/>
-              <a:t> VS Codium opens and shows the Welcome tab.</a:t>
+              <a:t>10 GB free disk space</a:t>
+            </a:r>
+            <a:r>
+              <a:rPr/>
+              <a:t> — the model files are large</a:t>
+            </a:r>
+          </a:p>
+          <a:p>
+            <a:pPr lvl="0"/>
+            <a:r>
+              <a:rPr/>
+              <a:t>60–90 minutes, uninterrupted</a:t>
+            </a:r>
+          </a:p>
+          <a:p>
+            <a:pPr lvl="0" indent="0" marL="0">
+              <a:buNone/>
+            </a:pPr>
+            <a:r>
+              <a:rPr/>
+              <a:t>Do this on the machine you will actually bring to class. A working setup on a desktop at home is of no use in the lab.</a:t>
             </a:r>
           </a:p>
         </p:txBody>
@@ -3681,159 +3701,22 @@
             <p:ph type="title"/>
           </p:nvPr>
         </p:nvSpPr>
-        <p:spPr/>
-        <p:txBody>
-          <a:bodyPr/>
-          <a:lstStyle/>
-          <a:p>
-            <a:pPr lvl="0" indent="0" marL="0">
-              <a:buNone/>
-            </a:pPr>
-            <a:r>
-              <a:rPr/>
-              <a:t>Meet the two panels you will live in</a:t>
-            </a:r>
-          </a:p>
-        </p:txBody>
-      </p:sp>
-      <p:sp>
-        <p:nvSpPr>
-          <p:cNvPr id="3" name="Content Placeholder 2"/>
-          <p:cNvSpPr>
-            <a:spLocks noGrp="1"/>
-          </p:cNvSpPr>
-          <p:nvPr>
-            <p:ph idx="1"/>
-          </p:nvPr>
-        </p:nvSpPr>
-        <p:spPr/>
-        <p:txBody>
-          <a:bodyPr/>
-          <a:lstStyle/>
-          <a:p>
-            <a:pPr lvl="0" indent="0" marL="0">
-              <a:buNone/>
-            </a:pPr>
-            <a:r>
-              <a:rPr/>
-              <a:t>[ VS Codium window ]</a:t>
-            </a:r>
-          </a:p>
-          <a:p>
-            <a:pPr lvl="0" indent="0" marL="0">
-              <a:buNone/>
-            </a:pPr>
-            <a:r>
-              <a:rPr/>
-              <a:t>Left: </a:t>
-            </a:r>
-            <a:r>
-              <a:rPr b="1"/>
-              <a:t>Explorer</a:t>
-            </a:r>
-            <a:r>
-              <a:rPr/>
-              <a:t> (your files) · Bottom: </a:t>
-            </a:r>
-            <a:r>
-              <a:rPr b="1"/>
-              <a:t>Terminal</a:t>
-            </a:r>
-            <a:r>
-              <a:rPr/>
-              <a:t> · Right: </a:t>
-            </a:r>
-            <a:r>
-              <a:rPr b="1"/>
-              <a:t>Continue</a:t>
-            </a:r>
-            <a:r>
-              <a:rPr/>
-              <a:t> (chat)</a:t>
-            </a:r>
-          </a:p>
-          <a:p>
-            <a:pPr lvl="0" indent="0" marL="0">
-              <a:buNone/>
-            </a:pPr>
-            <a:r>
-              <a:rPr/>
-              <a:t>Two things to find right now:</a:t>
-            </a:r>
-          </a:p>
-          <a:p>
-            <a:pPr lvl="0"/>
-            <a:r>
-              <a:rPr b="1"/>
-              <a:t>The Explorer</a:t>
-            </a:r>
-            <a:r>
-              <a:rPr/>
-              <a:t> — </a:t>
-            </a:r>
-            <a:r>
-              <a:rPr>
-                <a:latin typeface="Courier"/>
-              </a:rPr>
-              <a:t>View → Explorer</a:t>
-            </a:r>
-            <a:r>
-              <a:rPr/>
-              <a:t>, or </a:t>
-            </a:r>
-            <a:r>
-              <a:rPr>
-                <a:latin typeface="Courier"/>
-              </a:rPr>
-              <a:t>Ctrl/Cmd+Shift+E</a:t>
-            </a:r>
-          </a:p>
-          <a:p>
-            <a:pPr lvl="0"/>
-            <a:r>
-              <a:rPr b="1"/>
-              <a:t>The integrated Terminal</a:t>
-            </a:r>
-            <a:r>
-              <a:rPr/>
-              <a:t> — </a:t>
-            </a:r>
-            <a:r>
-              <a:rPr>
-                <a:latin typeface="Courier"/>
-              </a:rPr>
-              <a:t>View → Terminal</a:t>
-            </a:r>
-            <a:r>
-              <a:rPr/>
-              <a:t>, or </a:t>
-            </a:r>
-            <a:r>
-              <a:rPr>
-                <a:latin typeface="Courier"/>
-              </a:rPr>
-              <a:t>Ctrl+`</a:t>
-            </a:r>
-            <a:r>
-              <a:rPr/>
-              <a:t> (backtick)</a:t>
-            </a:r>
-          </a:p>
-          <a:p>
-            <a:pPr lvl="0" indent="0" marL="0">
-              <a:buNone/>
-            </a:pPr>
-            <a:r>
-              <a:rPr/>
-              <a:t>The </a:t>
-            </a:r>
-            <a:r>
-              <a:rPr b="1"/>
-              <a:t>Terminal</a:t>
-            </a:r>
-            <a:r>
-              <a:rPr/>
-              <a:t> is where most of this course happens. If you have never used a command line, that is fine — every command you need is on these slides.</a:t>
+        <p:spPr>
+          <a:xfrm>
+            <a:off x="722313" y="3305176"/>
+            <a:ext cx="7772400" cy="1021556"/>
+          </a:xfrm>
+        </p:spPr>
+        <p:txBody>
+          <a:bodyPr/>
+          <a:lstStyle/>
+          <a:p>
+            <a:pPr lvl="0" indent="0" marL="0">
+              <a:buNone/>
+            </a:pPr>
+            <a:r>
+              <a:rPr/>
+              <a:t>Step 1 — VS Codium</a:t>
             </a:r>
           </a:p>
         </p:txBody>
@@ -3844,6 +3727,453 @@
 </file>
 
 <file path=ppt/slides/slide14.xml><?xml version="1.0" encoding="utf-8"?>
+<p:sld xmlns:a="http://schemas.openxmlformats.org/drawingml/2006/main" xmlns:r="http://schemas.openxmlformats.org/officeDocument/2006/relationships" xmlns:p="http://schemas.openxmlformats.org/presentationml/2006/main">
+  <p:cSld>
+    <p:spTree>
+      <p:nvGrpSpPr>
+        <p:cNvPr id="1" name=""/>
+        <p:cNvGrpSpPr/>
+        <p:nvPr/>
+      </p:nvGrpSpPr>
+      <p:grpSpPr>
+        <a:xfrm>
+          <a:off x="0" y="0"/>
+          <a:ext cx="0" cy="0"/>
+          <a:chOff x="0" y="0"/>
+          <a:chExt cx="0" cy="0"/>
+        </a:xfrm>
+      </p:grpSpPr>
+      <p:sp>
+        <p:nvSpPr>
+          <p:cNvPr id="2" name="Title 1"/>
+          <p:cNvSpPr>
+            <a:spLocks noGrp="1"/>
+          </p:cNvSpPr>
+          <p:nvPr>
+            <p:ph type="title"/>
+          </p:nvPr>
+        </p:nvSpPr>
+        <p:spPr/>
+        <p:txBody>
+          <a:bodyPr/>
+          <a:lstStyle/>
+          <a:p>
+            <a:pPr lvl="0" indent="0" marL="0">
+              <a:buNone/>
+            </a:pPr>
+            <a:r>
+              <a:rPr/>
+              <a:t>Install VS Codium</a:t>
+            </a:r>
+          </a:p>
+        </p:txBody>
+      </p:sp>
+      <p:sp>
+        <p:nvSpPr>
+          <p:cNvPr id="3" name="Content Placeholder 2"/>
+          <p:cNvSpPr>
+            <a:spLocks noGrp="1"/>
+          </p:cNvSpPr>
+          <p:nvPr>
+            <p:ph idx="1"/>
+          </p:nvPr>
+        </p:nvSpPr>
+        <p:spPr/>
+        <p:txBody>
+          <a:bodyPr/>
+          <a:lstStyle/>
+          <a:p>
+            <a:pPr lvl="0" indent="0" marL="0">
+              <a:buNone/>
+            </a:pPr>
+            <a:r>
+              <a:rPr/>
+              <a:t>download</a:t>
+            </a:r>
+          </a:p>
+          <a:p>
+            <a:pPr lvl="0" indent="0" marL="0">
+              <a:buNone/>
+            </a:pPr>
+            <a:r>
+              <a:rPr/>
+              <a:t>Go to </a:t>
+            </a:r>
+            <a:r>
+              <a:rPr b="1"/>
+              <a:t>vscodium.com</a:t>
+            </a:r>
+            <a:r>
+              <a:rPr/>
+              <a:t> and download the build for your operating system.</a:t>
+            </a:r>
+          </a:p>
+          <a:p>
+            <a:pPr lvl="0" indent="0" marL="0">
+              <a:buNone/>
+            </a:pPr>
+            <a:r>
+              <a:rPr/>
+              <a:t>This is the one step that cannot use the VS Codium terminal — you are installing the thing that provides it.</a:t>
+            </a:r>
+          </a:p>
+          <a:p>
+            <a:pPr lvl="0" indent="0" marL="0">
+              <a:buNone/>
+            </a:pPr>
+            <a:r>
+              <a:rPr b="1"/>
+              <a:t>macOS</a:t>
+            </a:r>
+          </a:p>
+          <a:p>
+            <a:pPr lvl="0" indent="0" marL="0">
+              <a:buNone/>
+            </a:pPr>
+            <a:r>
+              <a:rPr/>
+              <a:t>Download the </a:t>
+            </a:r>
+            <a:r>
+              <a:rPr>
+                <a:latin typeface="Courier"/>
+              </a:rPr>
+              <a:t>.dmg</a:t>
+            </a:r>
+            <a:r>
+              <a:rPr/>
+              <a:t>, open it, drag </a:t>
+            </a:r>
+            <a:r>
+              <a:rPr b="1"/>
+              <a:t>VSCodium</a:t>
+            </a:r>
+            <a:r>
+              <a:rPr/>
+              <a:t> to Applications.</a:t>
+            </a:r>
+          </a:p>
+          <a:p>
+            <a:pPr lvl="0" indent="0" marL="0">
+              <a:buNone/>
+            </a:pPr>
+            <a:r>
+              <a:rPr/>
+              <a:t>If macOS refuses to open it: right-click the app → </a:t>
+            </a:r>
+            <a:r>
+              <a:rPr b="1"/>
+              <a:t>Open</a:t>
+            </a:r>
+            <a:r>
+              <a:rPr/>
+              <a:t> → </a:t>
+            </a:r>
+            <a:r>
+              <a:rPr b="1"/>
+              <a:t>Open</a:t>
+            </a:r>
+            <a:r>
+              <a:rPr/>
+              <a:t>.</a:t>
+            </a:r>
+          </a:p>
+          <a:p>
+            <a:pPr lvl="0" indent="0" marL="0">
+              <a:buNone/>
+            </a:pPr>
+            <a:r>
+              <a:rPr b="1"/>
+              <a:t>Windows</a:t>
+            </a:r>
+          </a:p>
+          <a:p>
+            <a:pPr lvl="0" indent="0" marL="0">
+              <a:buNone/>
+            </a:pPr>
+            <a:r>
+              <a:rPr/>
+              <a:t>Download the </a:t>
+            </a:r>
+            <a:r>
+              <a:rPr i="1"/>
+              <a:t>User Installer</a:t>
+            </a:r>
+            <a:r>
+              <a:rPr/>
+              <a:t> </a:t>
+            </a:r>
+            <a:r>
+              <a:rPr>
+                <a:latin typeface="Courier"/>
+              </a:rPr>
+              <a:t>.exe</a:t>
+            </a:r>
+            <a:r>
+              <a:rPr/>
+              <a:t> and run it.</a:t>
+            </a:r>
+          </a:p>
+          <a:p>
+            <a:pPr lvl="0" indent="0" marL="0">
+              <a:buNone/>
+            </a:pPr>
+            <a:r>
+              <a:rPr/>
+              <a:t>Tick </a:t>
+            </a:r>
+            <a:r>
+              <a:rPr b="1"/>
+              <a:t>“Add to PATH”</a:t>
+            </a:r>
+            <a:r>
+              <a:rPr/>
+              <a:t> when the installer offers it.</a:t>
+            </a:r>
+          </a:p>
+          <a:p>
+            <a:pPr lvl="0" indent="0" marL="0">
+              <a:buNone/>
+            </a:pPr>
+            <a:r>
+              <a:rPr b="1"/>
+              <a:t>Linux:</a:t>
+            </a:r>
+            <a:r>
+              <a:rPr/>
+              <a:t> use your package manager, or the </a:t>
+            </a:r>
+            <a:r>
+              <a:rPr>
+                <a:latin typeface="Courier"/>
+              </a:rPr>
+              <a:t>.deb</a:t>
+            </a:r>
+            <a:r>
+              <a:rPr/>
+              <a:t> / </a:t>
+            </a:r>
+            <a:r>
+              <a:rPr>
+                <a:latin typeface="Courier"/>
+              </a:rPr>
+              <a:t>.rpm</a:t>
+            </a:r>
+            <a:r>
+              <a:rPr/>
+              <a:t> from the same page.</a:t>
+            </a:r>
+          </a:p>
+          <a:p>
+            <a:pPr lvl="0" indent="0" marL="0">
+              <a:buNone/>
+            </a:pPr>
+            <a:r>
+              <a:rPr b="1"/>
+              <a:t>Check.</a:t>
+            </a:r>
+            <a:r>
+              <a:rPr/>
+              <a:t> VS Codium opens and shows the Welcome tab.</a:t>
+            </a:r>
+          </a:p>
+        </p:txBody>
+      </p:sp>
+    </p:spTree>
+  </p:cSld>
+</p:sld>
+</file>
+
+<file path=ppt/slides/slide15.xml><?xml version="1.0" encoding="utf-8"?>
+<p:sld xmlns:a="http://schemas.openxmlformats.org/drawingml/2006/main" xmlns:r="http://schemas.openxmlformats.org/officeDocument/2006/relationships" xmlns:p="http://schemas.openxmlformats.org/presentationml/2006/main">
+  <p:cSld>
+    <p:spTree>
+      <p:nvGrpSpPr>
+        <p:cNvPr id="1" name=""/>
+        <p:cNvGrpSpPr/>
+        <p:nvPr/>
+      </p:nvGrpSpPr>
+      <p:grpSpPr>
+        <a:xfrm>
+          <a:off x="0" y="0"/>
+          <a:ext cx="0" cy="0"/>
+          <a:chOff x="0" y="0"/>
+          <a:chExt cx="0" cy="0"/>
+        </a:xfrm>
+      </p:grpSpPr>
+      <p:sp>
+        <p:nvSpPr>
+          <p:cNvPr id="2" name="Title 1"/>
+          <p:cNvSpPr>
+            <a:spLocks noGrp="1"/>
+          </p:cNvSpPr>
+          <p:nvPr>
+            <p:ph type="title"/>
+          </p:nvPr>
+        </p:nvSpPr>
+        <p:spPr/>
+        <p:txBody>
+          <a:bodyPr/>
+          <a:lstStyle/>
+          <a:p>
+            <a:pPr lvl="0" indent="0" marL="0">
+              <a:buNone/>
+            </a:pPr>
+            <a:r>
+              <a:rPr/>
+              <a:t>Meet the two panels you will live in</a:t>
+            </a:r>
+          </a:p>
+        </p:txBody>
+      </p:sp>
+      <p:sp>
+        <p:nvSpPr>
+          <p:cNvPr id="3" name="Content Placeholder 2"/>
+          <p:cNvSpPr>
+            <a:spLocks noGrp="1"/>
+          </p:cNvSpPr>
+          <p:nvPr>
+            <p:ph idx="1"/>
+          </p:nvPr>
+        </p:nvSpPr>
+        <p:spPr/>
+        <p:txBody>
+          <a:bodyPr/>
+          <a:lstStyle/>
+          <a:p>
+            <a:pPr lvl="0" indent="0" marL="0">
+              <a:buNone/>
+            </a:pPr>
+            <a:r>
+              <a:rPr/>
+              <a:t>[ VS Codium window ]</a:t>
+            </a:r>
+          </a:p>
+          <a:p>
+            <a:pPr lvl="0" indent="0" marL="0">
+              <a:buNone/>
+            </a:pPr>
+            <a:r>
+              <a:rPr/>
+              <a:t>Left: </a:t>
+            </a:r>
+            <a:r>
+              <a:rPr b="1"/>
+              <a:t>Explorer</a:t>
+            </a:r>
+            <a:r>
+              <a:rPr/>
+              <a:t> (your files) · Bottom: </a:t>
+            </a:r>
+            <a:r>
+              <a:rPr b="1"/>
+              <a:t>Terminal</a:t>
+            </a:r>
+            <a:r>
+              <a:rPr/>
+              <a:t> · Right: </a:t>
+            </a:r>
+            <a:r>
+              <a:rPr b="1"/>
+              <a:t>Continue</a:t>
+            </a:r>
+            <a:r>
+              <a:rPr/>
+              <a:t> (chat)</a:t>
+            </a:r>
+          </a:p>
+          <a:p>
+            <a:pPr lvl="0" indent="0" marL="0">
+              <a:buNone/>
+            </a:pPr>
+            <a:r>
+              <a:rPr/>
+              <a:t>Two things to find right now:</a:t>
+            </a:r>
+          </a:p>
+          <a:p>
+            <a:pPr lvl="0"/>
+            <a:r>
+              <a:rPr b="1"/>
+              <a:t>The Explorer</a:t>
+            </a:r>
+            <a:r>
+              <a:rPr/>
+              <a:t> — </a:t>
+            </a:r>
+            <a:r>
+              <a:rPr>
+                <a:latin typeface="Courier"/>
+              </a:rPr>
+              <a:t>View → Explorer</a:t>
+            </a:r>
+            <a:r>
+              <a:rPr/>
+              <a:t>, or </a:t>
+            </a:r>
+            <a:r>
+              <a:rPr>
+                <a:latin typeface="Courier"/>
+              </a:rPr>
+              <a:t>Ctrl/Cmd+Shift+E</a:t>
+            </a:r>
+          </a:p>
+          <a:p>
+            <a:pPr lvl="0"/>
+            <a:r>
+              <a:rPr b="1"/>
+              <a:t>The integrated Terminal</a:t>
+            </a:r>
+            <a:r>
+              <a:rPr/>
+              <a:t> — </a:t>
+            </a:r>
+            <a:r>
+              <a:rPr>
+                <a:latin typeface="Courier"/>
+              </a:rPr>
+              <a:t>View → Terminal</a:t>
+            </a:r>
+            <a:r>
+              <a:rPr/>
+              <a:t>, or </a:t>
+            </a:r>
+            <a:r>
+              <a:rPr>
+                <a:latin typeface="Courier"/>
+              </a:rPr>
+              <a:t>Ctrl+`</a:t>
+            </a:r>
+            <a:r>
+              <a:rPr/>
+              <a:t> (backtick)</a:t>
+            </a:r>
+          </a:p>
+          <a:p>
+            <a:pPr lvl="0" indent="0" marL="0">
+              <a:buNone/>
+            </a:pPr>
+            <a:r>
+              <a:rPr/>
+              <a:t>The </a:t>
+            </a:r>
+            <a:r>
+              <a:rPr b="1"/>
+              <a:t>Terminal</a:t>
+            </a:r>
+            <a:r>
+              <a:rPr/>
+              <a:t> is where most of this course happens. If you have never used a command line, that is fine — every command you need is on these slides.</a:t>
+            </a:r>
+          </a:p>
+        </p:txBody>
+      </p:sp>
+    </p:spTree>
+  </p:cSld>
+</p:sld>
+</file>
+
+<file path=ppt/slides/slide16.xml><?xml version="1.0" encoding="utf-8"?>
 <p:sld xmlns:a="http://schemas.openxmlformats.org/drawingml/2006/main" xmlns:r="http://schemas.openxmlformats.org/officeDocument/2006/relationships" xmlns:p="http://schemas.openxmlformats.org/presentationml/2006/main">
   <p:cSld>
     <p:spTree>
@@ -4156,105 +4486,6 @@
 </p:sld>
 </file>
 
-<file path=ppt/slides/slide15.xml><?xml version="1.0" encoding="utf-8"?>
-<p:sld xmlns:a="http://schemas.openxmlformats.org/drawingml/2006/main" xmlns:r="http://schemas.openxmlformats.org/officeDocument/2006/relationships" xmlns:p="http://schemas.openxmlformats.org/presentationml/2006/main">
-  <p:cSld>
-    <p:spTree>
-      <p:nvGrpSpPr>
-        <p:cNvPr id="1" name=""/>
-        <p:cNvGrpSpPr/>
-        <p:nvPr/>
-      </p:nvGrpSpPr>
-      <p:grpSpPr>
-        <a:xfrm>
-          <a:off x="0" y="0"/>
-          <a:ext cx="0" cy="0"/>
-          <a:chOff x="0" y="0"/>
-          <a:chExt cx="0" cy="0"/>
-        </a:xfrm>
-      </p:grpSpPr>
-      <p:sp>
-        <p:nvSpPr>
-          <p:cNvPr id="3" name="Content Placeholder 2"/>
-          <p:cNvSpPr>
-            <a:spLocks noGrp="1"/>
-          </p:cNvSpPr>
-          <p:nvPr>
-            <p:ph idx="1"/>
-          </p:nvPr>
-        </p:nvSpPr>
-        <p:spPr/>
-        <p:txBody>
-          <a:bodyPr/>
-          <a:lstStyle/>
-          <a:p>
-            <a:pPr lvl="0" indent="0" marL="0">
-              <a:buNone/>
-            </a:pPr>
-            <a:r>
-              <a:rPr/>
-              <a:t>VS Codium uses the Open VSX registry, not Microsoft’s Marketplace. Most extensions are there. If one is missing, the course does not depend on it.</a:t>
-            </a:r>
-          </a:p>
-        </p:txBody>
-      </p:sp>
-    </p:spTree>
-  </p:cSld>
-</p:sld>
-</file>
-
-<file path=ppt/slides/slide16.xml><?xml version="1.0" encoding="utf-8"?>
-<p:sld xmlns:a="http://schemas.openxmlformats.org/drawingml/2006/main" xmlns:r="http://schemas.openxmlformats.org/officeDocument/2006/relationships" xmlns:p="http://schemas.openxmlformats.org/presentationml/2006/main">
-  <p:cSld>
-    <p:spTree>
-      <p:nvGrpSpPr>
-        <p:cNvPr id="1" name=""/>
-        <p:cNvGrpSpPr/>
-        <p:nvPr/>
-      </p:nvGrpSpPr>
-      <p:grpSpPr>
-        <a:xfrm>
-          <a:off x="0" y="0"/>
-          <a:ext cx="0" cy="0"/>
-          <a:chOff x="0" y="0"/>
-          <a:chExt cx="0" cy="0"/>
-        </a:xfrm>
-      </p:grpSpPr>
-      <p:sp>
-        <p:nvSpPr>
-          <p:cNvPr id="2" name="Title 1"/>
-          <p:cNvSpPr>
-            <a:spLocks noGrp="1"/>
-          </p:cNvSpPr>
-          <p:nvPr>
-            <p:ph type="title"/>
-          </p:nvPr>
-        </p:nvSpPr>
-        <p:spPr>
-          <a:xfrm>
-            <a:off x="722313" y="3305176"/>
-            <a:ext cx="7772400" cy="1021556"/>
-          </a:xfrm>
-        </p:spPr>
-        <p:txBody>
-          <a:bodyPr/>
-          <a:lstStyle/>
-          <a:p>
-            <a:pPr lvl="0" indent="0" marL="0">
-              <a:buNone/>
-            </a:pPr>
-            <a:r>
-              <a:rPr/>
-              <a:t>Step 3 — Python</a:t>
-            </a:r>
-          </a:p>
-        </p:txBody>
-      </p:sp>
-    </p:spTree>
-  </p:cSld>
-</p:sld>
-</file>
-
 <file path=ppt/slides/slide17.xml><?xml version="1.0" encoding="utf-8"?>
 <p:sld xmlns:a="http://schemas.openxmlformats.org/drawingml/2006/main" xmlns:r="http://schemas.openxmlformats.org/officeDocument/2006/relationships" xmlns:p="http://schemas.openxmlformats.org/presentationml/2006/main">
   <p:cSld>
@@ -4274,31 +4505,6 @@
       </p:grpSpPr>
       <p:sp>
         <p:nvSpPr>
-          <p:cNvPr id="2" name="Title 1"/>
-          <p:cNvSpPr>
-            <a:spLocks noGrp="1"/>
-          </p:cNvSpPr>
-          <p:nvPr>
-            <p:ph type="title"/>
-          </p:nvPr>
-        </p:nvSpPr>
-        <p:spPr/>
-        <p:txBody>
-          <a:bodyPr/>
-          <a:lstStyle/>
-          <a:p>
-            <a:pPr lvl="0" indent="0" marL="0">
-              <a:buNone/>
-            </a:pPr>
-            <a:r>
-              <a:rPr/>
-              <a:t>Create the environment</a:t>
-            </a:r>
-          </a:p>
-        </p:txBody>
-      </p:sp>
-      <p:sp>
-        <p:nvSpPr>
           <p:cNvPr id="3" name="Content Placeholder 2"/>
           <p:cNvSpPr>
             <a:spLocks noGrp="1"/>
@@ -4317,123 +4523,7 @@
             </a:pPr>
             <a:r>
               <a:rPr/>
-              <a:t>Open the terminal in VS Codium (</a:t>
-            </a:r>
-            <a:r>
-              <a:rPr>
-                <a:latin typeface="Courier"/>
-              </a:rPr>
-              <a:t>Ctrl+`</a:t>
-            </a:r>
-            <a:r>
-              <a:rPr/>
-              <a:t>) and run, from the course folder:</a:t>
-            </a:r>
-          </a:p>
-          <a:p>
-            <a:pPr lvl="0" indent="0">
-              <a:buNone/>
-            </a:pPr>
-            <a:r>
-              <a:rPr>
-                <a:latin typeface="Courier"/>
-              </a:rPr>
-              <a:t>python3 </a:t>
-            </a:r>
-            <a:r>
-              <a:rPr>
-                <a:solidFill>
-                  <a:srgbClr val="7D9029"/>
-                </a:solidFill>
-                <a:latin typeface="Courier"/>
-              </a:rPr>
-              <a:t>-m</a:t>
-            </a:r>
-            <a:r>
-              <a:rPr>
-                <a:latin typeface="Courier"/>
-              </a:rPr>
-              <a:t> venv .venv</a:t>
-            </a:r>
-          </a:p>
-          <a:p>
-            <a:pPr lvl="0" indent="0" marL="0">
-              <a:buNone/>
-            </a:pPr>
-            <a:r>
-              <a:rPr/>
-              <a:t>Then activate it:</a:t>
-            </a:r>
-          </a:p>
-          <a:p>
-            <a:pPr lvl="0" indent="0">
-              <a:buNone/>
-            </a:pPr>
-            <a:r>
-              <a:rPr i="1">
-                <a:solidFill>
-                  <a:srgbClr val="60A0B0"/>
-                </a:solidFill>
-                <a:latin typeface="Courier"/>
-              </a:rPr>
-              <a:t># macOS / Linux</a:t>
-            </a:r>
-            <a:br/>
-            <a:r>
-              <a:rPr>
-                <a:solidFill>
-                  <a:srgbClr val="008000"/>
-                </a:solidFill>
-                <a:latin typeface="Courier"/>
-              </a:rPr>
-              <a:t>source</a:t>
-            </a:r>
-            <a:r>
-              <a:rPr>
-                <a:latin typeface="Courier"/>
-              </a:rPr>
-              <a:t> .venv/bin/activate</a:t>
-            </a:r>
-            <a:br/>
-            <a:br/>
-            <a:r>
-              <a:rPr i="1">
-                <a:solidFill>
-                  <a:srgbClr val="60A0B0"/>
-                </a:solidFill>
-                <a:latin typeface="Courier"/>
-              </a:rPr>
-              <a:t># Windows (PowerShell)</a:t>
-            </a:r>
-            <a:br/>
-            <a:r>
-              <a:rPr>
-                <a:latin typeface="Courier"/>
-              </a:rPr>
-              <a:t>.venv\Scripts\Activate.ps1</a:t>
-            </a:r>
-          </a:p>
-          <a:p>
-            <a:pPr lvl="0" indent="0" marL="0">
-              <a:buNone/>
-            </a:pPr>
-            <a:r>
-              <a:rPr b="1"/>
-              <a:t>Check.</a:t>
-            </a:r>
-            <a:r>
-              <a:rPr/>
-              <a:t> Your prompt now starts with </a:t>
-            </a:r>
-            <a:r>
-              <a:rPr>
-                <a:latin typeface="Courier"/>
-              </a:rPr>
-              <a:t>(.venv)</a:t>
-            </a:r>
-            <a:r>
-              <a:rPr/>
-              <a:t>.</a:t>
+              <a:t>VS Codium uses the Open VSX registry, not Microsoft’s Marketplace. Most extensions are there. If one is missing, the course does not depend on it.</a:t>
             </a:r>
           </a:p>
         </p:txBody>
@@ -4470,135 +4560,22 @@
             <p:ph type="title"/>
           </p:nvPr>
         </p:nvSpPr>
-        <p:spPr/>
-        <p:txBody>
-          <a:bodyPr/>
-          <a:lstStyle/>
-          <a:p>
-            <a:pPr lvl="0" indent="0" marL="0">
-              <a:buNone/>
-            </a:pPr>
-            <a:r>
-              <a:rPr/>
-              <a:t>Install the packages</a:t>
-            </a:r>
-          </a:p>
-        </p:txBody>
-      </p:sp>
-      <p:sp>
-        <p:nvSpPr>
-          <p:cNvPr id="3" name="Content Placeholder 2"/>
-          <p:cNvSpPr>
-            <a:spLocks noGrp="1"/>
-          </p:cNvSpPr>
-          <p:nvPr>
-            <p:ph idx="1"/>
-          </p:nvPr>
-        </p:nvSpPr>
-        <p:spPr/>
-        <p:txBody>
-          <a:bodyPr/>
-          <a:lstStyle/>
-          <a:p>
-            <a:pPr lvl="0" indent="0">
-              <a:buNone/>
-            </a:pPr>
-            <a:r>
-              <a:rPr>
-                <a:latin typeface="Courier"/>
-              </a:rPr>
-              <a:t>pip install </a:t>
-            </a:r>
-            <a:r>
-              <a:rPr>
-                <a:solidFill>
-                  <a:srgbClr val="7D9029"/>
-                </a:solidFill>
-                <a:latin typeface="Courier"/>
-              </a:rPr>
-              <a:t>-r</a:t>
-            </a:r>
-            <a:r>
-              <a:rPr>
-                <a:latin typeface="Courier"/>
-              </a:rPr>
-              <a:t> requirements.txt</a:t>
-            </a:r>
-          </a:p>
-          <a:p>
-            <a:pPr lvl="0" indent="0" marL="0">
-              <a:buNone/>
-            </a:pPr>
-            <a:r>
-              <a:rPr/>
-              <a:t>This pulls numpy, pandas, scikit-learn, statsmodels, matplotlib and the rest. It takes a few minutes.</a:t>
-            </a:r>
-          </a:p>
-          <a:p>
-            <a:pPr lvl="0" indent="0" marL="0">
-              <a:buNone/>
-            </a:pPr>
-            <a:r>
-              <a:rPr b="1"/>
-              <a:t>Check.</a:t>
-            </a:r>
-            <a:r>
-              <a:rPr/>
-              <a:t> No red error text at the end, and:</a:t>
-            </a:r>
-          </a:p>
-          <a:p>
-            <a:pPr lvl="0" indent="0">
-              <a:buNone/>
-            </a:pPr>
-            <a:r>
-              <a:rPr>
-                <a:latin typeface="Courier"/>
-              </a:rPr>
-              <a:t>python </a:t>
-            </a:r>
-            <a:r>
-              <a:rPr>
-                <a:solidFill>
-                  <a:srgbClr val="7D9029"/>
-                </a:solidFill>
-                <a:latin typeface="Courier"/>
-              </a:rPr>
-              <a:t>-c</a:t>
-            </a:r>
-            <a:r>
-              <a:rPr>
-                <a:latin typeface="Courier"/>
-              </a:rPr>
-              <a:t> </a:t>
-            </a:r>
-            <a:r>
-              <a:rPr>
-                <a:solidFill>
-                  <a:srgbClr val="4070A0"/>
-                </a:solidFill>
-                <a:latin typeface="Courier"/>
-              </a:rPr>
-              <a:t>"import numpy, pandas, sklearn; print('ok')"</a:t>
-            </a:r>
-          </a:p>
-          <a:p>
-            <a:pPr lvl="0" indent="0" marL="0">
-              <a:buNone/>
-            </a:pPr>
-            <a:r>
-              <a:rPr/>
-              <a:t>prints </a:t>
-            </a:r>
-            <a:r>
-              <a:rPr>
-                <a:latin typeface="Courier"/>
-              </a:rPr>
-              <a:t>ok</a:t>
-            </a:r>
-            <a:r>
-              <a:rPr/>
-              <a:t>.</a:t>
+        <p:spPr>
+          <a:xfrm>
+            <a:off x="722313" y="3305176"/>
+            <a:ext cx="7772400" cy="1021556"/>
+          </a:xfrm>
+        </p:spPr>
+        <p:txBody>
+          <a:bodyPr/>
+          <a:lstStyle/>
+          <a:p>
+            <a:pPr lvl="0" indent="0" marL="0">
+              <a:buNone/>
+            </a:pPr>
+            <a:r>
+              <a:rPr/>
+              <a:t>Step 3 — Python</a:t>
             </a:r>
           </a:p>
         </p:txBody>
@@ -4635,22 +4612,89 @@
             <p:ph type="title"/>
           </p:nvPr>
         </p:nvSpPr>
-        <p:spPr>
-          <a:xfrm>
-            <a:off x="722313" y="3305176"/>
-            <a:ext cx="7772400" cy="1021556"/>
-          </a:xfrm>
-        </p:spPr>
-        <p:txBody>
-          <a:bodyPr/>
-          <a:lstStyle/>
-          <a:p>
-            <a:pPr lvl="0" indent="0" marL="0">
-              <a:buNone/>
-            </a:pPr>
-            <a:r>
-              <a:rPr/>
-              <a:t>Step 4 — Ollama and Qwen</a:t>
+        <p:spPr/>
+        <p:txBody>
+          <a:bodyPr/>
+          <a:lstStyle/>
+          <a:p>
+            <a:pPr lvl="0" indent="0" marL="0">
+              <a:buNone/>
+            </a:pPr>
+            <a:r>
+              <a:rPr/>
+              <a:t>Install Python</a:t>
+            </a:r>
+          </a:p>
+        </p:txBody>
+      </p:sp>
+      <p:sp>
+        <p:nvSpPr>
+          <p:cNvPr id="3" name="Content Placeholder 2"/>
+          <p:cNvSpPr>
+            <a:spLocks noGrp="1"/>
+          </p:cNvSpPr>
+          <p:nvPr>
+            <p:ph idx="1"/>
+          </p:nvPr>
+        </p:nvSpPr>
+        <p:spPr/>
+        <p:txBody>
+          <a:bodyPr/>
+          <a:lstStyle/>
+          <a:p>
+            <a:pPr lvl="0" indent="0" marL="0">
+              <a:buNone/>
+            </a:pPr>
+            <a:r>
+              <a:rPr/>
+              <a:t>download</a:t>
+            </a:r>
+          </a:p>
+          <a:p>
+            <a:pPr lvl="0" indent="0" marL="0">
+              <a:buNone/>
+            </a:pPr>
+            <a:r>
+              <a:rPr/>
+              <a:t>Go to </a:t>
+            </a:r>
+            <a:r>
+              <a:rPr b="1"/>
+              <a:t>python.org/downloads</a:t>
+            </a:r>
+            <a:r>
+              <a:rPr/>
+              <a:t> and install </a:t>
+            </a:r>
+            <a:r>
+              <a:rPr b="1"/>
+              <a:t>Python 3.11 or 3.12</a:t>
+            </a:r>
+            <a:r>
+              <a:rPr/>
+              <a:t>.</a:t>
+            </a:r>
+          </a:p>
+          <a:p>
+            <a:pPr lvl="0" indent="0" marL="0">
+              <a:buNone/>
+            </a:pPr>
+            <a:r>
+              <a:rPr b="1"/>
+              <a:t>Windows: tick “Add python.exe to PATH”</a:t>
+            </a:r>
+            <a:r>
+              <a:rPr/>
+              <a:t> on the first installer screen. It is easy to miss, and without it nothing below works.</a:t>
+            </a:r>
+          </a:p>
+          <a:p>
+            <a:pPr lvl="0" indent="0" marL="0">
+              <a:buNone/>
+            </a:pPr>
+            <a:r>
+              <a:rPr/>
+              <a:t>macOS ships an old Python that is not suitable. Install a current one anyway.</a:t>
             </a:r>
           </a:p>
         </p:txBody>
@@ -4749,7 +4793,7 @@
             </a:pPr>
             <a:r>
               <a:rPr/>
-              <a:t>Install Ollama</a:t>
+              <a:t>Check Python is there</a:t>
             </a:r>
           </a:p>
         </p:txBody>
@@ -4773,8 +4817,8 @@
               <a:buNone/>
             </a:pPr>
             <a:r>
-              <a:rPr b="1"/>
-              <a:t>macOS / Linux</a:t>
+              <a:rPr/>
+              <a:t>VS Codium terminal</a:t>
             </a:r>
           </a:p>
           <a:p>
@@ -4785,7 +4829,7 @@
               <a:rPr>
                 <a:latin typeface="Courier"/>
               </a:rPr>
-              <a:t>curl </a:t>
+              <a:t>python3 </a:t>
             </a:r>
             <a:r>
               <a:rPr>
@@ -4794,91 +4838,6 @@
                 </a:solidFill>
                 <a:latin typeface="Courier"/>
               </a:rPr>
-              <a:t>-fsSL</a:t>
-            </a:r>
-            <a:r>
-              <a:rPr>
-                <a:latin typeface="Courier"/>
-              </a:rPr>
-              <a:t> https://ollama.com/install.sh </a:t>
-            </a:r>
-            <a:r>
-              <a:rPr b="1">
-                <a:solidFill>
-                  <a:srgbClr val="007020"/>
-                </a:solidFill>
-                <a:latin typeface="Courier"/>
-              </a:rPr>
-              <a:t>|</a:t>
-            </a:r>
-            <a:r>
-              <a:rPr>
-                <a:latin typeface="Courier"/>
-              </a:rPr>
-              <a:t> </a:t>
-            </a:r>
-            <a:r>
-              <a:rPr>
-                <a:solidFill>
-                  <a:srgbClr val="06287E"/>
-                </a:solidFill>
-                <a:latin typeface="Courier"/>
-              </a:rPr>
-              <a:t>sh</a:t>
-            </a:r>
-          </a:p>
-          <a:p>
-            <a:pPr lvl="0" indent="0" marL="0">
-              <a:buNone/>
-            </a:pPr>
-            <a:r>
-              <a:rPr b="1"/>
-              <a:t>Windows</a:t>
-            </a:r>
-          </a:p>
-          <a:p>
-            <a:pPr lvl="0" indent="0" marL="0">
-              <a:buNone/>
-            </a:pPr>
-            <a:r>
-              <a:rPr/>
-              <a:t>Download the installer from </a:t>
-            </a:r>
-            <a:r>
-              <a:rPr b="1"/>
-              <a:t>ollama.com/download</a:t>
-            </a:r>
-            <a:r>
-              <a:rPr/>
-              <a:t> and run it.</a:t>
-            </a:r>
-          </a:p>
-          <a:p>
-            <a:pPr lvl="0" indent="0" marL="0">
-              <a:buNone/>
-            </a:pPr>
-            <a:r>
-              <a:rPr b="1"/>
-              <a:t>Check.</a:t>
-            </a:r>
-          </a:p>
-          <a:p>
-            <a:pPr lvl="0" indent="0">
-              <a:buNone/>
-            </a:pPr>
-            <a:r>
-              <a:rPr>
-                <a:latin typeface="Courier"/>
-              </a:rPr>
-              <a:t>ollama </a:t>
-            </a:r>
-            <a:r>
-              <a:rPr>
-                <a:solidFill>
-                  <a:srgbClr val="7D9029"/>
-                </a:solidFill>
-                <a:latin typeface="Courier"/>
-              </a:rPr>
               <a:t>--version</a:t>
             </a:r>
           </a:p>
@@ -4888,7 +4847,73 @@
             </a:pPr>
             <a:r>
               <a:rPr/>
-              <a:t>prints a version number.</a:t>
+              <a:t>Prints </a:t>
+            </a:r>
+            <a:r>
+              <a:rPr>
+                <a:latin typeface="Courier"/>
+              </a:rPr>
+              <a:t>Python 3.11.x</a:t>
+            </a:r>
+            <a:r>
+              <a:rPr/>
+              <a:t> or </a:t>
+            </a:r>
+            <a:r>
+              <a:rPr>
+                <a:latin typeface="Courier"/>
+              </a:rPr>
+              <a:t>3.12.x</a:t>
+            </a:r>
+            <a:r>
+              <a:rPr/>
+              <a:t>.</a:t>
+            </a:r>
+          </a:p>
+          <a:p>
+            <a:pPr lvl="0" indent="0" marL="0">
+              <a:buNone/>
+            </a:pPr>
+            <a:r>
+              <a:rPr/>
+              <a:t>On Windows, if </a:t>
+            </a:r>
+            <a:r>
+              <a:rPr>
+                <a:latin typeface="Courier"/>
+              </a:rPr>
+              <a:t>python3</a:t>
+            </a:r>
+            <a:r>
+              <a:rPr/>
+              <a:t> is not found, try </a:t>
+            </a:r>
+            <a:r>
+              <a:rPr>
+                <a:latin typeface="Courier"/>
+              </a:rPr>
+              <a:t>python --version</a:t>
+            </a:r>
+            <a:r>
+              <a:rPr/>
+              <a:t>.</a:t>
+            </a:r>
+          </a:p>
+          <a:p>
+            <a:pPr lvl="0" indent="0" marL="0">
+              <a:buNone/>
+            </a:pPr>
+            <a:r>
+              <a:rPr/>
+              <a:t>If it says </a:t>
+            </a:r>
+            <a:r>
+              <a:rPr i="1"/>
+              <a:t>command not found</a:t>
+            </a:r>
+            <a:r>
+              <a:rPr/>
+              <a:t>, the PATH box was not ticked. Re-run the installer — do not try to work around it.</a:t>
             </a:r>
           </a:p>
         </p:txBody>
@@ -4925,6 +4950,747 @@
             <p:ph type="title"/>
           </p:nvPr>
         </p:nvSpPr>
+        <p:spPr/>
+        <p:txBody>
+          <a:bodyPr/>
+          <a:lstStyle/>
+          <a:p>
+            <a:pPr lvl="0" indent="0" marL="0">
+              <a:buNone/>
+            </a:pPr>
+            <a:r>
+              <a:rPr/>
+              <a:t>Create the environment</a:t>
+            </a:r>
+          </a:p>
+        </p:txBody>
+      </p:sp>
+      <p:sp>
+        <p:nvSpPr>
+          <p:cNvPr id="3" name="Content Placeholder 2"/>
+          <p:cNvSpPr>
+            <a:spLocks noGrp="1"/>
+          </p:cNvSpPr>
+          <p:nvPr>
+            <p:ph idx="1"/>
+          </p:nvPr>
+        </p:nvSpPr>
+        <p:spPr/>
+        <p:txBody>
+          <a:bodyPr/>
+          <a:lstStyle/>
+          <a:p>
+            <a:pPr lvl="0" indent="0" marL="0">
+              <a:buNone/>
+            </a:pPr>
+            <a:r>
+              <a:rPr/>
+              <a:t>VS Codium terminal</a:t>
+            </a:r>
+          </a:p>
+          <a:p>
+            <a:pPr lvl="0" indent="0" marL="0">
+              <a:buNone/>
+            </a:pPr>
+            <a:r>
+              <a:rPr/>
+              <a:t>First </a:t>
+            </a:r>
+            <a:r>
+              <a:rPr>
+                <a:latin typeface="Courier"/>
+              </a:rPr>
+              <a:t>File → Open Folder…</a:t>
+            </a:r>
+            <a:r>
+              <a:rPr/>
+              <a:t> and choose your course folder. Then:</a:t>
+            </a:r>
+          </a:p>
+          <a:p>
+            <a:pPr lvl="0" indent="0">
+              <a:buNone/>
+            </a:pPr>
+            <a:r>
+              <a:rPr>
+                <a:latin typeface="Courier"/>
+              </a:rPr>
+              <a:t>python3 </a:t>
+            </a:r>
+            <a:r>
+              <a:rPr>
+                <a:solidFill>
+                  <a:srgbClr val="7D9029"/>
+                </a:solidFill>
+                <a:latin typeface="Courier"/>
+              </a:rPr>
+              <a:t>-m</a:t>
+            </a:r>
+            <a:r>
+              <a:rPr>
+                <a:latin typeface="Courier"/>
+              </a:rPr>
+              <a:t> venv .venv</a:t>
+            </a:r>
+          </a:p>
+          <a:p>
+            <a:pPr lvl="0" indent="0" marL="0">
+              <a:buNone/>
+            </a:pPr>
+            <a:r>
+              <a:rPr/>
+              <a:t>This makes a private package folder for this course, so it cannot break your other work.</a:t>
+            </a:r>
+          </a:p>
+        </p:txBody>
+      </p:sp>
+    </p:spTree>
+  </p:cSld>
+</p:sld>
+</file>
+
+<file path=ppt/slides/slide22.xml><?xml version="1.0" encoding="utf-8"?>
+<p:sld xmlns:a="http://schemas.openxmlformats.org/drawingml/2006/main" xmlns:r="http://schemas.openxmlformats.org/officeDocument/2006/relationships" xmlns:p="http://schemas.openxmlformats.org/presentationml/2006/main">
+  <p:cSld>
+    <p:spTree>
+      <p:nvGrpSpPr>
+        <p:cNvPr id="1" name=""/>
+        <p:cNvGrpSpPr/>
+        <p:nvPr/>
+      </p:nvGrpSpPr>
+      <p:grpSpPr>
+        <a:xfrm>
+          <a:off x="0" y="0"/>
+          <a:ext cx="0" cy="0"/>
+          <a:chOff x="0" y="0"/>
+          <a:chExt cx="0" cy="0"/>
+        </a:xfrm>
+      </p:grpSpPr>
+      <p:sp>
+        <p:nvSpPr>
+          <p:cNvPr id="2" name="Title 1"/>
+          <p:cNvSpPr>
+            <a:spLocks noGrp="1"/>
+          </p:cNvSpPr>
+          <p:nvPr>
+            <p:ph type="title"/>
+          </p:nvPr>
+        </p:nvSpPr>
+        <p:spPr/>
+        <p:txBody>
+          <a:bodyPr/>
+          <a:lstStyle/>
+          <a:p>
+            <a:pPr lvl="0" indent="0" marL="0">
+              <a:buNone/>
+            </a:pPr>
+            <a:r>
+              <a:rPr/>
+              <a:t>Activate it</a:t>
+            </a:r>
+          </a:p>
+        </p:txBody>
+      </p:sp>
+      <p:sp>
+        <p:nvSpPr>
+          <p:cNvPr id="3" name="Content Placeholder 2"/>
+          <p:cNvSpPr>
+            <a:spLocks noGrp="1"/>
+          </p:cNvSpPr>
+          <p:nvPr>
+            <p:ph idx="1"/>
+          </p:nvPr>
+        </p:nvSpPr>
+        <p:spPr/>
+        <p:txBody>
+          <a:bodyPr/>
+          <a:lstStyle/>
+          <a:p>
+            <a:pPr lvl="0" indent="0" marL="0">
+              <a:buNone/>
+            </a:pPr>
+            <a:r>
+              <a:rPr/>
+              <a:t>VS Codium terminal</a:t>
+            </a:r>
+          </a:p>
+          <a:p>
+            <a:pPr lvl="0" indent="0">
+              <a:buNone/>
+            </a:pPr>
+            <a:r>
+              <a:rPr i="1">
+                <a:solidFill>
+                  <a:srgbClr val="60A0B0"/>
+                </a:solidFill>
+                <a:latin typeface="Courier"/>
+              </a:rPr>
+              <a:t># macOS / Linux</a:t>
+            </a:r>
+            <a:br/>
+            <a:r>
+              <a:rPr>
+                <a:solidFill>
+                  <a:srgbClr val="008000"/>
+                </a:solidFill>
+                <a:latin typeface="Courier"/>
+              </a:rPr>
+              <a:t>source</a:t>
+            </a:r>
+            <a:r>
+              <a:rPr>
+                <a:latin typeface="Courier"/>
+              </a:rPr>
+              <a:t> .venv/bin/activate</a:t>
+            </a:r>
+            <a:br/>
+            <a:br/>
+            <a:r>
+              <a:rPr i="1">
+                <a:solidFill>
+                  <a:srgbClr val="60A0B0"/>
+                </a:solidFill>
+                <a:latin typeface="Courier"/>
+              </a:rPr>
+              <a:t># Windows (PowerShell)</a:t>
+            </a:r>
+            <a:br/>
+            <a:r>
+              <a:rPr>
+                <a:latin typeface="Courier"/>
+              </a:rPr>
+              <a:t>.venv\Scripts\Activate.ps1</a:t>
+            </a:r>
+          </a:p>
+          <a:p>
+            <a:pPr lvl="0" indent="0" marL="0">
+              <a:buNone/>
+            </a:pPr>
+            <a:r>
+              <a:rPr/>
+              <a:t>Your prompt now starts with </a:t>
+            </a:r>
+            <a:r>
+              <a:rPr>
+                <a:latin typeface="Courier"/>
+              </a:rPr>
+              <a:t>(.venv)</a:t>
+            </a:r>
+            <a:r>
+              <a:rPr/>
+              <a:t>. </a:t>
+            </a:r>
+            <a:r>
+              <a:rPr b="1"/>
+              <a:t>Every command from here on assumes you see that.</a:t>
+            </a:r>
+          </a:p>
+        </p:txBody>
+      </p:sp>
+    </p:spTree>
+  </p:cSld>
+</p:sld>
+</file>
+
+<file path=ppt/slides/slide23.xml><?xml version="1.0" encoding="utf-8"?>
+<p:sld xmlns:a="http://schemas.openxmlformats.org/drawingml/2006/main" xmlns:r="http://schemas.openxmlformats.org/officeDocument/2006/relationships" xmlns:p="http://schemas.openxmlformats.org/presentationml/2006/main">
+  <p:cSld>
+    <p:spTree>
+      <p:nvGrpSpPr>
+        <p:cNvPr id="1" name=""/>
+        <p:cNvGrpSpPr/>
+        <p:nvPr/>
+      </p:nvGrpSpPr>
+      <p:grpSpPr>
+        <a:xfrm>
+          <a:off x="0" y="0"/>
+          <a:ext cx="0" cy="0"/>
+          <a:chOff x="0" y="0"/>
+          <a:chExt cx="0" cy="0"/>
+        </a:xfrm>
+      </p:grpSpPr>
+      <p:sp>
+        <p:nvSpPr>
+          <p:cNvPr id="2" name="Title 1"/>
+          <p:cNvSpPr>
+            <a:spLocks noGrp="1"/>
+          </p:cNvSpPr>
+          <p:nvPr>
+            <p:ph type="title"/>
+          </p:nvPr>
+        </p:nvSpPr>
+        <p:spPr/>
+        <p:txBody>
+          <a:bodyPr/>
+          <a:lstStyle/>
+          <a:p>
+            <a:pPr lvl="0" indent="0" marL="0">
+              <a:buNone/>
+            </a:pPr>
+            <a:r>
+              <a:rPr/>
+              <a:t>Install the packages</a:t>
+            </a:r>
+          </a:p>
+        </p:txBody>
+      </p:sp>
+      <p:sp>
+        <p:nvSpPr>
+          <p:cNvPr id="3" name="Content Placeholder 2"/>
+          <p:cNvSpPr>
+            <a:spLocks noGrp="1"/>
+          </p:cNvSpPr>
+          <p:nvPr>
+            <p:ph idx="1"/>
+          </p:nvPr>
+        </p:nvSpPr>
+        <p:spPr/>
+        <p:txBody>
+          <a:bodyPr/>
+          <a:lstStyle/>
+          <a:p>
+            <a:pPr lvl="0" indent="0" marL="0">
+              <a:buNone/>
+            </a:pPr>
+            <a:r>
+              <a:rPr/>
+              <a:t>VS Codium terminal · with </a:t>
+            </a:r>
+            <a:r>
+              <a:rPr>
+                <a:latin typeface="Courier"/>
+              </a:rPr>
+              <a:t>(.venv)</a:t>
+            </a:r>
+            <a:r>
+              <a:rPr/>
+              <a:t> showing</a:t>
+            </a:r>
+          </a:p>
+          <a:p>
+            <a:pPr lvl="0" indent="0">
+              <a:buNone/>
+            </a:pPr>
+            <a:r>
+              <a:rPr>
+                <a:latin typeface="Courier"/>
+              </a:rPr>
+              <a:t>pip install </a:t>
+            </a:r>
+            <a:r>
+              <a:rPr>
+                <a:solidFill>
+                  <a:srgbClr val="7D9029"/>
+                </a:solidFill>
+                <a:latin typeface="Courier"/>
+              </a:rPr>
+              <a:t>-r</a:t>
+            </a:r>
+            <a:r>
+              <a:rPr>
+                <a:latin typeface="Courier"/>
+              </a:rPr>
+              <a:t> requirements.txt</a:t>
+            </a:r>
+          </a:p>
+          <a:p>
+            <a:pPr lvl="0" indent="0" marL="0">
+              <a:buNone/>
+            </a:pPr>
+            <a:r>
+              <a:rPr/>
+              <a:t>numpy, pandas, scikit-learn, statsmodels, matplotlib and the rest. A few minutes.</a:t>
+            </a:r>
+          </a:p>
+          <a:p>
+            <a:pPr lvl="0" indent="0">
+              <a:buNone/>
+            </a:pPr>
+            <a:r>
+              <a:rPr>
+                <a:latin typeface="Courier"/>
+              </a:rPr>
+              <a:t>python </a:t>
+            </a:r>
+            <a:r>
+              <a:rPr>
+                <a:solidFill>
+                  <a:srgbClr val="7D9029"/>
+                </a:solidFill>
+                <a:latin typeface="Courier"/>
+              </a:rPr>
+              <a:t>-c</a:t>
+            </a:r>
+            <a:r>
+              <a:rPr>
+                <a:latin typeface="Courier"/>
+              </a:rPr>
+              <a:t> </a:t>
+            </a:r>
+            <a:r>
+              <a:rPr>
+                <a:solidFill>
+                  <a:srgbClr val="4070A0"/>
+                </a:solidFill>
+                <a:latin typeface="Courier"/>
+              </a:rPr>
+              <a:t>"import numpy, pandas, sklearn; print('ok')"</a:t>
+            </a:r>
+          </a:p>
+          <a:p>
+            <a:pPr lvl="0" indent="0" marL="0">
+              <a:buNone/>
+            </a:pPr>
+            <a:r>
+              <a:rPr/>
+              <a:t>prints </a:t>
+            </a:r>
+            <a:r>
+              <a:rPr>
+                <a:latin typeface="Courier"/>
+              </a:rPr>
+              <a:t>ok</a:t>
+            </a:r>
+            <a:r>
+              <a:rPr/>
+              <a:t>.</a:t>
+            </a:r>
+          </a:p>
+        </p:txBody>
+      </p:sp>
+    </p:spTree>
+  </p:cSld>
+</p:sld>
+</file>
+
+<file path=ppt/slides/slide24.xml><?xml version="1.0" encoding="utf-8"?>
+<p:sld xmlns:a="http://schemas.openxmlformats.org/drawingml/2006/main" xmlns:r="http://schemas.openxmlformats.org/officeDocument/2006/relationships" xmlns:p="http://schemas.openxmlformats.org/presentationml/2006/main">
+  <p:cSld>
+    <p:spTree>
+      <p:nvGrpSpPr>
+        <p:cNvPr id="1" name=""/>
+        <p:cNvGrpSpPr/>
+        <p:nvPr/>
+      </p:nvGrpSpPr>
+      <p:grpSpPr>
+        <a:xfrm>
+          <a:off x="0" y="0"/>
+          <a:ext cx="0" cy="0"/>
+          <a:chOff x="0" y="0"/>
+          <a:chExt cx="0" cy="0"/>
+        </a:xfrm>
+      </p:grpSpPr>
+      <p:sp>
+        <p:nvSpPr>
+          <p:cNvPr id="2" name="Title 1"/>
+          <p:cNvSpPr>
+            <a:spLocks noGrp="1"/>
+          </p:cNvSpPr>
+          <p:nvPr>
+            <p:ph type="title"/>
+          </p:nvPr>
+        </p:nvSpPr>
+        <p:spPr>
+          <a:xfrm>
+            <a:off x="722313" y="3305176"/>
+            <a:ext cx="7772400" cy="1021556"/>
+          </a:xfrm>
+        </p:spPr>
+        <p:txBody>
+          <a:bodyPr/>
+          <a:lstStyle/>
+          <a:p>
+            <a:pPr lvl="0" indent="0" marL="0">
+              <a:buNone/>
+            </a:pPr>
+            <a:r>
+              <a:rPr/>
+              <a:t>Step 4 — Ollama and Qwen</a:t>
+            </a:r>
+          </a:p>
+        </p:txBody>
+      </p:sp>
+    </p:spTree>
+  </p:cSld>
+</p:sld>
+</file>
+
+<file path=ppt/slides/slide25.xml><?xml version="1.0" encoding="utf-8"?>
+<p:sld xmlns:a="http://schemas.openxmlformats.org/drawingml/2006/main" xmlns:r="http://schemas.openxmlformats.org/officeDocument/2006/relationships" xmlns:p="http://schemas.openxmlformats.org/presentationml/2006/main">
+  <p:cSld>
+    <p:spTree>
+      <p:nvGrpSpPr>
+        <p:cNvPr id="1" name=""/>
+        <p:cNvGrpSpPr/>
+        <p:nvPr/>
+      </p:nvGrpSpPr>
+      <p:grpSpPr>
+        <a:xfrm>
+          <a:off x="0" y="0"/>
+          <a:ext cx="0" cy="0"/>
+          <a:chOff x="0" y="0"/>
+          <a:chExt cx="0" cy="0"/>
+        </a:xfrm>
+      </p:grpSpPr>
+      <p:sp>
+        <p:nvSpPr>
+          <p:cNvPr id="2" name="Title 1"/>
+          <p:cNvSpPr>
+            <a:spLocks noGrp="1"/>
+          </p:cNvSpPr>
+          <p:nvPr>
+            <p:ph type="title"/>
+          </p:nvPr>
+        </p:nvSpPr>
+        <p:spPr/>
+        <p:txBody>
+          <a:bodyPr/>
+          <a:lstStyle/>
+          <a:p>
+            <a:pPr lvl="0" indent="0" marL="0">
+              <a:buNone/>
+            </a:pPr>
+            <a:r>
+              <a:rPr/>
+              <a:t>Install Ollama</a:t>
+            </a:r>
+          </a:p>
+        </p:txBody>
+      </p:sp>
+      <p:sp>
+        <p:nvSpPr>
+          <p:cNvPr id="3" name="Content Placeholder 2"/>
+          <p:cNvSpPr>
+            <a:spLocks noGrp="1"/>
+          </p:cNvSpPr>
+          <p:nvPr>
+            <p:ph idx="1"/>
+          </p:nvPr>
+        </p:nvSpPr>
+        <p:spPr/>
+        <p:txBody>
+          <a:bodyPr/>
+          <a:lstStyle/>
+          <a:p>
+            <a:pPr lvl="0" indent="0" marL="0">
+              <a:buNone/>
+            </a:pPr>
+            <a:r>
+              <a:rPr/>
+              <a:t>download</a:t>
+            </a:r>
+          </a:p>
+          <a:p>
+            <a:pPr lvl="0" indent="0" marL="0">
+              <a:buNone/>
+            </a:pPr>
+            <a:r>
+              <a:rPr/>
+              <a:t>Go to </a:t>
+            </a:r>
+            <a:r>
+              <a:rPr b="1"/>
+              <a:t>ollama.com/download</a:t>
+            </a:r>
+            <a:r>
+              <a:rPr/>
+              <a:t>, choose your operating system, and run the installer. This works on macOS, Windows and Linux.</a:t>
+            </a:r>
+          </a:p>
+          <a:p>
+            <a:pPr lvl="0" indent="0" marL="0">
+              <a:buNone/>
+            </a:pPr>
+            <a:r>
+              <a:rPr/>
+              <a:t>You may see a one-line </a:t>
+            </a:r>
+            <a:r>
+              <a:rPr>
+                <a:latin typeface="Courier"/>
+              </a:rPr>
+              <a:t>curl … | sh</a:t>
+            </a:r>
+            <a:r>
+              <a:rPr/>
+              <a:t> command on the web. Ignore it — the installer does the same thing and there is nothing to mistype.</a:t>
+            </a:r>
+          </a:p>
+          <a:p>
+            <a:pPr lvl="0" indent="0" marL="0">
+              <a:buNone/>
+            </a:pPr>
+            <a:r>
+              <a:rPr/>
+              <a:t>On macOS, </a:t>
+            </a:r>
+            <a:r>
+              <a:rPr b="1"/>
+              <a:t>open the app once</a:t>
+            </a:r>
+            <a:r>
+              <a:rPr/>
+              <a:t> after installing. It puts the </a:t>
+            </a:r>
+            <a:r>
+              <a:rPr>
+                <a:latin typeface="Courier"/>
+              </a:rPr>
+              <a:t>ollama</a:t>
+            </a:r>
+            <a:r>
+              <a:rPr/>
+              <a:t> command in place and starts the background service.</a:t>
+            </a:r>
+          </a:p>
+        </p:txBody>
+      </p:sp>
+    </p:spTree>
+  </p:cSld>
+</p:sld>
+</file>
+
+<file path=ppt/slides/slide26.xml><?xml version="1.0" encoding="utf-8"?>
+<p:sld xmlns:a="http://schemas.openxmlformats.org/drawingml/2006/main" xmlns:r="http://schemas.openxmlformats.org/officeDocument/2006/relationships" xmlns:p="http://schemas.openxmlformats.org/presentationml/2006/main">
+  <p:cSld>
+    <p:spTree>
+      <p:nvGrpSpPr>
+        <p:cNvPr id="1" name=""/>
+        <p:cNvGrpSpPr/>
+        <p:nvPr/>
+      </p:nvGrpSpPr>
+      <p:grpSpPr>
+        <a:xfrm>
+          <a:off x="0" y="0"/>
+          <a:ext cx="0" cy="0"/>
+          <a:chOff x="0" y="0"/>
+          <a:chExt cx="0" cy="0"/>
+        </a:xfrm>
+      </p:grpSpPr>
+      <p:sp>
+        <p:nvSpPr>
+          <p:cNvPr id="2" name="Title 1"/>
+          <p:cNvSpPr>
+            <a:spLocks noGrp="1"/>
+          </p:cNvSpPr>
+          <p:nvPr>
+            <p:ph type="title"/>
+          </p:nvPr>
+        </p:nvSpPr>
+        <p:spPr/>
+        <p:txBody>
+          <a:bodyPr/>
+          <a:lstStyle/>
+          <a:p>
+            <a:pPr lvl="0" indent="0" marL="0">
+              <a:buNone/>
+            </a:pPr>
+            <a:r>
+              <a:rPr/>
+              <a:t>Check Ollama is there</a:t>
+            </a:r>
+          </a:p>
+        </p:txBody>
+      </p:sp>
+      <p:sp>
+        <p:nvSpPr>
+          <p:cNvPr id="3" name="Content Placeholder 2"/>
+          <p:cNvSpPr>
+            <a:spLocks noGrp="1"/>
+          </p:cNvSpPr>
+          <p:nvPr>
+            <p:ph idx="1"/>
+          </p:nvPr>
+        </p:nvSpPr>
+        <p:spPr/>
+        <p:txBody>
+          <a:bodyPr/>
+          <a:lstStyle/>
+          <a:p>
+            <a:pPr lvl="0" indent="0" marL="0">
+              <a:buNone/>
+            </a:pPr>
+            <a:r>
+              <a:rPr/>
+              <a:t>VS Codium terminal</a:t>
+            </a:r>
+          </a:p>
+          <a:p>
+            <a:pPr lvl="0" indent="0">
+              <a:buNone/>
+            </a:pPr>
+            <a:r>
+              <a:rPr>
+                <a:latin typeface="Courier"/>
+              </a:rPr>
+              <a:t>ollama </a:t>
+            </a:r>
+            <a:r>
+              <a:rPr>
+                <a:solidFill>
+                  <a:srgbClr val="7D9029"/>
+                </a:solidFill>
+                <a:latin typeface="Courier"/>
+              </a:rPr>
+              <a:t>--version</a:t>
+            </a:r>
+          </a:p>
+          <a:p>
+            <a:pPr lvl="0" indent="0" marL="0">
+              <a:buNone/>
+            </a:pPr>
+            <a:r>
+              <a:rPr/>
+              <a:t>Prints a version number.</a:t>
+            </a:r>
+          </a:p>
+          <a:p>
+            <a:pPr lvl="0" indent="0" marL="0">
+              <a:buNone/>
+            </a:pPr>
+            <a:r>
+              <a:rPr i="1"/>
+              <a:t>Command not found?</a:t>
+            </a:r>
+            <a:r>
+              <a:rPr/>
+              <a:t> Close the terminal panel and open a new one — a new terminal picks up the changed PATH. On Windows, restart VS Codium.</a:t>
+            </a:r>
+          </a:p>
+        </p:txBody>
+      </p:sp>
+    </p:spTree>
+  </p:cSld>
+</p:sld>
+</file>
+
+<file path=ppt/slides/slide27.xml><?xml version="1.0" encoding="utf-8"?>
+<p:sld xmlns:a="http://schemas.openxmlformats.org/drawingml/2006/main" xmlns:r="http://schemas.openxmlformats.org/officeDocument/2006/relationships" xmlns:p="http://schemas.openxmlformats.org/presentationml/2006/main">
+  <p:cSld>
+    <p:spTree>
+      <p:nvGrpSpPr>
+        <p:cNvPr id="1" name=""/>
+        <p:cNvGrpSpPr/>
+        <p:nvPr/>
+      </p:nvGrpSpPr>
+      <p:grpSpPr>
+        <a:xfrm>
+          <a:off x="0" y="0"/>
+          <a:ext cx="0" cy="0"/>
+          <a:chOff x="0" y="0"/>
+          <a:chExt cx="0" cy="0"/>
+        </a:xfrm>
+      </p:grpSpPr>
+      <p:sp>
+        <p:nvSpPr>
+          <p:cNvPr id="2" name="Title 1"/>
+          <p:cNvSpPr>
+            <a:spLocks noGrp="1"/>
+          </p:cNvSpPr>
+          <p:nvPr>
+            <p:ph type="title"/>
+          </p:nvPr>
+        </p:nvSpPr>
         <p:spPr>
           <a:xfrm>
             <a:off x="457201" y="204787"/>
@@ -4959,6 +5725,15 @@
         <p:txBody>
           <a:bodyPr/>
           <a:lstStyle/>
+          <a:p>
+            <a:pPr lvl="0" indent="0" marL="0">
+              <a:buNone/>
+            </a:pPr>
+            <a:r>
+              <a:rPr/>
+              <a:t>VS Codium terminal</a:t>
+            </a:r>
+          </a:p>
           <a:p>
             <a:pPr lvl="0" indent="0" marL="0">
               <a:buNone/>
@@ -5215,745 +5990,6 @@
 </p:sld>
 </file>
 
-<file path=ppt/slides/slide22.xml><?xml version="1.0" encoding="utf-8"?>
-<p:sld xmlns:a="http://schemas.openxmlformats.org/drawingml/2006/main" xmlns:r="http://schemas.openxmlformats.org/officeDocument/2006/relationships" xmlns:p="http://schemas.openxmlformats.org/presentationml/2006/main">
-  <p:cSld>
-    <p:spTree>
-      <p:nvGrpSpPr>
-        <p:cNvPr id="1" name=""/>
-        <p:cNvGrpSpPr/>
-        <p:nvPr/>
-      </p:nvGrpSpPr>
-      <p:grpSpPr>
-        <a:xfrm>
-          <a:off x="0" y="0"/>
-          <a:ext cx="0" cy="0"/>
-          <a:chOff x="0" y="0"/>
-          <a:chExt cx="0" cy="0"/>
-        </a:xfrm>
-      </p:grpSpPr>
-      <p:sp>
-        <p:nvSpPr>
-          <p:cNvPr id="3" name="Content Placeholder 2"/>
-          <p:cNvSpPr>
-            <a:spLocks noGrp="1"/>
-          </p:cNvSpPr>
-          <p:nvPr>
-            <p:ph idx="1"/>
-          </p:nvPr>
-        </p:nvSpPr>
-        <p:spPr/>
-        <p:txBody>
-          <a:bodyPr/>
-          <a:lstStyle/>
-          <a:p>
-            <a:pPr lvl="0" indent="0" marL="0">
-              <a:buNone/>
-            </a:pPr>
-            <a:r>
-              <a:rPr/>
-              <a:t>You also need the embedding model for Session 10:</a:t>
-            </a:r>
-          </a:p>
-          <a:p>
-            <a:pPr lvl="0" indent="0">
-              <a:buNone/>
-            </a:pPr>
-            <a:r>
-              <a:rPr>
-                <a:latin typeface="Courier"/>
-              </a:rPr>
-              <a:t>ollama pull nomic-embed-text</a:t>
-            </a:r>
-          </a:p>
-          <a:p>
-            <a:pPr lvl="0" indent="0" marL="0">
-              <a:buNone/>
-            </a:pPr>
-            <a:r>
-              <a:rPr/>
-              <a:t>This downloads several gigabytes. Do it on a good connection, </a:t>
-            </a:r>
-            <a:r>
-              <a:rPr b="1"/>
-              <a:t>not</a:t>
-            </a:r>
-            <a:r>
-              <a:rPr/>
-              <a:t> ten minutes before class.</a:t>
-            </a:r>
-          </a:p>
-        </p:txBody>
-      </p:sp>
-    </p:spTree>
-  </p:cSld>
-</p:sld>
-</file>
-
-<file path=ppt/slides/slide23.xml><?xml version="1.0" encoding="utf-8"?>
-<p:sld xmlns:a="http://schemas.openxmlformats.org/drawingml/2006/main" xmlns:r="http://schemas.openxmlformats.org/officeDocument/2006/relationships" xmlns:p="http://schemas.openxmlformats.org/presentationml/2006/main">
-  <p:cSld>
-    <p:spTree>
-      <p:nvGrpSpPr>
-        <p:cNvPr id="1" name=""/>
-        <p:cNvGrpSpPr/>
-        <p:nvPr/>
-      </p:nvGrpSpPr>
-      <p:grpSpPr>
-        <a:xfrm>
-          <a:off x="0" y="0"/>
-          <a:ext cx="0" cy="0"/>
-          <a:chOff x="0" y="0"/>
-          <a:chExt cx="0" cy="0"/>
-        </a:xfrm>
-      </p:grpSpPr>
-      <p:sp>
-        <p:nvSpPr>
-          <p:cNvPr id="2" name="Title 1"/>
-          <p:cNvSpPr>
-            <a:spLocks noGrp="1"/>
-          </p:cNvSpPr>
-          <p:nvPr>
-            <p:ph type="title"/>
-          </p:nvPr>
-        </p:nvSpPr>
-        <p:spPr/>
-        <p:txBody>
-          <a:bodyPr/>
-          <a:lstStyle/>
-          <a:p>
-            <a:pPr lvl="0" indent="0" marL="0">
-              <a:buNone/>
-            </a:pPr>
-            <a:r>
-              <a:rPr/>
-              <a:t>Verify the model</a:t>
-            </a:r>
-          </a:p>
-        </p:txBody>
-      </p:sp>
-      <p:sp>
-        <p:nvSpPr>
-          <p:cNvPr id="3" name="Content Placeholder 2"/>
-          <p:cNvSpPr>
-            <a:spLocks noGrp="1"/>
-          </p:cNvSpPr>
-          <p:nvPr>
-            <p:ph idx="1"/>
-          </p:nvPr>
-        </p:nvSpPr>
-        <p:spPr/>
-        <p:txBody>
-          <a:bodyPr/>
-          <a:lstStyle/>
-          <a:p>
-            <a:pPr lvl="0" indent="0">
-              <a:buNone/>
-            </a:pPr>
-            <a:r>
-              <a:rPr>
-                <a:latin typeface="Courier"/>
-              </a:rPr>
-              <a:t>ollama list</a:t>
-            </a:r>
-          </a:p>
-          <a:p>
-            <a:pPr lvl="0" indent="0" marL="0">
-              <a:buNone/>
-            </a:pPr>
-            <a:r>
-              <a:rPr/>
-              <a:t>You should see your model listed. Now talk to it:</a:t>
-            </a:r>
-          </a:p>
-          <a:p>
-            <a:pPr lvl="0" indent="0">
-              <a:buNone/>
-            </a:pPr>
-            <a:r>
-              <a:rPr>
-                <a:latin typeface="Courier"/>
-              </a:rPr>
-              <a:t>ollama run qwen2.5-coder:7b </a:t>
-            </a:r>
-            <a:r>
-              <a:rPr>
-                <a:solidFill>
-                  <a:srgbClr val="4070A0"/>
-                </a:solidFill>
-                <a:latin typeface="Courier"/>
-              </a:rPr>
-              <a:t>"Explain the bias-variance tradeoff in three sentences."</a:t>
-            </a:r>
-          </a:p>
-          <a:p>
-            <a:pPr lvl="0" indent="0" marL="0">
-              <a:buNone/>
-            </a:pPr>
-            <a:r>
-              <a:rPr/>
-              <a:t>Type </a:t>
-            </a:r>
-            <a:r>
-              <a:rPr>
-                <a:latin typeface="Courier"/>
-              </a:rPr>
-              <a:t>/bye</a:t>
-            </a:r>
-            <a:r>
-              <a:rPr/>
-              <a:t> to leave the chat.</a:t>
-            </a:r>
-          </a:p>
-          <a:p>
-            <a:pPr lvl="0" indent="0" marL="0">
-              <a:buNone/>
-            </a:pPr>
-            <a:r>
-              <a:rPr b="1"/>
-              <a:t>The real check.</a:t>
-            </a:r>
-            <a:r>
-              <a:rPr/>
-              <a:t> Turn off your wifi and run that command again. It should still answer. That is what “local” means.</a:t>
-            </a:r>
-          </a:p>
-        </p:txBody>
-      </p:sp>
-    </p:spTree>
-  </p:cSld>
-</p:sld>
-</file>
-
-<file path=ppt/slides/slide24.xml><?xml version="1.0" encoding="utf-8"?>
-<p:sld xmlns:a="http://schemas.openxmlformats.org/drawingml/2006/main" xmlns:r="http://schemas.openxmlformats.org/officeDocument/2006/relationships" xmlns:p="http://schemas.openxmlformats.org/presentationml/2006/main">
-  <p:cSld>
-    <p:spTree>
-      <p:nvGrpSpPr>
-        <p:cNvPr id="1" name=""/>
-        <p:cNvGrpSpPr/>
-        <p:nvPr/>
-      </p:nvGrpSpPr>
-      <p:grpSpPr>
-        <a:xfrm>
-          <a:off x="0" y="0"/>
-          <a:ext cx="0" cy="0"/>
-          <a:chOff x="0" y="0"/>
-          <a:chExt cx="0" cy="0"/>
-        </a:xfrm>
-      </p:grpSpPr>
-      <p:sp>
-        <p:nvSpPr>
-          <p:cNvPr id="2" name="Title 1"/>
-          <p:cNvSpPr>
-            <a:spLocks noGrp="1"/>
-          </p:cNvSpPr>
-          <p:nvPr>
-            <p:ph type="title"/>
-          </p:nvPr>
-        </p:nvSpPr>
-        <p:spPr>
-          <a:xfrm>
-            <a:off x="722313" y="3305176"/>
-            <a:ext cx="7772400" cy="1021556"/>
-          </a:xfrm>
-        </p:spPr>
-        <p:txBody>
-          <a:bodyPr/>
-          <a:lstStyle/>
-          <a:p>
-            <a:pPr lvl="0" indent="0" marL="0">
-              <a:buNone/>
-            </a:pPr>
-            <a:r>
-              <a:rPr/>
-              <a:t>Step 5 — The CLI agent</a:t>
-            </a:r>
-          </a:p>
-        </p:txBody>
-      </p:sp>
-    </p:spTree>
-  </p:cSld>
-</p:sld>
-</file>
-
-<file path=ppt/slides/slide25.xml><?xml version="1.0" encoding="utf-8"?>
-<p:sld xmlns:a="http://schemas.openxmlformats.org/drawingml/2006/main" xmlns:r="http://schemas.openxmlformats.org/officeDocument/2006/relationships" xmlns:p="http://schemas.openxmlformats.org/presentationml/2006/main">
-  <p:cSld>
-    <p:spTree>
-      <p:nvGrpSpPr>
-        <p:cNvPr id="1" name=""/>
-        <p:cNvGrpSpPr/>
-        <p:nvPr/>
-      </p:nvGrpSpPr>
-      <p:grpSpPr>
-        <a:xfrm>
-          <a:off x="0" y="0"/>
-          <a:ext cx="0" cy="0"/>
-          <a:chOff x="0" y="0"/>
-          <a:chExt cx="0" cy="0"/>
-        </a:xfrm>
-      </p:grpSpPr>
-      <p:sp>
-        <p:nvSpPr>
-          <p:cNvPr id="2" name="Title 1"/>
-          <p:cNvSpPr>
-            <a:spLocks noGrp="1"/>
-          </p:cNvSpPr>
-          <p:nvPr>
-            <p:ph type="title"/>
-          </p:nvPr>
-        </p:nvSpPr>
-        <p:spPr/>
-        <p:txBody>
-          <a:bodyPr/>
-          <a:lstStyle/>
-          <a:p>
-            <a:pPr lvl="0" indent="0" marL="0">
-              <a:buNone/>
-            </a:pPr>
-            <a:r>
-              <a:rPr/>
-              <a:t>Talking to Qwen the way I talk to Claude</a:t>
-            </a:r>
-          </a:p>
-        </p:txBody>
-      </p:sp>
-      <p:sp>
-        <p:nvSpPr>
-          <p:cNvPr id="3" name="Content Placeholder 2"/>
-          <p:cNvSpPr>
-            <a:spLocks noGrp="1"/>
-          </p:cNvSpPr>
-          <p:nvPr>
-            <p:ph idx="1"/>
-          </p:nvPr>
-        </p:nvSpPr>
-        <p:spPr/>
-        <p:txBody>
-          <a:bodyPr/>
-          <a:lstStyle/>
-          <a:p>
-            <a:pPr lvl="0" indent="0" marL="0">
-              <a:buNone/>
-            </a:pPr>
-            <a:r>
-              <a:rPr/>
-              <a:t>The Continue sidebar is useful for questions about a selected block of code.</a:t>
-            </a:r>
-          </a:p>
-          <a:p>
-            <a:pPr lvl="0" indent="0" marL="0">
-              <a:buNone/>
-            </a:pPr>
-            <a:r>
-              <a:rPr/>
-              <a:t>But the way this course actually works — and the way I work in front of you — is an </a:t>
-            </a:r>
-            <a:r>
-              <a:rPr b="1"/>
-              <a:t>agent in the terminal</a:t>
-            </a:r>
-            <a:r>
-              <a:rPr/>
-              <a:t>: something that reads your files, edits them, and commits, while you steer it in prose.</a:t>
-            </a:r>
-          </a:p>
-          <a:p>
-            <a:pPr lvl="0" indent="0" marL="0">
-              <a:buNone/>
-            </a:pPr>
-            <a:r>
-              <a:rPr/>
-              <a:t>That tool is </a:t>
-            </a:r>
-            <a:r>
-              <a:rPr b="1"/>
-              <a:t>aider</a:t>
-            </a:r>
-            <a:r>
-              <a:rPr/>
-              <a:t>, and it runs against your local Qwen.</a:t>
-            </a:r>
-          </a:p>
-          <a:p>
-            <a:pPr lvl="0" indent="0" marL="0">
-              <a:buNone/>
-            </a:pPr>
-            <a:r>
-              <a:rPr/>
-              <a:t>Same shape as the workflow you have seen me use. Different engine, and it is running on your laptop.</a:t>
-            </a:r>
-          </a:p>
-        </p:txBody>
-      </p:sp>
-    </p:spTree>
-  </p:cSld>
-</p:sld>
-</file>
-
-<file path=ppt/slides/slide26.xml><?xml version="1.0" encoding="utf-8"?>
-<p:sld xmlns:a="http://schemas.openxmlformats.org/drawingml/2006/main" xmlns:r="http://schemas.openxmlformats.org/officeDocument/2006/relationships" xmlns:p="http://schemas.openxmlformats.org/presentationml/2006/main">
-  <p:cSld>
-    <p:spTree>
-      <p:nvGrpSpPr>
-        <p:cNvPr id="1" name=""/>
-        <p:cNvGrpSpPr/>
-        <p:nvPr/>
-      </p:nvGrpSpPr>
-      <p:grpSpPr>
-        <a:xfrm>
-          <a:off x="0" y="0"/>
-          <a:ext cx="0" cy="0"/>
-          <a:chOff x="0" y="0"/>
-          <a:chExt cx="0" cy="0"/>
-        </a:xfrm>
-      </p:grpSpPr>
-      <p:sp>
-        <p:nvSpPr>
-          <p:cNvPr id="2" name="Title 1"/>
-          <p:cNvSpPr>
-            <a:spLocks noGrp="1"/>
-          </p:cNvSpPr>
-          <p:nvPr>
-            <p:ph type="title"/>
-          </p:nvPr>
-        </p:nvSpPr>
-        <p:spPr/>
-        <p:txBody>
-          <a:bodyPr/>
-          <a:lstStyle/>
-          <a:p>
-            <a:pPr lvl="0" indent="0" marL="0">
-              <a:buNone/>
-            </a:pPr>
-            <a:r>
-              <a:rPr/>
-              <a:t>Install aider</a:t>
-            </a:r>
-          </a:p>
-        </p:txBody>
-      </p:sp>
-      <p:sp>
-        <p:nvSpPr>
-          <p:cNvPr id="3" name="Content Placeholder 2"/>
-          <p:cNvSpPr>
-            <a:spLocks noGrp="1"/>
-          </p:cNvSpPr>
-          <p:nvPr>
-            <p:ph idx="1"/>
-          </p:nvPr>
-        </p:nvSpPr>
-        <p:spPr/>
-        <p:txBody>
-          <a:bodyPr/>
-          <a:lstStyle/>
-          <a:p>
-            <a:pPr lvl="0" indent="0" marL="0">
-              <a:buNone/>
-            </a:pPr>
-            <a:r>
-              <a:rPr/>
-              <a:t>In the VS Codium terminal, with your </a:t>
-            </a:r>
-            <a:r>
-              <a:rPr>
-                <a:latin typeface="Courier"/>
-              </a:rPr>
-              <a:t>.venv</a:t>
-            </a:r>
-            <a:r>
-              <a:rPr/>
-              <a:t> active:</a:t>
-            </a:r>
-          </a:p>
-          <a:p>
-            <a:pPr lvl="0" indent="0">
-              <a:buNone/>
-            </a:pPr>
-            <a:r>
-              <a:rPr>
-                <a:latin typeface="Courier"/>
-              </a:rPr>
-              <a:t>python </a:t>
-            </a:r>
-            <a:r>
-              <a:rPr>
-                <a:solidFill>
-                  <a:srgbClr val="7D9029"/>
-                </a:solidFill>
-                <a:latin typeface="Courier"/>
-              </a:rPr>
-              <a:t>-m</a:t>
-            </a:r>
-            <a:r>
-              <a:rPr>
-                <a:latin typeface="Courier"/>
-              </a:rPr>
-              <a:t> pip install aider-install</a:t>
-            </a:r>
-            <a:br/>
-            <a:r>
-              <a:rPr>
-                <a:latin typeface="Courier"/>
-              </a:rPr>
-              <a:t>aider-install</a:t>
-            </a:r>
-          </a:p>
-          <a:p>
-            <a:pPr lvl="0" indent="0" marL="0">
-              <a:buNone/>
-            </a:pPr>
-            <a:r>
-              <a:rPr/>
-              <a:t>Then tell it where Ollama lives:</a:t>
-            </a:r>
-          </a:p>
-          <a:p>
-            <a:pPr lvl="0" indent="0">
-              <a:buNone/>
-            </a:pPr>
-            <a:r>
-              <a:rPr i="1">
-                <a:solidFill>
-                  <a:srgbClr val="60A0B0"/>
-                </a:solidFill>
-                <a:latin typeface="Courier"/>
-              </a:rPr>
-              <a:t># macOS / Linux</a:t>
-            </a:r>
-            <a:br/>
-            <a:r>
-              <a:rPr>
-                <a:solidFill>
-                  <a:srgbClr val="008000"/>
-                </a:solidFill>
-                <a:latin typeface="Courier"/>
-              </a:rPr>
-              <a:t>export</a:t>
-            </a:r>
-            <a:r>
-              <a:rPr>
-                <a:latin typeface="Courier"/>
-              </a:rPr>
-              <a:t> </a:t>
-            </a:r>
-            <a:r>
-              <a:rPr>
-                <a:solidFill>
-                  <a:srgbClr val="19177C"/>
-                </a:solidFill>
-                <a:latin typeface="Courier"/>
-              </a:rPr>
-              <a:t>OLLAMA_API_BASE</a:t>
-            </a:r>
-            <a:r>
-              <a:rPr>
-                <a:solidFill>
-                  <a:srgbClr val="666666"/>
-                </a:solidFill>
-                <a:latin typeface="Courier"/>
-              </a:rPr>
-              <a:t>=</a:t>
-            </a:r>
-            <a:r>
-              <a:rPr>
-                <a:latin typeface="Courier"/>
-              </a:rPr>
-              <a:t>http://127.0.0.1:11434</a:t>
-            </a:r>
-            <a:br/>
-            <a:br/>
-            <a:r>
-              <a:rPr i="1">
-                <a:solidFill>
-                  <a:srgbClr val="60A0B0"/>
-                </a:solidFill>
-                <a:latin typeface="Courier"/>
-              </a:rPr>
-              <a:t># Windows (PowerShell) — then restart the terminal</a:t>
-            </a:r>
-            <a:br/>
-            <a:r>
-              <a:rPr>
-                <a:latin typeface="Courier"/>
-              </a:rPr>
-              <a:t>setx OLLAMA_API_BASE http://127.0.0.1:11434</a:t>
-            </a:r>
-          </a:p>
-        </p:txBody>
-      </p:sp>
-    </p:spTree>
-  </p:cSld>
-</p:sld>
-</file>
-
-<file path=ppt/slides/slide27.xml><?xml version="1.0" encoding="utf-8"?>
-<p:sld xmlns:a="http://schemas.openxmlformats.org/drawingml/2006/main" xmlns:r="http://schemas.openxmlformats.org/officeDocument/2006/relationships" xmlns:p="http://schemas.openxmlformats.org/presentationml/2006/main">
-  <p:cSld>
-    <p:spTree>
-      <p:nvGrpSpPr>
-        <p:cNvPr id="1" name=""/>
-        <p:cNvGrpSpPr/>
-        <p:nvPr/>
-      </p:nvGrpSpPr>
-      <p:grpSpPr>
-        <a:xfrm>
-          <a:off x="0" y="0"/>
-          <a:ext cx="0" cy="0"/>
-          <a:chOff x="0" y="0"/>
-          <a:chExt cx="0" cy="0"/>
-        </a:xfrm>
-      </p:grpSpPr>
-      <p:sp>
-        <p:nvSpPr>
-          <p:cNvPr id="2" name="Title 1"/>
-          <p:cNvSpPr>
-            <a:spLocks noGrp="1"/>
-          </p:cNvSpPr>
-          <p:nvPr>
-            <p:ph type="title"/>
-          </p:nvPr>
-        </p:nvSpPr>
-        <p:spPr/>
-        <p:txBody>
-          <a:bodyPr/>
-          <a:lstStyle/>
-          <a:p>
-            <a:pPr lvl="0" indent="0" marL="0">
-              <a:buNone/>
-            </a:pPr>
-            <a:r>
-              <a:rPr/>
-              <a:t>Give Ollama a real context window</a:t>
-            </a:r>
-          </a:p>
-        </p:txBody>
-      </p:sp>
-      <p:sp>
-        <p:nvSpPr>
-          <p:cNvPr id="3" name="Content Placeholder 2"/>
-          <p:cNvSpPr>
-            <a:spLocks noGrp="1"/>
-          </p:cNvSpPr>
-          <p:nvPr>
-            <p:ph idx="1"/>
-          </p:nvPr>
-        </p:nvSpPr>
-        <p:spPr/>
-        <p:txBody>
-          <a:bodyPr/>
-          <a:lstStyle/>
-          <a:p>
-            <a:pPr lvl="0" indent="0" marL="0">
-              <a:buNone/>
-            </a:pPr>
-            <a:r>
-              <a:rPr b="1"/>
-              <a:t>This step is not optional.</a:t>
-            </a:r>
-            <a:r>
-              <a:rPr/>
-              <a:t> Ollama defaults to a </a:t>
-            </a:r>
-            <a:r>
-              <a:rPr b="1"/>
-              <a:t>2k</a:t>
-            </a:r>
-            <a:r>
-              <a:rPr/>
-              <a:t> context window and then </a:t>
-            </a:r>
-            <a:r>
-              <a:rPr i="1"/>
-              <a:t>silently discards</a:t>
-            </a:r>
-            <a:r>
-              <a:rPr/>
-              <a:t> whatever does not fit. Your agent will appear to “forget” the file you just gave it.</a:t>
-            </a:r>
-          </a:p>
-          <a:p>
-            <a:pPr lvl="0" indent="0" marL="0">
-              <a:buNone/>
-            </a:pPr>
-            <a:r>
-              <a:rPr/>
-              <a:t>Start the server with a larger window:</a:t>
-            </a:r>
-          </a:p>
-          <a:p>
-            <a:pPr lvl="0" indent="0">
-              <a:buNone/>
-            </a:pPr>
-            <a:r>
-              <a:rPr>
-                <a:solidFill>
-                  <a:srgbClr val="19177C"/>
-                </a:solidFill>
-                <a:latin typeface="Courier"/>
-              </a:rPr>
-              <a:t>OLLAMA_CONTEXT_LENGTH</a:t>
-            </a:r>
-            <a:r>
-              <a:rPr>
-                <a:solidFill>
-                  <a:srgbClr val="666666"/>
-                </a:solidFill>
-                <a:latin typeface="Courier"/>
-              </a:rPr>
-              <a:t>=</a:t>
-            </a:r>
-            <a:r>
-              <a:rPr>
-                <a:latin typeface="Courier"/>
-              </a:rPr>
-              <a:t>8192 ollama serve</a:t>
-            </a:r>
-          </a:p>
-          <a:p>
-            <a:pPr lvl="0" indent="0" marL="0">
-              <a:buNone/>
-            </a:pPr>
-            <a:r>
-              <a:rPr/>
-              <a:t>Leave that terminal running. Open a </a:t>
-            </a:r>
-            <a:r>
-              <a:rPr b="1"/>
-              <a:t>second</a:t>
-            </a:r>
-            <a:r>
-              <a:rPr/>
-              <a:t> terminal for aider.</a:t>
-            </a:r>
-          </a:p>
-          <a:p>
-            <a:pPr lvl="0" indent="0" marL="0">
-              <a:buNone/>
-            </a:pPr>
-            <a:r>
-              <a:rPr/>
-              <a:t>In VS Codium: the </a:t>
-            </a:r>
-            <a:r>
-              <a:rPr>
-                <a:latin typeface="Courier"/>
-              </a:rPr>
-              <a:t>+</a:t>
-            </a:r>
-            <a:r>
-              <a:rPr/>
-              <a:t> icon in the terminal panel splits off a new shell.</a:t>
-            </a:r>
-          </a:p>
-        </p:txBody>
-      </p:sp>
-    </p:spTree>
-  </p:cSld>
-</p:sld>
-</file>
-
 <file path=ppt/slides/slide28.xml><?xml version="1.0" encoding="utf-8"?>
 <p:sld xmlns:a="http://schemas.openxmlformats.org/drawingml/2006/main" xmlns:r="http://schemas.openxmlformats.org/officeDocument/2006/relationships" xmlns:p="http://schemas.openxmlformats.org/presentationml/2006/main">
   <p:cSld>
@@ -5973,31 +6009,6 @@
       </p:grpSpPr>
       <p:sp>
         <p:nvSpPr>
-          <p:cNvPr id="2" name="Title 1"/>
-          <p:cNvSpPr>
-            <a:spLocks noGrp="1"/>
-          </p:cNvSpPr>
-          <p:nvPr>
-            <p:ph type="title"/>
-          </p:nvPr>
-        </p:nvSpPr>
-        <p:spPr/>
-        <p:txBody>
-          <a:bodyPr/>
-          <a:lstStyle/>
-          <a:p>
-            <a:pPr lvl="0" indent="0" marL="0">
-              <a:buNone/>
-            </a:pPr>
-            <a:r>
-              <a:rPr/>
-              <a:t>Run the agent</a:t>
-            </a:r>
-          </a:p>
-        </p:txBody>
-      </p:sp>
-      <p:sp>
-        <p:nvSpPr>
           <p:cNvPr id="3" name="Content Placeholder 2"/>
           <p:cNvSpPr>
             <a:spLocks noGrp="1"/>
@@ -6011,104 +6022,40 @@
           <a:bodyPr/>
           <a:lstStyle/>
           <a:p>
+            <a:pPr lvl="0" indent="0" marL="0">
+              <a:buNone/>
+            </a:pPr>
+            <a:r>
+              <a:rPr/>
+              <a:t>You also need the embedding model for Session 10:</a:t>
+            </a:r>
+          </a:p>
+          <a:p>
             <a:pPr lvl="0" indent="0">
               <a:buNone/>
             </a:pPr>
             <a:r>
               <a:rPr>
-                <a:solidFill>
-                  <a:srgbClr val="008000"/>
-                </a:solidFill>
-                <a:latin typeface="Courier"/>
-              </a:rPr>
-              <a:t>cd</a:t>
-            </a:r>
-            <a:r>
-              <a:rPr>
-                <a:latin typeface="Courier"/>
-              </a:rPr>
-              <a:t> /path/to/your/repo</a:t>
-            </a:r>
-            <a:br/>
-            <a:r>
-              <a:rPr>
-                <a:latin typeface="Courier"/>
-              </a:rPr>
-              <a:t>aider </a:t>
-            </a:r>
-            <a:r>
-              <a:rPr>
-                <a:solidFill>
-                  <a:srgbClr val="7D9029"/>
-                </a:solidFill>
-                <a:latin typeface="Courier"/>
-              </a:rPr>
-              <a:t>--model</a:t>
-            </a:r>
-            <a:r>
-              <a:rPr>
-                <a:latin typeface="Courier"/>
-              </a:rPr>
-              <a:t> ollama_chat/qwen2.5-coder:7b</a:t>
-            </a:r>
-          </a:p>
-          <a:p>
-            <a:pPr lvl="0" indent="0" marL="0">
-              <a:buNone/>
-            </a:pPr>
-            <a:r>
-              <a:rPr/>
-              <a:t>Note the prefix: </a:t>
-            </a:r>
-            <a:r>
-              <a:rPr b="1">
-                <a:latin typeface="Courier"/>
-              </a:rPr>
-              <a:t>ollama_chat/</a:t>
-            </a:r>
-            <a:r>
-              <a:rPr/>
-              <a:t>, not </a:t>
-            </a:r>
-            <a:r>
-              <a:rPr>
-                <a:latin typeface="Courier"/>
-              </a:rPr>
-              <a:t>ollama/</a:t>
-            </a:r>
-            <a:r>
-              <a:rPr/>
-              <a:t>. The second one exists and behaves worse.</a:t>
-            </a:r>
-          </a:p>
-          <a:p>
-            <a:pPr lvl="0" indent="0" marL="0">
-              <a:buNone/>
-            </a:pPr>
-            <a:r>
-              <a:rPr/>
-              <a:t>Now you are in a prompt. Ask in plain language:</a:t>
-            </a:r>
-          </a:p>
-          <a:p>
-            <a:pPr lvl="0" indent="0">
-              <a:buNone/>
-            </a:pPr>
-            <a:r>
-              <a:rPr>
-                <a:latin typeface="Courier"/>
-              </a:rPr>
-              <a:t>&gt; add a function that loads data/spine/core.parquet and
-  prints the number of rows per country</a:t>
-            </a:r>
-          </a:p>
-          <a:p>
-            <a:pPr lvl="0" indent="0" marL="0">
-              <a:buNone/>
-            </a:pPr>
-            <a:r>
-              <a:rPr/>
-              <a:t>aider writes the code, shows you a diff, and asks to apply it.</a:t>
+                <a:latin typeface="Courier"/>
+              </a:rPr>
+              <a:t>ollama pull nomic-embed-text</a:t>
+            </a:r>
+          </a:p>
+          <a:p>
+            <a:pPr lvl="0" indent="0" marL="0">
+              <a:buNone/>
+            </a:pPr>
+            <a:r>
+              <a:rPr/>
+              <a:t>This downloads several gigabytes. Do it on a good connection, </a:t>
+            </a:r>
+            <a:r>
+              <a:rPr b="1"/>
+              <a:t>not</a:t>
+            </a:r>
+            <a:r>
+              <a:rPr/>
+              <a:t> ten minutes before class.</a:t>
             </a:r>
           </a:p>
         </p:txBody>
@@ -6155,7 +6102,7 @@
             </a:pPr>
             <a:r>
               <a:rPr/>
-              <a:t>What aider does to your git history</a:t>
+              <a:t>Verify the model</a:t>
             </a:r>
           </a:p>
         </p:txBody>
@@ -6180,122 +6127,79 @@
             </a:pPr>
             <a:r>
               <a:rPr/>
-              <a:t>aider </a:t>
-            </a:r>
+              <a:t>VS Codium terminal</a:t>
+            </a:r>
+          </a:p>
+          <a:p>
+            <a:pPr lvl="0" indent="0">
+              <a:buNone/>
+            </a:pPr>
+            <a:r>
+              <a:rPr>
+                <a:latin typeface="Courier"/>
+              </a:rPr>
+              <a:t>ollama list</a:t>
+            </a:r>
+          </a:p>
+          <a:p>
+            <a:pPr lvl="0" indent="0" marL="0">
+              <a:buNone/>
+            </a:pPr>
+            <a:r>
+              <a:rPr/>
+              <a:t>You should see your model listed. Now talk to it:</a:t>
+            </a:r>
+          </a:p>
+          <a:p>
+            <a:pPr lvl="0" indent="0">
+              <a:buNone/>
+            </a:pPr>
+            <a:r>
+              <a:rPr>
+                <a:latin typeface="Courier"/>
+              </a:rPr>
+              <a:t>ollama run qwen2.5-coder:7b </a:t>
+            </a:r>
+            <a:r>
+              <a:rPr>
+                <a:solidFill>
+                  <a:srgbClr val="4070A0"/>
+                </a:solidFill>
+                <a:latin typeface="Courier"/>
+              </a:rPr>
+              <a:t>"Explain the bias-variance tradeoff in three sentences."</a:t>
+            </a:r>
+          </a:p>
+          <a:p>
+            <a:pPr lvl="0" indent="0" marL="0">
+              <a:buNone/>
+            </a:pPr>
+            <a:r>
+              <a:rPr/>
+              <a:t>Type </a:t>
+            </a:r>
+            <a:r>
+              <a:rPr>
+                <a:latin typeface="Courier"/>
+              </a:rPr>
+              <a:t>/bye</a:t>
+            </a:r>
+            <a:r>
+              <a:rPr/>
+              <a:t> to leave the chat.</a:t>
+            </a:r>
+          </a:p>
+          <a:p>
+            <a:pPr lvl="0" indent="0" marL="0">
+              <a:buNone/>
+            </a:pPr>
             <a:r>
               <a:rPr b="1"/>
-              <a:t>commits automatically</a:t>
-            </a:r>
-            <a:r>
-              <a:rPr/>
-              <a:t> after each change it applies.</a:t>
-            </a:r>
-          </a:p>
-          <a:p>
-            <a:pPr lvl="0" indent="0" marL="0">
-              <a:buNone/>
-            </a:pPr>
-            <a:r>
-              <a:rPr/>
-              <a:t>That is usually what you want — but this course counts commits as evidence of who did the work:</a:t>
-            </a:r>
-          </a:p>
-          <a:p>
-            <a:pPr lvl="0" indent="0">
-              <a:buNone/>
-            </a:pPr>
-            <a:r>
-              <a:rPr i="1">
-                <a:solidFill>
-                  <a:srgbClr val="60A0B0"/>
-                </a:solidFill>
-                <a:latin typeface="Courier"/>
-              </a:rPr>
-              <a:t># see what it did</a:t>
-            </a:r>
-            <a:br/>
-            <a:r>
-              <a:rPr>
-                <a:solidFill>
-                  <a:srgbClr val="06287E"/>
-                </a:solidFill>
-                <a:latin typeface="Courier"/>
-              </a:rPr>
-              <a:t>git</a:t>
-            </a:r>
-            <a:r>
-              <a:rPr>
-                <a:latin typeface="Courier"/>
-              </a:rPr>
-              <a:t> log </a:t>
-            </a:r>
-            <a:r>
-              <a:rPr>
-                <a:solidFill>
-                  <a:srgbClr val="7D9029"/>
-                </a:solidFill>
-                <a:latin typeface="Courier"/>
-              </a:rPr>
-              <a:t>--oneline</a:t>
-            </a:r>
-            <a:br/>
-            <a:br/>
-            <a:r>
-              <a:rPr i="1">
-                <a:solidFill>
-                  <a:srgbClr val="60A0B0"/>
-                </a:solidFill>
-                <a:latin typeface="Courier"/>
-              </a:rPr>
-              <a:t># turn auto-commit off if you'd rather commit yourself</a:t>
-            </a:r>
-            <a:br/>
-            <a:r>
-              <a:rPr>
-                <a:latin typeface="Courier"/>
-              </a:rPr>
-              <a:t>aider </a:t>
-            </a:r>
-            <a:r>
-              <a:rPr>
-                <a:solidFill>
-                  <a:srgbClr val="7D9029"/>
-                </a:solidFill>
-                <a:latin typeface="Courier"/>
-              </a:rPr>
-              <a:t>--model</a:t>
-            </a:r>
-            <a:r>
-              <a:rPr>
-                <a:latin typeface="Courier"/>
-              </a:rPr>
-              <a:t> ollama_chat/qwen2.5-coder:7b </a:t>
-            </a:r>
-            <a:r>
-              <a:rPr>
-                <a:solidFill>
-                  <a:srgbClr val="7D9029"/>
-                </a:solidFill>
-                <a:latin typeface="Courier"/>
-              </a:rPr>
-              <a:t>--no-auto-commits</a:t>
-            </a:r>
-          </a:p>
-          <a:p>
-            <a:pPr lvl="0" indent="0" marL="0">
-              <a:buNone/>
-            </a:pPr>
-            <a:r>
-              <a:rPr/>
-              <a:t>Commits made by the agent are attributed to </a:t>
-            </a:r>
-            <a:r>
-              <a:rPr b="1"/>
-              <a:t>you</a:t>
-            </a:r>
-            <a:r>
-              <a:rPr/>
-              <a:t>. That is correct — you directed it. But read the diff before you accept it: you are answerable for every line in your repository.</a:t>
+              <a:t>The real check.</a:t>
+            </a:r>
+            <a:r>
+              <a:rPr/>
+              <a:t> Turn off your wifi and run that command again. It should still answer. That is what “local” means.</a:t>
             </a:r>
           </a:p>
         </p:txBody>
@@ -6462,7 +6366,7 @@
             </a:pPr>
             <a:r>
               <a:rPr/>
-              <a:t>Step 6 — GitHub</a:t>
+              <a:t>Step 5 — The CLI agent</a:t>
             </a:r>
           </a:p>
         </p:txBody>
@@ -6509,7 +6413,7 @@
             </a:pPr>
             <a:r>
               <a:rPr/>
-              <a:t>Create your account</a:t>
+              <a:t>Talking to Qwen the way I talk to Claude</a:t>
             </a:r>
           </a:p>
         </p:txBody>
@@ -6529,90 +6433,55 @@
           <a:bodyPr/>
           <a:lstStyle/>
           <a:p>
-            <a:pPr lvl="0" indent="-342900" marL="342900">
-              <a:buAutoNum type="arabicPeriod"/>
-            </a:pPr>
-            <a:r>
-              <a:rPr/>
-              <a:t>Go to </a:t>
+            <a:pPr lvl="0" indent="0" marL="0">
+              <a:buNone/>
+            </a:pPr>
+            <a:r>
+              <a:rPr/>
+              <a:t>The Continue sidebar is useful for questions about a selected block of code.</a:t>
+            </a:r>
+          </a:p>
+          <a:p>
+            <a:pPr lvl="0" indent="0" marL="0">
+              <a:buNone/>
+            </a:pPr>
+            <a:r>
+              <a:rPr/>
+              <a:t>But the way this course actually works — and the way I work in front of you — is an </a:t>
             </a:r>
             <a:r>
               <a:rPr b="1"/>
-              <a:t>github.com</a:t>
-            </a:r>
-            <a:r>
-              <a:rPr/>
-              <a:t> and choose </a:t>
+              <a:t>agent in the terminal</a:t>
+            </a:r>
+            <a:r>
+              <a:rPr/>
+              <a:t>: something that reads your files, edits them, and commits, while you steer it in prose.</a:t>
+            </a:r>
+          </a:p>
+          <a:p>
+            <a:pPr lvl="0" indent="0" marL="0">
+              <a:buNone/>
+            </a:pPr>
+            <a:r>
+              <a:rPr/>
+              <a:t>That tool is </a:t>
             </a:r>
             <a:r>
               <a:rPr b="1"/>
-              <a:t>Sign up</a:t>
-            </a:r>
-            <a:r>
-              <a:rPr/>
-              <a:t>.</a:t>
-            </a:r>
-          </a:p>
-          <a:p>
-            <a:pPr lvl="0" indent="-342900" marL="342900">
-              <a:buAutoNum type="arabicPeriod"/>
-            </a:pPr>
-            <a:r>
-              <a:rPr/>
-              <a:t>Use an email you will still have after you graduate.</a:t>
-            </a:r>
-          </a:p>
-          <a:p>
-            <a:pPr lvl="0" indent="-342900" marL="342900">
-              <a:buAutoNum type="arabicPeriod"/>
-            </a:pPr>
-            <a:r>
-              <a:rPr/>
-              <a:t>Pick a username you would put on a CV — this is a professional record.</a:t>
-            </a:r>
-          </a:p>
-          <a:p>
-            <a:pPr lvl="0" indent="-342900" marL="342900">
-              <a:buAutoNum type="arabicPeriod"/>
-            </a:pPr>
-            <a:r>
-              <a:rPr/>
-              <a:t>Verify the email GitHub sends you.</a:t>
-            </a:r>
-          </a:p>
-          <a:p>
-            <a:pPr lvl="0" indent="-342900" marL="342900">
-              <a:buAutoNum type="arabicPeriod"/>
-            </a:pPr>
-            <a:r>
-              <a:rPr/>
-              <a:t>Enable </a:t>
-            </a:r>
-            <a:r>
-              <a:rPr b="1"/>
-              <a:t>two-factor authentication</a:t>
-            </a:r>
-            <a:r>
-              <a:rPr/>
-              <a:t> when prompted. GitHub requires it.</a:t>
-            </a:r>
-          </a:p>
-          <a:p>
-            <a:pPr lvl="0" indent="0" marL="0">
-              <a:buNone/>
-            </a:pPr>
-            <a:r>
-              <a:rPr/>
-              <a:t>[ github.com/signup — email, password, username, then a verification puzzle ]</a:t>
-            </a:r>
-          </a:p>
-          <a:p>
-            <a:pPr lvl="0" indent="0" marL="0">
-              <a:buNone/>
-            </a:pPr>
-            <a:r>
-              <a:rPr/>
-              <a:t>Free accounts include unlimited private repositories. You do not need a paid plan.</a:t>
+              <a:t>aider</a:t>
+            </a:r>
+            <a:r>
+              <a:rPr/>
+              <a:t>, and it runs against your local Qwen.</a:t>
+            </a:r>
+          </a:p>
+          <a:p>
+            <a:pPr lvl="0" indent="0" marL="0">
+              <a:buNone/>
+            </a:pPr>
+            <a:r>
+              <a:rPr/>
+              <a:t>Same shape as the workflow you have seen me use. Different engine, and it is running on your laptop.</a:t>
             </a:r>
           </a:p>
         </p:txBody>
@@ -6659,7 +6528,7 @@
             </a:pPr>
             <a:r>
               <a:rPr/>
-              <a:t>Tell git who you are</a:t>
+              <a:t>Install aider</a:t>
             </a:r>
           </a:p>
         </p:txBody>
@@ -6684,7 +6553,17 @@
             </a:pPr>
             <a:r>
               <a:rPr/>
-              <a:t>In the VS Codium terminal:</a:t>
+              <a:t>VS Codium terminal · with </a:t>
+            </a:r>
+            <a:r>
+              <a:rPr>
+                <a:latin typeface="Courier"/>
+              </a:rPr>
+              <a:t>(.venv)</a:t>
+            </a:r>
+            <a:r>
+              <a:rPr/>
+              <a:t> showing</a:t>
             </a:r>
           </a:p>
           <a:p>
@@ -6693,18 +6572,9 @@
             </a:pPr>
             <a:r>
               <a:rPr>
-                <a:solidFill>
-                  <a:srgbClr val="06287E"/>
-                </a:solidFill>
-                <a:latin typeface="Courier"/>
-              </a:rPr>
-              <a:t>git</a:t>
-            </a:r>
-            <a:r>
-              <a:rPr>
-                <a:latin typeface="Courier"/>
-              </a:rPr>
-              <a:t> </a:t>
+                <a:latin typeface="Courier"/>
+              </a:rPr>
+              <a:t>python </a:t>
             </a:r>
             <a:r>
               <a:rPr>
@@ -6713,154 +6583,20 @@
                 </a:solidFill>
                 <a:latin typeface="Courier"/>
               </a:rPr>
-              <a:t>--version</a:t>
-            </a:r>
-            <a:r>
-              <a:rPr>
-                <a:latin typeface="Courier"/>
-              </a:rPr>
-              <a:t>                       </a:t>
-            </a:r>
-            <a:r>
-              <a:rPr i="1">
-                <a:solidFill>
-                  <a:srgbClr val="60A0B0"/>
-                </a:solidFill>
-                <a:latin typeface="Courier"/>
-              </a:rPr>
-              <a:t># install from git-scm.com if missing</a:t>
+              <a:t>-m</a:t>
+            </a:r>
+            <a:r>
+              <a:rPr>
+                <a:latin typeface="Courier"/>
+              </a:rPr>
+              <a:t> pip install aider-install</a:t>
             </a:r>
             <a:br/>
             <a:r>
               <a:rPr>
-                <a:solidFill>
-                  <a:srgbClr val="06287E"/>
-                </a:solidFill>
-                <a:latin typeface="Courier"/>
-              </a:rPr>
-              <a:t>git</a:t>
-            </a:r>
-            <a:r>
-              <a:rPr>
-                <a:latin typeface="Courier"/>
-              </a:rPr>
-              <a:t> config </a:t>
-            </a:r>
-            <a:r>
-              <a:rPr>
-                <a:solidFill>
-                  <a:srgbClr val="7D9029"/>
-                </a:solidFill>
-                <a:latin typeface="Courier"/>
-              </a:rPr>
-              <a:t>--global</a:t>
-            </a:r>
-            <a:r>
-              <a:rPr>
-                <a:latin typeface="Courier"/>
-              </a:rPr>
-              <a:t> user.name  </a:t>
-            </a:r>
-            <a:r>
-              <a:rPr>
-                <a:solidFill>
-                  <a:srgbClr val="4070A0"/>
-                </a:solidFill>
-                <a:latin typeface="Courier"/>
-              </a:rPr>
-              <a:t>"Your Full Name"</a:t>
-            </a:r>
-            <a:br/>
-            <a:r>
-              <a:rPr>
-                <a:solidFill>
-                  <a:srgbClr val="06287E"/>
-                </a:solidFill>
-                <a:latin typeface="Courier"/>
-              </a:rPr>
-              <a:t>git</a:t>
-            </a:r>
-            <a:r>
-              <a:rPr>
-                <a:latin typeface="Courier"/>
-              </a:rPr>
-              <a:t> config </a:t>
-            </a:r>
-            <a:r>
-              <a:rPr>
-                <a:solidFill>
-                  <a:srgbClr val="7D9029"/>
-                </a:solidFill>
-                <a:latin typeface="Courier"/>
-              </a:rPr>
-              <a:t>--global</a:t>
-            </a:r>
-            <a:r>
-              <a:rPr>
-                <a:latin typeface="Courier"/>
-              </a:rPr>
-              <a:t> user.email </a:t>
-            </a:r>
-            <a:r>
-              <a:rPr>
-                <a:solidFill>
-                  <a:srgbClr val="4070A0"/>
-                </a:solidFill>
-                <a:latin typeface="Courier"/>
-              </a:rPr>
-              <a:t>"your.name@hec.ca"</a:t>
-            </a:r>
-          </a:p>
-          <a:p>
-            <a:pPr lvl="0" indent="0" marL="0">
-              <a:buNone/>
-            </a:pPr>
-            <a:r>
-              <a:rPr b="1"/>
-              <a:t>Use your real name and your university email.</a:t>
-            </a:r>
-            <a:r>
-              <a:rPr/>
-              <a:t> Your commit history is one of four records this course uses to check that all three group members did the work. Commits from </a:t>
-            </a:r>
-            <a:r>
-              <a:rPr>
-                <a:latin typeface="Courier"/>
-              </a:rPr>
-              <a:t>unknown@localhost</a:t>
-            </a:r>
-            <a:r>
-              <a:rPr/>
-              <a:t> cannot be attributed to you, and unattributed work counts as work you did not do.</a:t>
-            </a:r>
-          </a:p>
-          <a:p>
-            <a:pPr lvl="0" indent="0" marL="0">
-              <a:buNone/>
-            </a:pPr>
-            <a:r>
-              <a:rPr/>
-              <a:t>Report your exact </a:t>
-            </a:r>
-            <a:r>
-              <a:rPr>
-                <a:latin typeface="Courier"/>
-              </a:rPr>
-              <a:t>user.name</a:t>
-            </a:r>
-            <a:r>
-              <a:rPr/>
-              <a:t> and </a:t>
-            </a:r>
-            <a:r>
-              <a:rPr>
-                <a:latin typeface="Courier"/>
-              </a:rPr>
-              <a:t>user.email</a:t>
-            </a:r>
-            <a:r>
-              <a:rPr/>
-              <a:t> to me in Session 1.</a:t>
+                <a:latin typeface="Courier"/>
+              </a:rPr>
+              <a:t>aider-install</a:t>
             </a:r>
           </a:p>
         </p:txBody>
@@ -6871,6 +6607,1408 @@
 </file>
 
 <file path=ppt/slides/slide33.xml><?xml version="1.0" encoding="utf-8"?>
+<p:sld xmlns:a="http://schemas.openxmlformats.org/drawingml/2006/main" xmlns:r="http://schemas.openxmlformats.org/officeDocument/2006/relationships" xmlns:p="http://schemas.openxmlformats.org/presentationml/2006/main">
+  <p:cSld>
+    <p:spTree>
+      <p:nvGrpSpPr>
+        <p:cNvPr id="1" name=""/>
+        <p:cNvGrpSpPr/>
+        <p:nvPr/>
+      </p:nvGrpSpPr>
+      <p:grpSpPr>
+        <a:xfrm>
+          <a:off x="0" y="0"/>
+          <a:ext cx="0" cy="0"/>
+          <a:chOff x="0" y="0"/>
+          <a:chExt cx="0" cy="0"/>
+        </a:xfrm>
+      </p:grpSpPr>
+      <p:sp>
+        <p:nvSpPr>
+          <p:cNvPr id="2" name="Title 1"/>
+          <p:cNvSpPr>
+            <a:spLocks noGrp="1"/>
+          </p:cNvSpPr>
+          <p:nvPr>
+            <p:ph type="title"/>
+          </p:nvPr>
+        </p:nvSpPr>
+        <p:spPr/>
+        <p:txBody>
+          <a:bodyPr/>
+          <a:lstStyle/>
+          <a:p>
+            <a:pPr lvl="0" indent="0" marL="0">
+              <a:buNone/>
+            </a:pPr>
+            <a:r>
+              <a:rPr/>
+              <a:t>Point aider at Ollama</a:t>
+            </a:r>
+          </a:p>
+        </p:txBody>
+      </p:sp>
+      <p:sp>
+        <p:nvSpPr>
+          <p:cNvPr id="3" name="Content Placeholder 2"/>
+          <p:cNvSpPr>
+            <a:spLocks noGrp="1"/>
+          </p:cNvSpPr>
+          <p:nvPr>
+            <p:ph idx="1"/>
+          </p:nvPr>
+        </p:nvSpPr>
+        <p:spPr/>
+        <p:txBody>
+          <a:bodyPr/>
+          <a:lstStyle/>
+          <a:p>
+            <a:pPr lvl="0" indent="0" marL="0">
+              <a:buNone/>
+            </a:pPr>
+            <a:r>
+              <a:rPr/>
+              <a:t>VS Codium terminal</a:t>
+            </a:r>
+          </a:p>
+          <a:p>
+            <a:pPr lvl="0" indent="0">
+              <a:buNone/>
+            </a:pPr>
+            <a:r>
+              <a:rPr i="1">
+                <a:solidFill>
+                  <a:srgbClr val="60A0B0"/>
+                </a:solidFill>
+                <a:latin typeface="Courier"/>
+              </a:rPr>
+              <a:t># macOS / Linux</a:t>
+            </a:r>
+            <a:br/>
+            <a:r>
+              <a:rPr>
+                <a:solidFill>
+                  <a:srgbClr val="008000"/>
+                </a:solidFill>
+                <a:latin typeface="Courier"/>
+              </a:rPr>
+              <a:t>export</a:t>
+            </a:r>
+            <a:r>
+              <a:rPr>
+                <a:latin typeface="Courier"/>
+              </a:rPr>
+              <a:t> </a:t>
+            </a:r>
+            <a:r>
+              <a:rPr>
+                <a:solidFill>
+                  <a:srgbClr val="19177C"/>
+                </a:solidFill>
+                <a:latin typeface="Courier"/>
+              </a:rPr>
+              <a:t>OLLAMA_API_BASE</a:t>
+            </a:r>
+            <a:r>
+              <a:rPr>
+                <a:solidFill>
+                  <a:srgbClr val="666666"/>
+                </a:solidFill>
+                <a:latin typeface="Courier"/>
+              </a:rPr>
+              <a:t>=</a:t>
+            </a:r>
+            <a:r>
+              <a:rPr>
+                <a:latin typeface="Courier"/>
+              </a:rPr>
+              <a:t>http://127.0.0.1:11434</a:t>
+            </a:r>
+            <a:br/>
+            <a:br/>
+            <a:r>
+              <a:rPr i="1">
+                <a:solidFill>
+                  <a:srgbClr val="60A0B0"/>
+                </a:solidFill>
+                <a:latin typeface="Courier"/>
+              </a:rPr>
+              <a:t># Windows (PowerShell) — then open a new terminal</a:t>
+            </a:r>
+            <a:br/>
+            <a:r>
+              <a:rPr>
+                <a:latin typeface="Courier"/>
+              </a:rPr>
+              <a:t>setx OLLAMA_API_BASE http://127.0.0.1:11434</a:t>
+            </a:r>
+          </a:p>
+        </p:txBody>
+      </p:sp>
+    </p:spTree>
+  </p:cSld>
+</p:sld>
+</file>
+
+<file path=ppt/slides/slide34.xml><?xml version="1.0" encoding="utf-8"?>
+<p:sld xmlns:a="http://schemas.openxmlformats.org/drawingml/2006/main" xmlns:r="http://schemas.openxmlformats.org/officeDocument/2006/relationships" xmlns:p="http://schemas.openxmlformats.org/presentationml/2006/main">
+  <p:cSld>
+    <p:spTree>
+      <p:nvGrpSpPr>
+        <p:cNvPr id="1" name=""/>
+        <p:cNvGrpSpPr/>
+        <p:nvPr/>
+      </p:nvGrpSpPr>
+      <p:grpSpPr>
+        <a:xfrm>
+          <a:off x="0" y="0"/>
+          <a:ext cx="0" cy="0"/>
+          <a:chOff x="0" y="0"/>
+          <a:chExt cx="0" cy="0"/>
+        </a:xfrm>
+      </p:grpSpPr>
+      <p:sp>
+        <p:nvSpPr>
+          <p:cNvPr id="2" name="Title 1"/>
+          <p:cNvSpPr>
+            <a:spLocks noGrp="1"/>
+          </p:cNvSpPr>
+          <p:nvPr>
+            <p:ph type="title"/>
+          </p:nvPr>
+        </p:nvSpPr>
+        <p:spPr/>
+        <p:txBody>
+          <a:bodyPr/>
+          <a:lstStyle/>
+          <a:p>
+            <a:pPr lvl="0" indent="0" marL="0">
+              <a:buNone/>
+            </a:pPr>
+            <a:r>
+              <a:rPr/>
+              <a:t>Give Ollama a real context window</a:t>
+            </a:r>
+          </a:p>
+        </p:txBody>
+      </p:sp>
+      <p:sp>
+        <p:nvSpPr>
+          <p:cNvPr id="3" name="Content Placeholder 2"/>
+          <p:cNvSpPr>
+            <a:spLocks noGrp="1"/>
+          </p:cNvSpPr>
+          <p:nvPr>
+            <p:ph idx="1"/>
+          </p:nvPr>
+        </p:nvSpPr>
+        <p:spPr/>
+        <p:txBody>
+          <a:bodyPr/>
+          <a:lstStyle/>
+          <a:p>
+            <a:pPr lvl="0" indent="0" marL="0">
+              <a:buNone/>
+            </a:pPr>
+            <a:r>
+              <a:rPr b="1"/>
+              <a:t>This step is not optional.</a:t>
+            </a:r>
+            <a:r>
+              <a:rPr/>
+              <a:t> Ollama defaults to a </a:t>
+            </a:r>
+            <a:r>
+              <a:rPr b="1"/>
+              <a:t>2k</a:t>
+            </a:r>
+            <a:r>
+              <a:rPr/>
+              <a:t> context window and then </a:t>
+            </a:r>
+            <a:r>
+              <a:rPr i="1"/>
+              <a:t>silently discards</a:t>
+            </a:r>
+            <a:r>
+              <a:rPr/>
+              <a:t> whatever does not fit. Your agent will appear to “forget” the file you just gave it.</a:t>
+            </a:r>
+          </a:p>
+          <a:p>
+            <a:pPr lvl="0" indent="0" marL="0">
+              <a:buNone/>
+            </a:pPr>
+            <a:r>
+              <a:rPr/>
+              <a:t>Start the server with a larger window:</a:t>
+            </a:r>
+          </a:p>
+          <a:p>
+            <a:pPr lvl="0" indent="0" marL="0">
+              <a:buNone/>
+            </a:pPr>
+            <a:r>
+              <a:rPr/>
+              <a:t>VS Codium terminal 1</a:t>
+            </a:r>
+          </a:p>
+          <a:p>
+            <a:pPr lvl="0" indent="0">
+              <a:buNone/>
+            </a:pPr>
+            <a:r>
+              <a:rPr>
+                <a:solidFill>
+                  <a:srgbClr val="19177C"/>
+                </a:solidFill>
+                <a:latin typeface="Courier"/>
+              </a:rPr>
+              <a:t>OLLAMA_CONTEXT_LENGTH</a:t>
+            </a:r>
+            <a:r>
+              <a:rPr>
+                <a:solidFill>
+                  <a:srgbClr val="666666"/>
+                </a:solidFill>
+                <a:latin typeface="Courier"/>
+              </a:rPr>
+              <a:t>=</a:t>
+            </a:r>
+            <a:r>
+              <a:rPr>
+                <a:latin typeface="Courier"/>
+              </a:rPr>
+              <a:t>8192 ollama serve</a:t>
+            </a:r>
+          </a:p>
+          <a:p>
+            <a:pPr lvl="0" indent="0" marL="0">
+              <a:buNone/>
+            </a:pPr>
+            <a:r>
+              <a:rPr/>
+              <a:t>Leave that terminal running. Open a </a:t>
+            </a:r>
+            <a:r>
+              <a:rPr b="1"/>
+              <a:t>second</a:t>
+            </a:r>
+            <a:r>
+              <a:rPr/>
+              <a:t> terminal for aider.</a:t>
+            </a:r>
+          </a:p>
+          <a:p>
+            <a:pPr lvl="0" indent="0" marL="0">
+              <a:buNone/>
+            </a:pPr>
+            <a:r>
+              <a:rPr/>
+              <a:t>In VS Codium: the </a:t>
+            </a:r>
+            <a:r>
+              <a:rPr>
+                <a:latin typeface="Courier"/>
+              </a:rPr>
+              <a:t>+</a:t>
+            </a:r>
+            <a:r>
+              <a:rPr/>
+              <a:t> icon in the terminal panel splits off a new shell.</a:t>
+            </a:r>
+          </a:p>
+        </p:txBody>
+      </p:sp>
+    </p:spTree>
+  </p:cSld>
+</p:sld>
+</file>
+
+<file path=ppt/slides/slide35.xml><?xml version="1.0" encoding="utf-8"?>
+<p:sld xmlns:a="http://schemas.openxmlformats.org/drawingml/2006/main" xmlns:r="http://schemas.openxmlformats.org/officeDocument/2006/relationships" xmlns:p="http://schemas.openxmlformats.org/presentationml/2006/main">
+  <p:cSld>
+    <p:spTree>
+      <p:nvGrpSpPr>
+        <p:cNvPr id="1" name=""/>
+        <p:cNvGrpSpPr/>
+        <p:nvPr/>
+      </p:nvGrpSpPr>
+      <p:grpSpPr>
+        <a:xfrm>
+          <a:off x="0" y="0"/>
+          <a:ext cx="0" cy="0"/>
+          <a:chOff x="0" y="0"/>
+          <a:chExt cx="0" cy="0"/>
+        </a:xfrm>
+      </p:grpSpPr>
+      <p:sp>
+        <p:nvSpPr>
+          <p:cNvPr id="2" name="Title 1"/>
+          <p:cNvSpPr>
+            <a:spLocks noGrp="1"/>
+          </p:cNvSpPr>
+          <p:nvPr>
+            <p:ph type="title"/>
+          </p:nvPr>
+        </p:nvSpPr>
+        <p:spPr/>
+        <p:txBody>
+          <a:bodyPr/>
+          <a:lstStyle/>
+          <a:p>
+            <a:pPr lvl="0" indent="0" marL="0">
+              <a:buNone/>
+            </a:pPr>
+            <a:r>
+              <a:rPr/>
+              <a:t>Run the agent</a:t>
+            </a:r>
+          </a:p>
+        </p:txBody>
+      </p:sp>
+      <p:sp>
+        <p:nvSpPr>
+          <p:cNvPr id="3" name="Content Placeholder 2"/>
+          <p:cNvSpPr>
+            <a:spLocks noGrp="1"/>
+          </p:cNvSpPr>
+          <p:nvPr>
+            <p:ph idx="1"/>
+          </p:nvPr>
+        </p:nvSpPr>
+        <p:spPr/>
+        <p:txBody>
+          <a:bodyPr/>
+          <a:lstStyle/>
+          <a:p>
+            <a:pPr lvl="0" indent="0" marL="0">
+              <a:buNone/>
+            </a:pPr>
+            <a:r>
+              <a:rPr/>
+              <a:t>VS Codium terminal 2</a:t>
+            </a:r>
+          </a:p>
+          <a:p>
+            <a:pPr lvl="0" indent="0">
+              <a:buNone/>
+            </a:pPr>
+            <a:r>
+              <a:rPr>
+                <a:solidFill>
+                  <a:srgbClr val="008000"/>
+                </a:solidFill>
+                <a:latin typeface="Courier"/>
+              </a:rPr>
+              <a:t>cd</a:t>
+            </a:r>
+            <a:r>
+              <a:rPr>
+                <a:latin typeface="Courier"/>
+              </a:rPr>
+              <a:t> /path/to/your/repo</a:t>
+            </a:r>
+            <a:br/>
+            <a:r>
+              <a:rPr>
+                <a:latin typeface="Courier"/>
+              </a:rPr>
+              <a:t>aider </a:t>
+            </a:r>
+            <a:r>
+              <a:rPr>
+                <a:solidFill>
+                  <a:srgbClr val="7D9029"/>
+                </a:solidFill>
+                <a:latin typeface="Courier"/>
+              </a:rPr>
+              <a:t>--model</a:t>
+            </a:r>
+            <a:r>
+              <a:rPr>
+                <a:latin typeface="Courier"/>
+              </a:rPr>
+              <a:t> ollama_chat/qwen2.5-coder:7b</a:t>
+            </a:r>
+          </a:p>
+          <a:p>
+            <a:pPr lvl="0" indent="0" marL="0">
+              <a:buNone/>
+            </a:pPr>
+            <a:r>
+              <a:rPr/>
+              <a:t>Note the prefix: </a:t>
+            </a:r>
+            <a:r>
+              <a:rPr b="1">
+                <a:latin typeface="Courier"/>
+              </a:rPr>
+              <a:t>ollama_chat/</a:t>
+            </a:r>
+            <a:r>
+              <a:rPr/>
+              <a:t>, not </a:t>
+            </a:r>
+            <a:r>
+              <a:rPr>
+                <a:latin typeface="Courier"/>
+              </a:rPr>
+              <a:t>ollama/</a:t>
+            </a:r>
+            <a:r>
+              <a:rPr/>
+              <a:t>. The second one exists and behaves worse.</a:t>
+            </a:r>
+          </a:p>
+        </p:txBody>
+      </p:sp>
+    </p:spTree>
+  </p:cSld>
+</p:sld>
+</file>
+
+<file path=ppt/slides/slide36.xml><?xml version="1.0" encoding="utf-8"?>
+<p:sld xmlns:a="http://schemas.openxmlformats.org/drawingml/2006/main" xmlns:r="http://schemas.openxmlformats.org/officeDocument/2006/relationships" xmlns:p="http://schemas.openxmlformats.org/presentationml/2006/main">
+  <p:cSld>
+    <p:spTree>
+      <p:nvGrpSpPr>
+        <p:cNvPr id="1" name=""/>
+        <p:cNvGrpSpPr/>
+        <p:nvPr/>
+      </p:nvGrpSpPr>
+      <p:grpSpPr>
+        <a:xfrm>
+          <a:off x="0" y="0"/>
+          <a:ext cx="0" cy="0"/>
+          <a:chOff x="0" y="0"/>
+          <a:chExt cx="0" cy="0"/>
+        </a:xfrm>
+      </p:grpSpPr>
+      <p:sp>
+        <p:nvSpPr>
+          <p:cNvPr id="2" name="Title 1"/>
+          <p:cNvSpPr>
+            <a:spLocks noGrp="1"/>
+          </p:cNvSpPr>
+          <p:nvPr>
+            <p:ph type="title"/>
+          </p:nvPr>
+        </p:nvSpPr>
+        <p:spPr/>
+        <p:txBody>
+          <a:bodyPr/>
+          <a:lstStyle/>
+          <a:p>
+            <a:pPr lvl="0" indent="0" marL="0">
+              <a:buNone/>
+            </a:pPr>
+            <a:r>
+              <a:rPr/>
+              <a:t>Ask it for something</a:t>
+            </a:r>
+          </a:p>
+        </p:txBody>
+      </p:sp>
+      <p:sp>
+        <p:nvSpPr>
+          <p:cNvPr id="3" name="Content Placeholder 2"/>
+          <p:cNvSpPr>
+            <a:spLocks noGrp="1"/>
+          </p:cNvSpPr>
+          <p:nvPr>
+            <p:ph idx="1"/>
+          </p:nvPr>
+        </p:nvSpPr>
+        <p:spPr/>
+        <p:txBody>
+          <a:bodyPr/>
+          <a:lstStyle/>
+          <a:p>
+            <a:pPr lvl="0" indent="0" marL="0">
+              <a:buNone/>
+            </a:pPr>
+            <a:r>
+              <a:rPr/>
+              <a:t>You are now at a prompt. Ask in plain language:</a:t>
+            </a:r>
+          </a:p>
+          <a:p>
+            <a:pPr lvl="0" indent="0">
+              <a:buNone/>
+            </a:pPr>
+            <a:r>
+              <a:rPr>
+                <a:latin typeface="Courier"/>
+              </a:rPr>
+              <a:t>&gt; add a function that loads data/spine/core.parquet
+  and prints the number of rows per country</a:t>
+            </a:r>
+          </a:p>
+          <a:p>
+            <a:pPr lvl="0" indent="0" marL="0">
+              <a:buNone/>
+            </a:pPr>
+            <a:r>
+              <a:rPr/>
+              <a:t>aider writes the code, shows you a </a:t>
+            </a:r>
+            <a:r>
+              <a:rPr b="1"/>
+              <a:t>diff</a:t>
+            </a:r>
+            <a:r>
+              <a:rPr/>
+              <a:t>, and asks to apply it.</a:t>
+            </a:r>
+          </a:p>
+          <a:p>
+            <a:pPr lvl="0" indent="0" marL="0">
+              <a:buNone/>
+            </a:pPr>
+            <a:r>
+              <a:rPr/>
+              <a:t>Read the diff before you accept. That habit is the whole skill.</a:t>
+            </a:r>
+          </a:p>
+        </p:txBody>
+      </p:sp>
+    </p:spTree>
+  </p:cSld>
+</p:sld>
+</file>
+
+<file path=ppt/slides/slide37.xml><?xml version="1.0" encoding="utf-8"?>
+<p:sld xmlns:a="http://schemas.openxmlformats.org/drawingml/2006/main" xmlns:r="http://schemas.openxmlformats.org/officeDocument/2006/relationships" xmlns:p="http://schemas.openxmlformats.org/presentationml/2006/main">
+  <p:cSld>
+    <p:spTree>
+      <p:nvGrpSpPr>
+        <p:cNvPr id="1" name=""/>
+        <p:cNvGrpSpPr/>
+        <p:nvPr/>
+      </p:nvGrpSpPr>
+      <p:grpSpPr>
+        <a:xfrm>
+          <a:off x="0" y="0"/>
+          <a:ext cx="0" cy="0"/>
+          <a:chOff x="0" y="0"/>
+          <a:chExt cx="0" cy="0"/>
+        </a:xfrm>
+      </p:grpSpPr>
+      <p:sp>
+        <p:nvSpPr>
+          <p:cNvPr id="2" name="Title 1"/>
+          <p:cNvSpPr>
+            <a:spLocks noGrp="1"/>
+          </p:cNvSpPr>
+          <p:nvPr>
+            <p:ph type="title"/>
+          </p:nvPr>
+        </p:nvSpPr>
+        <p:spPr/>
+        <p:txBody>
+          <a:bodyPr/>
+          <a:lstStyle/>
+          <a:p>
+            <a:pPr lvl="0" indent="0" marL="0">
+              <a:buNone/>
+            </a:pPr>
+            <a:r>
+              <a:rPr/>
+              <a:t>What aider does to your git history</a:t>
+            </a:r>
+          </a:p>
+        </p:txBody>
+      </p:sp>
+      <p:sp>
+        <p:nvSpPr>
+          <p:cNvPr id="3" name="Content Placeholder 2"/>
+          <p:cNvSpPr>
+            <a:spLocks noGrp="1"/>
+          </p:cNvSpPr>
+          <p:nvPr>
+            <p:ph idx="1"/>
+          </p:nvPr>
+        </p:nvSpPr>
+        <p:spPr/>
+        <p:txBody>
+          <a:bodyPr/>
+          <a:lstStyle/>
+          <a:p>
+            <a:pPr lvl="0" indent="0" marL="0">
+              <a:buNone/>
+            </a:pPr>
+            <a:r>
+              <a:rPr/>
+              <a:t>aider </a:t>
+            </a:r>
+            <a:r>
+              <a:rPr b="1"/>
+              <a:t>commits automatically</a:t>
+            </a:r>
+            <a:r>
+              <a:rPr/>
+              <a:t> after each change it applies.</a:t>
+            </a:r>
+          </a:p>
+          <a:p>
+            <a:pPr lvl="0" indent="0" marL="0">
+              <a:buNone/>
+            </a:pPr>
+            <a:r>
+              <a:rPr/>
+              <a:t>That is usually what you want — but this course counts commits as evidence of who did the work:</a:t>
+            </a:r>
+          </a:p>
+          <a:p>
+            <a:pPr lvl="0" indent="0">
+              <a:buNone/>
+            </a:pPr>
+            <a:r>
+              <a:rPr i="1">
+                <a:solidFill>
+                  <a:srgbClr val="60A0B0"/>
+                </a:solidFill>
+                <a:latin typeface="Courier"/>
+              </a:rPr>
+              <a:t># see what it did</a:t>
+            </a:r>
+            <a:br/>
+            <a:r>
+              <a:rPr>
+                <a:solidFill>
+                  <a:srgbClr val="06287E"/>
+                </a:solidFill>
+                <a:latin typeface="Courier"/>
+              </a:rPr>
+              <a:t>git</a:t>
+            </a:r>
+            <a:r>
+              <a:rPr>
+                <a:latin typeface="Courier"/>
+              </a:rPr>
+              <a:t> log </a:t>
+            </a:r>
+            <a:r>
+              <a:rPr>
+                <a:solidFill>
+                  <a:srgbClr val="7D9029"/>
+                </a:solidFill>
+                <a:latin typeface="Courier"/>
+              </a:rPr>
+              <a:t>--oneline</a:t>
+            </a:r>
+            <a:br/>
+            <a:br/>
+            <a:r>
+              <a:rPr i="1">
+                <a:solidFill>
+                  <a:srgbClr val="60A0B0"/>
+                </a:solidFill>
+                <a:latin typeface="Courier"/>
+              </a:rPr>
+              <a:t># turn auto-commit off if you'd rather commit yourself</a:t>
+            </a:r>
+            <a:br/>
+            <a:r>
+              <a:rPr>
+                <a:latin typeface="Courier"/>
+              </a:rPr>
+              <a:t>aider </a:t>
+            </a:r>
+            <a:r>
+              <a:rPr>
+                <a:solidFill>
+                  <a:srgbClr val="7D9029"/>
+                </a:solidFill>
+                <a:latin typeface="Courier"/>
+              </a:rPr>
+              <a:t>--model</a:t>
+            </a:r>
+            <a:r>
+              <a:rPr>
+                <a:latin typeface="Courier"/>
+              </a:rPr>
+              <a:t> ollama_chat/qwen2.5-coder:7b </a:t>
+            </a:r>
+            <a:r>
+              <a:rPr>
+                <a:solidFill>
+                  <a:srgbClr val="7D9029"/>
+                </a:solidFill>
+                <a:latin typeface="Courier"/>
+              </a:rPr>
+              <a:t>--no-auto-commits</a:t>
+            </a:r>
+          </a:p>
+          <a:p>
+            <a:pPr lvl="0" indent="0" marL="0">
+              <a:buNone/>
+            </a:pPr>
+            <a:r>
+              <a:rPr/>
+              <a:t>Commits made by the agent are attributed to </a:t>
+            </a:r>
+            <a:r>
+              <a:rPr b="1"/>
+              <a:t>you</a:t>
+            </a:r>
+            <a:r>
+              <a:rPr/>
+              <a:t>. That is correct — you directed it. But read the diff before you accept it: you are answerable for every line in your repository.</a:t>
+            </a:r>
+          </a:p>
+        </p:txBody>
+      </p:sp>
+    </p:spTree>
+  </p:cSld>
+</p:sld>
+</file>
+
+<file path=ppt/slides/slide38.xml><?xml version="1.0" encoding="utf-8"?>
+<p:sld xmlns:a="http://schemas.openxmlformats.org/drawingml/2006/main" xmlns:r="http://schemas.openxmlformats.org/officeDocument/2006/relationships" xmlns:p="http://schemas.openxmlformats.org/presentationml/2006/main">
+  <p:cSld>
+    <p:spTree>
+      <p:nvGrpSpPr>
+        <p:cNvPr id="1" name=""/>
+        <p:cNvGrpSpPr/>
+        <p:nvPr/>
+      </p:nvGrpSpPr>
+      <p:grpSpPr>
+        <a:xfrm>
+          <a:off x="0" y="0"/>
+          <a:ext cx="0" cy="0"/>
+          <a:chOff x="0" y="0"/>
+          <a:chExt cx="0" cy="0"/>
+        </a:xfrm>
+      </p:grpSpPr>
+      <p:sp>
+        <p:nvSpPr>
+          <p:cNvPr id="2" name="Title 1"/>
+          <p:cNvSpPr>
+            <a:spLocks noGrp="1"/>
+          </p:cNvSpPr>
+          <p:nvPr>
+            <p:ph type="title"/>
+          </p:nvPr>
+        </p:nvSpPr>
+        <p:spPr>
+          <a:xfrm>
+            <a:off x="722313" y="3305176"/>
+            <a:ext cx="7772400" cy="1021556"/>
+          </a:xfrm>
+        </p:spPr>
+        <p:txBody>
+          <a:bodyPr/>
+          <a:lstStyle/>
+          <a:p>
+            <a:pPr lvl="0" indent="0" marL="0">
+              <a:buNone/>
+            </a:pPr>
+            <a:r>
+              <a:rPr/>
+              <a:t>Step 6 — GitHub</a:t>
+            </a:r>
+          </a:p>
+        </p:txBody>
+      </p:sp>
+    </p:spTree>
+  </p:cSld>
+</p:sld>
+</file>
+
+<file path=ppt/slides/slide39.xml><?xml version="1.0" encoding="utf-8"?>
+<p:sld xmlns:a="http://schemas.openxmlformats.org/drawingml/2006/main" xmlns:r="http://schemas.openxmlformats.org/officeDocument/2006/relationships" xmlns:p="http://schemas.openxmlformats.org/presentationml/2006/main">
+  <p:cSld>
+    <p:spTree>
+      <p:nvGrpSpPr>
+        <p:cNvPr id="1" name=""/>
+        <p:cNvGrpSpPr/>
+        <p:nvPr/>
+      </p:nvGrpSpPr>
+      <p:grpSpPr>
+        <a:xfrm>
+          <a:off x="0" y="0"/>
+          <a:ext cx="0" cy="0"/>
+          <a:chOff x="0" y="0"/>
+          <a:chExt cx="0" cy="0"/>
+        </a:xfrm>
+      </p:grpSpPr>
+      <p:sp>
+        <p:nvSpPr>
+          <p:cNvPr id="2" name="Title 1"/>
+          <p:cNvSpPr>
+            <a:spLocks noGrp="1"/>
+          </p:cNvSpPr>
+          <p:nvPr>
+            <p:ph type="title"/>
+          </p:nvPr>
+        </p:nvSpPr>
+        <p:spPr/>
+        <p:txBody>
+          <a:bodyPr/>
+          <a:lstStyle/>
+          <a:p>
+            <a:pPr lvl="0" indent="0" marL="0">
+              <a:buNone/>
+            </a:pPr>
+            <a:r>
+              <a:rPr/>
+              <a:t>Create your account</a:t>
+            </a:r>
+          </a:p>
+        </p:txBody>
+      </p:sp>
+      <p:sp>
+        <p:nvSpPr>
+          <p:cNvPr id="3" name="Content Placeholder 2"/>
+          <p:cNvSpPr>
+            <a:spLocks noGrp="1"/>
+          </p:cNvSpPr>
+          <p:nvPr>
+            <p:ph idx="1"/>
+          </p:nvPr>
+        </p:nvSpPr>
+        <p:spPr/>
+        <p:txBody>
+          <a:bodyPr/>
+          <a:lstStyle/>
+          <a:p>
+            <a:pPr lvl="0" indent="-342900" marL="342900">
+              <a:buAutoNum type="arabicPeriod"/>
+            </a:pPr>
+            <a:r>
+              <a:rPr/>
+              <a:t>Go to </a:t>
+            </a:r>
+            <a:r>
+              <a:rPr b="1"/>
+              <a:t>github.com</a:t>
+            </a:r>
+            <a:r>
+              <a:rPr/>
+              <a:t> and choose </a:t>
+            </a:r>
+            <a:r>
+              <a:rPr b="1"/>
+              <a:t>Sign up</a:t>
+            </a:r>
+            <a:r>
+              <a:rPr/>
+              <a:t>.</a:t>
+            </a:r>
+          </a:p>
+          <a:p>
+            <a:pPr lvl="0" indent="-342900" marL="342900">
+              <a:buAutoNum type="arabicPeriod"/>
+            </a:pPr>
+            <a:r>
+              <a:rPr/>
+              <a:t>Use an email you will still have after you graduate.</a:t>
+            </a:r>
+          </a:p>
+          <a:p>
+            <a:pPr lvl="0" indent="-342900" marL="342900">
+              <a:buAutoNum type="arabicPeriod"/>
+            </a:pPr>
+            <a:r>
+              <a:rPr/>
+              <a:t>Pick a username you would put on a CV — this is a professional record.</a:t>
+            </a:r>
+          </a:p>
+          <a:p>
+            <a:pPr lvl="0" indent="-342900" marL="342900">
+              <a:buAutoNum type="arabicPeriod"/>
+            </a:pPr>
+            <a:r>
+              <a:rPr/>
+              <a:t>Verify the email GitHub sends you.</a:t>
+            </a:r>
+          </a:p>
+          <a:p>
+            <a:pPr lvl="0" indent="-342900" marL="342900">
+              <a:buAutoNum type="arabicPeriod"/>
+            </a:pPr>
+            <a:r>
+              <a:rPr/>
+              <a:t>Enable </a:t>
+            </a:r>
+            <a:r>
+              <a:rPr b="1"/>
+              <a:t>two-factor authentication</a:t>
+            </a:r>
+            <a:r>
+              <a:rPr/>
+              <a:t> when prompted. GitHub requires it.</a:t>
+            </a:r>
+          </a:p>
+          <a:p>
+            <a:pPr lvl="0" indent="0" marL="0">
+              <a:buNone/>
+            </a:pPr>
+            <a:r>
+              <a:rPr/>
+              <a:t>[ github.com/signup — email, password, username, then a verification puzzle ]</a:t>
+            </a:r>
+          </a:p>
+          <a:p>
+            <a:pPr lvl="0" indent="0" marL="0">
+              <a:buNone/>
+            </a:pPr>
+            <a:r>
+              <a:rPr/>
+              <a:t>Free accounts include unlimited private repositories. You do not need a paid plan.</a:t>
+            </a:r>
+          </a:p>
+        </p:txBody>
+      </p:sp>
+    </p:spTree>
+  </p:cSld>
+</p:sld>
+</file>
+
+<file path=ppt/slides/slide4.xml><?xml version="1.0" encoding="utf-8"?>
+<p:sld xmlns:a="http://schemas.openxmlformats.org/drawingml/2006/main" xmlns:r="http://schemas.openxmlformats.org/officeDocument/2006/relationships" xmlns:p="http://schemas.openxmlformats.org/presentationml/2006/main">
+  <p:cSld>
+    <p:spTree>
+      <p:nvGrpSpPr>
+        <p:cNvPr id="1" name=""/>
+        <p:cNvGrpSpPr/>
+        <p:nvPr/>
+      </p:nvGrpSpPr>
+      <p:grpSpPr>
+        <a:xfrm>
+          <a:off x="0" y="0"/>
+          <a:ext cx="0" cy="0"/>
+          <a:chOff x="0" y="0"/>
+          <a:chExt cx="0" cy="0"/>
+        </a:xfrm>
+      </p:grpSpPr>
+      <p:sp>
+        <p:nvSpPr>
+          <p:cNvPr id="2" name="Title 1"/>
+          <p:cNvSpPr>
+            <a:spLocks noGrp="1"/>
+          </p:cNvSpPr>
+          <p:nvPr>
+            <p:ph type="title"/>
+          </p:nvPr>
+        </p:nvSpPr>
+        <p:spPr/>
+        <p:txBody>
+          <a:bodyPr/>
+          <a:lstStyle/>
+          <a:p>
+            <a:pPr lvl="0" indent="0" marL="0">
+              <a:buNone/>
+            </a:pPr>
+            <a:r>
+              <a:rPr/>
+              <a:t>Three distinctions we will not let go of</a:t>
+            </a:r>
+          </a:p>
+        </p:txBody>
+      </p:sp>
+      <p:sp>
+        <p:nvSpPr>
+          <p:cNvPr id="3" name="Content Placeholder 2"/>
+          <p:cNvSpPr>
+            <a:spLocks noGrp="1"/>
+          </p:cNvSpPr>
+          <p:nvPr>
+            <p:ph idx="1"/>
+          </p:nvPr>
+        </p:nvSpPr>
+        <p:spPr/>
+        <p:txBody>
+          <a:bodyPr/>
+          <a:lstStyle/>
+          <a:p>
+            <a:pPr lvl="0" indent="-342900" marL="342900">
+              <a:buAutoNum type="arabicPeriod"/>
+            </a:pPr>
+            <a:r>
+              <a:rPr b="1"/>
+              <a:t>A scenario is not a forecast.</a:t>
+            </a:r>
+            <a:r>
+              <a:rPr/>
+              <a:t> </a:t>
+            </a:r>
+            <a:r>
+              <a:rPr i="1"/>
+              <a:t>Europe 2031</a:t>
+            </a:r>
+            <a:r>
+              <a:rPr/>
+              <a:t> is a conditional narrative — a stress test, not a prediction. You will read it as a set of assumptions you can measure.</a:t>
+            </a:r>
+          </a:p>
+          <a:p>
+            <a:pPr lvl="0" indent="-342900" marL="342900">
+              <a:buAutoNum type="arabicPeriod"/>
+            </a:pPr>
+            <a:r>
+              <a:rPr b="1"/>
+              <a:t>Prediction is not inference.</a:t>
+            </a:r>
+            <a:r>
+              <a:rPr/>
+              <a:t> “How well does this predict?” and “what is the effect of X?” are different questions, answered by different estimators, with different guarantees.</a:t>
+            </a:r>
+          </a:p>
+          <a:p>
+            <a:pPr lvl="0" indent="-342900" marL="342900">
+              <a:buAutoNum type="arabicPeriod"/>
+            </a:pPr>
+            <a:r>
+              <a:rPr b="1"/>
+              <a:t>A construct is not a measurement.</a:t>
+            </a:r>
+            <a:r>
+              <a:rPr/>
+              <a:t> An “AI exposure index” is something we built. Session 09 is about being honest about that.</a:t>
+            </a:r>
+          </a:p>
+        </p:txBody>
+      </p:sp>
+    </p:spTree>
+  </p:cSld>
+</p:sld>
+</file>
+
+<file path=ppt/slides/slide40.xml><?xml version="1.0" encoding="utf-8"?>
+<p:sld xmlns:a="http://schemas.openxmlformats.org/drawingml/2006/main" xmlns:r="http://schemas.openxmlformats.org/officeDocument/2006/relationships" xmlns:p="http://schemas.openxmlformats.org/presentationml/2006/main">
+  <p:cSld>
+    <p:spTree>
+      <p:nvGrpSpPr>
+        <p:cNvPr id="1" name=""/>
+        <p:cNvGrpSpPr/>
+        <p:nvPr/>
+      </p:nvGrpSpPr>
+      <p:grpSpPr>
+        <a:xfrm>
+          <a:off x="0" y="0"/>
+          <a:ext cx="0" cy="0"/>
+          <a:chOff x="0" y="0"/>
+          <a:chExt cx="0" cy="0"/>
+        </a:xfrm>
+      </p:grpSpPr>
+      <p:sp>
+        <p:nvSpPr>
+          <p:cNvPr id="2" name="Title 1"/>
+          <p:cNvSpPr>
+            <a:spLocks noGrp="1"/>
+          </p:cNvSpPr>
+          <p:nvPr>
+            <p:ph type="title"/>
+          </p:nvPr>
+        </p:nvSpPr>
+        <p:spPr/>
+        <p:txBody>
+          <a:bodyPr/>
+          <a:lstStyle/>
+          <a:p>
+            <a:pPr lvl="0" indent="0" marL="0">
+              <a:buNone/>
+            </a:pPr>
+            <a:r>
+              <a:rPr/>
+              <a:t>Install Git</a:t>
+            </a:r>
+          </a:p>
+        </p:txBody>
+      </p:sp>
+      <p:sp>
+        <p:nvSpPr>
+          <p:cNvPr id="3" name="Content Placeholder 2"/>
+          <p:cNvSpPr>
+            <a:spLocks noGrp="1"/>
+          </p:cNvSpPr>
+          <p:nvPr>
+            <p:ph idx="1"/>
+          </p:nvPr>
+        </p:nvSpPr>
+        <p:spPr/>
+        <p:txBody>
+          <a:bodyPr/>
+          <a:lstStyle/>
+          <a:p>
+            <a:pPr lvl="0" indent="0" marL="0">
+              <a:buNone/>
+            </a:pPr>
+            <a:r>
+              <a:rPr/>
+              <a:t>download</a:t>
+            </a:r>
+          </a:p>
+          <a:p>
+            <a:pPr lvl="0" indent="0" marL="0">
+              <a:buNone/>
+            </a:pPr>
+            <a:r>
+              <a:rPr/>
+              <a:t>Go to </a:t>
+            </a:r>
+            <a:r>
+              <a:rPr b="1"/>
+              <a:t>git-scm.com/downloads</a:t>
+            </a:r>
+            <a:r>
+              <a:rPr/>
+              <a:t> and run the installer for your system. Accept every default.</a:t>
+            </a:r>
+          </a:p>
+          <a:p>
+            <a:pPr lvl="0" indent="0" marL="0">
+              <a:buNone/>
+            </a:pPr>
+            <a:r>
+              <a:rPr/>
+              <a:t>macOS may already have it. Check first — the next slide tells you how.</a:t>
+            </a:r>
+          </a:p>
+        </p:txBody>
+      </p:sp>
+    </p:spTree>
+  </p:cSld>
+</p:sld>
+</file>
+
+<file path=ppt/slides/slide41.xml><?xml version="1.0" encoding="utf-8"?>
+<p:sld xmlns:a="http://schemas.openxmlformats.org/drawingml/2006/main" xmlns:r="http://schemas.openxmlformats.org/officeDocument/2006/relationships" xmlns:p="http://schemas.openxmlformats.org/presentationml/2006/main">
+  <p:cSld>
+    <p:spTree>
+      <p:nvGrpSpPr>
+        <p:cNvPr id="1" name=""/>
+        <p:cNvGrpSpPr/>
+        <p:nvPr/>
+      </p:nvGrpSpPr>
+      <p:grpSpPr>
+        <a:xfrm>
+          <a:off x="0" y="0"/>
+          <a:ext cx="0" cy="0"/>
+          <a:chOff x="0" y="0"/>
+          <a:chExt cx="0" cy="0"/>
+        </a:xfrm>
+      </p:grpSpPr>
+      <p:sp>
+        <p:nvSpPr>
+          <p:cNvPr id="2" name="Title 1"/>
+          <p:cNvSpPr>
+            <a:spLocks noGrp="1"/>
+          </p:cNvSpPr>
+          <p:nvPr>
+            <p:ph type="title"/>
+          </p:nvPr>
+        </p:nvSpPr>
+        <p:spPr/>
+        <p:txBody>
+          <a:bodyPr/>
+          <a:lstStyle/>
+          <a:p>
+            <a:pPr lvl="0" indent="0" marL="0">
+              <a:buNone/>
+            </a:pPr>
+            <a:r>
+              <a:rPr/>
+              <a:t>Tell git who you are</a:t>
+            </a:r>
+          </a:p>
+        </p:txBody>
+      </p:sp>
+      <p:sp>
+        <p:nvSpPr>
+          <p:cNvPr id="3" name="Content Placeholder 2"/>
+          <p:cNvSpPr>
+            <a:spLocks noGrp="1"/>
+          </p:cNvSpPr>
+          <p:nvPr>
+            <p:ph idx="1"/>
+          </p:nvPr>
+        </p:nvSpPr>
+        <p:spPr/>
+        <p:txBody>
+          <a:bodyPr/>
+          <a:lstStyle/>
+          <a:p>
+            <a:pPr lvl="0" indent="0" marL="0">
+              <a:buNone/>
+            </a:pPr>
+            <a:r>
+              <a:rPr/>
+              <a:t>VS Codium terminal</a:t>
+            </a:r>
+          </a:p>
+          <a:p>
+            <a:pPr lvl="0" indent="0">
+              <a:buNone/>
+            </a:pPr>
+            <a:r>
+              <a:rPr>
+                <a:solidFill>
+                  <a:srgbClr val="06287E"/>
+                </a:solidFill>
+                <a:latin typeface="Courier"/>
+              </a:rPr>
+              <a:t>git</a:t>
+            </a:r>
+            <a:r>
+              <a:rPr>
+                <a:latin typeface="Courier"/>
+              </a:rPr>
+              <a:t> </a:t>
+            </a:r>
+            <a:r>
+              <a:rPr>
+                <a:solidFill>
+                  <a:srgbClr val="7D9029"/>
+                </a:solidFill>
+                <a:latin typeface="Courier"/>
+              </a:rPr>
+              <a:t>--version</a:t>
+            </a:r>
+            <a:br/>
+            <a:r>
+              <a:rPr>
+                <a:solidFill>
+                  <a:srgbClr val="06287E"/>
+                </a:solidFill>
+                <a:latin typeface="Courier"/>
+              </a:rPr>
+              <a:t>git</a:t>
+            </a:r>
+            <a:r>
+              <a:rPr>
+                <a:latin typeface="Courier"/>
+              </a:rPr>
+              <a:t> config </a:t>
+            </a:r>
+            <a:r>
+              <a:rPr>
+                <a:solidFill>
+                  <a:srgbClr val="7D9029"/>
+                </a:solidFill>
+                <a:latin typeface="Courier"/>
+              </a:rPr>
+              <a:t>--global</a:t>
+            </a:r>
+            <a:r>
+              <a:rPr>
+                <a:latin typeface="Courier"/>
+              </a:rPr>
+              <a:t> user.name  </a:t>
+            </a:r>
+            <a:r>
+              <a:rPr>
+                <a:solidFill>
+                  <a:srgbClr val="4070A0"/>
+                </a:solidFill>
+                <a:latin typeface="Courier"/>
+              </a:rPr>
+              <a:t>"Your Full Name"</a:t>
+            </a:r>
+            <a:br/>
+            <a:r>
+              <a:rPr>
+                <a:solidFill>
+                  <a:srgbClr val="06287E"/>
+                </a:solidFill>
+                <a:latin typeface="Courier"/>
+              </a:rPr>
+              <a:t>git</a:t>
+            </a:r>
+            <a:r>
+              <a:rPr>
+                <a:latin typeface="Courier"/>
+              </a:rPr>
+              <a:t> config </a:t>
+            </a:r>
+            <a:r>
+              <a:rPr>
+                <a:solidFill>
+                  <a:srgbClr val="7D9029"/>
+                </a:solidFill>
+                <a:latin typeface="Courier"/>
+              </a:rPr>
+              <a:t>--global</a:t>
+            </a:r>
+            <a:r>
+              <a:rPr>
+                <a:latin typeface="Courier"/>
+              </a:rPr>
+              <a:t> user.email </a:t>
+            </a:r>
+            <a:r>
+              <a:rPr>
+                <a:solidFill>
+                  <a:srgbClr val="4070A0"/>
+                </a:solidFill>
+                <a:latin typeface="Courier"/>
+              </a:rPr>
+              <a:t>"your.name@hec.ca"</a:t>
+            </a:r>
+          </a:p>
+          <a:p>
+            <a:pPr lvl="0" indent="0" marL="0">
+              <a:buNone/>
+            </a:pPr>
+            <a:r>
+              <a:rPr b="1"/>
+              <a:t>Use your real name and your university email.</a:t>
+            </a:r>
+            <a:r>
+              <a:rPr/>
+              <a:t> Your commit history is one of four records this course uses to check that all three group members did the work. Commits from </a:t>
+            </a:r>
+            <a:r>
+              <a:rPr>
+                <a:latin typeface="Courier"/>
+              </a:rPr>
+              <a:t>unknown@localhost</a:t>
+            </a:r>
+            <a:r>
+              <a:rPr/>
+              <a:t> cannot be attributed to you, and unattributed work counts as work you did not do.</a:t>
+            </a:r>
+          </a:p>
+          <a:p>
+            <a:pPr lvl="0" indent="0" marL="0">
+              <a:buNone/>
+            </a:pPr>
+            <a:r>
+              <a:rPr/>
+              <a:t>Report your exact </a:t>
+            </a:r>
+            <a:r>
+              <a:rPr>
+                <a:latin typeface="Courier"/>
+              </a:rPr>
+              <a:t>user.name</a:t>
+            </a:r>
+            <a:r>
+              <a:rPr/>
+              <a:t> and </a:t>
+            </a:r>
+            <a:r>
+              <a:rPr>
+                <a:latin typeface="Courier"/>
+              </a:rPr>
+              <a:t>user.email</a:t>
+            </a:r>
+            <a:r>
+              <a:rPr/>
+              <a:t> to me in Session 1.</a:t>
+            </a:r>
+          </a:p>
+        </p:txBody>
+      </p:sp>
+    </p:spTree>
+  </p:cSld>
+</p:sld>
+</file>
+
+<file path=ppt/slides/slide42.xml><?xml version="1.0" encoding="utf-8"?>
 <p:sld xmlns:a="http://schemas.openxmlformats.org/drawingml/2006/main" xmlns:r="http://schemas.openxmlformats.org/officeDocument/2006/relationships" xmlns:p="http://schemas.openxmlformats.org/presentationml/2006/main">
   <p:cSld>
     <p:spTree>
@@ -7161,1364 +8299,6 @@
 </p:sld>
 </file>
 
-<file path=ppt/slides/slide34.xml><?xml version="1.0" encoding="utf-8"?>
-<p:sld xmlns:a="http://schemas.openxmlformats.org/drawingml/2006/main" xmlns:r="http://schemas.openxmlformats.org/officeDocument/2006/relationships" xmlns:p="http://schemas.openxmlformats.org/presentationml/2006/main">
-  <p:cSld>
-    <p:spTree>
-      <p:nvGrpSpPr>
-        <p:cNvPr id="1" name=""/>
-        <p:cNvGrpSpPr/>
-        <p:nvPr/>
-      </p:nvGrpSpPr>
-      <p:grpSpPr>
-        <a:xfrm>
-          <a:off x="0" y="0"/>
-          <a:ext cx="0" cy="0"/>
-          <a:chOff x="0" y="0"/>
-          <a:chExt cx="0" cy="0"/>
-        </a:xfrm>
-      </p:grpSpPr>
-      <p:sp>
-        <p:nvSpPr>
-          <p:cNvPr id="3" name="Content Placeholder 2"/>
-          <p:cNvSpPr>
-            <a:spLocks noGrp="1"/>
-          </p:cNvSpPr>
-          <p:nvPr>
-            <p:ph idx="1"/>
-          </p:nvPr>
-        </p:nvSpPr>
-        <p:spPr/>
-        <p:txBody>
-          <a:bodyPr/>
-          <a:lstStyle/>
-          <a:p>
-            <a:pPr lvl="0" indent="0" marL="0">
-              <a:buNone/>
-            </a:pPr>
-            <a:r>
-              <a:rPr/>
-              <a:t>[ github.com/new — owner, repository name, description, Public/Private, README checkbox ]</a:t>
-            </a:r>
-          </a:p>
-          <a:p>
-            <a:pPr lvl="0" indent="0" marL="0">
-              <a:buNone/>
-            </a:pPr>
-            <a:r>
-              <a:rPr/>
-              <a:t>Then </a:t>
-            </a:r>
-            <a:r>
-              <a:rPr b="1"/>
-              <a:t>Settings → Collaborators</a:t>
-            </a:r>
-            <a:r>
-              <a:rPr/>
-              <a:t> and add your two teammates and me.</a:t>
-            </a:r>
-          </a:p>
-        </p:txBody>
-      </p:sp>
-    </p:spTree>
-  </p:cSld>
-</p:sld>
-</file>
-
-<file path=ppt/slides/slide35.xml><?xml version="1.0" encoding="utf-8"?>
-<p:sld xmlns:a="http://schemas.openxmlformats.org/drawingml/2006/main" xmlns:r="http://schemas.openxmlformats.org/officeDocument/2006/relationships" xmlns:p="http://schemas.openxmlformats.org/presentationml/2006/main">
-  <p:cSld>
-    <p:spTree>
-      <p:nvGrpSpPr>
-        <p:cNvPr id="1" name=""/>
-        <p:cNvGrpSpPr/>
-        <p:nvPr/>
-      </p:nvGrpSpPr>
-      <p:grpSpPr>
-        <a:xfrm>
-          <a:off x="0" y="0"/>
-          <a:ext cx="0" cy="0"/>
-          <a:chOff x="0" y="0"/>
-          <a:chExt cx="0" cy="0"/>
-        </a:xfrm>
-      </p:grpSpPr>
-      <p:sp>
-        <p:nvSpPr>
-          <p:cNvPr id="2" name="Title 1"/>
-          <p:cNvSpPr>
-            <a:spLocks noGrp="1"/>
-          </p:cNvSpPr>
-          <p:nvPr>
-            <p:ph type="title"/>
-          </p:nvPr>
-        </p:nvSpPr>
-        <p:spPr>
-          <a:xfrm>
-            <a:off x="722313" y="3305176"/>
-            <a:ext cx="7772400" cy="1021556"/>
-          </a:xfrm>
-        </p:spPr>
-        <p:txBody>
-          <a:bodyPr/>
-          <a:lstStyle/>
-          <a:p>
-            <a:pPr lvl="0" indent="0" marL="0">
-              <a:buNone/>
-            </a:pPr>
-            <a:r>
-              <a:rPr/>
-              <a:t>Step 7 — Connect it</a:t>
-            </a:r>
-          </a:p>
-        </p:txBody>
-      </p:sp>
-    </p:spTree>
-  </p:cSld>
-</p:sld>
-</file>
-
-<file path=ppt/slides/slide36.xml><?xml version="1.0" encoding="utf-8"?>
-<p:sld xmlns:a="http://schemas.openxmlformats.org/drawingml/2006/main" xmlns:r="http://schemas.openxmlformats.org/officeDocument/2006/relationships" xmlns:p="http://schemas.openxmlformats.org/presentationml/2006/main">
-  <p:cSld>
-    <p:spTree>
-      <p:nvGrpSpPr>
-        <p:cNvPr id="1" name=""/>
-        <p:cNvGrpSpPr/>
-        <p:nvPr/>
-      </p:nvGrpSpPr>
-      <p:grpSpPr>
-        <a:xfrm>
-          <a:off x="0" y="0"/>
-          <a:ext cx="0" cy="0"/>
-          <a:chOff x="0" y="0"/>
-          <a:chExt cx="0" cy="0"/>
-        </a:xfrm>
-      </p:grpSpPr>
-      <p:sp>
-        <p:nvSpPr>
-          <p:cNvPr id="2" name="Title 1"/>
-          <p:cNvSpPr>
-            <a:spLocks noGrp="1"/>
-          </p:cNvSpPr>
-          <p:nvPr>
-            <p:ph type="title"/>
-          </p:nvPr>
-        </p:nvSpPr>
-        <p:spPr/>
-        <p:txBody>
-          <a:bodyPr/>
-          <a:lstStyle/>
-          <a:p>
-            <a:pPr lvl="0" indent="0" marL="0">
-              <a:buNone/>
-            </a:pPr>
-            <a:r>
-              <a:rPr/>
-              <a:t>Clone your repo into VS Codium</a:t>
-            </a:r>
-          </a:p>
-        </p:txBody>
-      </p:sp>
-      <p:sp>
-        <p:nvSpPr>
-          <p:cNvPr id="3" name="Content Placeholder 2"/>
-          <p:cNvSpPr>
-            <a:spLocks noGrp="1"/>
-          </p:cNvSpPr>
-          <p:nvPr>
-            <p:ph idx="1"/>
-          </p:nvPr>
-        </p:nvSpPr>
-        <p:spPr/>
-        <p:txBody>
-          <a:bodyPr/>
-          <a:lstStyle/>
-          <a:p>
-            <a:pPr lvl="0" indent="0" marL="0">
-              <a:buNone/>
-            </a:pPr>
-            <a:r>
-              <a:rPr/>
-              <a:t>On your repository page, click the green </a:t>
-            </a:r>
-            <a:r>
-              <a:rPr b="1"/>
-              <a:t>Code</a:t>
-            </a:r>
-            <a:r>
-              <a:rPr/>
-              <a:t> button and copy the </a:t>
-            </a:r>
-            <a:r>
-              <a:rPr b="1"/>
-              <a:t>HTTPS</a:t>
-            </a:r>
-            <a:r>
-              <a:rPr/>
-              <a:t> URL.</a:t>
-            </a:r>
-          </a:p>
-          <a:p>
-            <a:pPr lvl="0" indent="0" marL="0">
-              <a:buNone/>
-            </a:pPr>
-            <a:r>
-              <a:rPr/>
-              <a:t>In the VS Codium terminal:</a:t>
-            </a:r>
-          </a:p>
-          <a:p>
-            <a:pPr lvl="0" indent="0">
-              <a:buNone/>
-            </a:pPr>
-            <a:r>
-              <a:rPr>
-                <a:solidFill>
-                  <a:srgbClr val="06287E"/>
-                </a:solidFill>
-                <a:latin typeface="Courier"/>
-              </a:rPr>
-              <a:t>git</a:t>
-            </a:r>
-            <a:r>
-              <a:rPr>
-                <a:latin typeface="Courier"/>
-              </a:rPr>
-              <a:t> clone https://github.com/YOUR-USERNAME/math60033a-gXX.git</a:t>
-            </a:r>
-            <a:br/>
-            <a:r>
-              <a:rPr>
-                <a:solidFill>
-                  <a:srgbClr val="008000"/>
-                </a:solidFill>
-                <a:latin typeface="Courier"/>
-              </a:rPr>
-              <a:t>cd</a:t>
-            </a:r>
-            <a:r>
-              <a:rPr>
-                <a:latin typeface="Courier"/>
-              </a:rPr>
-              <a:t> math60033a-gXX</a:t>
-            </a:r>
-          </a:p>
-          <a:p>
-            <a:pPr lvl="0" indent="0" marL="0">
-              <a:buNone/>
-            </a:pPr>
-            <a:r>
-              <a:rPr/>
-              <a:t>Then </a:t>
-            </a:r>
-            <a:r>
-              <a:rPr>
-                <a:latin typeface="Courier"/>
-              </a:rPr>
-              <a:t>File → Open Folder…</a:t>
-            </a:r>
-            <a:r>
-              <a:rPr/>
-              <a:t> and choose that folder.</a:t>
-            </a:r>
-          </a:p>
-          <a:p>
-            <a:pPr lvl="0" indent="0" marL="0">
-              <a:buNone/>
-            </a:pPr>
-            <a:r>
-              <a:rPr b="1"/>
-              <a:t>Check.</a:t>
-            </a:r>
-            <a:r>
-              <a:rPr/>
-              <a:t> The Explorer shows </a:t>
-            </a:r>
-            <a:r>
-              <a:rPr>
-                <a:latin typeface="Courier"/>
-              </a:rPr>
-              <a:t>README.md</a:t>
-            </a:r>
-            <a:r>
-              <a:rPr/>
-              <a:t>, and the bottom-left of the window shows the branch name </a:t>
-            </a:r>
-            <a:r>
-              <a:rPr>
-                <a:latin typeface="Courier"/>
-              </a:rPr>
-              <a:t>main</a:t>
-            </a:r>
-            <a:r>
-              <a:rPr/>
-              <a:t>.</a:t>
-            </a:r>
-          </a:p>
-        </p:txBody>
-      </p:sp>
-    </p:spTree>
-  </p:cSld>
-</p:sld>
-</file>
-
-<file path=ppt/slides/slide37.xml><?xml version="1.0" encoding="utf-8"?>
-<p:sld xmlns:a="http://schemas.openxmlformats.org/drawingml/2006/main" xmlns:r="http://schemas.openxmlformats.org/officeDocument/2006/relationships" xmlns:p="http://schemas.openxmlformats.org/presentationml/2006/main">
-  <p:cSld>
-    <p:spTree>
-      <p:nvGrpSpPr>
-        <p:cNvPr id="1" name=""/>
-        <p:cNvGrpSpPr/>
-        <p:nvPr/>
-      </p:nvGrpSpPr>
-      <p:grpSpPr>
-        <a:xfrm>
-          <a:off x="0" y="0"/>
-          <a:ext cx="0" cy="0"/>
-          <a:chOff x="0" y="0"/>
-          <a:chExt cx="0" cy="0"/>
-        </a:xfrm>
-      </p:grpSpPr>
-      <p:sp>
-        <p:nvSpPr>
-          <p:cNvPr id="2" name="Title 1"/>
-          <p:cNvSpPr>
-            <a:spLocks noGrp="1"/>
-          </p:cNvSpPr>
-          <p:nvPr>
-            <p:ph type="title"/>
-          </p:nvPr>
-        </p:nvSpPr>
-        <p:spPr/>
-        <p:txBody>
-          <a:bodyPr/>
-          <a:lstStyle/>
-          <a:p>
-            <a:pPr lvl="0" indent="0" marL="0">
-              <a:buNone/>
-            </a:pPr>
-            <a:r>
-              <a:rPr/>
-              <a:t>Authenticating the first time you push</a:t>
-            </a:r>
-          </a:p>
-        </p:txBody>
-      </p:sp>
-      <p:sp>
-        <p:nvSpPr>
-          <p:cNvPr id="3" name="Content Placeholder 2"/>
-          <p:cNvSpPr>
-            <a:spLocks noGrp="1"/>
-          </p:cNvSpPr>
-          <p:nvPr>
-            <p:ph idx="1"/>
-          </p:nvPr>
-        </p:nvSpPr>
-        <p:spPr/>
-        <p:txBody>
-          <a:bodyPr/>
-          <a:lstStyle/>
-          <a:p>
-            <a:pPr lvl="0" indent="0" marL="0">
-              <a:buNone/>
-            </a:pPr>
-            <a:r>
-              <a:rPr/>
-              <a:t>When you first push, GitHub asks for credentials. </a:t>
-            </a:r>
-            <a:r>
-              <a:rPr b="1"/>
-              <a:t>Your account password will not work</a:t>
-            </a:r>
-            <a:r>
-              <a:rPr/>
-              <a:t> — it wants a token.</a:t>
-            </a:r>
-          </a:p>
-          <a:p>
-            <a:pPr lvl="0" indent="-342900" marL="342900">
-              <a:buAutoNum type="arabicPeriod"/>
-            </a:pPr>
-            <a:r>
-              <a:rPr/>
-              <a:t>github.com → your avatar → </a:t>
-            </a:r>
-            <a:r>
-              <a:rPr b="1"/>
-              <a:t>Settings</a:t>
-            </a:r>
-          </a:p>
-          <a:p>
-            <a:pPr lvl="0" indent="-342900" marL="342900">
-              <a:buAutoNum type="arabicPeriod"/>
-            </a:pPr>
-            <a:r>
-              <a:rPr b="1"/>
-              <a:t>Developer settings</a:t>
-            </a:r>
-            <a:r>
-              <a:rPr/>
-              <a:t> → </a:t>
-            </a:r>
-            <a:r>
-              <a:rPr b="1"/>
-              <a:t>Personal access tokens</a:t>
-            </a:r>
-            <a:r>
-              <a:rPr/>
-              <a:t> → </a:t>
-            </a:r>
-            <a:r>
-              <a:rPr b="1"/>
-              <a:t>Tokens (classic)</a:t>
-            </a:r>
-          </a:p>
-          <a:p>
-            <a:pPr lvl="0" indent="-342900" marL="342900">
-              <a:buAutoNum type="arabicPeriod"/>
-            </a:pPr>
-            <a:r>
-              <a:rPr b="1"/>
-              <a:t>Generate new token</a:t>
-            </a:r>
-            <a:r>
-              <a:rPr/>
-              <a:t>, tick the </a:t>
-            </a:r>
-            <a:r>
-              <a:rPr b="1">
-                <a:latin typeface="Courier"/>
-              </a:rPr>
-              <a:t>repo</a:t>
-            </a:r>
-            <a:r>
-              <a:rPr/>
-              <a:t> scope, set an expiry</a:t>
-            </a:r>
-          </a:p>
-          <a:p>
-            <a:pPr lvl="0" indent="-342900" marL="342900">
-              <a:buAutoNum type="arabicPeriod"/>
-            </a:pPr>
-            <a:r>
-              <a:rPr/>
-              <a:t>Copy the token — </a:t>
-            </a:r>
-            <a:r>
-              <a:rPr b="1"/>
-              <a:t>it is shown once</a:t>
-            </a:r>
-          </a:p>
-          <a:p>
-            <a:pPr lvl="0" indent="-342900" marL="342900">
-              <a:buAutoNum type="arabicPeriod"/>
-            </a:pPr>
-            <a:r>
-              <a:rPr/>
-              <a:t>Paste it when git asks for your </a:t>
-            </a:r>
-            <a:r>
-              <a:rPr i="1"/>
-              <a:t>password</a:t>
-            </a:r>
-          </a:p>
-          <a:p>
-            <a:pPr lvl="0" indent="0">
-              <a:buNone/>
-            </a:pPr>
-            <a:r>
-              <a:rPr>
-                <a:solidFill>
-                  <a:srgbClr val="06287E"/>
-                </a:solidFill>
-                <a:latin typeface="Courier"/>
-              </a:rPr>
-              <a:t>git</a:t>
-            </a:r>
-            <a:r>
-              <a:rPr>
-                <a:latin typeface="Courier"/>
-              </a:rPr>
-              <a:t> config </a:t>
-            </a:r>
-            <a:r>
-              <a:rPr>
-                <a:solidFill>
-                  <a:srgbClr val="7D9029"/>
-                </a:solidFill>
-                <a:latin typeface="Courier"/>
-              </a:rPr>
-              <a:t>--global</a:t>
-            </a:r>
-            <a:r>
-              <a:rPr>
-                <a:latin typeface="Courier"/>
-              </a:rPr>
-              <a:t> credential.helper store</a:t>
-            </a:r>
-          </a:p>
-          <a:p>
-            <a:pPr lvl="0" indent="0" marL="0">
-              <a:buNone/>
-            </a:pPr>
-            <a:r>
-              <a:rPr/>
-              <a:t>stores it so you are asked only once.</a:t>
-            </a:r>
-          </a:p>
-        </p:txBody>
-      </p:sp>
-    </p:spTree>
-  </p:cSld>
-</p:sld>
-</file>
-
-<file path=ppt/slides/slide38.xml><?xml version="1.0" encoding="utf-8"?>
-<p:sld xmlns:a="http://schemas.openxmlformats.org/drawingml/2006/main" xmlns:r="http://schemas.openxmlformats.org/officeDocument/2006/relationships" xmlns:p="http://schemas.openxmlformats.org/presentationml/2006/main">
-  <p:cSld>
-    <p:spTree>
-      <p:nvGrpSpPr>
-        <p:cNvPr id="1" name=""/>
-        <p:cNvGrpSpPr/>
-        <p:nvPr/>
-      </p:nvGrpSpPr>
-      <p:grpSpPr>
-        <a:xfrm>
-          <a:off x="0" y="0"/>
-          <a:ext cx="0" cy="0"/>
-          <a:chOff x="0" y="0"/>
-          <a:chExt cx="0" cy="0"/>
-        </a:xfrm>
-      </p:grpSpPr>
-      <p:sp>
-        <p:nvSpPr>
-          <p:cNvPr id="2" name="Title 1"/>
-          <p:cNvSpPr>
-            <a:spLocks noGrp="1"/>
-          </p:cNvSpPr>
-          <p:nvPr>
-            <p:ph type="title"/>
-          </p:nvPr>
-        </p:nvSpPr>
-        <p:spPr/>
-        <p:txBody>
-          <a:bodyPr/>
-          <a:lstStyle/>
-          <a:p>
-            <a:pPr lvl="0" indent="0" marL="0">
-              <a:buNone/>
-            </a:pPr>
-            <a:r>
-              <a:rPr/>
-              <a:t>The round trip</a:t>
-            </a:r>
-          </a:p>
-        </p:txBody>
-      </p:sp>
-      <p:sp>
-        <p:nvSpPr>
-          <p:cNvPr id="3" name="Content Placeholder 2"/>
-          <p:cNvSpPr>
-            <a:spLocks noGrp="1"/>
-          </p:cNvSpPr>
-          <p:nvPr>
-            <p:ph idx="1"/>
-          </p:nvPr>
-        </p:nvSpPr>
-        <p:spPr/>
-        <p:txBody>
-          <a:bodyPr/>
-          <a:lstStyle/>
-          <a:p>
-            <a:pPr lvl="0" indent="0">
-              <a:buNone/>
-            </a:pPr>
-            <a:r>
-              <a:rPr>
-                <a:solidFill>
-                  <a:srgbClr val="008000"/>
-                </a:solidFill>
-                <a:latin typeface="Courier"/>
-              </a:rPr>
-              <a:t>echo</a:t>
-            </a:r>
-            <a:r>
-              <a:rPr>
-                <a:latin typeface="Courier"/>
-              </a:rPr>
-              <a:t> </a:t>
-            </a:r>
-            <a:r>
-              <a:rPr>
-                <a:solidFill>
-                  <a:srgbClr val="4070A0"/>
-                </a:solidFill>
-                <a:latin typeface="Courier"/>
-              </a:rPr>
-              <a:t>"# Group XX — MATH60033A"</a:t>
-            </a:r>
-            <a:r>
-              <a:rPr>
-                <a:latin typeface="Courier"/>
-              </a:rPr>
-              <a:t> </a:t>
-            </a:r>
-            <a:r>
-              <a:rPr>
-                <a:solidFill>
-                  <a:srgbClr val="666666"/>
-                </a:solidFill>
-                <a:latin typeface="Courier"/>
-              </a:rPr>
-              <a:t>&gt;&gt;</a:t>
-            </a:r>
-            <a:r>
-              <a:rPr>
-                <a:latin typeface="Courier"/>
-              </a:rPr>
-              <a:t> README.md</a:t>
-            </a:r>
-            <a:br/>
-            <a:r>
-              <a:rPr>
-                <a:solidFill>
-                  <a:srgbClr val="06287E"/>
-                </a:solidFill>
-                <a:latin typeface="Courier"/>
-              </a:rPr>
-              <a:t>git</a:t>
-            </a:r>
-            <a:r>
-              <a:rPr>
-                <a:latin typeface="Courier"/>
-              </a:rPr>
-              <a:t> add README.md</a:t>
-            </a:r>
-            <a:br/>
-            <a:r>
-              <a:rPr>
-                <a:solidFill>
-                  <a:srgbClr val="06287E"/>
-                </a:solidFill>
-                <a:latin typeface="Courier"/>
-              </a:rPr>
-              <a:t>git</a:t>
-            </a:r>
-            <a:r>
-              <a:rPr>
-                <a:latin typeface="Courier"/>
-              </a:rPr>
-              <a:t> commit </a:t>
-            </a:r>
-            <a:r>
-              <a:rPr>
-                <a:solidFill>
-                  <a:srgbClr val="7D9029"/>
-                </a:solidFill>
-                <a:latin typeface="Courier"/>
-              </a:rPr>
-              <a:t>-m</a:t>
-            </a:r>
-            <a:r>
-              <a:rPr>
-                <a:latin typeface="Courier"/>
-              </a:rPr>
-              <a:t> </a:t>
-            </a:r>
-            <a:r>
-              <a:rPr>
-                <a:solidFill>
-                  <a:srgbClr val="4070A0"/>
-                </a:solidFill>
-                <a:latin typeface="Courier"/>
-              </a:rPr>
-              <a:t>"Start the group log"</a:t>
-            </a:r>
-            <a:br/>
-            <a:r>
-              <a:rPr>
-                <a:solidFill>
-                  <a:srgbClr val="06287E"/>
-                </a:solidFill>
-                <a:latin typeface="Courier"/>
-              </a:rPr>
-              <a:t>git</a:t>
-            </a:r>
-            <a:r>
-              <a:rPr>
-                <a:latin typeface="Courier"/>
-              </a:rPr>
-              <a:t> push</a:t>
-            </a:r>
-          </a:p>
-          <a:p>
-            <a:pPr lvl="0" indent="0" marL="0">
-              <a:buNone/>
-            </a:pPr>
-            <a:r>
-              <a:rPr/>
-              <a:t>Refresh your repository page in the browser. Your line is there.</a:t>
-            </a:r>
-          </a:p>
-          <a:p>
-            <a:pPr lvl="0" indent="0" marL="0">
-              <a:buNone/>
-            </a:pPr>
-            <a:r>
-              <a:rPr b="1"/>
-              <a:t>Check.</a:t>
-            </a:r>
-            <a:r>
-              <a:rPr/>
-              <a:t> You have now completed the full loop: edit locally → commit → push → visible on GitHub. Everything else this term is a variation on that loop.</a:t>
-            </a:r>
-          </a:p>
-        </p:txBody>
-      </p:sp>
-    </p:spTree>
-  </p:cSld>
-</p:sld>
-</file>
-
-<file path=ppt/slides/slide39.xml><?xml version="1.0" encoding="utf-8"?>
-<p:sld xmlns:a="http://schemas.openxmlformats.org/drawingml/2006/main" xmlns:r="http://schemas.openxmlformats.org/officeDocument/2006/relationships" xmlns:p="http://schemas.openxmlformats.org/presentationml/2006/main">
-  <p:cSld>
-    <p:spTree>
-      <p:nvGrpSpPr>
-        <p:cNvPr id="1" name=""/>
-        <p:cNvGrpSpPr/>
-        <p:nvPr/>
-      </p:nvGrpSpPr>
-      <p:grpSpPr>
-        <a:xfrm>
-          <a:off x="0" y="0"/>
-          <a:ext cx="0" cy="0"/>
-          <a:chOff x="0" y="0"/>
-          <a:chExt cx="0" cy="0"/>
-        </a:xfrm>
-      </p:grpSpPr>
-      <p:sp>
-        <p:nvSpPr>
-          <p:cNvPr id="2" name="Title 1"/>
-          <p:cNvSpPr>
-            <a:spLocks noGrp="1"/>
-          </p:cNvSpPr>
-          <p:nvPr>
-            <p:ph type="title"/>
-          </p:nvPr>
-        </p:nvSpPr>
-        <p:spPr>
-          <a:xfrm>
-            <a:off x="722313" y="3305176"/>
-            <a:ext cx="7772400" cy="1021556"/>
-          </a:xfrm>
-        </p:spPr>
-        <p:txBody>
-          <a:bodyPr/>
-          <a:lstStyle/>
-          <a:p>
-            <a:pPr lvl="0" indent="0" marL="0">
-              <a:buNone/>
-            </a:pPr>
-            <a:r>
-              <a:rPr/>
-              <a:t>The worked example</a:t>
-            </a:r>
-          </a:p>
-        </p:txBody>
-      </p:sp>
-    </p:spTree>
-  </p:cSld>
-</p:sld>
-</file>
-
-<file path=ppt/slides/slide4.xml><?xml version="1.0" encoding="utf-8"?>
-<p:sld xmlns:a="http://schemas.openxmlformats.org/drawingml/2006/main" xmlns:r="http://schemas.openxmlformats.org/officeDocument/2006/relationships" xmlns:p="http://schemas.openxmlformats.org/presentationml/2006/main">
-  <p:cSld>
-    <p:spTree>
-      <p:nvGrpSpPr>
-        <p:cNvPr id="1" name=""/>
-        <p:cNvGrpSpPr/>
-        <p:nvPr/>
-      </p:nvGrpSpPr>
-      <p:grpSpPr>
-        <a:xfrm>
-          <a:off x="0" y="0"/>
-          <a:ext cx="0" cy="0"/>
-          <a:chOff x="0" y="0"/>
-          <a:chExt cx="0" cy="0"/>
-        </a:xfrm>
-      </p:grpSpPr>
-      <p:sp>
-        <p:nvSpPr>
-          <p:cNvPr id="2" name="Title 1"/>
-          <p:cNvSpPr>
-            <a:spLocks noGrp="1"/>
-          </p:cNvSpPr>
-          <p:nvPr>
-            <p:ph type="title"/>
-          </p:nvPr>
-        </p:nvSpPr>
-        <p:spPr/>
-        <p:txBody>
-          <a:bodyPr/>
-          <a:lstStyle/>
-          <a:p>
-            <a:pPr lvl="0" indent="0" marL="0">
-              <a:buNone/>
-            </a:pPr>
-            <a:r>
-              <a:rPr/>
-              <a:t>Three distinctions we will not let go of</a:t>
-            </a:r>
-          </a:p>
-        </p:txBody>
-      </p:sp>
-      <p:sp>
-        <p:nvSpPr>
-          <p:cNvPr id="3" name="Content Placeholder 2"/>
-          <p:cNvSpPr>
-            <a:spLocks noGrp="1"/>
-          </p:cNvSpPr>
-          <p:nvPr>
-            <p:ph idx="1"/>
-          </p:nvPr>
-        </p:nvSpPr>
-        <p:spPr/>
-        <p:txBody>
-          <a:bodyPr/>
-          <a:lstStyle/>
-          <a:p>
-            <a:pPr lvl="0" indent="-342900" marL="342900">
-              <a:buAutoNum type="arabicPeriod"/>
-            </a:pPr>
-            <a:r>
-              <a:rPr b="1"/>
-              <a:t>A scenario is not a forecast.</a:t>
-            </a:r>
-            <a:r>
-              <a:rPr/>
-              <a:t> </a:t>
-            </a:r>
-            <a:r>
-              <a:rPr i="1"/>
-              <a:t>Europe 2031</a:t>
-            </a:r>
-            <a:r>
-              <a:rPr/>
-              <a:t> is a conditional narrative — a stress test, not a prediction. You will read it as a set of assumptions you can measure.</a:t>
-            </a:r>
-          </a:p>
-          <a:p>
-            <a:pPr lvl="0" indent="-342900" marL="342900">
-              <a:buAutoNum type="arabicPeriod"/>
-            </a:pPr>
-            <a:r>
-              <a:rPr b="1"/>
-              <a:t>Prediction is not inference.</a:t>
-            </a:r>
-            <a:r>
-              <a:rPr/>
-              <a:t> “How well does this predict?” and “what is the effect of X?” are different questions, answered by different estimators, with different guarantees.</a:t>
-            </a:r>
-          </a:p>
-          <a:p>
-            <a:pPr lvl="0" indent="-342900" marL="342900">
-              <a:buAutoNum type="arabicPeriod"/>
-            </a:pPr>
-            <a:r>
-              <a:rPr b="1"/>
-              <a:t>A construct is not a measurement.</a:t>
-            </a:r>
-            <a:r>
-              <a:rPr/>
-              <a:t> An “AI exposure index” is something we built. Session 09 is about being honest about that.</a:t>
-            </a:r>
-          </a:p>
-        </p:txBody>
-      </p:sp>
-    </p:spTree>
-  </p:cSld>
-</p:sld>
-</file>
-
-<file path=ppt/slides/slide40.xml><?xml version="1.0" encoding="utf-8"?>
-<p:sld xmlns:a="http://schemas.openxmlformats.org/drawingml/2006/main" xmlns:r="http://schemas.openxmlformats.org/officeDocument/2006/relationships" xmlns:p="http://schemas.openxmlformats.org/presentationml/2006/main">
-  <p:cSld>
-    <p:spTree>
-      <p:nvGrpSpPr>
-        <p:cNvPr id="1" name=""/>
-        <p:cNvGrpSpPr/>
-        <p:nvPr/>
-      </p:nvGrpSpPr>
-      <p:grpSpPr>
-        <a:xfrm>
-          <a:off x="0" y="0"/>
-          <a:ext cx="0" cy="0"/>
-          <a:chOff x="0" y="0"/>
-          <a:chExt cx="0" cy="0"/>
-        </a:xfrm>
-      </p:grpSpPr>
-      <p:sp>
-        <p:nvSpPr>
-          <p:cNvPr id="2" name="Title 1"/>
-          <p:cNvSpPr>
-            <a:spLocks noGrp="1"/>
-          </p:cNvSpPr>
-          <p:nvPr>
-            <p:ph type="title"/>
-          </p:nvPr>
-        </p:nvSpPr>
-        <p:spPr/>
-        <p:txBody>
-          <a:bodyPr/>
-          <a:lstStyle/>
-          <a:p>
-            <a:pPr lvl="0" indent="0" marL="0">
-              <a:buNone/>
-            </a:pPr>
-            <a:r>
-              <a:rPr/>
-              <a:t>Putting all of it together</a:t>
-            </a:r>
-          </a:p>
-        </p:txBody>
-      </p:sp>
-      <p:sp>
-        <p:nvSpPr>
-          <p:cNvPr id="3" name="Content Placeholder 2"/>
-          <p:cNvSpPr>
-            <a:spLocks noGrp="1"/>
-          </p:cNvSpPr>
-          <p:nvPr>
-            <p:ph idx="1"/>
-          </p:nvPr>
-        </p:nvSpPr>
-        <p:spPr/>
-        <p:txBody>
-          <a:bodyPr/>
-          <a:lstStyle/>
-          <a:p>
-            <a:pPr lvl="0" indent="0" marL="0">
-              <a:buNone/>
-            </a:pPr>
-            <a:r>
-              <a:rPr/>
-              <a:t>Everything is installed. This is what a working session actually looks like.</a:t>
-            </a:r>
-          </a:p>
-          <a:p>
-            <a:pPr lvl="0" indent="0" marL="0">
-              <a:buNone/>
-            </a:pPr>
-            <a:r>
-              <a:rPr b="1"/>
-              <a:t>Terminal 1</a:t>
-            </a:r>
-            <a:r>
-              <a:rPr/>
-              <a:t> — the model server, left running:</a:t>
-            </a:r>
-          </a:p>
-          <a:p>
-            <a:pPr lvl="0" indent="0">
-              <a:buNone/>
-            </a:pPr>
-            <a:r>
-              <a:rPr>
-                <a:solidFill>
-                  <a:srgbClr val="19177C"/>
-                </a:solidFill>
-                <a:latin typeface="Courier"/>
-              </a:rPr>
-              <a:t>OLLAMA_CONTEXT_LENGTH</a:t>
-            </a:r>
-            <a:r>
-              <a:rPr>
-                <a:solidFill>
-                  <a:srgbClr val="666666"/>
-                </a:solidFill>
-                <a:latin typeface="Courier"/>
-              </a:rPr>
-              <a:t>=</a:t>
-            </a:r>
-            <a:r>
-              <a:rPr>
-                <a:latin typeface="Courier"/>
-              </a:rPr>
-              <a:t>8192 ollama serve</a:t>
-            </a:r>
-          </a:p>
-          <a:p>
-            <a:pPr lvl="0" indent="0" marL="0">
-              <a:buNone/>
-            </a:pPr>
-            <a:r>
-              <a:rPr b="1"/>
-              <a:t>Terminal 2</a:t>
-            </a:r>
-            <a:r>
-              <a:rPr/>
-              <a:t> — inside your repository:</a:t>
-            </a:r>
-          </a:p>
-          <a:p>
-            <a:pPr lvl="0" indent="0">
-              <a:buNone/>
-            </a:pPr>
-            <a:r>
-              <a:rPr>
-                <a:solidFill>
-                  <a:srgbClr val="008000"/>
-                </a:solidFill>
-                <a:latin typeface="Courier"/>
-              </a:rPr>
-              <a:t>cd</a:t>
-            </a:r>
-            <a:r>
-              <a:rPr>
-                <a:latin typeface="Courier"/>
-              </a:rPr>
-              <a:t> math60033a-gXX</a:t>
-            </a:r>
-            <a:br/>
-            <a:r>
-              <a:rPr>
-                <a:solidFill>
-                  <a:srgbClr val="008000"/>
-                </a:solidFill>
-                <a:latin typeface="Courier"/>
-              </a:rPr>
-              <a:t>source</a:t>
-            </a:r>
-            <a:r>
-              <a:rPr>
-                <a:latin typeface="Courier"/>
-              </a:rPr>
-              <a:t> .venv/bin/activate</a:t>
-            </a:r>
-            <a:br/>
-            <a:r>
-              <a:rPr>
-                <a:latin typeface="Courier"/>
-              </a:rPr>
-              <a:t>aider </a:t>
-            </a:r>
-            <a:r>
-              <a:rPr>
-                <a:solidFill>
-                  <a:srgbClr val="7D9029"/>
-                </a:solidFill>
-                <a:latin typeface="Courier"/>
-              </a:rPr>
-              <a:t>--model</a:t>
-            </a:r>
-            <a:r>
-              <a:rPr>
-                <a:latin typeface="Courier"/>
-              </a:rPr>
-              <a:t> ollama_chat/qwen2.5-coder:7b</a:t>
-            </a:r>
-          </a:p>
-        </p:txBody>
-      </p:sp>
-    </p:spTree>
-  </p:cSld>
-</p:sld>
-</file>
-
-<file path=ppt/slides/slide41.xml><?xml version="1.0" encoding="utf-8"?>
-<p:sld xmlns:a="http://schemas.openxmlformats.org/drawingml/2006/main" xmlns:r="http://schemas.openxmlformats.org/officeDocument/2006/relationships" xmlns:p="http://schemas.openxmlformats.org/presentationml/2006/main">
-  <p:cSld>
-    <p:spTree>
-      <p:nvGrpSpPr>
-        <p:cNvPr id="1" name=""/>
-        <p:cNvGrpSpPr/>
-        <p:nvPr/>
-      </p:nvGrpSpPr>
-      <p:grpSpPr>
-        <a:xfrm>
-          <a:off x="0" y="0"/>
-          <a:ext cx="0" cy="0"/>
-          <a:chOff x="0" y="0"/>
-          <a:chExt cx="0" cy="0"/>
-        </a:xfrm>
-      </p:grpSpPr>
-      <p:sp>
-        <p:nvSpPr>
-          <p:cNvPr id="2" name="Title 1"/>
-          <p:cNvSpPr>
-            <a:spLocks noGrp="1"/>
-          </p:cNvSpPr>
-          <p:nvPr>
-            <p:ph type="title"/>
-          </p:nvPr>
-        </p:nvSpPr>
-        <p:spPr/>
-        <p:txBody>
-          <a:bodyPr/>
-          <a:lstStyle/>
-          <a:p>
-            <a:pPr lvl="0" indent="0" marL="0">
-              <a:buNone/>
-            </a:pPr>
-            <a:r>
-              <a:rPr/>
-              <a:t>Ask for something real</a:t>
-            </a:r>
-          </a:p>
-        </p:txBody>
-      </p:sp>
-      <p:sp>
-        <p:nvSpPr>
-          <p:cNvPr id="3" name="Content Placeholder 2"/>
-          <p:cNvSpPr>
-            <a:spLocks noGrp="1"/>
-          </p:cNvSpPr>
-          <p:nvPr>
-            <p:ph idx="1"/>
-          </p:nvPr>
-        </p:nvSpPr>
-        <p:spPr/>
-        <p:txBody>
-          <a:bodyPr/>
-          <a:lstStyle/>
-          <a:p>
-            <a:pPr lvl="0" indent="0">
-              <a:buNone/>
-            </a:pPr>
-            <a:r>
-              <a:rPr>
-                <a:latin typeface="Courier"/>
-              </a:rPr>
-              <a:t>&gt; create explore.py that loads data/spine/core.parquet with pandas,
-  prints the shape, and shows mean gdp_pc_eur by year</a:t>
-            </a:r>
-          </a:p>
-          <a:p>
-            <a:pPr lvl="0" indent="0" marL="0">
-              <a:buNone/>
-            </a:pPr>
-            <a:r>
-              <a:rPr/>
-              <a:t>aider proposes a diff. You read it. You accept it.</a:t>
-            </a:r>
-          </a:p>
-          <a:p>
-            <a:pPr lvl="0" indent="0">
-              <a:buNone/>
-            </a:pPr>
-            <a:r>
-              <a:rPr>
-                <a:latin typeface="Courier"/>
-              </a:rPr>
-              <a:t>python explore.py</a:t>
-            </a:r>
-            <a:br/>
-            <a:r>
-              <a:rPr>
-                <a:solidFill>
-                  <a:srgbClr val="06287E"/>
-                </a:solidFill>
-                <a:latin typeface="Courier"/>
-              </a:rPr>
-              <a:t>git</a:t>
-            </a:r>
-            <a:r>
-              <a:rPr>
-                <a:latin typeface="Courier"/>
-              </a:rPr>
-              <a:t> log </a:t>
-            </a:r>
-            <a:r>
-              <a:rPr>
-                <a:solidFill>
-                  <a:srgbClr val="7D9029"/>
-                </a:solidFill>
-                <a:latin typeface="Courier"/>
-              </a:rPr>
-              <a:t>--oneline</a:t>
-            </a:r>
-            <a:r>
-              <a:rPr>
-                <a:latin typeface="Courier"/>
-              </a:rPr>
-              <a:t> </a:t>
-            </a:r>
-            <a:r>
-              <a:rPr>
-                <a:solidFill>
-                  <a:srgbClr val="7D9029"/>
-                </a:solidFill>
-                <a:latin typeface="Courier"/>
-              </a:rPr>
-              <a:t>-1</a:t>
-            </a:r>
-            <a:br/>
-            <a:r>
-              <a:rPr>
-                <a:solidFill>
-                  <a:srgbClr val="06287E"/>
-                </a:solidFill>
-                <a:latin typeface="Courier"/>
-              </a:rPr>
-              <a:t>git</a:t>
-            </a:r>
-            <a:r>
-              <a:rPr>
-                <a:latin typeface="Courier"/>
-              </a:rPr>
-              <a:t> push</a:t>
-            </a:r>
-          </a:p>
-          <a:p>
-            <a:pPr lvl="0" indent="0" marL="0">
-              <a:buNone/>
-            </a:pPr>
-            <a:r>
-              <a:rPr b="1"/>
-              <a:t>You have just:</a:t>
-            </a:r>
-            <a:r>
-              <a:rPr/>
-              <a:t> run a model on your own hardware, had it write code against real data, reviewed the change, committed it under your name, and published it to your group’s repository — </a:t>
-            </a:r>
-            <a:r>
-              <a:rPr b="1"/>
-              <a:t>without sending one byte to anyone’s API.</a:t>
-            </a:r>
-          </a:p>
-        </p:txBody>
-      </p:sp>
-    </p:spTree>
-  </p:cSld>
-</p:sld>
-</file>
-
-<file path=ppt/slides/slide42.xml><?xml version="1.0" encoding="utf-8"?>
-<p:sld xmlns:a="http://schemas.openxmlformats.org/drawingml/2006/main" xmlns:r="http://schemas.openxmlformats.org/officeDocument/2006/relationships" xmlns:p="http://schemas.openxmlformats.org/presentationml/2006/main">
-  <p:cSld>
-    <p:spTree>
-      <p:nvGrpSpPr>
-        <p:cNvPr id="1" name=""/>
-        <p:cNvGrpSpPr/>
-        <p:nvPr/>
-      </p:nvGrpSpPr>
-      <p:grpSpPr>
-        <a:xfrm>
-          <a:off x="0" y="0"/>
-          <a:ext cx="0" cy="0"/>
-          <a:chOff x="0" y="0"/>
-          <a:chExt cx="0" cy="0"/>
-        </a:xfrm>
-      </p:grpSpPr>
-      <p:sp>
-        <p:nvSpPr>
-          <p:cNvPr id="2" name="Title 1"/>
-          <p:cNvSpPr>
-            <a:spLocks noGrp="1"/>
-          </p:cNvSpPr>
-          <p:nvPr>
-            <p:ph type="title"/>
-          </p:nvPr>
-        </p:nvSpPr>
-        <p:spPr/>
-        <p:txBody>
-          <a:bodyPr/>
-          <a:lstStyle/>
-          <a:p>
-            <a:pPr lvl="0" indent="0" marL="0">
-              <a:buNone/>
-            </a:pPr>
-            <a:r>
-              <a:rPr/>
-              <a:t>Why we do it this way</a:t>
-            </a:r>
-          </a:p>
-        </p:txBody>
-      </p:sp>
-      <p:sp>
-        <p:nvSpPr>
-          <p:cNvPr id="3" name="Content Placeholder 2"/>
-          <p:cNvSpPr>
-            <a:spLocks noGrp="1"/>
-          </p:cNvSpPr>
-          <p:nvPr>
-            <p:ph idx="1"/>
-          </p:nvPr>
-        </p:nvSpPr>
-        <p:spPr/>
-        <p:txBody>
-          <a:bodyPr/>
-          <a:lstStyle/>
-          <a:p>
-            <a:pPr lvl="0"/>
-            <a:r>
-              <a:rPr b="1"/>
-              <a:t>The data stay put.</a:t>
-            </a:r>
-            <a:r>
-              <a:rPr/>
-              <a:t> Some of what you use this term cannot legally be uploaded.</a:t>
-            </a:r>
-          </a:p>
-          <a:p>
-            <a:pPr lvl="0"/>
-            <a:r>
-              <a:rPr b="1"/>
-              <a:t>The cost is zero.</a:t>
-            </a:r>
-            <a:r>
-              <a:rPr/>
-              <a:t> No key, no quota, no bill at the end of the month.</a:t>
-            </a:r>
-          </a:p>
-          <a:p>
-            <a:pPr lvl="0"/>
-            <a:r>
-              <a:rPr b="1"/>
-              <a:t>The record is honest.</a:t>
-            </a:r>
-            <a:r>
-              <a:rPr/>
-              <a:t> Commits carry your name; the diff carries the reasoning.</a:t>
-            </a:r>
-          </a:p>
-          <a:p>
-            <a:pPr lvl="0"/>
-            <a:r>
-              <a:rPr b="1"/>
-              <a:t>The skill transfers.</a:t>
-            </a:r>
-            <a:r>
-              <a:rPr/>
-              <a:t> This is how the work is actually done now.</a:t>
-            </a:r>
-          </a:p>
-          <a:p>
-            <a:pPr lvl="0" indent="0" marL="0">
-              <a:buNone/>
-            </a:pPr>
-            <a:r>
-              <a:rPr/>
-              <a:t>The model is a </a:t>
-            </a:r>
-            <a:r>
-              <a:rPr b="1"/>
-              <a:t>junior collaborator with no accountability.</a:t>
-            </a:r>
-            <a:r>
-              <a:rPr/>
-              <a:t> It will produce confident, wrong code. Every line you commit is a line you are claiming as correct. Read the diff.</a:t>
-            </a:r>
-          </a:p>
-        </p:txBody>
-      </p:sp>
-    </p:spTree>
-  </p:cSld>
-</p:sld>
-</file>
-
 <file path=ppt/slides/slide43.xml><?xml version="1.0" encoding="utf-8"?>
 <p:sld xmlns:a="http://schemas.openxmlformats.org/drawingml/2006/main" xmlns:r="http://schemas.openxmlformats.org/officeDocument/2006/relationships" xmlns:p="http://schemas.openxmlformats.org/presentationml/2006/main">
   <p:cSld>
@@ -8538,6 +8318,62 @@
       </p:grpSpPr>
       <p:sp>
         <p:nvSpPr>
+          <p:cNvPr id="3" name="Content Placeholder 2"/>
+          <p:cNvSpPr>
+            <a:spLocks noGrp="1"/>
+          </p:cNvSpPr>
+          <p:nvPr>
+            <p:ph idx="1"/>
+          </p:nvPr>
+        </p:nvSpPr>
+        <p:spPr/>
+        <p:txBody>
+          <a:bodyPr/>
+          <a:lstStyle/>
+          <a:p>
+            <a:pPr lvl="0" indent="0" marL="0">
+              <a:buNone/>
+            </a:pPr>
+            <a:r>
+              <a:rPr/>
+              <a:t>[ github.com/new — owner, repository name, description, Public/Private, README checkbox ]</a:t>
+            </a:r>
+          </a:p>
+          <a:p>
+            <a:pPr lvl="0" indent="0" marL="0">
+              <a:buNone/>
+            </a:pPr>
+            <a:r>
+              <a:rPr/>
+              <a:t>Keep it to yourself for now. We will sort out groups and access in class.</a:t>
+            </a:r>
+          </a:p>
+        </p:txBody>
+      </p:sp>
+    </p:spTree>
+  </p:cSld>
+</p:sld>
+</file>
+
+<file path=ppt/slides/slide44.xml><?xml version="1.0" encoding="utf-8"?>
+<p:sld xmlns:a="http://schemas.openxmlformats.org/drawingml/2006/main" xmlns:r="http://schemas.openxmlformats.org/officeDocument/2006/relationships" xmlns:p="http://schemas.openxmlformats.org/presentationml/2006/main">
+  <p:cSld>
+    <p:spTree>
+      <p:nvGrpSpPr>
+        <p:cNvPr id="1" name=""/>
+        <p:cNvGrpSpPr/>
+        <p:nvPr/>
+      </p:nvGrpSpPr>
+      <p:grpSpPr>
+        <a:xfrm>
+          <a:off x="0" y="0"/>
+          <a:ext cx="0" cy="0"/>
+          <a:chOff x="0" y="0"/>
+          <a:chExt cx="0" cy="0"/>
+        </a:xfrm>
+      </p:grpSpPr>
+      <p:sp>
+        <p:nvSpPr>
           <p:cNvPr id="2" name="Title 1"/>
           <p:cNvSpPr>
             <a:spLocks noGrp="1"/>
@@ -8561,7 +8397,7 @@
             </a:pPr>
             <a:r>
               <a:rPr/>
-              <a:t>If it breaks</a:t>
+              <a:t>Step 7 — Connect it</a:t>
             </a:r>
           </a:p>
         </p:txBody>
@@ -8571,7 +8407,1677 @@
 </p:sld>
 </file>
 
-<file path=ppt/slides/slide44.xml><?xml version="1.0" encoding="utf-8"?>
+<file path=ppt/slides/slide45.xml><?xml version="1.0" encoding="utf-8"?>
+<p:sld xmlns:a="http://schemas.openxmlformats.org/drawingml/2006/main" xmlns:r="http://schemas.openxmlformats.org/officeDocument/2006/relationships" xmlns:p="http://schemas.openxmlformats.org/presentationml/2006/main">
+  <p:cSld>
+    <p:spTree>
+      <p:nvGrpSpPr>
+        <p:cNvPr id="1" name=""/>
+        <p:cNvGrpSpPr/>
+        <p:nvPr/>
+      </p:nvGrpSpPr>
+      <p:grpSpPr>
+        <a:xfrm>
+          <a:off x="0" y="0"/>
+          <a:ext cx="0" cy="0"/>
+          <a:chOff x="0" y="0"/>
+          <a:chExt cx="0" cy="0"/>
+        </a:xfrm>
+      </p:grpSpPr>
+      <p:sp>
+        <p:nvSpPr>
+          <p:cNvPr id="2" name="Title 1"/>
+          <p:cNvSpPr>
+            <a:spLocks noGrp="1"/>
+          </p:cNvSpPr>
+          <p:nvPr>
+            <p:ph type="title"/>
+          </p:nvPr>
+        </p:nvSpPr>
+        <p:spPr/>
+        <p:txBody>
+          <a:bodyPr/>
+          <a:lstStyle/>
+          <a:p>
+            <a:pPr lvl="0" indent="0" marL="0">
+              <a:buNone/>
+            </a:pPr>
+            <a:r>
+              <a:rPr/>
+              <a:t>Clone your repo into VS Codium</a:t>
+            </a:r>
+          </a:p>
+        </p:txBody>
+      </p:sp>
+      <p:sp>
+        <p:nvSpPr>
+          <p:cNvPr id="3" name="Content Placeholder 2"/>
+          <p:cNvSpPr>
+            <a:spLocks noGrp="1"/>
+          </p:cNvSpPr>
+          <p:nvPr>
+            <p:ph idx="1"/>
+          </p:nvPr>
+        </p:nvSpPr>
+        <p:spPr/>
+        <p:txBody>
+          <a:bodyPr/>
+          <a:lstStyle/>
+          <a:p>
+            <a:pPr lvl="0" indent="0" marL="0">
+              <a:buNone/>
+            </a:pPr>
+            <a:r>
+              <a:rPr/>
+              <a:t>On your repository page, click the green </a:t>
+            </a:r>
+            <a:r>
+              <a:rPr b="1"/>
+              <a:t>Code</a:t>
+            </a:r>
+            <a:r>
+              <a:rPr/>
+              <a:t> button and copy the </a:t>
+            </a:r>
+            <a:r>
+              <a:rPr b="1"/>
+              <a:t>HTTPS</a:t>
+            </a:r>
+            <a:r>
+              <a:rPr/>
+              <a:t> URL.</a:t>
+            </a:r>
+          </a:p>
+          <a:p>
+            <a:pPr lvl="0" indent="0" marL="0">
+              <a:buNone/>
+            </a:pPr>
+            <a:r>
+              <a:rPr/>
+              <a:t>VS Codium terminal</a:t>
+            </a:r>
+          </a:p>
+          <a:p>
+            <a:pPr lvl="0" indent="0">
+              <a:buNone/>
+            </a:pPr>
+            <a:r>
+              <a:rPr>
+                <a:solidFill>
+                  <a:srgbClr val="06287E"/>
+                </a:solidFill>
+                <a:latin typeface="Courier"/>
+              </a:rPr>
+              <a:t>git</a:t>
+            </a:r>
+            <a:r>
+              <a:rPr>
+                <a:latin typeface="Courier"/>
+              </a:rPr>
+              <a:t> clone https://github.com/YOUR-USERNAME/math60033a-gXX.git</a:t>
+            </a:r>
+            <a:br/>
+            <a:r>
+              <a:rPr>
+                <a:solidFill>
+                  <a:srgbClr val="008000"/>
+                </a:solidFill>
+                <a:latin typeface="Courier"/>
+              </a:rPr>
+              <a:t>cd</a:t>
+            </a:r>
+            <a:r>
+              <a:rPr>
+                <a:latin typeface="Courier"/>
+              </a:rPr>
+              <a:t> math60033a-gXX</a:t>
+            </a:r>
+          </a:p>
+          <a:p>
+            <a:pPr lvl="0" indent="0" marL="0">
+              <a:buNone/>
+            </a:pPr>
+            <a:r>
+              <a:rPr/>
+              <a:t>Then </a:t>
+            </a:r>
+            <a:r>
+              <a:rPr>
+                <a:latin typeface="Courier"/>
+              </a:rPr>
+              <a:t>File → Open Folder…</a:t>
+            </a:r>
+            <a:r>
+              <a:rPr/>
+              <a:t> and choose that folder.</a:t>
+            </a:r>
+          </a:p>
+          <a:p>
+            <a:pPr lvl="0" indent="0" marL="0">
+              <a:buNone/>
+            </a:pPr>
+            <a:r>
+              <a:rPr b="1"/>
+              <a:t>Check.</a:t>
+            </a:r>
+            <a:r>
+              <a:rPr/>
+              <a:t> The Explorer shows </a:t>
+            </a:r>
+            <a:r>
+              <a:rPr>
+                <a:latin typeface="Courier"/>
+              </a:rPr>
+              <a:t>README.md</a:t>
+            </a:r>
+            <a:r>
+              <a:rPr/>
+              <a:t>, and the bottom-left of the window shows the branch name </a:t>
+            </a:r>
+            <a:r>
+              <a:rPr>
+                <a:latin typeface="Courier"/>
+              </a:rPr>
+              <a:t>main</a:t>
+            </a:r>
+            <a:r>
+              <a:rPr/>
+              <a:t>.</a:t>
+            </a:r>
+          </a:p>
+        </p:txBody>
+      </p:sp>
+    </p:spTree>
+  </p:cSld>
+</p:sld>
+</file>
+
+<file path=ppt/slides/slide46.xml><?xml version="1.0" encoding="utf-8"?>
+<p:sld xmlns:a="http://schemas.openxmlformats.org/drawingml/2006/main" xmlns:r="http://schemas.openxmlformats.org/officeDocument/2006/relationships" xmlns:p="http://schemas.openxmlformats.org/presentationml/2006/main">
+  <p:cSld>
+    <p:spTree>
+      <p:nvGrpSpPr>
+        <p:cNvPr id="1" name=""/>
+        <p:cNvGrpSpPr/>
+        <p:nvPr/>
+      </p:nvGrpSpPr>
+      <p:grpSpPr>
+        <a:xfrm>
+          <a:off x="0" y="0"/>
+          <a:ext cx="0" cy="0"/>
+          <a:chOff x="0" y="0"/>
+          <a:chExt cx="0" cy="0"/>
+        </a:xfrm>
+      </p:grpSpPr>
+      <p:sp>
+        <p:nvSpPr>
+          <p:cNvPr id="2" name="Title 1"/>
+          <p:cNvSpPr>
+            <a:spLocks noGrp="1"/>
+          </p:cNvSpPr>
+          <p:nvPr>
+            <p:ph type="title"/>
+          </p:nvPr>
+        </p:nvSpPr>
+        <p:spPr/>
+        <p:txBody>
+          <a:bodyPr/>
+          <a:lstStyle/>
+          <a:p>
+            <a:pPr lvl="0" indent="0" marL="0">
+              <a:buNone/>
+            </a:pPr>
+            <a:r>
+              <a:rPr/>
+              <a:t>Your password will not work</a:t>
+            </a:r>
+          </a:p>
+        </p:txBody>
+      </p:sp>
+      <p:sp>
+        <p:nvSpPr>
+          <p:cNvPr id="3" name="Content Placeholder 2"/>
+          <p:cNvSpPr>
+            <a:spLocks noGrp="1"/>
+          </p:cNvSpPr>
+          <p:nvPr>
+            <p:ph idx="1"/>
+          </p:nvPr>
+        </p:nvSpPr>
+        <p:spPr/>
+        <p:txBody>
+          <a:bodyPr/>
+          <a:lstStyle/>
+          <a:p>
+            <a:pPr lvl="0" indent="0" marL="0">
+              <a:buNone/>
+            </a:pPr>
+            <a:r>
+              <a:rPr/>
+              <a:t>When you first push, GitHub asks for credentials — and </a:t>
+            </a:r>
+            <a:r>
+              <a:rPr b="1"/>
+              <a:t>rejects your account password</a:t>
+            </a:r>
+            <a:r>
+              <a:rPr/>
+              <a:t>. It wants a </a:t>
+            </a:r>
+            <a:r>
+              <a:rPr i="1"/>
+              <a:t>token</a:t>
+            </a:r>
+            <a:r>
+              <a:rPr/>
+              <a:t>.</a:t>
+            </a:r>
+          </a:p>
+          <a:p>
+            <a:pPr lvl="0" indent="-342900" marL="342900">
+              <a:buAutoNum type="arabicPeriod"/>
+            </a:pPr>
+            <a:r>
+              <a:rPr/>
+              <a:t>github.com → your avatar → </a:t>
+            </a:r>
+            <a:r>
+              <a:rPr b="1"/>
+              <a:t>Settings</a:t>
+            </a:r>
+          </a:p>
+          <a:p>
+            <a:pPr lvl="0" indent="-342900" marL="342900">
+              <a:buAutoNum type="arabicPeriod"/>
+            </a:pPr>
+            <a:r>
+              <a:rPr b="1"/>
+              <a:t>Developer settings</a:t>
+            </a:r>
+            <a:r>
+              <a:rPr/>
+              <a:t> → </a:t>
+            </a:r>
+            <a:r>
+              <a:rPr b="1"/>
+              <a:t>Personal access tokens</a:t>
+            </a:r>
+            <a:r>
+              <a:rPr/>
+              <a:t> → </a:t>
+            </a:r>
+            <a:r>
+              <a:rPr b="1"/>
+              <a:t>Tokens (classic)</a:t>
+            </a:r>
+          </a:p>
+          <a:p>
+            <a:pPr lvl="0" indent="-342900" marL="342900">
+              <a:buAutoNum type="arabicPeriod"/>
+            </a:pPr>
+            <a:r>
+              <a:rPr b="1"/>
+              <a:t>Generate new token</a:t>
+            </a:r>
+            <a:r>
+              <a:rPr/>
+              <a:t>, tick the </a:t>
+            </a:r>
+            <a:r>
+              <a:rPr b="1">
+                <a:latin typeface="Courier"/>
+              </a:rPr>
+              <a:t>repo</a:t>
+            </a:r>
+            <a:r>
+              <a:rPr/>
+              <a:t> scope, set an expiry</a:t>
+            </a:r>
+          </a:p>
+        </p:txBody>
+      </p:sp>
+    </p:spTree>
+  </p:cSld>
+</p:sld>
+</file>
+
+<file path=ppt/slides/slide47.xml><?xml version="1.0" encoding="utf-8"?>
+<p:sld xmlns:a="http://schemas.openxmlformats.org/drawingml/2006/main" xmlns:r="http://schemas.openxmlformats.org/officeDocument/2006/relationships" xmlns:p="http://schemas.openxmlformats.org/presentationml/2006/main">
+  <p:cSld>
+    <p:spTree>
+      <p:nvGrpSpPr>
+        <p:cNvPr id="1" name=""/>
+        <p:cNvGrpSpPr/>
+        <p:nvPr/>
+      </p:nvGrpSpPr>
+      <p:grpSpPr>
+        <a:xfrm>
+          <a:off x="0" y="0"/>
+          <a:ext cx="0" cy="0"/>
+          <a:chOff x="0" y="0"/>
+          <a:chExt cx="0" cy="0"/>
+        </a:xfrm>
+      </p:grpSpPr>
+      <p:sp>
+        <p:nvSpPr>
+          <p:cNvPr id="2" name="Title 1"/>
+          <p:cNvSpPr>
+            <a:spLocks noGrp="1"/>
+          </p:cNvSpPr>
+          <p:nvPr>
+            <p:ph type="title"/>
+          </p:nvPr>
+        </p:nvSpPr>
+        <p:spPr/>
+        <p:txBody>
+          <a:bodyPr/>
+          <a:lstStyle/>
+          <a:p>
+            <a:pPr lvl="0" indent="0" marL="0">
+              <a:buNone/>
+            </a:pPr>
+            <a:r>
+              <a:rPr/>
+              <a:t>Using the token</a:t>
+            </a:r>
+          </a:p>
+        </p:txBody>
+      </p:sp>
+      <p:sp>
+        <p:nvSpPr>
+          <p:cNvPr id="3" name="Content Placeholder 2"/>
+          <p:cNvSpPr>
+            <a:spLocks noGrp="1"/>
+          </p:cNvSpPr>
+          <p:nvPr>
+            <p:ph idx="1"/>
+          </p:nvPr>
+        </p:nvSpPr>
+        <p:spPr/>
+        <p:txBody>
+          <a:bodyPr/>
+          <a:lstStyle/>
+          <a:p>
+            <a:pPr lvl="0" indent="-342900" marL="342900">
+              <a:buAutoNum startAt="4" type="arabicPeriod"/>
+            </a:pPr>
+            <a:r>
+              <a:rPr/>
+              <a:t>Copy the token — </a:t>
+            </a:r>
+            <a:r>
+              <a:rPr b="1"/>
+              <a:t>it is shown once</a:t>
+            </a:r>
+          </a:p>
+          <a:p>
+            <a:pPr lvl="0" indent="-342900" marL="342900">
+              <a:buAutoNum startAt="4" type="arabicPeriod"/>
+            </a:pPr>
+            <a:r>
+              <a:rPr/>
+              <a:t>Paste it when git asks for your </a:t>
+            </a:r>
+            <a:r>
+              <a:rPr i="1"/>
+              <a:t>password</a:t>
+            </a:r>
+          </a:p>
+          <a:p>
+            <a:pPr lvl="0" indent="0">
+              <a:buNone/>
+            </a:pPr>
+            <a:r>
+              <a:rPr>
+                <a:solidFill>
+                  <a:srgbClr val="06287E"/>
+                </a:solidFill>
+                <a:latin typeface="Courier"/>
+              </a:rPr>
+              <a:t>git</a:t>
+            </a:r>
+            <a:r>
+              <a:rPr>
+                <a:latin typeface="Courier"/>
+              </a:rPr>
+              <a:t> config </a:t>
+            </a:r>
+            <a:r>
+              <a:rPr>
+                <a:solidFill>
+                  <a:srgbClr val="7D9029"/>
+                </a:solidFill>
+                <a:latin typeface="Courier"/>
+              </a:rPr>
+              <a:t>--global</a:t>
+            </a:r>
+            <a:r>
+              <a:rPr>
+                <a:latin typeface="Courier"/>
+              </a:rPr>
+              <a:t> credential.helper store</a:t>
+            </a:r>
+          </a:p>
+          <a:p>
+            <a:pPr lvl="0" indent="0" marL="0">
+              <a:buNone/>
+            </a:pPr>
+            <a:r>
+              <a:rPr/>
+              <a:t>Stores it, so you are asked only once.</a:t>
+            </a:r>
+          </a:p>
+        </p:txBody>
+      </p:sp>
+    </p:spTree>
+  </p:cSld>
+</p:sld>
+</file>
+
+<file path=ppt/slides/slide48.xml><?xml version="1.0" encoding="utf-8"?>
+<p:sld xmlns:a="http://schemas.openxmlformats.org/drawingml/2006/main" xmlns:r="http://schemas.openxmlformats.org/officeDocument/2006/relationships" xmlns:p="http://schemas.openxmlformats.org/presentationml/2006/main">
+  <p:cSld>
+    <p:spTree>
+      <p:nvGrpSpPr>
+        <p:cNvPr id="1" name=""/>
+        <p:cNvGrpSpPr/>
+        <p:nvPr/>
+      </p:nvGrpSpPr>
+      <p:grpSpPr>
+        <a:xfrm>
+          <a:off x="0" y="0"/>
+          <a:ext cx="0" cy="0"/>
+          <a:chOff x="0" y="0"/>
+          <a:chExt cx="0" cy="0"/>
+        </a:xfrm>
+      </p:grpSpPr>
+      <p:sp>
+        <p:nvSpPr>
+          <p:cNvPr id="2" name="Title 1"/>
+          <p:cNvSpPr>
+            <a:spLocks noGrp="1"/>
+          </p:cNvSpPr>
+          <p:nvPr>
+            <p:ph type="title"/>
+          </p:nvPr>
+        </p:nvSpPr>
+        <p:spPr/>
+        <p:txBody>
+          <a:bodyPr/>
+          <a:lstStyle/>
+          <a:p>
+            <a:pPr lvl="0" indent="0" marL="0">
+              <a:buNone/>
+            </a:pPr>
+            <a:r>
+              <a:rPr/>
+              <a:t>The round trip</a:t>
+            </a:r>
+          </a:p>
+        </p:txBody>
+      </p:sp>
+      <p:sp>
+        <p:nvSpPr>
+          <p:cNvPr id="3" name="Content Placeholder 2"/>
+          <p:cNvSpPr>
+            <a:spLocks noGrp="1"/>
+          </p:cNvSpPr>
+          <p:nvPr>
+            <p:ph idx="1"/>
+          </p:nvPr>
+        </p:nvSpPr>
+        <p:spPr/>
+        <p:txBody>
+          <a:bodyPr/>
+          <a:lstStyle/>
+          <a:p>
+            <a:pPr lvl="0" indent="0" marL="0">
+              <a:buNone/>
+            </a:pPr>
+            <a:r>
+              <a:rPr/>
+              <a:t>VS Codium terminal</a:t>
+            </a:r>
+          </a:p>
+          <a:p>
+            <a:pPr lvl="0" indent="0">
+              <a:buNone/>
+            </a:pPr>
+            <a:r>
+              <a:rPr>
+                <a:solidFill>
+                  <a:srgbClr val="008000"/>
+                </a:solidFill>
+                <a:latin typeface="Courier"/>
+              </a:rPr>
+              <a:t>echo</a:t>
+            </a:r>
+            <a:r>
+              <a:rPr>
+                <a:latin typeface="Courier"/>
+              </a:rPr>
+              <a:t> </a:t>
+            </a:r>
+            <a:r>
+              <a:rPr>
+                <a:solidFill>
+                  <a:srgbClr val="4070A0"/>
+                </a:solidFill>
+                <a:latin typeface="Courier"/>
+              </a:rPr>
+              <a:t>"# Group XX — MATH60033A"</a:t>
+            </a:r>
+            <a:r>
+              <a:rPr>
+                <a:latin typeface="Courier"/>
+              </a:rPr>
+              <a:t> </a:t>
+            </a:r>
+            <a:r>
+              <a:rPr>
+                <a:solidFill>
+                  <a:srgbClr val="666666"/>
+                </a:solidFill>
+                <a:latin typeface="Courier"/>
+              </a:rPr>
+              <a:t>&gt;&gt;</a:t>
+            </a:r>
+            <a:r>
+              <a:rPr>
+                <a:latin typeface="Courier"/>
+              </a:rPr>
+              <a:t> README.md</a:t>
+            </a:r>
+            <a:br/>
+            <a:r>
+              <a:rPr>
+                <a:solidFill>
+                  <a:srgbClr val="06287E"/>
+                </a:solidFill>
+                <a:latin typeface="Courier"/>
+              </a:rPr>
+              <a:t>git</a:t>
+            </a:r>
+            <a:r>
+              <a:rPr>
+                <a:latin typeface="Courier"/>
+              </a:rPr>
+              <a:t> add README.md</a:t>
+            </a:r>
+            <a:br/>
+            <a:r>
+              <a:rPr>
+                <a:solidFill>
+                  <a:srgbClr val="06287E"/>
+                </a:solidFill>
+                <a:latin typeface="Courier"/>
+              </a:rPr>
+              <a:t>git</a:t>
+            </a:r>
+            <a:r>
+              <a:rPr>
+                <a:latin typeface="Courier"/>
+              </a:rPr>
+              <a:t> commit </a:t>
+            </a:r>
+            <a:r>
+              <a:rPr>
+                <a:solidFill>
+                  <a:srgbClr val="7D9029"/>
+                </a:solidFill>
+                <a:latin typeface="Courier"/>
+              </a:rPr>
+              <a:t>-m</a:t>
+            </a:r>
+            <a:r>
+              <a:rPr>
+                <a:latin typeface="Courier"/>
+              </a:rPr>
+              <a:t> </a:t>
+            </a:r>
+            <a:r>
+              <a:rPr>
+                <a:solidFill>
+                  <a:srgbClr val="4070A0"/>
+                </a:solidFill>
+                <a:latin typeface="Courier"/>
+              </a:rPr>
+              <a:t>"Start the group log"</a:t>
+            </a:r>
+            <a:br/>
+            <a:r>
+              <a:rPr>
+                <a:solidFill>
+                  <a:srgbClr val="06287E"/>
+                </a:solidFill>
+                <a:latin typeface="Courier"/>
+              </a:rPr>
+              <a:t>git</a:t>
+            </a:r>
+            <a:r>
+              <a:rPr>
+                <a:latin typeface="Courier"/>
+              </a:rPr>
+              <a:t> push</a:t>
+            </a:r>
+          </a:p>
+          <a:p>
+            <a:pPr lvl="0" indent="0" marL="0">
+              <a:buNone/>
+            </a:pPr>
+            <a:r>
+              <a:rPr/>
+              <a:t>Refresh your repository page in the browser. Your line is there.</a:t>
+            </a:r>
+          </a:p>
+          <a:p>
+            <a:pPr lvl="0" indent="0" marL="0">
+              <a:buNone/>
+            </a:pPr>
+            <a:r>
+              <a:rPr b="1"/>
+              <a:t>Check.</a:t>
+            </a:r>
+            <a:r>
+              <a:rPr/>
+              <a:t> You have now completed the full loop: edit locally → commit → push → visible on GitHub. Everything else this term is a variation on that loop.</a:t>
+            </a:r>
+          </a:p>
+        </p:txBody>
+      </p:sp>
+    </p:spTree>
+  </p:cSld>
+</p:sld>
+</file>
+
+<file path=ppt/slides/slide49.xml><?xml version="1.0" encoding="utf-8"?>
+<p:sld xmlns:a="http://schemas.openxmlformats.org/drawingml/2006/main" xmlns:r="http://schemas.openxmlformats.org/officeDocument/2006/relationships" xmlns:p="http://schemas.openxmlformats.org/presentationml/2006/main">
+  <p:cSld>
+    <p:spTree>
+      <p:nvGrpSpPr>
+        <p:cNvPr id="1" name=""/>
+        <p:cNvGrpSpPr/>
+        <p:nvPr/>
+      </p:nvGrpSpPr>
+      <p:grpSpPr>
+        <a:xfrm>
+          <a:off x="0" y="0"/>
+          <a:ext cx="0" cy="0"/>
+          <a:chOff x="0" y="0"/>
+          <a:chExt cx="0" cy="0"/>
+        </a:xfrm>
+      </p:grpSpPr>
+      <p:sp>
+        <p:nvSpPr>
+          <p:cNvPr id="2" name="Title 1"/>
+          <p:cNvSpPr>
+            <a:spLocks noGrp="1"/>
+          </p:cNvSpPr>
+          <p:nvPr>
+            <p:ph type="title"/>
+          </p:nvPr>
+        </p:nvSpPr>
+        <p:spPr>
+          <a:xfrm>
+            <a:off x="722313" y="3305176"/>
+            <a:ext cx="7772400" cy="1021556"/>
+          </a:xfrm>
+        </p:spPr>
+        <p:txBody>
+          <a:bodyPr/>
+          <a:lstStyle/>
+          <a:p>
+            <a:pPr lvl="0" indent="0" marL="0">
+              <a:buNone/>
+            </a:pPr>
+            <a:r>
+              <a:rPr/>
+              <a:t>The worked example</a:t>
+            </a:r>
+          </a:p>
+        </p:txBody>
+      </p:sp>
+    </p:spTree>
+  </p:cSld>
+</p:sld>
+</file>
+
+<file path=ppt/slides/slide5.xml><?xml version="1.0" encoding="utf-8"?>
+<p:sld xmlns:a="http://schemas.openxmlformats.org/drawingml/2006/main" xmlns:r="http://schemas.openxmlformats.org/officeDocument/2006/relationships" xmlns:p="http://schemas.openxmlformats.org/presentationml/2006/main">
+  <p:cSld>
+    <p:spTree>
+      <p:nvGrpSpPr>
+        <p:cNvPr id="1" name=""/>
+        <p:cNvGrpSpPr/>
+        <p:nvPr/>
+      </p:nvGrpSpPr>
+      <p:grpSpPr>
+        <a:xfrm>
+          <a:off x="0" y="0"/>
+          <a:ext cx="0" cy="0"/>
+          <a:chOff x="0" y="0"/>
+          <a:chExt cx="0" cy="0"/>
+        </a:xfrm>
+      </p:grpSpPr>
+      <p:sp>
+        <p:nvSpPr>
+          <p:cNvPr id="2" name="Title 1"/>
+          <p:cNvSpPr>
+            <a:spLocks noGrp="1"/>
+          </p:cNvSpPr>
+          <p:nvPr>
+            <p:ph type="title"/>
+          </p:nvPr>
+        </p:nvSpPr>
+        <p:spPr>
+          <a:xfrm>
+            <a:off x="457201" y="204787"/>
+            <a:ext cx="3008313" cy="871538"/>
+          </a:xfrm>
+        </p:spPr>
+        <p:txBody>
+          <a:bodyPr/>
+          <a:lstStyle/>
+          <a:p>
+            <a:pPr lvl="0" indent="0" marL="0">
+              <a:buNone/>
+            </a:pPr>
+            <a:r>
+              <a:rPr/>
+              <a:t>What this session’s pre-work is</a:t>
+            </a:r>
+          </a:p>
+        </p:txBody>
+      </p:sp>
+      <p:sp>
+        <p:nvSpPr>
+          <p:cNvPr id="4" name="Text Placeholder 3"/>
+          <p:cNvSpPr>
+            <a:spLocks noGrp="1"/>
+          </p:cNvSpPr>
+          <p:nvPr>
+            <p:ph idx="2" sz="half" type="body"/>
+          </p:nvPr>
+        </p:nvSpPr>
+        <p:spPr/>
+        <p:txBody>
+          <a:bodyPr/>
+          <a:lstStyle/>
+          <a:p>
+            <a:pPr lvl="0" indent="0" marL="0">
+              <a:buNone/>
+            </a:pPr>
+            <a:r>
+              <a:rPr/>
+              <a:t>Four things, before you arrive:</a:t>
+            </a:r>
+          </a:p>
+        </p:txBody>
+      </p:sp>
+      <p:graphicFrame>
+        <p:nvGraphicFramePr>
+          <p:cNvPr id="6" name="Content Placeholder 5"/>
+          <p:cNvGraphicFramePr>
+            <a:graphicFrameLocks noGrp="1"/>
+          </p:cNvGraphicFramePr>
+          <p:nvPr>
+            <p:ph idx="1"/>
+          </p:nvPr>
+        </p:nvGraphicFramePr>
+        <p:xfrm>
+          <a:off x="3568700" y="203200"/>
+          <a:ext cx="5105400" cy="4381500"/>
+        </p:xfrm>
+        <a:graphic>
+          <a:graphicData uri="http://schemas.openxmlformats.org/drawingml/2006/table">
+            <a:tbl>
+              <a:tblPr firstRow="1" bandRow="1">
+                <a:tableStyleId>{5C22544A-7EE6-4342-B048-85BDC9FD1C3A}</a:tableStyleId>
+              </a:tblPr>
+              <a:tblGrid>
+                <a:gridCol w="1701800"/>
+                <a:gridCol w="1701800"/>
+                <a:gridCol w="1701800"/>
+              </a:tblGrid>
+              <a:tr h="0">
+                <a:tc>
+                  <a:txBody>
+                    <a:bodyPr/>
+                    <a:lstStyle/>
+                    <a:p>
+                      <a:pPr lvl="0" indent="0" marL="0">
+                        <a:buNone/>
+                      </a:pPr>
+                      <a:r>
+                        <a:rPr/>
+                        <a:t>#</a:t>
+                      </a:r>
+                    </a:p>
+                  </a:txBody>
+                  <a:tcPr/>
+                </a:tc>
+                <a:tc>
+                  <a:txBody>
+                    <a:bodyPr/>
+                    <a:lstStyle/>
+                    <a:p>
+                      <a:pPr lvl="0" indent="0" marL="0">
+                        <a:buNone/>
+                      </a:pPr>
+                      <a:r>
+                        <a:rPr/>
+                        <a:t>Task</a:t>
+                      </a:r>
+                    </a:p>
+                  </a:txBody>
+                  <a:tcPr/>
+                </a:tc>
+                <a:tc>
+                  <a:txBody>
+                    <a:bodyPr/>
+                    <a:lstStyle/>
+                    <a:p>
+                      <a:pPr lvl="0" indent="0" marL="0">
+                        <a:buNone/>
+                      </a:pPr>
+                      <a:r>
+                        <a:rPr/>
+                        <a:t>Time</a:t>
+                      </a:r>
+                    </a:p>
+                  </a:txBody>
+                  <a:tcPr/>
+                </a:tc>
+              </a:tr>
+              <a:tr h="0">
+                <a:tc>
+                  <a:txBody>
+                    <a:bodyPr/>
+                    <a:lstStyle/>
+                    <a:p>
+                      <a:pPr lvl="0" indent="0" marL="0">
+                        <a:buNone/>
+                      </a:pPr>
+                      <a:r>
+                        <a:rPr/>
+                        <a:t>0</a:t>
+                      </a:r>
+                    </a:p>
+                  </a:txBody>
+                </a:tc>
+                <a:tc>
+                  <a:txBody>
+                    <a:bodyPr/>
+                    <a:lstStyle/>
+                    <a:p>
+                      <a:pPr lvl="0" indent="0" marL="0">
+                        <a:buNone/>
+                      </a:pPr>
+                      <a:r>
+                        <a:rPr b="1"/>
+                        <a:t>Build your workstation</a:t>
+                      </a:r>
+                      <a:r>
+                        <a:rPr/>
+                        <a:t> — these slides</a:t>
+                      </a:r>
+                    </a:p>
+                  </a:txBody>
+                </a:tc>
+                <a:tc>
+                  <a:txBody>
+                    <a:bodyPr/>
+                    <a:lstStyle/>
+                    <a:p>
+                      <a:pPr lvl="0" indent="0" marL="0">
+                        <a:buNone/>
+                      </a:pPr>
+                      <a:r>
+                        <a:rPr/>
+                        <a:t>60–90 min</a:t>
+                      </a:r>
+                    </a:p>
+                  </a:txBody>
+                </a:tc>
+              </a:tr>
+              <a:tr h="0">
+                <a:tc>
+                  <a:txBody>
+                    <a:bodyPr/>
+                    <a:lstStyle/>
+                    <a:p>
+                      <a:pPr lvl="0" indent="0" marL="0">
+                        <a:buNone/>
+                      </a:pPr>
+                      <a:r>
+                        <a:rPr/>
+                        <a:t>1</a:t>
+                      </a:r>
+                    </a:p>
+                  </a:txBody>
+                </a:tc>
+                <a:tc>
+                  <a:txBody>
+                    <a:bodyPr/>
+                    <a:lstStyle/>
+                    <a:p>
+                      <a:pPr lvl="0" indent="0" marL="0">
+                        <a:buNone/>
+                      </a:pPr>
+                      <a:r>
+                        <a:rPr/>
+                        <a:t>Read </a:t>
+                      </a:r>
+                      <a:r>
+                        <a:rPr i="1"/>
+                        <a:t>Europe 2031</a:t>
+                      </a:r>
+                    </a:p>
+                  </a:txBody>
+                </a:tc>
+                <a:tc>
+                  <a:txBody>
+                    <a:bodyPr/>
+                    <a:lstStyle/>
+                    <a:p>
+                      <a:pPr lvl="0" indent="0" marL="0">
+                        <a:buNone/>
+                      </a:pPr>
+                      <a:r>
+                        <a:rPr/>
+                        <a:t>30 min</a:t>
+                      </a:r>
+                    </a:p>
+                  </a:txBody>
+                </a:tc>
+              </a:tr>
+              <a:tr h="0">
+                <a:tc>
+                  <a:txBody>
+                    <a:bodyPr/>
+                    <a:lstStyle/>
+                    <a:p>
+                      <a:pPr lvl="0" indent="0" marL="0">
+                        <a:buNone/>
+                      </a:pPr>
+                      <a:r>
+                        <a:rPr/>
+                        <a:t>2</a:t>
+                      </a:r>
+                    </a:p>
+                  </a:txBody>
+                </a:tc>
+                <a:tc>
+                  <a:txBody>
+                    <a:bodyPr/>
+                    <a:lstStyle/>
+                    <a:p>
+                      <a:pPr lvl="0" indent="0" marL="0">
+                        <a:buNone/>
+                      </a:pPr>
+                      <a:r>
+                        <a:rPr/>
+                        <a:t>Review three concepts</a:t>
+                      </a:r>
+                    </a:p>
+                  </a:txBody>
+                </a:tc>
+                <a:tc>
+                  <a:txBody>
+                    <a:bodyPr/>
+                    <a:lstStyle/>
+                    <a:p>
+                      <a:pPr lvl="0" indent="0" marL="0">
+                        <a:buNone/>
+                      </a:pPr>
+                      <a:r>
+                        <a:rPr/>
+                        <a:t>15 min</a:t>
+                      </a:r>
+                    </a:p>
+                  </a:txBody>
+                </a:tc>
+              </a:tr>
+              <a:tr h="0">
+                <a:tc>
+                  <a:txBody>
+                    <a:bodyPr/>
+                    <a:lstStyle/>
+                    <a:p>
+                      <a:pPr lvl="0" indent="0" marL="0">
+                        <a:buNone/>
+                      </a:pPr>
+                      <a:r>
+                        <a:rPr/>
+                        <a:t>3</a:t>
+                      </a:r>
+                    </a:p>
+                  </a:txBody>
+                </a:tc>
+                <a:tc>
+                  <a:txBody>
+                    <a:bodyPr/>
+                    <a:lstStyle/>
+                    <a:p>
+                      <a:pPr lvl="0" indent="0" marL="0">
+                        <a:buNone/>
+                      </a:pPr>
+                      <a:r>
+                        <a:rPr/>
+                        <a:t>Run the verification script</a:t>
+                      </a:r>
+                    </a:p>
+                  </a:txBody>
+                </a:tc>
+                <a:tc>
+                  <a:txBody>
+                    <a:bodyPr/>
+                    <a:lstStyle/>
+                    <a:p>
+                      <a:pPr lvl="0" indent="0" marL="0">
+                        <a:buNone/>
+                      </a:pPr>
+                      <a:r>
+                        <a:rPr/>
+                        <a:t>5 min</a:t>
+                      </a:r>
+                    </a:p>
+                  </a:txBody>
+                </a:tc>
+              </a:tr>
+            </a:tbl>
+          </a:graphicData>
+        </a:graphic>
+      </p:graphicFrame>
+    </p:spTree>
+  </p:cSld>
+</p:sld>
+</file>
+
+<file path=ppt/slides/slide50.xml><?xml version="1.0" encoding="utf-8"?>
+<p:sld xmlns:a="http://schemas.openxmlformats.org/drawingml/2006/main" xmlns:r="http://schemas.openxmlformats.org/officeDocument/2006/relationships" xmlns:p="http://schemas.openxmlformats.org/presentationml/2006/main">
+  <p:cSld>
+    <p:spTree>
+      <p:nvGrpSpPr>
+        <p:cNvPr id="1" name=""/>
+        <p:cNvGrpSpPr/>
+        <p:nvPr/>
+      </p:nvGrpSpPr>
+      <p:grpSpPr>
+        <a:xfrm>
+          <a:off x="0" y="0"/>
+          <a:ext cx="0" cy="0"/>
+          <a:chOff x="0" y="0"/>
+          <a:chExt cx="0" cy="0"/>
+        </a:xfrm>
+      </p:grpSpPr>
+      <p:sp>
+        <p:nvSpPr>
+          <p:cNvPr id="2" name="Title 1"/>
+          <p:cNvSpPr>
+            <a:spLocks noGrp="1"/>
+          </p:cNvSpPr>
+          <p:nvPr>
+            <p:ph type="title"/>
+          </p:nvPr>
+        </p:nvSpPr>
+        <p:spPr/>
+        <p:txBody>
+          <a:bodyPr/>
+          <a:lstStyle/>
+          <a:p>
+            <a:pPr lvl="0" indent="0" marL="0">
+              <a:buNone/>
+            </a:pPr>
+            <a:r>
+              <a:rPr/>
+              <a:t>Two terminals</a:t>
+            </a:r>
+          </a:p>
+        </p:txBody>
+      </p:sp>
+      <p:sp>
+        <p:nvSpPr>
+          <p:cNvPr id="3" name="Content Placeholder 2"/>
+          <p:cNvSpPr>
+            <a:spLocks noGrp="1"/>
+          </p:cNvSpPr>
+          <p:nvPr>
+            <p:ph idx="1"/>
+          </p:nvPr>
+        </p:nvSpPr>
+        <p:spPr/>
+        <p:txBody>
+          <a:bodyPr/>
+          <a:lstStyle/>
+          <a:p>
+            <a:pPr lvl="0" indent="0" marL="0">
+              <a:buNone/>
+            </a:pPr>
+            <a:r>
+              <a:rPr b="1"/>
+              <a:t>Terminal 1</a:t>
+            </a:r>
+            <a:r>
+              <a:rPr/>
+              <a:t> — the model server, left running:</a:t>
+            </a:r>
+          </a:p>
+          <a:p>
+            <a:pPr lvl="0" indent="0" marL="0">
+              <a:buNone/>
+            </a:pPr>
+            <a:r>
+              <a:rPr/>
+              <a:t>VS Codium terminal 1</a:t>
+            </a:r>
+          </a:p>
+          <a:p>
+            <a:pPr lvl="0" indent="0">
+              <a:buNone/>
+            </a:pPr>
+            <a:r>
+              <a:rPr>
+                <a:solidFill>
+                  <a:srgbClr val="19177C"/>
+                </a:solidFill>
+                <a:latin typeface="Courier"/>
+              </a:rPr>
+              <a:t>OLLAMA_CONTEXT_LENGTH</a:t>
+            </a:r>
+            <a:r>
+              <a:rPr>
+                <a:solidFill>
+                  <a:srgbClr val="666666"/>
+                </a:solidFill>
+                <a:latin typeface="Courier"/>
+              </a:rPr>
+              <a:t>=</a:t>
+            </a:r>
+            <a:r>
+              <a:rPr>
+                <a:latin typeface="Courier"/>
+              </a:rPr>
+              <a:t>8192 ollama serve</a:t>
+            </a:r>
+          </a:p>
+          <a:p>
+            <a:pPr lvl="0" indent="0" marL="0">
+              <a:buNone/>
+            </a:pPr>
+            <a:r>
+              <a:rPr b="1"/>
+              <a:t>Terminal 2</a:t>
+            </a:r>
+            <a:r>
+              <a:rPr/>
+              <a:t> — inside your repository:</a:t>
+            </a:r>
+          </a:p>
+          <a:p>
+            <a:pPr lvl="0" indent="0" marL="0">
+              <a:buNone/>
+            </a:pPr>
+            <a:r>
+              <a:rPr/>
+              <a:t>VS Codium terminal 2</a:t>
+            </a:r>
+          </a:p>
+          <a:p>
+            <a:pPr lvl="0" indent="0">
+              <a:buNone/>
+            </a:pPr>
+            <a:r>
+              <a:rPr>
+                <a:solidFill>
+                  <a:srgbClr val="008000"/>
+                </a:solidFill>
+                <a:latin typeface="Courier"/>
+              </a:rPr>
+              <a:t>cd</a:t>
+            </a:r>
+            <a:r>
+              <a:rPr>
+                <a:latin typeface="Courier"/>
+              </a:rPr>
+              <a:t> math60033a-gXX</a:t>
+            </a:r>
+            <a:br/>
+            <a:r>
+              <a:rPr>
+                <a:solidFill>
+                  <a:srgbClr val="008000"/>
+                </a:solidFill>
+                <a:latin typeface="Courier"/>
+              </a:rPr>
+              <a:t>source</a:t>
+            </a:r>
+            <a:r>
+              <a:rPr>
+                <a:latin typeface="Courier"/>
+              </a:rPr>
+              <a:t> .venv/bin/activate</a:t>
+            </a:r>
+            <a:br/>
+            <a:r>
+              <a:rPr>
+                <a:latin typeface="Courier"/>
+              </a:rPr>
+              <a:t>aider </a:t>
+            </a:r>
+            <a:r>
+              <a:rPr>
+                <a:solidFill>
+                  <a:srgbClr val="7D9029"/>
+                </a:solidFill>
+                <a:latin typeface="Courier"/>
+              </a:rPr>
+              <a:t>--model</a:t>
+            </a:r>
+            <a:r>
+              <a:rPr>
+                <a:latin typeface="Courier"/>
+              </a:rPr>
+              <a:t> ollama_chat/qwen2.5-coder:7b</a:t>
+            </a:r>
+          </a:p>
+        </p:txBody>
+      </p:sp>
+    </p:spTree>
+  </p:cSld>
+</p:sld>
+</file>
+
+<file path=ppt/slides/slide51.xml><?xml version="1.0" encoding="utf-8"?>
+<p:sld xmlns:a="http://schemas.openxmlformats.org/drawingml/2006/main" xmlns:r="http://schemas.openxmlformats.org/officeDocument/2006/relationships" xmlns:p="http://schemas.openxmlformats.org/presentationml/2006/main">
+  <p:cSld>
+    <p:spTree>
+      <p:nvGrpSpPr>
+        <p:cNvPr id="1" name=""/>
+        <p:cNvGrpSpPr/>
+        <p:nvPr/>
+      </p:nvGrpSpPr>
+      <p:grpSpPr>
+        <a:xfrm>
+          <a:off x="0" y="0"/>
+          <a:ext cx="0" cy="0"/>
+          <a:chOff x="0" y="0"/>
+          <a:chExt cx="0" cy="0"/>
+        </a:xfrm>
+      </p:grpSpPr>
+      <p:sp>
+        <p:nvSpPr>
+          <p:cNvPr id="2" name="Title 1"/>
+          <p:cNvSpPr>
+            <a:spLocks noGrp="1"/>
+          </p:cNvSpPr>
+          <p:nvPr>
+            <p:ph type="title"/>
+          </p:nvPr>
+        </p:nvSpPr>
+        <p:spPr/>
+        <p:txBody>
+          <a:bodyPr/>
+          <a:lstStyle/>
+          <a:p>
+            <a:pPr lvl="0" indent="0" marL="0">
+              <a:buNone/>
+            </a:pPr>
+            <a:r>
+              <a:rPr/>
+              <a:t>Ask for something real</a:t>
+            </a:r>
+          </a:p>
+        </p:txBody>
+      </p:sp>
+      <p:sp>
+        <p:nvSpPr>
+          <p:cNvPr id="3" name="Content Placeholder 2"/>
+          <p:cNvSpPr>
+            <a:spLocks noGrp="1"/>
+          </p:cNvSpPr>
+          <p:nvPr>
+            <p:ph idx="1"/>
+          </p:nvPr>
+        </p:nvSpPr>
+        <p:spPr/>
+        <p:txBody>
+          <a:bodyPr/>
+          <a:lstStyle/>
+          <a:p>
+            <a:pPr lvl="0" indent="0" marL="0">
+              <a:buNone/>
+            </a:pPr>
+            <a:r>
+              <a:rPr/>
+              <a:t>At the aider prompt</a:t>
+            </a:r>
+          </a:p>
+          <a:p>
+            <a:pPr lvl="0" indent="0">
+              <a:buNone/>
+            </a:pPr>
+            <a:r>
+              <a:rPr>
+                <a:latin typeface="Courier"/>
+              </a:rPr>
+              <a:t>&gt; create explore.py that loads data/spine/core.parquet,
+  prints the shape, and shows mean gdp_pc_eur by year</a:t>
+            </a:r>
+          </a:p>
+          <a:p>
+            <a:pPr lvl="0" indent="0" marL="0">
+              <a:buNone/>
+            </a:pPr>
+            <a:r>
+              <a:rPr/>
+              <a:t>aider proposes a diff. You read it. You accept it.</a:t>
+            </a:r>
+          </a:p>
+          <a:p>
+            <a:pPr lvl="0" indent="0">
+              <a:buNone/>
+            </a:pPr>
+            <a:r>
+              <a:rPr>
+                <a:latin typeface="Courier"/>
+              </a:rPr>
+              <a:t>python explore.py</a:t>
+            </a:r>
+            <a:br/>
+            <a:r>
+              <a:rPr>
+                <a:solidFill>
+                  <a:srgbClr val="06287E"/>
+                </a:solidFill>
+                <a:latin typeface="Courier"/>
+              </a:rPr>
+              <a:t>git</a:t>
+            </a:r>
+            <a:r>
+              <a:rPr>
+                <a:latin typeface="Courier"/>
+              </a:rPr>
+              <a:t> push</a:t>
+            </a:r>
+          </a:p>
+        </p:txBody>
+      </p:sp>
+    </p:spTree>
+  </p:cSld>
+</p:sld>
+</file>
+
+<file path=ppt/slides/slide52.xml><?xml version="1.0" encoding="utf-8"?>
+<p:sld xmlns:a="http://schemas.openxmlformats.org/drawingml/2006/main" xmlns:r="http://schemas.openxmlformats.org/officeDocument/2006/relationships" xmlns:p="http://schemas.openxmlformats.org/presentationml/2006/main">
+  <p:cSld>
+    <p:spTree>
+      <p:nvGrpSpPr>
+        <p:cNvPr id="1" name=""/>
+        <p:cNvGrpSpPr/>
+        <p:nvPr/>
+      </p:nvGrpSpPr>
+      <p:grpSpPr>
+        <a:xfrm>
+          <a:off x="0" y="0"/>
+          <a:ext cx="0" cy="0"/>
+          <a:chOff x="0" y="0"/>
+          <a:chExt cx="0" cy="0"/>
+        </a:xfrm>
+      </p:grpSpPr>
+      <p:sp>
+        <p:nvSpPr>
+          <p:cNvPr id="2" name="Title 1"/>
+          <p:cNvSpPr>
+            <a:spLocks noGrp="1"/>
+          </p:cNvSpPr>
+          <p:nvPr>
+            <p:ph type="title"/>
+          </p:nvPr>
+        </p:nvSpPr>
+        <p:spPr/>
+        <p:txBody>
+          <a:bodyPr/>
+          <a:lstStyle/>
+          <a:p>
+            <a:pPr lvl="0" indent="0" marL="0">
+              <a:buNone/>
+            </a:pPr>
+            <a:r>
+              <a:rPr/>
+              <a:t>What just happened</a:t>
+            </a:r>
+          </a:p>
+        </p:txBody>
+      </p:sp>
+      <p:sp>
+        <p:nvSpPr>
+          <p:cNvPr id="3" name="Content Placeholder 2"/>
+          <p:cNvSpPr>
+            <a:spLocks noGrp="1"/>
+          </p:cNvSpPr>
+          <p:nvPr>
+            <p:ph idx="1"/>
+          </p:nvPr>
+        </p:nvSpPr>
+        <p:spPr/>
+        <p:txBody>
+          <a:bodyPr/>
+          <a:lstStyle/>
+          <a:p>
+            <a:pPr lvl="0" indent="0" marL="0">
+              <a:buNone/>
+            </a:pPr>
+            <a:r>
+              <a:rPr/>
+              <a:t>You ran a model </a:t>
+            </a:r>
+            <a:r>
+              <a:rPr b="1"/>
+              <a:t>on your own hardware</a:t>
+            </a:r>
+            <a:r>
+              <a:rPr/>
+              <a:t>, had it write code against real data, reviewed the change, committed it under your name, and published it — </a:t>
+            </a:r>
+            <a:r>
+              <a:rPr b="1"/>
+              <a:t>without sending one byte to anyone’s API.</a:t>
+            </a:r>
+          </a:p>
+          <a:p>
+            <a:pPr lvl="0" indent="0" marL="0">
+              <a:buNone/>
+            </a:pPr>
+            <a:r>
+              <a:rPr/>
+              <a:t>Every lab this term is a variation on those two terminals.</a:t>
+            </a:r>
+          </a:p>
+        </p:txBody>
+      </p:sp>
+    </p:spTree>
+  </p:cSld>
+</p:sld>
+</file>
+
+<file path=ppt/slides/slide53.xml><?xml version="1.0" encoding="utf-8"?>
+<p:sld xmlns:a="http://schemas.openxmlformats.org/drawingml/2006/main" xmlns:r="http://schemas.openxmlformats.org/officeDocument/2006/relationships" xmlns:p="http://schemas.openxmlformats.org/presentationml/2006/main">
+  <p:cSld>
+    <p:spTree>
+      <p:nvGrpSpPr>
+        <p:cNvPr id="1" name=""/>
+        <p:cNvGrpSpPr/>
+        <p:nvPr/>
+      </p:nvGrpSpPr>
+      <p:grpSpPr>
+        <a:xfrm>
+          <a:off x="0" y="0"/>
+          <a:ext cx="0" cy="0"/>
+          <a:chOff x="0" y="0"/>
+          <a:chExt cx="0" cy="0"/>
+        </a:xfrm>
+      </p:grpSpPr>
+      <p:sp>
+        <p:nvSpPr>
+          <p:cNvPr id="2" name="Title 1"/>
+          <p:cNvSpPr>
+            <a:spLocks noGrp="1"/>
+          </p:cNvSpPr>
+          <p:nvPr>
+            <p:ph type="title"/>
+          </p:nvPr>
+        </p:nvSpPr>
+        <p:spPr/>
+        <p:txBody>
+          <a:bodyPr/>
+          <a:lstStyle/>
+          <a:p>
+            <a:pPr lvl="0" indent="0" marL="0">
+              <a:buNone/>
+            </a:pPr>
+            <a:r>
+              <a:rPr/>
+              <a:t>Why we do it this way</a:t>
+            </a:r>
+          </a:p>
+        </p:txBody>
+      </p:sp>
+      <p:sp>
+        <p:nvSpPr>
+          <p:cNvPr id="3" name="Content Placeholder 2"/>
+          <p:cNvSpPr>
+            <a:spLocks noGrp="1"/>
+          </p:cNvSpPr>
+          <p:nvPr>
+            <p:ph idx="1"/>
+          </p:nvPr>
+        </p:nvSpPr>
+        <p:spPr/>
+        <p:txBody>
+          <a:bodyPr/>
+          <a:lstStyle/>
+          <a:p>
+            <a:pPr lvl="0"/>
+            <a:r>
+              <a:rPr b="1"/>
+              <a:t>The data stay put.</a:t>
+            </a:r>
+            <a:r>
+              <a:rPr/>
+              <a:t> Some of what you use this term cannot legally be uploaded.</a:t>
+            </a:r>
+          </a:p>
+          <a:p>
+            <a:pPr lvl="0"/>
+            <a:r>
+              <a:rPr b="1"/>
+              <a:t>The cost is zero.</a:t>
+            </a:r>
+            <a:r>
+              <a:rPr/>
+              <a:t> No key, no quota, no bill at the end of the month.</a:t>
+            </a:r>
+          </a:p>
+          <a:p>
+            <a:pPr lvl="0"/>
+            <a:r>
+              <a:rPr b="1"/>
+              <a:t>The record is honest.</a:t>
+            </a:r>
+            <a:r>
+              <a:rPr/>
+              <a:t> Commits carry your name; the diff carries the reasoning.</a:t>
+            </a:r>
+          </a:p>
+          <a:p>
+            <a:pPr lvl="0"/>
+            <a:r>
+              <a:rPr b="1"/>
+              <a:t>The skill transfers.</a:t>
+            </a:r>
+            <a:r>
+              <a:rPr/>
+              <a:t> This is how the work is actually done now.</a:t>
+            </a:r>
+          </a:p>
+          <a:p>
+            <a:pPr lvl="0" indent="0" marL="0">
+              <a:buNone/>
+            </a:pPr>
+            <a:r>
+              <a:rPr/>
+              <a:t>The model is a </a:t>
+            </a:r>
+            <a:r>
+              <a:rPr b="1"/>
+              <a:t>junior collaborator with no accountability.</a:t>
+            </a:r>
+            <a:r>
+              <a:rPr/>
+              <a:t> It will produce confident, wrong code. Every line you commit is a line you are claiming as correct. Read the diff.</a:t>
+            </a:r>
+          </a:p>
+        </p:txBody>
+      </p:sp>
+    </p:spTree>
+  </p:cSld>
+</p:sld>
+</file>
+
+<file path=ppt/slides/slide54.xml><?xml version="1.0" encoding="utf-8"?>
+<p:sld xmlns:a="http://schemas.openxmlformats.org/drawingml/2006/main" xmlns:r="http://schemas.openxmlformats.org/officeDocument/2006/relationships" xmlns:p="http://schemas.openxmlformats.org/presentationml/2006/main">
+  <p:cSld>
+    <p:spTree>
+      <p:nvGrpSpPr>
+        <p:cNvPr id="1" name=""/>
+        <p:cNvGrpSpPr/>
+        <p:nvPr/>
+      </p:nvGrpSpPr>
+      <p:grpSpPr>
+        <a:xfrm>
+          <a:off x="0" y="0"/>
+          <a:ext cx="0" cy="0"/>
+          <a:chOff x="0" y="0"/>
+          <a:chExt cx="0" cy="0"/>
+        </a:xfrm>
+      </p:grpSpPr>
+      <p:sp>
+        <p:nvSpPr>
+          <p:cNvPr id="2" name="Title 1"/>
+          <p:cNvSpPr>
+            <a:spLocks noGrp="1"/>
+          </p:cNvSpPr>
+          <p:nvPr>
+            <p:ph type="title"/>
+          </p:nvPr>
+        </p:nvSpPr>
+        <p:spPr>
+          <a:xfrm>
+            <a:off x="722313" y="3305176"/>
+            <a:ext cx="7772400" cy="1021556"/>
+          </a:xfrm>
+        </p:spPr>
+        <p:txBody>
+          <a:bodyPr/>
+          <a:lstStyle/>
+          <a:p>
+            <a:pPr lvl="0" indent="0" marL="0">
+              <a:buNone/>
+            </a:pPr>
+            <a:r>
+              <a:rPr/>
+              <a:t>If it breaks</a:t>
+            </a:r>
+          </a:p>
+        </p:txBody>
+      </p:sp>
+    </p:spTree>
+  </p:cSld>
+</p:sld>
+</file>
+
+<file path=ppt/slides/slide55.xml><?xml version="1.0" encoding="utf-8"?>
 <p:sld xmlns:a="http://schemas.openxmlformats.org/drawingml/2006/main" xmlns:r="http://schemas.openxmlformats.org/officeDocument/2006/relationships" xmlns:p="http://schemas.openxmlformats.org/presentationml/2006/main">
   <p:cSld>
     <p:spTree>
@@ -8928,7 +10434,7 @@
 </p:sld>
 </file>
 
-<file path=ppt/slides/slide45.xml><?xml version="1.0" encoding="utf-8"?>
+<file path=ppt/slides/slide56.xml><?xml version="1.0" encoding="utf-8"?>
 <p:sld xmlns:a="http://schemas.openxmlformats.org/drawingml/2006/main" xmlns:r="http://schemas.openxmlformats.org/officeDocument/2006/relationships" xmlns:p="http://schemas.openxmlformats.org/presentationml/2006/main">
   <p:cSld>
     <p:spTree>
@@ -8975,7 +10481,7 @@
 </p:sld>
 </file>
 
-<file path=ppt/slides/slide46.xml><?xml version="1.0" encoding="utf-8"?>
+<file path=ppt/slides/slide57.xml><?xml version="1.0" encoding="utf-8"?>
 <p:sld xmlns:a="http://schemas.openxmlformats.org/drawingml/2006/main" xmlns:r="http://schemas.openxmlformats.org/officeDocument/2006/relationships" xmlns:p="http://schemas.openxmlformats.org/presentationml/2006/main">
   <p:cSld>
     <p:spTree>
@@ -9037,17 +10543,17 @@
             </a:pPr>
             <a:r>
               <a:rPr/>
-              <a:t>From the repository root, with </a:t>
-            </a:r>
-            <a:r>
-              <a:rPr>
-                <a:latin typeface="Courier"/>
-              </a:rPr>
-              <a:t>.venv</a:t>
-            </a:r>
-            <a:r>
-              <a:rPr/>
-              <a:t> active:</a:t>
+              <a:t>VS Codium terminal · with </a:t>
+            </a:r>
+            <a:r>
+              <a:rPr>
+                <a:latin typeface="Courier"/>
+              </a:rPr>
+              <a:t>(.venv)</a:t>
+            </a:r>
+            <a:r>
+              <a:rPr/>
+              <a:t> showing</a:t>
             </a:r>
           </a:p>
           <a:p>
@@ -9090,7 +10596,7 @@
 </p:sld>
 </file>
 
-<file path=ppt/slides/slide47.xml><?xml version="1.0" encoding="utf-8"?>
+<file path=ppt/slides/slide58.xml><?xml version="1.0" encoding="utf-8"?>
 <p:sld xmlns:a="http://schemas.openxmlformats.org/drawingml/2006/main" xmlns:r="http://schemas.openxmlformats.org/officeDocument/2006/relationships" xmlns:p="http://schemas.openxmlformats.org/presentationml/2006/main">
   <p:cSld>
     <p:spTree>
@@ -9224,7 +10730,7 @@
 </p:sld>
 </file>
 
-<file path=ppt/slides/slide48.xml><?xml version="1.0" encoding="utf-8"?>
+<file path=ppt/slides/slide59.xml><?xml version="1.0" encoding="utf-8"?>
 <p:sld xmlns:a="http://schemas.openxmlformats.org/drawingml/2006/main" xmlns:r="http://schemas.openxmlformats.org/officeDocument/2006/relationships" xmlns:p="http://schemas.openxmlformats.org/presentationml/2006/main">
   <p:cSld>
     <p:spTree>
@@ -9278,358 +10784,6 @@
           </a:p>
         </p:txBody>
       </p:sp>
-    </p:spTree>
-  </p:cSld>
-</p:sld>
-</file>
-
-<file path=ppt/slides/slide5.xml><?xml version="1.0" encoding="utf-8"?>
-<p:sld xmlns:a="http://schemas.openxmlformats.org/drawingml/2006/main" xmlns:r="http://schemas.openxmlformats.org/officeDocument/2006/relationships" xmlns:p="http://schemas.openxmlformats.org/presentationml/2006/main">
-  <p:cSld>
-    <p:spTree>
-      <p:nvGrpSpPr>
-        <p:cNvPr id="1" name=""/>
-        <p:cNvGrpSpPr/>
-        <p:nvPr/>
-      </p:nvGrpSpPr>
-      <p:grpSpPr>
-        <a:xfrm>
-          <a:off x="0" y="0"/>
-          <a:ext cx="0" cy="0"/>
-          <a:chOff x="0" y="0"/>
-          <a:chExt cx="0" cy="0"/>
-        </a:xfrm>
-      </p:grpSpPr>
-      <p:sp>
-        <p:nvSpPr>
-          <p:cNvPr id="2" name="Title 1"/>
-          <p:cNvSpPr>
-            <a:spLocks noGrp="1"/>
-          </p:cNvSpPr>
-          <p:nvPr>
-            <p:ph type="title"/>
-          </p:nvPr>
-        </p:nvSpPr>
-        <p:spPr>
-          <a:xfrm>
-            <a:off x="457201" y="204787"/>
-            <a:ext cx="3008313" cy="871538"/>
-          </a:xfrm>
-        </p:spPr>
-        <p:txBody>
-          <a:bodyPr/>
-          <a:lstStyle/>
-          <a:p>
-            <a:pPr lvl="0" indent="0" marL="0">
-              <a:buNone/>
-            </a:pPr>
-            <a:r>
-              <a:rPr/>
-              <a:t>What this session’s pre-work is</a:t>
-            </a:r>
-          </a:p>
-        </p:txBody>
-      </p:sp>
-      <p:sp>
-        <p:nvSpPr>
-          <p:cNvPr id="4" name="Text Placeholder 3"/>
-          <p:cNvSpPr>
-            <a:spLocks noGrp="1"/>
-          </p:cNvSpPr>
-          <p:nvPr>
-            <p:ph idx="2" sz="half" type="body"/>
-          </p:nvPr>
-        </p:nvSpPr>
-        <p:spPr/>
-        <p:txBody>
-          <a:bodyPr/>
-          <a:lstStyle/>
-          <a:p>
-            <a:pPr lvl="0" indent="0" marL="0">
-              <a:buNone/>
-            </a:pPr>
-            <a:r>
-              <a:rPr/>
-              <a:t>Four things, before you arrive:</a:t>
-            </a:r>
-          </a:p>
-        </p:txBody>
-      </p:sp>
-      <p:graphicFrame>
-        <p:nvGraphicFramePr>
-          <p:cNvPr id="6" name="Content Placeholder 5"/>
-          <p:cNvGraphicFramePr>
-            <a:graphicFrameLocks noGrp="1"/>
-          </p:cNvGraphicFramePr>
-          <p:nvPr>
-            <p:ph idx="1"/>
-          </p:nvPr>
-        </p:nvGraphicFramePr>
-        <p:xfrm>
-          <a:off x="3568700" y="203200"/>
-          <a:ext cx="5105400" cy="4381500"/>
-        </p:xfrm>
-        <a:graphic>
-          <a:graphicData uri="http://schemas.openxmlformats.org/drawingml/2006/table">
-            <a:tbl>
-              <a:tblPr firstRow="1" bandRow="1">
-                <a:tableStyleId>{5C22544A-7EE6-4342-B048-85BDC9FD1C3A}</a:tableStyleId>
-              </a:tblPr>
-              <a:tblGrid>
-                <a:gridCol w="1701800"/>
-                <a:gridCol w="1701800"/>
-                <a:gridCol w="1701800"/>
-              </a:tblGrid>
-              <a:tr h="0">
-                <a:tc>
-                  <a:txBody>
-                    <a:bodyPr/>
-                    <a:lstStyle/>
-                    <a:p>
-                      <a:pPr lvl="0" indent="0" marL="0">
-                        <a:buNone/>
-                      </a:pPr>
-                      <a:r>
-                        <a:rPr/>
-                        <a:t>#</a:t>
-                      </a:r>
-                    </a:p>
-                  </a:txBody>
-                  <a:tcPr/>
-                </a:tc>
-                <a:tc>
-                  <a:txBody>
-                    <a:bodyPr/>
-                    <a:lstStyle/>
-                    <a:p>
-                      <a:pPr lvl="0" indent="0" marL="0">
-                        <a:buNone/>
-                      </a:pPr>
-                      <a:r>
-                        <a:rPr/>
-                        <a:t>Task</a:t>
-                      </a:r>
-                    </a:p>
-                  </a:txBody>
-                  <a:tcPr/>
-                </a:tc>
-                <a:tc>
-                  <a:txBody>
-                    <a:bodyPr/>
-                    <a:lstStyle/>
-                    <a:p>
-                      <a:pPr lvl="0" indent="0" marL="0">
-                        <a:buNone/>
-                      </a:pPr>
-                      <a:r>
-                        <a:rPr/>
-                        <a:t>Time</a:t>
-                      </a:r>
-                    </a:p>
-                  </a:txBody>
-                  <a:tcPr/>
-                </a:tc>
-              </a:tr>
-              <a:tr h="0">
-                <a:tc>
-                  <a:txBody>
-                    <a:bodyPr/>
-                    <a:lstStyle/>
-                    <a:p>
-                      <a:pPr lvl="0" indent="0" marL="0">
-                        <a:buNone/>
-                      </a:pPr>
-                      <a:r>
-                        <a:rPr/>
-                        <a:t>0</a:t>
-                      </a:r>
-                    </a:p>
-                  </a:txBody>
-                </a:tc>
-                <a:tc>
-                  <a:txBody>
-                    <a:bodyPr/>
-                    <a:lstStyle/>
-                    <a:p>
-                      <a:pPr lvl="0" indent="0" marL="0">
-                        <a:buNone/>
-                      </a:pPr>
-                      <a:r>
-                        <a:rPr b="1"/>
-                        <a:t>Build your workstation</a:t>
-                      </a:r>
-                      <a:r>
-                        <a:rPr/>
-                        <a:t> — these slides</a:t>
-                      </a:r>
-                    </a:p>
-                  </a:txBody>
-                </a:tc>
-                <a:tc>
-                  <a:txBody>
-                    <a:bodyPr/>
-                    <a:lstStyle/>
-                    <a:p>
-                      <a:pPr lvl="0" indent="0" marL="0">
-                        <a:buNone/>
-                      </a:pPr>
-                      <a:r>
-                        <a:rPr/>
-                        <a:t>60–90 min</a:t>
-                      </a:r>
-                    </a:p>
-                  </a:txBody>
-                </a:tc>
-              </a:tr>
-              <a:tr h="0">
-                <a:tc>
-                  <a:txBody>
-                    <a:bodyPr/>
-                    <a:lstStyle/>
-                    <a:p>
-                      <a:pPr lvl="0" indent="0" marL="0">
-                        <a:buNone/>
-                      </a:pPr>
-                      <a:r>
-                        <a:rPr/>
-                        <a:t>1</a:t>
-                      </a:r>
-                    </a:p>
-                  </a:txBody>
-                </a:tc>
-                <a:tc>
-                  <a:txBody>
-                    <a:bodyPr/>
-                    <a:lstStyle/>
-                    <a:p>
-                      <a:pPr lvl="0" indent="0" marL="0">
-                        <a:buNone/>
-                      </a:pPr>
-                      <a:r>
-                        <a:rPr/>
-                        <a:t>Read </a:t>
-                      </a:r>
-                      <a:r>
-                        <a:rPr i="1"/>
-                        <a:t>Europe 2031</a:t>
-                      </a:r>
-                    </a:p>
-                  </a:txBody>
-                </a:tc>
-                <a:tc>
-                  <a:txBody>
-                    <a:bodyPr/>
-                    <a:lstStyle/>
-                    <a:p>
-                      <a:pPr lvl="0" indent="0" marL="0">
-                        <a:buNone/>
-                      </a:pPr>
-                      <a:r>
-                        <a:rPr/>
-                        <a:t>30 min</a:t>
-                      </a:r>
-                    </a:p>
-                  </a:txBody>
-                </a:tc>
-              </a:tr>
-              <a:tr h="0">
-                <a:tc>
-                  <a:txBody>
-                    <a:bodyPr/>
-                    <a:lstStyle/>
-                    <a:p>
-                      <a:pPr lvl="0" indent="0" marL="0">
-                        <a:buNone/>
-                      </a:pPr>
-                      <a:r>
-                        <a:rPr/>
-                        <a:t>2</a:t>
-                      </a:r>
-                    </a:p>
-                  </a:txBody>
-                </a:tc>
-                <a:tc>
-                  <a:txBody>
-                    <a:bodyPr/>
-                    <a:lstStyle/>
-                    <a:p>
-                      <a:pPr lvl="0" indent="0" marL="0">
-                        <a:buNone/>
-                      </a:pPr>
-                      <a:r>
-                        <a:rPr/>
-                        <a:t>Review three concepts</a:t>
-                      </a:r>
-                    </a:p>
-                  </a:txBody>
-                </a:tc>
-                <a:tc>
-                  <a:txBody>
-                    <a:bodyPr/>
-                    <a:lstStyle/>
-                    <a:p>
-                      <a:pPr lvl="0" indent="0" marL="0">
-                        <a:buNone/>
-                      </a:pPr>
-                      <a:r>
-                        <a:rPr/>
-                        <a:t>15 min</a:t>
-                      </a:r>
-                    </a:p>
-                  </a:txBody>
-                </a:tc>
-              </a:tr>
-              <a:tr h="0">
-                <a:tc>
-                  <a:txBody>
-                    <a:bodyPr/>
-                    <a:lstStyle/>
-                    <a:p>
-                      <a:pPr lvl="0" indent="0" marL="0">
-                        <a:buNone/>
-                      </a:pPr>
-                      <a:r>
-                        <a:rPr/>
-                        <a:t>3</a:t>
-                      </a:r>
-                    </a:p>
-                  </a:txBody>
-                </a:tc>
-                <a:tc>
-                  <a:txBody>
-                    <a:bodyPr/>
-                    <a:lstStyle/>
-                    <a:p>
-                      <a:pPr lvl="0" indent="0" marL="0">
-                        <a:buNone/>
-                      </a:pPr>
-                      <a:r>
-                        <a:rPr/>
-                        <a:t>Run the verification script</a:t>
-                      </a:r>
-                    </a:p>
-                  </a:txBody>
-                </a:tc>
-                <a:tc>
-                  <a:txBody>
-                    <a:bodyPr/>
-                    <a:lstStyle/>
-                    <a:p>
-                      <a:pPr lvl="0" indent="0" marL="0">
-                        <a:buNone/>
-                      </a:pPr>
-                      <a:r>
-                        <a:rPr/>
-                        <a:t>5 min</a:t>
-                      </a:r>
-                    </a:p>
-                  </a:txBody>
-                </a:tc>
-              </a:tr>
-            </a:tbl>
-          </a:graphicData>
-        </a:graphic>
-      </p:graphicFrame>
     </p:spTree>
   </p:cSld>
 </p:sld>

--- a/01-foundations-scenarios-and-tools/00-pre-session/slides-welcome-and-setup.pptx
+++ b/01-foundations-scenarios-and-tools/00-pre-session/slides-welcome-and-setup.pptx
@@ -52,18 +52,6 @@
     <p:sldId id="300" r:id="rId46"/>
     <p:sldId id="301" r:id="rId47"/>
     <p:sldId id="302" r:id="rId48"/>
-    <p:sldId id="303" r:id="rId49"/>
-    <p:sldId id="304" r:id="rId50"/>
-    <p:sldId id="305" r:id="rId51"/>
-    <p:sldId id="306" r:id="rId52"/>
-    <p:sldId id="307" r:id="rId53"/>
-    <p:sldId id="308" r:id="rId54"/>
-    <p:sldId id="309" r:id="rId55"/>
-    <p:sldId id="310" r:id="rId56"/>
-    <p:sldId id="311" r:id="rId57"/>
-    <p:sldId id="312" r:id="rId58"/>
-    <p:sldId id="313" r:id="rId59"/>
-    <p:sldId id="314" r:id="rId60"/>
   </p:sldIdLst>
   <p:sldSz cx="9144000" cy="5143500" type="screen16x9"/>
   <p:notesSz cx="6858000" cy="9144000"/>
@@ -972,7 +960,7 @@
           <a:bodyPr anchor="t"/>
           <a:lstStyle>
             <a:lvl1pPr algn="l">
-              <a:defRPr sz="3000" b="1" cap="all"/>
+              <a:defRPr sz="2350" b="1" cap="all"/>
             </a:lvl1pPr>
           </a:lstStyle>
           <a:p>
@@ -1004,7 +992,7 @@
           <a:lstStyle>
             <a:lvl1pPr marL="0" indent="0">
               <a:buNone/>
-              <a:defRPr sz="1500">
+              <a:defRPr sz="1150">
                 <a:solidFill>
                   <a:schemeClr val="tx1">
                     <a:tint val="75000"/>
@@ -1014,7 +1002,7 @@
             </a:lvl1pPr>
             <a:lvl2pPr marL="342900" indent="0">
               <a:buNone/>
-              <a:defRPr sz="1350">
+              <a:defRPr sz="1050">
                 <a:solidFill>
                   <a:schemeClr val="tx1">
                     <a:tint val="75000"/>
@@ -1024,7 +1012,7 @@
             </a:lvl2pPr>
             <a:lvl3pPr marL="685800" indent="0">
               <a:buNone/>
-              <a:defRPr sz="1200">
+              <a:defRPr sz="950">
                 <a:solidFill>
                   <a:schemeClr val="tx1">
                     <a:tint val="75000"/>
@@ -1034,7 +1022,7 @@
             </a:lvl3pPr>
             <a:lvl4pPr marL="1028700" indent="0">
               <a:buNone/>
-              <a:defRPr sz="1050">
+              <a:defRPr sz="800">
                 <a:solidFill>
                   <a:schemeClr val="tx1">
                     <a:tint val="75000"/>
@@ -1044,7 +1032,7 @@
             </a:lvl4pPr>
             <a:lvl5pPr marL="1371600" indent="0">
               <a:buNone/>
-              <a:defRPr sz="1050">
+              <a:defRPr sz="800">
                 <a:solidFill>
                   <a:schemeClr val="tx1">
                     <a:tint val="75000"/>
@@ -1054,7 +1042,7 @@
             </a:lvl5pPr>
             <a:lvl6pPr marL="1714500" indent="0">
               <a:buNone/>
-              <a:defRPr sz="1050">
+              <a:defRPr sz="800">
                 <a:solidFill>
                   <a:schemeClr val="tx1">
                     <a:tint val="75000"/>
@@ -1064,7 +1052,7 @@
             </a:lvl6pPr>
             <a:lvl7pPr marL="2057400" indent="0">
               <a:buNone/>
-              <a:defRPr sz="1050">
+              <a:defRPr sz="800">
                 <a:solidFill>
                   <a:schemeClr val="tx1">
                     <a:tint val="75000"/>
@@ -1074,7 +1062,7 @@
             </a:lvl7pPr>
             <a:lvl8pPr marL="2400300" indent="0">
               <a:buNone/>
-              <a:defRPr sz="1050">
+              <a:defRPr sz="800">
                 <a:solidFill>
                   <a:schemeClr val="tx1">
                     <a:tint val="75000"/>
@@ -1084,7 +1072,7 @@
             </a:lvl8pPr>
             <a:lvl9pPr marL="2743200" indent="0">
               <a:buNone/>
-              <a:defRPr sz="1050">
+              <a:defRPr sz="800">
                 <a:solidFill>
                   <a:schemeClr val="tx1">
                     <a:tint val="75000"/>
@@ -1239,31 +1227,31 @@
           <a:bodyPr/>
           <a:lstStyle>
             <a:lvl1pPr>
-              <a:defRPr sz="2100"/>
+              <a:defRPr sz="1650"/>
             </a:lvl1pPr>
             <a:lvl2pPr>
-              <a:defRPr sz="1800"/>
+              <a:defRPr sz="1400"/>
             </a:lvl2pPr>
             <a:lvl3pPr>
-              <a:defRPr sz="1500"/>
+              <a:defRPr sz="1150"/>
             </a:lvl3pPr>
             <a:lvl4pPr>
-              <a:defRPr sz="1350"/>
+              <a:defRPr sz="1050"/>
             </a:lvl4pPr>
             <a:lvl5pPr>
-              <a:defRPr sz="1350"/>
+              <a:defRPr sz="1050"/>
             </a:lvl5pPr>
             <a:lvl6pPr>
-              <a:defRPr sz="1350"/>
+              <a:defRPr sz="1050"/>
             </a:lvl6pPr>
             <a:lvl7pPr>
-              <a:defRPr sz="1350"/>
+              <a:defRPr sz="1050"/>
             </a:lvl7pPr>
             <a:lvl8pPr>
-              <a:defRPr sz="1350"/>
+              <a:defRPr sz="1050"/>
             </a:lvl8pPr>
             <a:lvl9pPr>
-              <a:defRPr sz="1350"/>
+              <a:defRPr sz="1050"/>
             </a:lvl9pPr>
           </a:lstStyle>
           <a:p>
@@ -1323,31 +1311,31 @@
           <a:bodyPr/>
           <a:lstStyle>
             <a:lvl1pPr>
-              <a:defRPr sz="2100"/>
+              <a:defRPr sz="1650"/>
             </a:lvl1pPr>
             <a:lvl2pPr>
-              <a:defRPr sz="1800"/>
+              <a:defRPr sz="1400"/>
             </a:lvl2pPr>
             <a:lvl3pPr>
-              <a:defRPr sz="1500"/>
+              <a:defRPr sz="1150"/>
             </a:lvl3pPr>
             <a:lvl4pPr>
-              <a:defRPr sz="1350"/>
+              <a:defRPr sz="1050"/>
             </a:lvl4pPr>
             <a:lvl5pPr>
-              <a:defRPr sz="1350"/>
+              <a:defRPr sz="1050"/>
             </a:lvl5pPr>
             <a:lvl6pPr>
-              <a:defRPr sz="1350"/>
+              <a:defRPr sz="1050"/>
             </a:lvl6pPr>
             <a:lvl7pPr>
-              <a:defRPr sz="1350"/>
+              <a:defRPr sz="1050"/>
             </a:lvl7pPr>
             <a:lvl8pPr>
-              <a:defRPr sz="1350"/>
+              <a:defRPr sz="1050"/>
             </a:lvl8pPr>
             <a:lvl9pPr>
-              <a:defRPr sz="1350"/>
+              <a:defRPr sz="1050"/>
             </a:lvl9pPr>
           </a:lstStyle>
           <a:p>
@@ -1529,39 +1517,39 @@
           <a:lstStyle>
             <a:lvl1pPr marL="0" indent="0">
               <a:buNone/>
-              <a:defRPr sz="1800" b="1"/>
+              <a:defRPr sz="1400" b="1"/>
             </a:lvl1pPr>
             <a:lvl2pPr marL="342900" indent="0">
               <a:buNone/>
-              <a:defRPr sz="1500" b="1"/>
+              <a:defRPr sz="1150" b="1"/>
             </a:lvl2pPr>
             <a:lvl3pPr marL="685800" indent="0">
               <a:buNone/>
-              <a:defRPr sz="1350" b="1"/>
+              <a:defRPr sz="1050" b="1"/>
             </a:lvl3pPr>
             <a:lvl4pPr marL="1028700" indent="0">
               <a:buNone/>
-              <a:defRPr sz="1200" b="1"/>
+              <a:defRPr sz="950" b="1"/>
             </a:lvl4pPr>
             <a:lvl5pPr marL="1371600" indent="0">
               <a:buNone/>
-              <a:defRPr sz="1200" b="1"/>
+              <a:defRPr sz="950" b="1"/>
             </a:lvl5pPr>
             <a:lvl6pPr marL="1714500" indent="0">
               <a:buNone/>
-              <a:defRPr sz="1200" b="1"/>
+              <a:defRPr sz="950" b="1"/>
             </a:lvl6pPr>
             <a:lvl7pPr marL="2057400" indent="0">
               <a:buNone/>
-              <a:defRPr sz="1200" b="1"/>
+              <a:defRPr sz="950" b="1"/>
             </a:lvl7pPr>
             <a:lvl8pPr marL="2400300" indent="0">
               <a:buNone/>
-              <a:defRPr sz="1200" b="1"/>
+              <a:defRPr sz="950" b="1"/>
             </a:lvl8pPr>
             <a:lvl9pPr marL="2743200" indent="0">
               <a:buNone/>
-              <a:defRPr sz="1200" b="1"/>
+              <a:defRPr sz="950" b="1"/>
             </a:lvl9pPr>
           </a:lstStyle>
           <a:p>
@@ -1593,31 +1581,31 @@
           <a:bodyPr/>
           <a:lstStyle>
             <a:lvl1pPr>
-              <a:defRPr sz="1800"/>
+              <a:defRPr sz="1400"/>
             </a:lvl1pPr>
             <a:lvl2pPr>
-              <a:defRPr sz="1500"/>
+              <a:defRPr sz="1150"/>
             </a:lvl2pPr>
             <a:lvl3pPr>
-              <a:defRPr sz="1350"/>
+              <a:defRPr sz="1050"/>
             </a:lvl3pPr>
             <a:lvl4pPr>
-              <a:defRPr sz="1200"/>
+              <a:defRPr sz="950"/>
             </a:lvl4pPr>
             <a:lvl5pPr>
-              <a:defRPr sz="1200"/>
+              <a:defRPr sz="950"/>
             </a:lvl5pPr>
             <a:lvl6pPr>
-              <a:defRPr sz="1200"/>
+              <a:defRPr sz="950"/>
             </a:lvl6pPr>
             <a:lvl7pPr>
-              <a:defRPr sz="1200"/>
+              <a:defRPr sz="950"/>
             </a:lvl7pPr>
             <a:lvl8pPr>
-              <a:defRPr sz="1200"/>
+              <a:defRPr sz="950"/>
             </a:lvl8pPr>
             <a:lvl9pPr>
-              <a:defRPr sz="1200"/>
+              <a:defRPr sz="950"/>
             </a:lvl9pPr>
           </a:lstStyle>
           <a:p>
@@ -1678,39 +1666,39 @@
           <a:lstStyle>
             <a:lvl1pPr marL="0" indent="0">
               <a:buNone/>
-              <a:defRPr sz="1800" b="1"/>
+              <a:defRPr sz="1400" b="1"/>
             </a:lvl1pPr>
             <a:lvl2pPr marL="342900" indent="0">
               <a:buNone/>
-              <a:defRPr sz="1500" b="1"/>
+              <a:defRPr sz="1150" b="1"/>
             </a:lvl2pPr>
             <a:lvl3pPr marL="685800" indent="0">
               <a:buNone/>
-              <a:defRPr sz="1350" b="1"/>
+              <a:defRPr sz="1050" b="1"/>
             </a:lvl3pPr>
             <a:lvl4pPr marL="1028700" indent="0">
               <a:buNone/>
-              <a:defRPr sz="1200" b="1"/>
+              <a:defRPr sz="950" b="1"/>
             </a:lvl4pPr>
             <a:lvl5pPr marL="1371600" indent="0">
               <a:buNone/>
-              <a:defRPr sz="1200" b="1"/>
+              <a:defRPr sz="950" b="1"/>
             </a:lvl5pPr>
             <a:lvl6pPr marL="1714500" indent="0">
               <a:buNone/>
-              <a:defRPr sz="1200" b="1"/>
+              <a:defRPr sz="950" b="1"/>
             </a:lvl6pPr>
             <a:lvl7pPr marL="2057400" indent="0">
               <a:buNone/>
-              <a:defRPr sz="1200" b="1"/>
+              <a:defRPr sz="950" b="1"/>
             </a:lvl7pPr>
             <a:lvl8pPr marL="2400300" indent="0">
               <a:buNone/>
-              <a:defRPr sz="1200" b="1"/>
+              <a:defRPr sz="950" b="1"/>
             </a:lvl8pPr>
             <a:lvl9pPr marL="2743200" indent="0">
               <a:buNone/>
-              <a:defRPr sz="1200" b="1"/>
+              <a:defRPr sz="950" b="1"/>
             </a:lvl9pPr>
           </a:lstStyle>
           <a:p>
@@ -1742,31 +1730,31 @@
           <a:bodyPr/>
           <a:lstStyle>
             <a:lvl1pPr>
-              <a:defRPr sz="1800"/>
+              <a:defRPr sz="1400"/>
             </a:lvl1pPr>
             <a:lvl2pPr>
-              <a:defRPr sz="1500"/>
+              <a:defRPr sz="1150"/>
             </a:lvl2pPr>
             <a:lvl3pPr>
-              <a:defRPr sz="1350"/>
+              <a:defRPr sz="1050"/>
             </a:lvl3pPr>
             <a:lvl4pPr>
-              <a:defRPr sz="1200"/>
+              <a:defRPr sz="950"/>
             </a:lvl4pPr>
             <a:lvl5pPr>
-              <a:defRPr sz="1200"/>
+              <a:defRPr sz="950"/>
             </a:lvl5pPr>
             <a:lvl6pPr>
-              <a:defRPr sz="1200"/>
+              <a:defRPr sz="950"/>
             </a:lvl6pPr>
             <a:lvl7pPr>
-              <a:defRPr sz="1200"/>
+              <a:defRPr sz="950"/>
             </a:lvl7pPr>
             <a:lvl8pPr>
-              <a:defRPr sz="1200"/>
+              <a:defRPr sz="950"/>
             </a:lvl8pPr>
             <a:lvl9pPr>
-              <a:defRPr sz="1200"/>
+              <a:defRPr sz="950"/>
             </a:lvl9pPr>
           </a:lstStyle>
           <a:p>
@@ -2133,7 +2121,7 @@
           <a:bodyPr anchor="b"/>
           <a:lstStyle>
             <a:lvl1pPr algn="l">
-              <a:defRPr sz="1500" b="1"/>
+              <a:defRPr sz="1150" b="1"/>
             </a:lvl1pPr>
           </a:lstStyle>
           <a:p>
@@ -2164,31 +2152,31 @@
           <a:bodyPr/>
           <a:lstStyle>
             <a:lvl1pPr>
-              <a:defRPr sz="2400"/>
+              <a:defRPr sz="1850"/>
             </a:lvl1pPr>
             <a:lvl2pPr>
-              <a:defRPr sz="2100"/>
+              <a:defRPr sz="1650"/>
             </a:lvl2pPr>
             <a:lvl3pPr>
-              <a:defRPr sz="1800"/>
+              <a:defRPr sz="1400"/>
             </a:lvl3pPr>
             <a:lvl4pPr>
-              <a:defRPr sz="1500"/>
+              <a:defRPr sz="1150"/>
             </a:lvl4pPr>
             <a:lvl5pPr>
-              <a:defRPr sz="1500"/>
+              <a:defRPr sz="1150"/>
             </a:lvl5pPr>
             <a:lvl6pPr>
-              <a:defRPr sz="1500"/>
+              <a:defRPr sz="1150"/>
             </a:lvl6pPr>
             <a:lvl7pPr>
-              <a:defRPr sz="1500"/>
+              <a:defRPr sz="1150"/>
             </a:lvl7pPr>
             <a:lvl8pPr>
-              <a:defRPr sz="1500"/>
+              <a:defRPr sz="1150"/>
             </a:lvl8pPr>
             <a:lvl9pPr>
-              <a:defRPr sz="1500"/>
+              <a:defRPr sz="1150"/>
             </a:lvl9pPr>
           </a:lstStyle>
           <a:p>
@@ -2249,39 +2237,39 @@
           <a:lstStyle>
             <a:lvl1pPr marL="0" indent="0">
               <a:buNone/>
-              <a:defRPr sz="1050"/>
+              <a:defRPr sz="800"/>
             </a:lvl1pPr>
             <a:lvl2pPr marL="342900" indent="0">
               <a:buNone/>
-              <a:defRPr sz="900"/>
+              <a:defRPr sz="700"/>
             </a:lvl2pPr>
             <a:lvl3pPr marL="685800" indent="0">
               <a:buNone/>
-              <a:defRPr sz="750"/>
+              <a:defRPr sz="700"/>
             </a:lvl3pPr>
             <a:lvl4pPr marL="1028700" indent="0">
               <a:buNone/>
-              <a:defRPr sz="675"/>
+              <a:defRPr sz="700"/>
             </a:lvl4pPr>
             <a:lvl5pPr marL="1371600" indent="0">
               <a:buNone/>
-              <a:defRPr sz="675"/>
+              <a:defRPr sz="700"/>
             </a:lvl5pPr>
             <a:lvl6pPr marL="1714500" indent="0">
               <a:buNone/>
-              <a:defRPr sz="675"/>
+              <a:defRPr sz="700"/>
             </a:lvl6pPr>
             <a:lvl7pPr marL="2057400" indent="0">
               <a:buNone/>
-              <a:defRPr sz="675"/>
+              <a:defRPr sz="700"/>
             </a:lvl7pPr>
             <a:lvl8pPr marL="2400300" indent="0">
               <a:buNone/>
-              <a:defRPr sz="675"/>
+              <a:defRPr sz="700"/>
             </a:lvl8pPr>
             <a:lvl9pPr marL="2743200" indent="0">
               <a:buNone/>
-              <a:defRPr sz="675"/>
+              <a:defRPr sz="700"/>
             </a:lvl9pPr>
           </a:lstStyle>
           <a:p>
@@ -2408,7 +2396,7 @@
           <a:bodyPr anchor="b"/>
           <a:lstStyle>
             <a:lvl1pPr algn="l">
-              <a:defRPr sz="1500" b="1"/>
+              <a:defRPr sz="1150" b="1"/>
             </a:lvl1pPr>
           </a:lstStyle>
           <a:p>
@@ -2440,39 +2428,39 @@
           <a:lstStyle>
             <a:lvl1pPr marL="0" indent="0">
               <a:buNone/>
-              <a:defRPr sz="2400"/>
+              <a:defRPr sz="1850"/>
             </a:lvl1pPr>
             <a:lvl2pPr marL="342900" indent="0">
               <a:buNone/>
-              <a:defRPr sz="2100"/>
+              <a:defRPr sz="1650"/>
             </a:lvl2pPr>
             <a:lvl3pPr marL="685800" indent="0">
               <a:buNone/>
-              <a:defRPr sz="1800"/>
+              <a:defRPr sz="1400"/>
             </a:lvl3pPr>
             <a:lvl4pPr marL="1028700" indent="0">
               <a:buNone/>
-              <a:defRPr sz="1500"/>
+              <a:defRPr sz="1150"/>
             </a:lvl4pPr>
             <a:lvl5pPr marL="1371600" indent="0">
               <a:buNone/>
-              <a:defRPr sz="1500"/>
+              <a:defRPr sz="1150"/>
             </a:lvl5pPr>
             <a:lvl6pPr marL="1714500" indent="0">
               <a:buNone/>
-              <a:defRPr sz="1500"/>
+              <a:defRPr sz="1150"/>
             </a:lvl6pPr>
             <a:lvl7pPr marL="2057400" indent="0">
               <a:buNone/>
-              <a:defRPr sz="1500"/>
+              <a:defRPr sz="1150"/>
             </a:lvl7pPr>
             <a:lvl8pPr marL="2400300" indent="0">
               <a:buNone/>
-              <a:defRPr sz="1500"/>
+              <a:defRPr sz="1150"/>
             </a:lvl8pPr>
             <a:lvl9pPr marL="2743200" indent="0">
               <a:buNone/>
-              <a:defRPr sz="1500"/>
+              <a:defRPr sz="1150"/>
             </a:lvl9pPr>
           </a:lstStyle>
           <a:p>
@@ -2501,39 +2489,39 @@
           <a:lstStyle>
             <a:lvl1pPr marL="0" indent="0">
               <a:buNone/>
-              <a:defRPr sz="1050"/>
+              <a:defRPr sz="800"/>
             </a:lvl1pPr>
             <a:lvl2pPr marL="342900" indent="0">
               <a:buNone/>
-              <a:defRPr sz="900"/>
+              <a:defRPr sz="700"/>
             </a:lvl2pPr>
             <a:lvl3pPr marL="685800" indent="0">
               <a:buNone/>
-              <a:defRPr sz="750"/>
+              <a:defRPr sz="700"/>
             </a:lvl3pPr>
             <a:lvl4pPr marL="1028700" indent="0">
               <a:buNone/>
-              <a:defRPr sz="675"/>
+              <a:defRPr sz="700"/>
             </a:lvl4pPr>
             <a:lvl5pPr marL="1371600" indent="0">
               <a:buNone/>
-              <a:defRPr sz="675"/>
+              <a:defRPr sz="700"/>
             </a:lvl5pPr>
             <a:lvl6pPr marL="1714500" indent="0">
               <a:buNone/>
-              <a:defRPr sz="675"/>
+              <a:defRPr sz="700"/>
             </a:lvl6pPr>
             <a:lvl7pPr marL="2057400" indent="0">
               <a:buNone/>
-              <a:defRPr sz="675"/>
+              <a:defRPr sz="700"/>
             </a:lvl7pPr>
             <a:lvl8pPr marL="2400300" indent="0">
               <a:buNone/>
-              <a:defRPr sz="675"/>
+              <a:defRPr sz="700"/>
             </a:lvl8pPr>
             <a:lvl9pPr marL="2743200" indent="0">
               <a:buNone/>
-              <a:defRPr sz="675"/>
+              <a:defRPr sz="700"/>
             </a:lvl9pPr>
           </a:lstStyle>
           <a:p>
@@ -2761,7 +2749,7 @@
           <a:bodyPr anchor="ctr" bIns="45720" lIns="91440" rIns="91440" rtlCol="0" tIns="45720" vert="horz"/>
           <a:lstStyle>
             <a:lvl1pPr algn="l">
-              <a:defRPr sz="900">
+              <a:defRPr sz="700">
                 <a:solidFill>
                   <a:schemeClr val="tx1">
                     <a:tint val="75000"/>
@@ -2802,7 +2790,7 @@
           <a:bodyPr anchor="ctr" bIns="45720" lIns="91440" rIns="91440" rtlCol="0" tIns="45720" vert="horz"/>
           <a:lstStyle>
             <a:lvl1pPr algn="ctr">
-              <a:defRPr sz="900">
+              <a:defRPr sz="700">
                 <a:solidFill>
                   <a:schemeClr val="tx1">
                     <a:tint val="75000"/>
@@ -2839,7 +2827,7 @@
           <a:bodyPr anchor="ctr" bIns="45720" lIns="91440" rIns="91440" rtlCol="0" tIns="45720" vert="horz"/>
           <a:lstStyle>
             <a:lvl1pPr algn="r">
-              <a:defRPr sz="900">
+              <a:defRPr sz="700">
                 <a:solidFill>
                   <a:schemeClr val="tx1">
                     <a:tint val="75000"/>
@@ -2885,7 +2873,7 @@
           <a:spcPct val="0"/>
         </a:spcBef>
         <a:buNone/>
-        <a:defRPr kern="1200" sz="3300">
+        <a:defRPr kern="1200" sz="2550">
           <a:solidFill>
             <a:schemeClr val="tx1"/>
           </a:solidFill>
@@ -2902,7 +2890,7 @@
         </a:spcBef>
         <a:buFont typeface="Arial"/>
         <a:buChar char="•"/>
-        <a:defRPr kern="1200" sz="2400">
+        <a:defRPr kern="1200" sz="1850">
           <a:solidFill>
             <a:schemeClr val="tx1"/>
           </a:solidFill>
@@ -2917,7 +2905,7 @@
         </a:spcBef>
         <a:buFont typeface="Arial"/>
         <a:buChar char="–"/>
-        <a:defRPr kern="1200" sz="2100">
+        <a:defRPr kern="1200" sz="1650">
           <a:solidFill>
             <a:schemeClr val="tx1"/>
           </a:solidFill>
@@ -2932,7 +2920,7 @@
         </a:spcBef>
         <a:buFont typeface="Arial"/>
         <a:buChar char="•"/>
-        <a:defRPr kern="1200" sz="1800">
+        <a:defRPr kern="1200" sz="1400">
           <a:solidFill>
             <a:schemeClr val="tx1"/>
           </a:solidFill>
@@ -2947,7 +2935,7 @@
         </a:spcBef>
         <a:buFont typeface="Arial"/>
         <a:buChar char="–"/>
-        <a:defRPr kern="1200" sz="1500">
+        <a:defRPr kern="1200" sz="1150">
           <a:solidFill>
             <a:schemeClr val="tx1"/>
           </a:solidFill>
@@ -2962,7 +2950,7 @@
         </a:spcBef>
         <a:buFont typeface="Arial"/>
         <a:buChar char="»"/>
-        <a:defRPr kern="1200" sz="1500">
+        <a:defRPr kern="1200" sz="1150">
           <a:solidFill>
             <a:schemeClr val="tx1"/>
           </a:solidFill>
@@ -2977,7 +2965,7 @@
         </a:spcBef>
         <a:buFont typeface="Arial"/>
         <a:buChar char="•"/>
-        <a:defRPr kern="1200" sz="1500">
+        <a:defRPr kern="1200" sz="1150">
           <a:solidFill>
             <a:schemeClr val="tx1"/>
           </a:solidFill>
@@ -2992,7 +2980,7 @@
         </a:spcBef>
         <a:buFont typeface="Arial"/>
         <a:buChar char="•"/>
-        <a:defRPr kern="1200" sz="1500">
+        <a:defRPr kern="1200" sz="1150">
           <a:solidFill>
             <a:schemeClr val="tx1"/>
           </a:solidFill>
@@ -3007,7 +2995,7 @@
         </a:spcBef>
         <a:buFont typeface="Arial"/>
         <a:buChar char="•"/>
-        <a:defRPr kern="1200" sz="1500">
+        <a:defRPr kern="1200" sz="1150">
           <a:solidFill>
             <a:schemeClr val="tx1"/>
           </a:solidFill>
@@ -3022,7 +3010,7 @@
         </a:spcBef>
         <a:buFont typeface="Arial"/>
         <a:buChar char="•"/>
-        <a:defRPr kern="1200" sz="1500">
+        <a:defRPr kern="1200" sz="1150">
           <a:solidFill>
             <a:schemeClr val="tx1"/>
           </a:solidFill>
@@ -3037,7 +3025,7 @@
         <a:defRPr lang="en-US"/>
       </a:defPPr>
       <a:lvl1pPr algn="l" defTabSz="342900" eaLnBrk="1" hangingPunct="1" latinLnBrk="0" marL="0" rtl="0">
-        <a:defRPr kern="1200" sz="1350">
+        <a:defRPr kern="1200" sz="1050">
           <a:solidFill>
             <a:schemeClr val="tx1"/>
           </a:solidFill>
@@ -3047,7 +3035,7 @@
         </a:defRPr>
       </a:lvl1pPr>
       <a:lvl2pPr algn="l" defTabSz="342900" eaLnBrk="1" hangingPunct="1" latinLnBrk="0" marL="342900" rtl="0">
-        <a:defRPr kern="1200" sz="1350">
+        <a:defRPr kern="1200" sz="1050">
           <a:solidFill>
             <a:schemeClr val="tx1"/>
           </a:solidFill>
@@ -3057,7 +3045,7 @@
         </a:defRPr>
       </a:lvl2pPr>
       <a:lvl3pPr algn="l" defTabSz="342900" eaLnBrk="1" hangingPunct="1" latinLnBrk="0" marL="685800" rtl="0">
-        <a:defRPr kern="1200" sz="1350">
+        <a:defRPr kern="1200" sz="1050">
           <a:solidFill>
             <a:schemeClr val="tx1"/>
           </a:solidFill>
@@ -3067,7 +3055,7 @@
         </a:defRPr>
       </a:lvl3pPr>
       <a:lvl4pPr algn="l" defTabSz="342900" eaLnBrk="1" hangingPunct="1" latinLnBrk="0" marL="1028700" rtl="0">
-        <a:defRPr kern="1200" sz="1350">
+        <a:defRPr kern="1200" sz="1050">
           <a:solidFill>
             <a:schemeClr val="tx1"/>
           </a:solidFill>
@@ -3077,7 +3065,7 @@
         </a:defRPr>
       </a:lvl4pPr>
       <a:lvl5pPr algn="l" defTabSz="342900" eaLnBrk="1" hangingPunct="1" latinLnBrk="0" marL="1371600" rtl="0">
-        <a:defRPr kern="1200" sz="1350">
+        <a:defRPr kern="1200" sz="1050">
           <a:solidFill>
             <a:schemeClr val="tx1"/>
           </a:solidFill>
@@ -3087,7 +3075,7 @@
         </a:defRPr>
       </a:lvl5pPr>
       <a:lvl6pPr algn="l" defTabSz="342900" eaLnBrk="1" hangingPunct="1" latinLnBrk="0" marL="1714500" rtl="0">
-        <a:defRPr kern="1200" sz="1350">
+        <a:defRPr kern="1200" sz="1050">
           <a:solidFill>
             <a:schemeClr val="tx1"/>
           </a:solidFill>
@@ -3097,7 +3085,7 @@
         </a:defRPr>
       </a:lvl6pPr>
       <a:lvl7pPr algn="l" defTabSz="342900" eaLnBrk="1" hangingPunct="1" latinLnBrk="0" marL="2057400" rtl="0">
-        <a:defRPr kern="1200" sz="1350">
+        <a:defRPr kern="1200" sz="1050">
           <a:solidFill>
             <a:schemeClr val="tx1"/>
           </a:solidFill>
@@ -3107,7 +3095,7 @@
         </a:defRPr>
       </a:lvl7pPr>
       <a:lvl8pPr algn="l" defTabSz="342900" eaLnBrk="1" hangingPunct="1" latinLnBrk="0" marL="2400300" rtl="0">
-        <a:defRPr kern="1200" sz="1350">
+        <a:defRPr kern="1200" sz="1050">
           <a:solidFill>
             <a:schemeClr val="tx1"/>
           </a:solidFill>
@@ -3117,7 +3105,7 @@
         </a:defRPr>
       </a:lvl8pPr>
       <a:lvl9pPr algn="l" defTabSz="342900" eaLnBrk="1" hangingPunct="1" latinLnBrk="0" marL="2743200" rtl="0">
-        <a:defRPr kern="1200" sz="1350">
+        <a:defRPr kern="1200" sz="1050">
           <a:solidFill>
             <a:schemeClr val="tx1"/>
           </a:solidFill>
@@ -3173,7 +3161,7 @@
             </a:pPr>
             <a:r>
               <a:rPr/>
-              <a:t>Welcome to MATH60033A</a:t>
+              <a:t>Welcome</a:t>
             </a:r>
           </a:p>
         </p:txBody>
@@ -3203,7 +3191,7 @@
             </a:pPr>
             <a:r>
               <a:rPr/>
-              <a:t>Machine Learning Methods for Economics — building your workstation</a:t>
+              <a:t>Quantitative Methods in International Business — building your workstation</a:t>
             </a:r>
             <a:br/>
             <a:br/>
@@ -7205,157 +7193,22 @@
             <p:ph type="title"/>
           </p:nvPr>
         </p:nvSpPr>
-        <p:spPr/>
-        <p:txBody>
-          <a:bodyPr/>
-          <a:lstStyle/>
-          <a:p>
-            <a:pPr lvl="0" indent="0" marL="0">
-              <a:buNone/>
-            </a:pPr>
-            <a:r>
-              <a:rPr/>
-              <a:t>What aider does to your git history</a:t>
-            </a:r>
-          </a:p>
-        </p:txBody>
-      </p:sp>
-      <p:sp>
-        <p:nvSpPr>
-          <p:cNvPr id="3" name="Content Placeholder 2"/>
-          <p:cNvSpPr>
-            <a:spLocks noGrp="1"/>
-          </p:cNvSpPr>
-          <p:nvPr>
-            <p:ph idx="1"/>
-          </p:nvPr>
-        </p:nvSpPr>
-        <p:spPr/>
-        <p:txBody>
-          <a:bodyPr/>
-          <a:lstStyle/>
-          <a:p>
-            <a:pPr lvl="0" indent="0" marL="0">
-              <a:buNone/>
-            </a:pPr>
-            <a:r>
-              <a:rPr/>
-              <a:t>aider </a:t>
-            </a:r>
-            <a:r>
-              <a:rPr b="1"/>
-              <a:t>commits automatically</a:t>
-            </a:r>
-            <a:r>
-              <a:rPr/>
-              <a:t> after each change it applies.</a:t>
-            </a:r>
-          </a:p>
-          <a:p>
-            <a:pPr lvl="0" indent="0" marL="0">
-              <a:buNone/>
-            </a:pPr>
-            <a:r>
-              <a:rPr/>
-              <a:t>That is usually what you want — but this course counts commits as evidence of who did the work:</a:t>
-            </a:r>
-          </a:p>
-          <a:p>
-            <a:pPr lvl="0" indent="0">
-              <a:buNone/>
-            </a:pPr>
-            <a:r>
-              <a:rPr i="1">
-                <a:solidFill>
-                  <a:srgbClr val="60A0B0"/>
-                </a:solidFill>
-                <a:latin typeface="Courier"/>
-              </a:rPr>
-              <a:t># see what it did</a:t>
-            </a:r>
-            <a:br/>
-            <a:r>
-              <a:rPr>
-                <a:solidFill>
-                  <a:srgbClr val="06287E"/>
-                </a:solidFill>
-                <a:latin typeface="Courier"/>
-              </a:rPr>
-              <a:t>git</a:t>
-            </a:r>
-            <a:r>
-              <a:rPr>
-                <a:latin typeface="Courier"/>
-              </a:rPr>
-              <a:t> log </a:t>
-            </a:r>
-            <a:r>
-              <a:rPr>
-                <a:solidFill>
-                  <a:srgbClr val="7D9029"/>
-                </a:solidFill>
-                <a:latin typeface="Courier"/>
-              </a:rPr>
-              <a:t>--oneline</a:t>
-            </a:r>
-            <a:br/>
-            <a:br/>
-            <a:r>
-              <a:rPr i="1">
-                <a:solidFill>
-                  <a:srgbClr val="60A0B0"/>
-                </a:solidFill>
-                <a:latin typeface="Courier"/>
-              </a:rPr>
-              <a:t># turn auto-commit off if you'd rather commit yourself</a:t>
-            </a:r>
-            <a:br/>
-            <a:r>
-              <a:rPr>
-                <a:latin typeface="Courier"/>
-              </a:rPr>
-              <a:t>aider </a:t>
-            </a:r>
-            <a:r>
-              <a:rPr>
-                <a:solidFill>
-                  <a:srgbClr val="7D9029"/>
-                </a:solidFill>
-                <a:latin typeface="Courier"/>
-              </a:rPr>
-              <a:t>--model</a:t>
-            </a:r>
-            <a:r>
-              <a:rPr>
-                <a:latin typeface="Courier"/>
-              </a:rPr>
-              <a:t> ollama_chat/qwen2.5-coder:7b </a:t>
-            </a:r>
-            <a:r>
-              <a:rPr>
-                <a:solidFill>
-                  <a:srgbClr val="7D9029"/>
-                </a:solidFill>
-                <a:latin typeface="Courier"/>
-              </a:rPr>
-              <a:t>--no-auto-commits</a:t>
-            </a:r>
-          </a:p>
-          <a:p>
-            <a:pPr lvl="0" indent="0" marL="0">
-              <a:buNone/>
-            </a:pPr>
-            <a:r>
-              <a:rPr/>
-              <a:t>Commits made by the agent are attributed to </a:t>
-            </a:r>
-            <a:r>
-              <a:rPr b="1"/>
-              <a:t>you</a:t>
-            </a:r>
-            <a:r>
-              <a:rPr/>
-              <a:t>. That is correct — you directed it. But read the diff before you accept it: you are answerable for every line in your repository.</a:t>
+        <p:spPr>
+          <a:xfrm>
+            <a:off x="722313" y="3305176"/>
+            <a:ext cx="7772400" cy="1021556"/>
+          </a:xfrm>
+        </p:spPr>
+        <p:txBody>
+          <a:bodyPr/>
+          <a:lstStyle/>
+          <a:p>
+            <a:pPr lvl="0" indent="0" marL="0">
+              <a:buNone/>
+            </a:pPr>
+            <a:r>
+              <a:rPr/>
+              <a:t>The worked example</a:t>
             </a:r>
           </a:p>
         </p:txBody>
@@ -7392,22 +7245,148 @@
             <p:ph type="title"/>
           </p:nvPr>
         </p:nvSpPr>
-        <p:spPr>
-          <a:xfrm>
-            <a:off x="722313" y="3305176"/>
-            <a:ext cx="7772400" cy="1021556"/>
-          </a:xfrm>
-        </p:spPr>
-        <p:txBody>
-          <a:bodyPr/>
-          <a:lstStyle/>
-          <a:p>
-            <a:pPr lvl="0" indent="0" marL="0">
-              <a:buNone/>
-            </a:pPr>
-            <a:r>
-              <a:rPr/>
-              <a:t>Step 6 — GitHub</a:t>
+        <p:spPr/>
+        <p:txBody>
+          <a:bodyPr/>
+          <a:lstStyle/>
+          <a:p>
+            <a:pPr lvl="0" indent="0" marL="0">
+              <a:buNone/>
+            </a:pPr>
+            <a:r>
+              <a:rPr/>
+              <a:t>Two terminals</a:t>
+            </a:r>
+          </a:p>
+        </p:txBody>
+      </p:sp>
+      <p:sp>
+        <p:nvSpPr>
+          <p:cNvPr id="3" name="Content Placeholder 2"/>
+          <p:cNvSpPr>
+            <a:spLocks noGrp="1"/>
+          </p:cNvSpPr>
+          <p:nvPr>
+            <p:ph idx="1"/>
+          </p:nvPr>
+        </p:nvSpPr>
+        <p:spPr/>
+        <p:txBody>
+          <a:bodyPr/>
+          <a:lstStyle/>
+          <a:p>
+            <a:pPr lvl="0" indent="0" marL="0">
+              <a:buNone/>
+            </a:pPr>
+            <a:r>
+              <a:rPr b="1"/>
+              <a:t>Terminal 1</a:t>
+            </a:r>
+            <a:r>
+              <a:rPr/>
+              <a:t> — the model server, left running:</a:t>
+            </a:r>
+          </a:p>
+          <a:p>
+            <a:pPr lvl="0" indent="0" marL="0">
+              <a:buNone/>
+            </a:pPr>
+            <a:r>
+              <a:rPr/>
+              <a:t>VS Codium terminal 1</a:t>
+            </a:r>
+          </a:p>
+          <a:p>
+            <a:pPr lvl="0" indent="0">
+              <a:buNone/>
+            </a:pPr>
+            <a:r>
+              <a:rPr>
+                <a:solidFill>
+                  <a:srgbClr val="19177C"/>
+                </a:solidFill>
+                <a:latin typeface="Courier"/>
+              </a:rPr>
+              <a:t>OLLAMA_CONTEXT_LENGTH</a:t>
+            </a:r>
+            <a:r>
+              <a:rPr>
+                <a:solidFill>
+                  <a:srgbClr val="666666"/>
+                </a:solidFill>
+                <a:latin typeface="Courier"/>
+              </a:rPr>
+              <a:t>=</a:t>
+            </a:r>
+            <a:r>
+              <a:rPr>
+                <a:latin typeface="Courier"/>
+              </a:rPr>
+              <a:t>8192 ollama serve</a:t>
+            </a:r>
+          </a:p>
+          <a:p>
+            <a:pPr lvl="0" indent="0" marL="0">
+              <a:buNone/>
+            </a:pPr>
+            <a:r>
+              <a:rPr b="1"/>
+              <a:t>Terminal 2</a:t>
+            </a:r>
+            <a:r>
+              <a:rPr/>
+              <a:t> — inside your course folder:</a:t>
+            </a:r>
+          </a:p>
+          <a:p>
+            <a:pPr lvl="0" indent="0" marL="0">
+              <a:buNone/>
+            </a:pPr>
+            <a:r>
+              <a:rPr/>
+              <a:t>VS Codium terminal 2</a:t>
+            </a:r>
+          </a:p>
+          <a:p>
+            <a:pPr lvl="0" indent="0">
+              <a:buNone/>
+            </a:pPr>
+            <a:r>
+              <a:rPr>
+                <a:solidFill>
+                  <a:srgbClr val="008000"/>
+                </a:solidFill>
+                <a:latin typeface="Courier"/>
+              </a:rPr>
+              <a:t>source</a:t>
+            </a:r>
+            <a:r>
+              <a:rPr>
+                <a:latin typeface="Courier"/>
+              </a:rPr>
+              <a:t> .venv/bin/activate</a:t>
+            </a:r>
+            <a:br/>
+            <a:r>
+              <a:rPr>
+                <a:latin typeface="Courier"/>
+              </a:rPr>
+              <a:t>aider </a:t>
+            </a:r>
+            <a:r>
+              <a:rPr>
+                <a:solidFill>
+                  <a:srgbClr val="7D9029"/>
+                </a:solidFill>
+                <a:latin typeface="Courier"/>
+              </a:rPr>
+              <a:t>--model</a:t>
+            </a:r>
+            <a:r>
+              <a:rPr>
+                <a:latin typeface="Courier"/>
+              </a:rPr>
+              <a:t> ollama_chat/qwen2.5-coder:7b</a:t>
             </a:r>
           </a:p>
         </p:txBody>
@@ -7454,7 +7433,7 @@
             </a:pPr>
             <a:r>
               <a:rPr/>
-              <a:t>Create your account</a:t>
+              <a:t>Ask for something real</a:t>
             </a:r>
           </a:p>
         </p:txBody>
@@ -7474,90 +7453,44 @@
           <a:bodyPr/>
           <a:lstStyle/>
           <a:p>
-            <a:pPr lvl="0" indent="-342900" marL="342900">
-              <a:buAutoNum type="arabicPeriod"/>
-            </a:pPr>
-            <a:r>
-              <a:rPr/>
-              <a:t>Go to </a:t>
-            </a:r>
-            <a:r>
-              <a:rPr b="1"/>
-              <a:t>github.com</a:t>
-            </a:r>
-            <a:r>
-              <a:rPr/>
-              <a:t> and choose </a:t>
-            </a:r>
-            <a:r>
-              <a:rPr b="1"/>
-              <a:t>Sign up</a:t>
-            </a:r>
-            <a:r>
-              <a:rPr/>
-              <a:t>.</a:t>
-            </a:r>
-          </a:p>
-          <a:p>
-            <a:pPr lvl="0" indent="-342900" marL="342900">
-              <a:buAutoNum type="arabicPeriod"/>
-            </a:pPr>
-            <a:r>
-              <a:rPr/>
-              <a:t>Use an email you will still have after you graduate.</a:t>
-            </a:r>
-          </a:p>
-          <a:p>
-            <a:pPr lvl="0" indent="-342900" marL="342900">
-              <a:buAutoNum type="arabicPeriod"/>
-            </a:pPr>
-            <a:r>
-              <a:rPr/>
-              <a:t>Pick a username you would put on a CV — this is a professional record.</a:t>
-            </a:r>
-          </a:p>
-          <a:p>
-            <a:pPr lvl="0" indent="-342900" marL="342900">
-              <a:buAutoNum type="arabicPeriod"/>
-            </a:pPr>
-            <a:r>
-              <a:rPr/>
-              <a:t>Verify the email GitHub sends you.</a:t>
-            </a:r>
-          </a:p>
-          <a:p>
-            <a:pPr lvl="0" indent="-342900" marL="342900">
-              <a:buAutoNum type="arabicPeriod"/>
-            </a:pPr>
-            <a:r>
-              <a:rPr/>
-              <a:t>Enable </a:t>
-            </a:r>
-            <a:r>
-              <a:rPr b="1"/>
-              <a:t>two-factor authentication</a:t>
-            </a:r>
-            <a:r>
-              <a:rPr/>
-              <a:t> when prompted. GitHub requires it.</a:t>
-            </a:r>
-          </a:p>
-          <a:p>
-            <a:pPr lvl="0" indent="0" marL="0">
-              <a:buNone/>
-            </a:pPr>
-            <a:r>
-              <a:rPr/>
-              <a:t>[ github.com/signup — email, password, username, then a verification puzzle ]</a:t>
-            </a:r>
-          </a:p>
-          <a:p>
-            <a:pPr lvl="0" indent="0" marL="0">
-              <a:buNone/>
-            </a:pPr>
-            <a:r>
-              <a:rPr/>
-              <a:t>Free accounts include unlimited private repositories. You do not need a paid plan.</a:t>
+            <a:pPr lvl="0" indent="0" marL="0">
+              <a:buNone/>
+            </a:pPr>
+            <a:r>
+              <a:rPr/>
+              <a:t>At the aider prompt</a:t>
+            </a:r>
+          </a:p>
+          <a:p>
+            <a:pPr lvl="0" indent="0">
+              <a:buNone/>
+            </a:pPr>
+            <a:r>
+              <a:rPr>
+                <a:latin typeface="Courier"/>
+              </a:rPr>
+              <a:t>&gt; create explore.py that loads data/spine/core.parquet,
+  prints the shape, and shows mean gdp_pc_eur by year</a:t>
+            </a:r>
+          </a:p>
+          <a:p>
+            <a:pPr lvl="0" indent="0" marL="0">
+              <a:buNone/>
+            </a:pPr>
+            <a:r>
+              <a:rPr/>
+              <a:t>aider proposes a diff. You read it. You accept it.</a:t>
+            </a:r>
+          </a:p>
+          <a:p>
+            <a:pPr lvl="0" indent="0">
+              <a:buNone/>
+            </a:pPr>
+            <a:r>
+              <a:rPr>
+                <a:latin typeface="Courier"/>
+              </a:rPr>
+              <a:t>python explore.py</a:t>
             </a:r>
           </a:p>
         </p:txBody>
@@ -7714,7 +7647,7 @@
             </a:pPr>
             <a:r>
               <a:rPr/>
-              <a:t>Install Git</a:t>
+              <a:t>What just happened</a:t>
             </a:r>
           </a:p>
         </p:txBody>
@@ -7739,33 +7672,28 @@
             </a:pPr>
             <a:r>
               <a:rPr/>
-              <a:t>download</a:t>
-            </a:r>
-          </a:p>
-          <a:p>
-            <a:pPr lvl="0" indent="0" marL="0">
-              <a:buNone/>
-            </a:pPr>
-            <a:r>
-              <a:rPr/>
-              <a:t>Go to </a:t>
+              <a:t>You ran a model </a:t>
             </a:r>
             <a:r>
               <a:rPr b="1"/>
-              <a:t>git-scm.com/downloads</a:t>
-            </a:r>
-            <a:r>
-              <a:rPr/>
-              <a:t> and run the installer for your system. Accept every default.</a:t>
-            </a:r>
-          </a:p>
-          <a:p>
-            <a:pPr lvl="0" indent="0" marL="0">
-              <a:buNone/>
-            </a:pPr>
-            <a:r>
-              <a:rPr/>
-              <a:t>macOS may already have it. Check first — the next slide tells you how.</a:t>
+              <a:t>on your own hardware</a:t>
+            </a:r>
+            <a:r>
+              <a:rPr/>
+              <a:t>, had it write code against real data, reviewed the change, and accepted it — </a:t>
+            </a:r>
+            <a:r>
+              <a:rPr b="1"/>
+              <a:t>without sending one byte to anyone’s API.</a:t>
+            </a:r>
+          </a:p>
+          <a:p>
+            <a:pPr lvl="0" indent="0" marL="0">
+              <a:buNone/>
+            </a:pPr>
+            <a:r>
+              <a:rPr/>
+              <a:t>Every lab this term is a variation on those two terminals.</a:t>
             </a:r>
           </a:p>
         </p:txBody>
@@ -7812,7 +7740,7 @@
             </a:pPr>
             <a:r>
               <a:rPr/>
-              <a:t>Tell git who you are</a:t>
+              <a:t>Why we do it this way</a:t>
             </a:r>
           </a:p>
         </p:txBody>
@@ -7832,173 +7760,64 @@
           <a:bodyPr/>
           <a:lstStyle/>
           <a:p>
-            <a:pPr lvl="0" indent="0" marL="0">
-              <a:buNone/>
-            </a:pPr>
-            <a:r>
-              <a:rPr/>
-              <a:t>VS Codium terminal</a:t>
-            </a:r>
-          </a:p>
-          <a:p>
-            <a:pPr lvl="0" indent="0">
-              <a:buNone/>
-            </a:pPr>
-            <a:r>
-              <a:rPr>
-                <a:solidFill>
-                  <a:srgbClr val="06287E"/>
-                </a:solidFill>
-                <a:latin typeface="Courier"/>
-              </a:rPr>
-              <a:t>git</a:t>
-            </a:r>
-            <a:r>
-              <a:rPr>
-                <a:latin typeface="Courier"/>
-              </a:rPr>
-              <a:t> </a:t>
-            </a:r>
-            <a:r>
-              <a:rPr>
-                <a:solidFill>
-                  <a:srgbClr val="7D9029"/>
-                </a:solidFill>
-                <a:latin typeface="Courier"/>
-              </a:rPr>
-              <a:t>--version</a:t>
-            </a:r>
-            <a:br/>
-            <a:r>
-              <a:rPr>
-                <a:solidFill>
-                  <a:srgbClr val="06287E"/>
-                </a:solidFill>
-                <a:latin typeface="Courier"/>
-              </a:rPr>
-              <a:t>git</a:t>
-            </a:r>
-            <a:r>
-              <a:rPr>
-                <a:latin typeface="Courier"/>
-              </a:rPr>
-              <a:t> config </a:t>
-            </a:r>
-            <a:r>
-              <a:rPr>
-                <a:solidFill>
-                  <a:srgbClr val="7D9029"/>
-                </a:solidFill>
-                <a:latin typeface="Courier"/>
-              </a:rPr>
-              <a:t>--global</a:t>
-            </a:r>
-            <a:r>
-              <a:rPr>
-                <a:latin typeface="Courier"/>
-              </a:rPr>
-              <a:t> user.name  </a:t>
-            </a:r>
-            <a:r>
-              <a:rPr>
-                <a:solidFill>
-                  <a:srgbClr val="4070A0"/>
-                </a:solidFill>
-                <a:latin typeface="Courier"/>
-              </a:rPr>
-              <a:t>"Your Full Name"</a:t>
-            </a:r>
-            <a:br/>
-            <a:r>
-              <a:rPr>
-                <a:solidFill>
-                  <a:srgbClr val="06287E"/>
-                </a:solidFill>
-                <a:latin typeface="Courier"/>
-              </a:rPr>
-              <a:t>git</a:t>
-            </a:r>
-            <a:r>
-              <a:rPr>
-                <a:latin typeface="Courier"/>
-              </a:rPr>
-              <a:t> config </a:t>
-            </a:r>
-            <a:r>
-              <a:rPr>
-                <a:solidFill>
-                  <a:srgbClr val="7D9029"/>
-                </a:solidFill>
-                <a:latin typeface="Courier"/>
-              </a:rPr>
-              <a:t>--global</a:t>
-            </a:r>
-            <a:r>
-              <a:rPr>
-                <a:latin typeface="Courier"/>
-              </a:rPr>
-              <a:t> user.email </a:t>
-            </a:r>
-            <a:r>
-              <a:rPr>
-                <a:solidFill>
-                  <a:srgbClr val="4070A0"/>
-                </a:solidFill>
-                <a:latin typeface="Courier"/>
-              </a:rPr>
-              <a:t>"your.name@hec.ca"</a:t>
-            </a:r>
-          </a:p>
-          <a:p>
-            <a:pPr lvl="0" indent="0" marL="0">
-              <a:buNone/>
-            </a:pPr>
+            <a:pPr lvl="0"/>
             <a:r>
               <a:rPr b="1"/>
-              <a:t>Use your real name and your university email.</a:t>
-            </a:r>
-            <a:r>
-              <a:rPr/>
-              <a:t> Your commit history is one of four records this course uses to check that all three group members did the work. Commits from </a:t>
-            </a:r>
-            <a:r>
-              <a:rPr>
-                <a:latin typeface="Courier"/>
-              </a:rPr>
-              <a:t>unknown@localhost</a:t>
-            </a:r>
-            <a:r>
-              <a:rPr/>
-              <a:t> cannot be attributed to you, and unattributed work counts as work you did not do.</a:t>
-            </a:r>
-          </a:p>
-          <a:p>
-            <a:pPr lvl="0" indent="0" marL="0">
-              <a:buNone/>
-            </a:pPr>
-            <a:r>
-              <a:rPr/>
-              <a:t>Report your exact </a:t>
-            </a:r>
-            <a:r>
-              <a:rPr>
-                <a:latin typeface="Courier"/>
-              </a:rPr>
-              <a:t>user.name</a:t>
-            </a:r>
-            <a:r>
-              <a:rPr/>
-              <a:t> and </a:t>
-            </a:r>
-            <a:r>
-              <a:rPr>
-                <a:latin typeface="Courier"/>
-              </a:rPr>
-              <a:t>user.email</a:t>
-            </a:r>
-            <a:r>
-              <a:rPr/>
-              <a:t> to me in Session 1.</a:t>
+              <a:t>The data stay put.</a:t>
+            </a:r>
+            <a:r>
+              <a:rPr/>
+              <a:t> Some of what you use this term cannot legally be uploaded.</a:t>
+            </a:r>
+          </a:p>
+          <a:p>
+            <a:pPr lvl="0"/>
+            <a:r>
+              <a:rPr b="1"/>
+              <a:t>The cost is zero.</a:t>
+            </a:r>
+            <a:r>
+              <a:rPr/>
+              <a:t> No key, no quota, no bill at the end of the month.</a:t>
+            </a:r>
+          </a:p>
+          <a:p>
+            <a:pPr lvl="0"/>
+            <a:r>
+              <a:rPr b="1"/>
+              <a:t>The record is honest.</a:t>
+            </a:r>
+            <a:r>
+              <a:rPr/>
+              <a:t> The diff shows exactly what changed, and why.</a:t>
+            </a:r>
+          </a:p>
+          <a:p>
+            <a:pPr lvl="0"/>
+            <a:r>
+              <a:rPr b="1"/>
+              <a:t>The skill transfers.</a:t>
+            </a:r>
+            <a:r>
+              <a:rPr/>
+              <a:t> This is how the work is actually done now.</a:t>
+            </a:r>
+          </a:p>
+          <a:p>
+            <a:pPr lvl="0" indent="0" marL="0">
+              <a:buNone/>
+            </a:pPr>
+            <a:r>
+              <a:rPr/>
+              <a:t>The model is a </a:t>
+            </a:r>
+            <a:r>
+              <a:rPr b="1"/>
+              <a:t>junior collaborator with no accountability.</a:t>
+            </a:r>
+            <a:r>
+              <a:rPr/>
+              <a:t> It will produce confident, wrong code. Every line you accept is a line you are claiming as correct. Read the diff.</a:t>
             </a:r>
           </a:p>
         </p:txBody>
@@ -8037,8 +7856,8 @@
         </p:nvSpPr>
         <p:spPr>
           <a:xfrm>
-            <a:off x="457201" y="204787"/>
-            <a:ext cx="3008313" cy="871538"/>
+            <a:off x="722313" y="3305176"/>
+            <a:ext cx="7772400" cy="1021556"/>
           </a:xfrm>
         </p:spPr>
         <p:txBody>
@@ -8050,250 +7869,11 @@
             </a:pPr>
             <a:r>
               <a:rPr/>
-              <a:t>Create your repository</a:t>
-            </a:r>
-          </a:p>
-        </p:txBody>
-      </p:sp>
-      <p:sp>
-        <p:nvSpPr>
-          <p:cNvPr id="4" name="Text Placeholder 3"/>
-          <p:cNvSpPr>
-            <a:spLocks noGrp="1"/>
-          </p:cNvSpPr>
-          <p:nvPr>
-            <p:ph idx="2" sz="half" type="body"/>
-          </p:nvPr>
-        </p:nvSpPr>
-        <p:spPr/>
-        <p:txBody>
-          <a:bodyPr/>
-          <a:lstStyle/>
-          <a:p>
-            <a:pPr lvl="0" indent="0" marL="0">
-              <a:buNone/>
-            </a:pPr>
-            <a:r>
-              <a:rPr/>
-              <a:t>On github.com, click </a:t>
-            </a:r>
-            <a:r>
-              <a:rPr b="1"/>
-              <a:t>+</a:t>
-            </a:r>
-            <a:r>
-              <a:rPr/>
-              <a:t> (top right) → </a:t>
-            </a:r>
-            <a:r>
-              <a:rPr b="1"/>
-              <a:t>New repository</a:t>
-            </a:r>
-            <a:r>
-              <a:rPr/>
-              <a:t>.</a:t>
-            </a:r>
-          </a:p>
-        </p:txBody>
-      </p:sp>
-      <p:graphicFrame>
-        <p:nvGraphicFramePr>
-          <p:cNvPr id="6" name="Content Placeholder 5"/>
-          <p:cNvGraphicFramePr>
-            <a:graphicFrameLocks noGrp="1"/>
-          </p:cNvGraphicFramePr>
-          <p:nvPr>
-            <p:ph idx="1"/>
-          </p:nvPr>
-        </p:nvGraphicFramePr>
-        <p:xfrm>
-          <a:off x="3568700" y="203200"/>
-          <a:ext cx="5105400" cy="4381500"/>
-        </p:xfrm>
-        <a:graphic>
-          <a:graphicData uri="http://schemas.openxmlformats.org/drawingml/2006/table">
-            <a:tbl>
-              <a:tblPr firstRow="1" bandRow="1">
-                <a:tableStyleId>{5C22544A-7EE6-4342-B048-85BDC9FD1C3A}</a:tableStyleId>
-              </a:tblPr>
-              <a:tblGrid>
-                <a:gridCol w="2552700"/>
-                <a:gridCol w="2552700"/>
-              </a:tblGrid>
-              <a:tr h="0">
-                <a:tc>
-                  <a:txBody>
-                    <a:bodyPr/>
-                    <a:lstStyle/>
-                    <a:p>
-                      <a:pPr lvl="0" indent="0" marL="0">
-                        <a:buNone/>
-                      </a:pPr>
-                      <a:r>
-                        <a:rPr/>
-                        <a:t>Field</a:t>
-                      </a:r>
-                    </a:p>
-                  </a:txBody>
-                  <a:tcPr/>
-                </a:tc>
-                <a:tc>
-                  <a:txBody>
-                    <a:bodyPr/>
-                    <a:lstStyle/>
-                    <a:p>
-                      <a:pPr lvl="0" indent="0" marL="0">
-                        <a:buNone/>
-                      </a:pPr>
-                      <a:r>
-                        <a:rPr/>
-                        <a:t>What to put</a:t>
-                      </a:r>
-                    </a:p>
-                  </a:txBody>
-                  <a:tcPr/>
-                </a:tc>
-              </a:tr>
-              <a:tr h="0">
-                <a:tc>
-                  <a:txBody>
-                    <a:bodyPr/>
-                    <a:lstStyle/>
-                    <a:p>
-                      <a:pPr lvl="0" indent="0" marL="0">
-                        <a:buNone/>
-                      </a:pPr>
-                      <a:r>
-                        <a:rPr b="1"/>
-                        <a:t>Repository name</a:t>
-                      </a:r>
-                    </a:p>
-                  </a:txBody>
-                </a:tc>
-                <a:tc>
-                  <a:txBody>
-                    <a:bodyPr/>
-                    <a:lstStyle/>
-                    <a:p>
-                      <a:pPr lvl="0" indent="0" marL="0">
-                        <a:buNone/>
-                      </a:pPr>
-                      <a:r>
-                        <a:rPr>
-                          <a:latin typeface="Courier"/>
-                        </a:rPr>
-                        <a:t>math60033a-gXX</a:t>
-                      </a:r>
-                      <a:r>
-                        <a:rPr/>
-                        <a:t> (XX = your group number)</a:t>
-                      </a:r>
-                    </a:p>
-                  </a:txBody>
-                </a:tc>
-              </a:tr>
-              <a:tr h="0">
-                <a:tc>
-                  <a:txBody>
-                    <a:bodyPr/>
-                    <a:lstStyle/>
-                    <a:p>
-                      <a:pPr lvl="0" indent="0" marL="0">
-                        <a:buNone/>
-                      </a:pPr>
-                      <a:r>
-                        <a:rPr b="1"/>
-                        <a:t>Description</a:t>
-                      </a:r>
-                    </a:p>
-                  </a:txBody>
-                </a:tc>
-                <a:tc>
-                  <a:txBody>
-                    <a:bodyPr/>
-                    <a:lstStyle/>
-                    <a:p>
-                      <a:pPr lvl="0" indent="0" marL="0">
-                        <a:buNone/>
-                      </a:pPr>
-                      <a:r>
-                        <a:rPr>
-                          <a:latin typeface="Courier"/>
-                        </a:rPr>
-                        <a:t>MATH60033A group work</a:t>
-                      </a:r>
-                    </a:p>
-                  </a:txBody>
-                </a:tc>
-              </a:tr>
-              <a:tr h="0">
-                <a:tc>
-                  <a:txBody>
-                    <a:bodyPr/>
-                    <a:lstStyle/>
-                    <a:p>
-                      <a:pPr lvl="0" indent="0" marL="0">
-                        <a:buNone/>
-                      </a:pPr>
-                      <a:r>
-                        <a:rPr b="1"/>
-                        <a:t>Visibility</a:t>
-                      </a:r>
-                    </a:p>
-                  </a:txBody>
-                </a:tc>
-                <a:tc>
-                  <a:txBody>
-                    <a:bodyPr/>
-                    <a:lstStyle/>
-                    <a:p>
-                      <a:pPr lvl="0" indent="0" marL="0">
-                        <a:buNone/>
-                      </a:pPr>
-                      <a:r>
-                        <a:rPr b="1"/>
-                        <a:t>Private</a:t>
-                      </a:r>
-                    </a:p>
-                  </a:txBody>
-                </a:tc>
-              </a:tr>
-              <a:tr h="0">
-                <a:tc>
-                  <a:txBody>
-                    <a:bodyPr/>
-                    <a:lstStyle/>
-                    <a:p>
-                      <a:pPr lvl="0" indent="0" marL="0">
-                        <a:buNone/>
-                      </a:pPr>
-                      <a:r>
-                        <a:rPr b="1"/>
-                        <a:t>Initialize with README</a:t>
-                      </a:r>
-                    </a:p>
-                  </a:txBody>
-                </a:tc>
-                <a:tc>
-                  <a:txBody>
-                    <a:bodyPr/>
-                    <a:lstStyle/>
-                    <a:p>
-                      <a:pPr lvl="0" indent="0" marL="0">
-                        <a:buNone/>
-                      </a:pPr>
-                      <a:r>
-                        <a:rPr/>
-                        <a:t>✅ tick it</a:t>
-                      </a:r>
-                    </a:p>
-                  </a:txBody>
-                </a:tc>
-              </a:tr>
-            </a:tbl>
-          </a:graphicData>
-        </a:graphic>
-      </p:graphicFrame>
+              <a:t>If it breaks</a:t>
+            </a:r>
+          </a:p>
+        </p:txBody>
+      </p:sp>
     </p:spTree>
   </p:cSld>
 </p:sld>
@@ -8318,38 +7898,349 @@
       </p:grpSpPr>
       <p:sp>
         <p:nvSpPr>
-          <p:cNvPr id="3" name="Content Placeholder 2"/>
-          <p:cNvSpPr>
-            <a:spLocks noGrp="1"/>
-          </p:cNvSpPr>
+          <p:cNvPr id="2" name="Title 1"/>
+          <p:cNvSpPr>
+            <a:spLocks noGrp="1"/>
+          </p:cNvSpPr>
+          <p:nvPr>
+            <p:ph type="title"/>
+          </p:nvPr>
+        </p:nvSpPr>
+        <p:spPr/>
+        <p:txBody>
+          <a:bodyPr/>
+          <a:lstStyle/>
+          <a:p>
+            <a:pPr lvl="0" indent="0" marL="0">
+              <a:buNone/>
+            </a:pPr>
+            <a:r>
+              <a:rPr/>
+              <a:t>Troubleshooting</a:t>
+            </a:r>
+          </a:p>
+        </p:txBody>
+      </p:sp>
+      <p:graphicFrame>
+        <p:nvGraphicFramePr>
+          <p:cNvPr id="6" name="Content Placeholder 5"/>
+          <p:cNvGraphicFramePr>
+            <a:graphicFrameLocks noGrp="1"/>
+          </p:cNvGraphicFramePr>
           <p:nvPr>
             <p:ph idx="1"/>
           </p:nvPr>
-        </p:nvSpPr>
-        <p:spPr/>
-        <p:txBody>
-          <a:bodyPr/>
-          <a:lstStyle/>
-          <a:p>
-            <a:pPr lvl="0" indent="0" marL="0">
-              <a:buNone/>
-            </a:pPr>
-            <a:r>
-              <a:rPr/>
-              <a:t>[ github.com/new — owner, repository name, description, Public/Private, README checkbox ]</a:t>
-            </a:r>
-          </a:p>
-          <a:p>
-            <a:pPr lvl="0" indent="0" marL="0">
-              <a:buNone/>
-            </a:pPr>
-            <a:r>
-              <a:rPr/>
-              <a:t>Keep it to yourself for now. We will sort out groups and access in class.</a:t>
-            </a:r>
-          </a:p>
-        </p:txBody>
-      </p:sp>
+        </p:nvGraphicFramePr>
+        <p:xfrm>
+          <a:off x="457200" y="1193800"/>
+          <a:ext cx="8229600" cy="3390900"/>
+        </p:xfrm>
+        <a:graphic>
+          <a:graphicData uri="http://schemas.openxmlformats.org/drawingml/2006/table">
+            <a:tbl>
+              <a:tblPr firstRow="1" bandRow="1">
+                <a:tableStyleId>{5C22544A-7EE6-4342-B048-85BDC9FD1C3A}</a:tableStyleId>
+              </a:tblPr>
+              <a:tblGrid>
+                <a:gridCol w="4114800"/>
+                <a:gridCol w="4114800"/>
+              </a:tblGrid>
+              <a:tr h="0">
+                <a:tc>
+                  <a:txBody>
+                    <a:bodyPr/>
+                    <a:lstStyle/>
+                    <a:p>
+                      <a:pPr lvl="0" indent="0" marL="0">
+                        <a:buNone/>
+                      </a:pPr>
+                      <a:r>
+                        <a:rPr/>
+                        <a:t>Symptom</a:t>
+                      </a:r>
+                    </a:p>
+                  </a:txBody>
+                  <a:tcPr/>
+                </a:tc>
+                <a:tc>
+                  <a:txBody>
+                    <a:bodyPr/>
+                    <a:lstStyle/>
+                    <a:p>
+                      <a:pPr lvl="0" indent="0" marL="0">
+                        <a:buNone/>
+                      </a:pPr>
+                      <a:r>
+                        <a:rPr/>
+                        <a:t>Fix</a:t>
+                      </a:r>
+                    </a:p>
+                  </a:txBody>
+                  <a:tcPr/>
+                </a:tc>
+              </a:tr>
+              <a:tr h="0">
+                <a:tc>
+                  <a:txBody>
+                    <a:bodyPr/>
+                    <a:lstStyle/>
+                    <a:p>
+                      <a:pPr lvl="0" indent="0" marL="0">
+                        <a:buNone/>
+                      </a:pPr>
+                      <a:r>
+                        <a:rPr>
+                          <a:latin typeface="Courier"/>
+                        </a:rPr>
+                        <a:t>ollama: command not found</a:t>
+                      </a:r>
+                    </a:p>
+                  </a:txBody>
+                </a:tc>
+                <a:tc>
+                  <a:txBody>
+                    <a:bodyPr/>
+                    <a:lstStyle/>
+                    <a:p>
+                      <a:pPr lvl="0" indent="0" marL="0">
+                        <a:buNone/>
+                      </a:pPr>
+                      <a:r>
+                        <a:rPr/>
+                        <a:t>Reopen the terminal; on Windows, restart VS Codium</a:t>
+                      </a:r>
+                    </a:p>
+                  </a:txBody>
+                </a:tc>
+              </a:tr>
+              <a:tr h="0">
+                <a:tc>
+                  <a:txBody>
+                    <a:bodyPr/>
+                    <a:lstStyle/>
+                    <a:p>
+                      <a:pPr lvl="0" indent="0" marL="0">
+                        <a:buNone/>
+                      </a:pPr>
+                      <a:r>
+                        <a:rPr/>
+                        <a:t>Model answers very slowly</a:t>
+                      </a:r>
+                    </a:p>
+                  </a:txBody>
+                </a:tc>
+                <a:tc>
+                  <a:txBody>
+                    <a:bodyPr/>
+                    <a:lstStyle/>
+                    <a:p>
+                      <a:pPr lvl="0" indent="0" marL="0">
+                        <a:buNone/>
+                      </a:pPr>
+                      <a:r>
+                        <a:rPr/>
+                        <a:t>Use a smaller model (</a:t>
+                      </a:r>
+                      <a:r>
+                        <a:rPr>
+                          <a:latin typeface="Courier"/>
+                        </a:rPr>
+                        <a:t>:3b</a:t>
+                      </a:r>
+                      <a:r>
+                        <a:rPr/>
+                        <a:t>); close other applications</a:t>
+                      </a:r>
+                    </a:p>
+                  </a:txBody>
+                </a:tc>
+              </a:tr>
+              <a:tr h="0">
+                <a:tc>
+                  <a:txBody>
+                    <a:bodyPr/>
+                    <a:lstStyle/>
+                    <a:p>
+                      <a:pPr lvl="0" indent="0" marL="0">
+                        <a:buNone/>
+                      </a:pPr>
+                      <a:r>
+                        <a:rPr/>
+                        <a:t>aider “forgets” your file</a:t>
+                      </a:r>
+                    </a:p>
+                  </a:txBody>
+                </a:tc>
+                <a:tc>
+                  <a:txBody>
+                    <a:bodyPr/>
+                    <a:lstStyle/>
+                    <a:p>
+                      <a:pPr lvl="0" indent="0" marL="0">
+                        <a:buNone/>
+                      </a:pPr>
+                      <a:r>
+                        <a:rPr/>
+                        <a:t>You skipped </a:t>
+                      </a:r>
+                      <a:r>
+                        <a:rPr>
+                          <a:latin typeface="Courier"/>
+                        </a:rPr>
+                        <a:t>OLLAMA_CONTEXT_LENGTH=8192 ollama serve</a:t>
+                      </a:r>
+                    </a:p>
+                  </a:txBody>
+                </a:tc>
+              </a:tr>
+              <a:tr h="0">
+                <a:tc>
+                  <a:txBody>
+                    <a:bodyPr/>
+                    <a:lstStyle/>
+                    <a:p>
+                      <a:pPr lvl="0" indent="0" marL="0">
+                        <a:buNone/>
+                      </a:pPr>
+                      <a:r>
+                        <a:rPr>
+                          <a:latin typeface="Courier"/>
+                        </a:rPr>
+                        <a:t>connection refused</a:t>
+                      </a:r>
+                      <a:r>
+                        <a:rPr/>
+                        <a:t> from aider</a:t>
+                      </a:r>
+                    </a:p>
+                  </a:txBody>
+                </a:tc>
+                <a:tc>
+                  <a:txBody>
+                    <a:bodyPr/>
+                    <a:lstStyle/>
+                    <a:p>
+                      <a:pPr lvl="0" indent="0" marL="0">
+                        <a:buNone/>
+                      </a:pPr>
+                      <a:r>
+                        <a:rPr/>
+                        <a:t>The </a:t>
+                      </a:r>
+                      <a:r>
+                        <a:rPr>
+                          <a:latin typeface="Courier"/>
+                        </a:rPr>
+                        <a:t>ollama serve</a:t>
+                      </a:r>
+                      <a:r>
+                        <a:rPr/>
+                        <a:t> terminal is not running</a:t>
+                      </a:r>
+                    </a:p>
+                  </a:txBody>
+                </a:tc>
+              </a:tr>
+              <a:tr h="0">
+                <a:tc>
+                  <a:txBody>
+                    <a:bodyPr/>
+                    <a:lstStyle/>
+                    <a:p>
+                      <a:pPr lvl="0" indent="0" marL="0">
+                        <a:buNone/>
+                      </a:pPr>
+                      <a:r>
+                        <a:rPr>
+                          <a:latin typeface="Courier"/>
+                        </a:rPr>
+                        <a:t>pip</a:t>
+                      </a:r>
+                      <a:r>
+                        <a:rPr/>
+                        <a:t> fails on install</a:t>
+                      </a:r>
+                    </a:p>
+                  </a:txBody>
+                </a:tc>
+                <a:tc>
+                  <a:txBody>
+                    <a:bodyPr/>
+                    <a:lstStyle/>
+                    <a:p>
+                      <a:pPr lvl="0" indent="0" marL="0">
+                        <a:buNone/>
+                      </a:pPr>
+                      <a:r>
+                        <a:rPr/>
+                        <a:t>Check </a:t>
+                      </a:r>
+                      <a:r>
+                        <a:rPr>
+                          <a:latin typeface="Courier"/>
+                        </a:rPr>
+                        <a:t>(.venv)</a:t>
+                      </a:r>
+                      <a:r>
+                        <a:rPr/>
+                        <a:t> is in your prompt</a:t>
+                      </a:r>
+                    </a:p>
+                  </a:txBody>
+                </a:tc>
+              </a:tr>
+              <a:tr h="0">
+                <a:tc>
+                  <a:txBody>
+                    <a:bodyPr/>
+                    <a:lstStyle/>
+                    <a:p>
+                      <a:pPr lvl="0" indent="0" marL="0">
+                        <a:buNone/>
+                      </a:pPr>
+                      <a:r>
+                        <a:rPr>
+                          <a:latin typeface="Courier"/>
+                        </a:rPr>
+                        <a:t>python3</a:t>
+                      </a:r>
+                      <a:r>
+                        <a:rPr/>
+                        <a:t> not found on Windows</a:t>
+                      </a:r>
+                    </a:p>
+                  </a:txBody>
+                </a:tc>
+                <a:tc>
+                  <a:txBody>
+                    <a:bodyPr/>
+                    <a:lstStyle/>
+                    <a:p>
+                      <a:pPr lvl="0" indent="0" marL="0">
+                        <a:buNone/>
+                      </a:pPr>
+                      <a:r>
+                        <a:rPr/>
+                        <a:t>Try </a:t>
+                      </a:r>
+                      <a:r>
+                        <a:rPr>
+                          <a:latin typeface="Courier"/>
+                        </a:rPr>
+                        <a:t>python</a:t>
+                      </a:r>
+                      <a:r>
+                        <a:rPr/>
+                        <a:t>; if still missing, PATH was not ticked</a:t>
+                      </a:r>
+                    </a:p>
+                  </a:txBody>
+                </a:tc>
+              </a:tr>
+            </a:tbl>
+          </a:graphicData>
+        </a:graphic>
+      </p:graphicFrame>
     </p:spTree>
   </p:cSld>
 </p:sld>
@@ -8374,30 +8265,25 @@
       </p:grpSpPr>
       <p:sp>
         <p:nvSpPr>
-          <p:cNvPr id="2" name="Title 1"/>
-          <p:cNvSpPr>
-            <a:spLocks noGrp="1"/>
-          </p:cNvSpPr>
-          <p:nvPr>
-            <p:ph type="title"/>
-          </p:nvPr>
-        </p:nvSpPr>
-        <p:spPr>
-          <a:xfrm>
-            <a:off x="722313" y="3305176"/>
-            <a:ext cx="7772400" cy="1021556"/>
-          </a:xfrm>
-        </p:spPr>
-        <p:txBody>
-          <a:bodyPr/>
-          <a:lstStyle/>
-          <a:p>
-            <a:pPr lvl="0" indent="0" marL="0">
-              <a:buNone/>
-            </a:pPr>
-            <a:r>
-              <a:rPr/>
-              <a:t>Step 7 — Connect it</a:t>
+          <p:cNvPr id="3" name="Content Placeholder 2"/>
+          <p:cNvSpPr>
+            <a:spLocks noGrp="1"/>
+          </p:cNvSpPr>
+          <p:nvPr>
+            <p:ph idx="1"/>
+          </p:nvPr>
+        </p:nvSpPr>
+        <p:spPr/>
+        <p:txBody>
+          <a:bodyPr/>
+          <a:lstStyle/>
+          <a:p>
+            <a:pPr lvl="0" indent="0" marL="0">
+              <a:buNone/>
+            </a:pPr>
+            <a:r>
+              <a:rPr/>
+              <a:t>Still stuck? Ask Qwen — that is itself a test of whether your setup works.</a:t>
             </a:r>
           </a:p>
         </p:txBody>
@@ -8444,7 +8330,7 @@
             </a:pPr>
             <a:r>
               <a:rPr/>
-              <a:t>Clone your repo into VS Codium</a:t>
+              <a:t>The last check</a:t>
             </a:r>
           </a:p>
         </p:txBody>
@@ -8469,87 +8355,37 @@
             </a:pPr>
             <a:r>
               <a:rPr/>
-              <a:t>On your repository page, click the green </a:t>
-            </a:r>
-            <a:r>
-              <a:rPr b="1"/>
-              <a:t>Code</a:t>
-            </a:r>
-            <a:r>
-              <a:rPr/>
-              <a:t> button and copy the </a:t>
-            </a:r>
-            <a:r>
-              <a:rPr b="1"/>
-              <a:t>HTTPS</a:t>
-            </a:r>
-            <a:r>
-              <a:rPr/>
-              <a:t> URL.</a:t>
-            </a:r>
-          </a:p>
-          <a:p>
-            <a:pPr lvl="0" indent="0" marL="0">
-              <a:buNone/>
-            </a:pPr>
-            <a:r>
-              <a:rPr/>
-              <a:t>VS Codium terminal</a:t>
-            </a:r>
-          </a:p>
-          <a:p>
-            <a:pPr lvl="0" indent="0">
-              <a:buNone/>
-            </a:pPr>
-            <a:r>
-              <a:rPr>
-                <a:solidFill>
-                  <a:srgbClr val="06287E"/>
-                </a:solidFill>
-                <a:latin typeface="Courier"/>
-              </a:rPr>
-              <a:t>git</a:t>
+              <a:t>VS Codium terminal · with </a:t>
             </a:r>
             <a:r>
               <a:rPr>
                 <a:latin typeface="Courier"/>
               </a:rPr>
-              <a:t> clone https://github.com/YOUR-USERNAME/math60033a-gXX.git</a:t>
-            </a:r>
-            <a:br/>
-            <a:r>
-              <a:rPr>
-                <a:solidFill>
-                  <a:srgbClr val="008000"/>
-                </a:solidFill>
-                <a:latin typeface="Courier"/>
-              </a:rPr>
-              <a:t>cd</a:t>
-            </a:r>
+              <a:t>(.venv)</a:t>
+            </a:r>
+            <a:r>
+              <a:rPr/>
+              <a:t> showing</a:t>
+            </a:r>
+          </a:p>
+          <a:p>
+            <a:pPr lvl="0" indent="0">
+              <a:buNone/>
+            </a:pPr>
             <a:r>
               <a:rPr>
                 <a:latin typeface="Courier"/>
               </a:rPr>
-              <a:t> math60033a-gXX</a:t>
-            </a:r>
-          </a:p>
-          <a:p>
-            <a:pPr lvl="0" indent="0" marL="0">
-              <a:buNone/>
-            </a:pPr>
-            <a:r>
-              <a:rPr/>
-              <a:t>Then </a:t>
-            </a:r>
-            <a:r>
-              <a:rPr>
-                <a:latin typeface="Courier"/>
-              </a:rPr>
-              <a:t>File → Open Folder…</a:t>
-            </a:r>
-            <a:r>
-              <a:rPr/>
-              <a:t> and choose that folder.</a:t>
+              <a:t>python 01-foundations-scenarios-and-tools/00-pre-session/verify_environment.py</a:t>
+            </a:r>
+          </a:p>
+          <a:p>
+            <a:pPr lvl="0" indent="0" marL="0">
+              <a:buNone/>
+            </a:pPr>
+            <a:r>
+              <a:rPr/>
+              <a:t>You should see five checks pass.</a:t>
             </a:r>
           </a:p>
           <a:p>
@@ -8558,31 +8394,11 @@
             </a:pPr>
             <a:r>
               <a:rPr b="1"/>
-              <a:t>Check.</a:t>
-            </a:r>
-            <a:r>
-              <a:rPr/>
-              <a:t> The Explorer shows </a:t>
-            </a:r>
-            <a:r>
-              <a:rPr>
-                <a:latin typeface="Courier"/>
-              </a:rPr>
-              <a:t>README.md</a:t>
-            </a:r>
-            <a:r>
-              <a:rPr/>
-              <a:t>, and the bottom-left of the window shows the branch name </a:t>
-            </a:r>
-            <a:r>
-              <a:rPr>
-                <a:latin typeface="Courier"/>
-              </a:rPr>
-              <a:t>main</a:t>
-            </a:r>
-            <a:r>
-              <a:rPr/>
-              <a:t>.</a:t>
+              <a:t>Bring the output to class</a:t>
+            </a:r>
+            <a:r>
+              <a:rPr/>
+              <a:t> — a screenshot or a paste into your notes.</a:t>
             </a:r>
           </a:p>
         </p:txBody>
@@ -8629,7 +8445,7 @@
             </a:pPr>
             <a:r>
               <a:rPr/>
-              <a:t>Your password will not work</a:t>
+              <a:t>Before Session 1</a:t>
             </a:r>
           </a:p>
         </p:txBody>
@@ -8649,89 +8465,60 @@
           <a:bodyPr/>
           <a:lstStyle/>
           <a:p>
-            <a:pPr lvl="0" indent="0" marL="0">
-              <a:buNone/>
-            </a:pPr>
-            <a:r>
-              <a:rPr/>
-              <a:t>When you first push, GitHub asks for credentials — and </a:t>
+            <a:pPr lvl="0"/>
+            <a:r>
+              <a:rPr/>
+              <a:t>✅ VS Codium installed, Python environment built</a:t>
+            </a:r>
+          </a:p>
+          <a:p>
+            <a:pPr lvl="0"/>
+            <a:r>
+              <a:rPr/>
+              <a:t>✅ Ollama running Qwen 2.5 Coder, verified </a:t>
             </a:r>
             <a:r>
               <a:rPr b="1"/>
-              <a:t>rejects your account password</a:t>
-            </a:r>
-            <a:r>
-              <a:rPr/>
-              <a:t>. It wants a </a:t>
+              <a:t>with the wifi off</a:t>
+            </a:r>
+          </a:p>
+          <a:p>
+            <a:pPr lvl="0"/>
+            <a:r>
+              <a:rPr/>
+              <a:t>✅ aider talking to your local model, editing a real file</a:t>
+            </a:r>
+          </a:p>
+          <a:p>
+            <a:pPr lvl="0"/>
+            <a:r>
+              <a:rPr/>
+              <a:t>✅ </a:t>
             </a:r>
             <a:r>
               <a:rPr i="1"/>
-              <a:t>token</a:t>
-            </a:r>
-            <a:r>
-              <a:rPr/>
-              <a:t>.</a:t>
-            </a:r>
-          </a:p>
-          <a:p>
-            <a:pPr lvl="0" indent="-342900" marL="342900">
-              <a:buAutoNum type="arabicPeriod"/>
-            </a:pPr>
-            <a:r>
-              <a:rPr/>
-              <a:t>github.com → your avatar → </a:t>
-            </a:r>
-            <a:r>
-              <a:rPr b="1"/>
-              <a:t>Settings</a:t>
-            </a:r>
-          </a:p>
-          <a:p>
-            <a:pPr lvl="0" indent="-342900" marL="342900">
-              <a:buAutoNum type="arabicPeriod"/>
-            </a:pPr>
-            <a:r>
-              <a:rPr b="1"/>
-              <a:t>Developer settings</a:t>
-            </a:r>
-            <a:r>
-              <a:rPr/>
-              <a:t> → </a:t>
-            </a:r>
-            <a:r>
-              <a:rPr b="1"/>
-              <a:t>Personal access tokens</a:t>
-            </a:r>
-            <a:r>
-              <a:rPr/>
-              <a:t> → </a:t>
-            </a:r>
-            <a:r>
-              <a:rPr b="1"/>
-              <a:t>Tokens (classic)</a:t>
-            </a:r>
-          </a:p>
-          <a:p>
-            <a:pPr lvl="0" indent="-342900" marL="342900">
-              <a:buAutoNum type="arabicPeriod"/>
-            </a:pPr>
-            <a:r>
-              <a:rPr b="1"/>
-              <a:t>Generate new token</a:t>
-            </a:r>
-            <a:r>
-              <a:rPr/>
-              <a:t>, tick the </a:t>
-            </a:r>
-            <a:r>
-              <a:rPr b="1">
+              <a:t>Europe 2031</a:t>
+            </a:r>
+            <a:r>
+              <a:rPr/>
+              <a:t> read as a stress test, not a prediction</a:t>
+            </a:r>
+          </a:p>
+          <a:p>
+            <a:pPr lvl="0"/>
+            <a:r>
+              <a:rPr/>
+              <a:t>✅ </a:t>
+            </a:r>
+            <a:r>
+              <a:rPr>
                 <a:latin typeface="Courier"/>
               </a:rPr>
-              <a:t>repo</a:t>
-            </a:r>
-            <a:r>
-              <a:rPr/>
-              <a:t> scope, set an expiry</a:t>
+              <a:t>verify_environment.py</a:t>
+            </a:r>
+            <a:r>
+              <a:rPr/>
+              <a:t> output in hand</a:t>
             </a:r>
           </a:p>
         </p:txBody>
@@ -8760,31 +8547,6 @@
       </p:grpSpPr>
       <p:sp>
         <p:nvSpPr>
-          <p:cNvPr id="2" name="Title 1"/>
-          <p:cNvSpPr>
-            <a:spLocks noGrp="1"/>
-          </p:cNvSpPr>
-          <p:nvPr>
-            <p:ph type="title"/>
-          </p:nvPr>
-        </p:nvSpPr>
-        <p:spPr/>
-        <p:txBody>
-          <a:bodyPr/>
-          <a:lstStyle/>
-          <a:p>
-            <a:pPr lvl="0" indent="0" marL="0">
-              <a:buNone/>
-            </a:pPr>
-            <a:r>
-              <a:rPr/>
-              <a:t>Using the token</a:t>
-            </a:r>
-          </a:p>
-        </p:txBody>
-      </p:sp>
-      <p:sp>
-        <p:nvSpPr>
           <p:cNvPr id="3" name="Content Placeholder 2"/>
           <p:cNvSpPr>
             <a:spLocks noGrp="1"/>
@@ -8798,341 +8560,24 @@
           <a:bodyPr/>
           <a:lstStyle/>
           <a:p>
-            <a:pPr lvl="0" indent="-342900" marL="342900">
-              <a:buAutoNum startAt="4" type="arabicPeriod"/>
-            </a:pPr>
-            <a:r>
-              <a:rPr/>
-              <a:t>Copy the token — </a:t>
-            </a:r>
+            <a:pPr lvl="0" indent="0" marL="0">
+              <a:spcBef>
+                <a:spcPts val="3000"/>
+              </a:spcBef>
+              <a:buNone/>
+            </a:pPr>
             <a:r>
               <a:rPr b="1"/>
-              <a:t>it is shown once</a:t>
-            </a:r>
-          </a:p>
-          <a:p>
-            <a:pPr lvl="0" indent="-342900" marL="342900">
-              <a:buAutoNum startAt="4" type="arabicPeriod"/>
-            </a:pPr>
-            <a:r>
-              <a:rPr/>
-              <a:t>Paste it when git asks for your </a:t>
-            </a:r>
-            <a:r>
-              <a:rPr i="1"/>
-              <a:t>password</a:t>
-            </a:r>
-          </a:p>
-          <a:p>
-            <a:pPr lvl="0" indent="0">
-              <a:buNone/>
-            </a:pPr>
-            <a:r>
-              <a:rPr>
-                <a:solidFill>
-                  <a:srgbClr val="06287E"/>
-                </a:solidFill>
-                <a:latin typeface="Courier"/>
-              </a:rPr>
-              <a:t>git</a:t>
-            </a:r>
-            <a:r>
-              <a:rPr>
-                <a:latin typeface="Courier"/>
-              </a:rPr>
-              <a:t> config </a:t>
-            </a:r>
-            <a:r>
-              <a:rPr>
-                <a:solidFill>
-                  <a:srgbClr val="7D9029"/>
-                </a:solidFill>
-                <a:latin typeface="Courier"/>
-              </a:rPr>
-              <a:t>--global</a:t>
-            </a:r>
-            <a:r>
-              <a:rPr>
-                <a:latin typeface="Courier"/>
-              </a:rPr>
-              <a:t> credential.helper store</a:t>
-            </a:r>
-          </a:p>
-          <a:p>
-            <a:pPr lvl="0" indent="0" marL="0">
-              <a:buNone/>
-            </a:pPr>
-            <a:r>
-              <a:rPr/>
-              <a:t>Stores it, so you are asked only once.</a:t>
-            </a:r>
-          </a:p>
-        </p:txBody>
-      </p:sp>
-    </p:spTree>
-  </p:cSld>
-</p:sld>
-</file>
-
-<file path=ppt/slides/slide48.xml><?xml version="1.0" encoding="utf-8"?>
-<p:sld xmlns:a="http://schemas.openxmlformats.org/drawingml/2006/main" xmlns:r="http://schemas.openxmlformats.org/officeDocument/2006/relationships" xmlns:p="http://schemas.openxmlformats.org/presentationml/2006/main">
-  <p:cSld>
-    <p:spTree>
-      <p:nvGrpSpPr>
-        <p:cNvPr id="1" name=""/>
-        <p:cNvGrpSpPr/>
-        <p:nvPr/>
-      </p:nvGrpSpPr>
-      <p:grpSpPr>
-        <a:xfrm>
-          <a:off x="0" y="0"/>
-          <a:ext cx="0" cy="0"/>
-          <a:chOff x="0" y="0"/>
-          <a:chExt cx="0" cy="0"/>
-        </a:xfrm>
-      </p:grpSpPr>
-      <p:sp>
-        <p:nvSpPr>
-          <p:cNvPr id="2" name="Title 1"/>
-          <p:cNvSpPr>
-            <a:spLocks noGrp="1"/>
-          </p:cNvSpPr>
-          <p:nvPr>
-            <p:ph type="title"/>
-          </p:nvPr>
-        </p:nvSpPr>
-        <p:spPr/>
-        <p:txBody>
-          <a:bodyPr/>
-          <a:lstStyle/>
-          <a:p>
-            <a:pPr lvl="0" indent="0" marL="0">
-              <a:buNone/>
-            </a:pPr>
-            <a:r>
-              <a:rPr/>
-              <a:t>The round trip</a:t>
-            </a:r>
-          </a:p>
-        </p:txBody>
-      </p:sp>
-      <p:sp>
-        <p:nvSpPr>
-          <p:cNvPr id="3" name="Content Placeholder 2"/>
-          <p:cNvSpPr>
-            <a:spLocks noGrp="1"/>
-          </p:cNvSpPr>
-          <p:nvPr>
-            <p:ph idx="1"/>
-          </p:nvPr>
-        </p:nvSpPr>
-        <p:spPr/>
-        <p:txBody>
-          <a:bodyPr/>
-          <a:lstStyle/>
-          <a:p>
-            <a:pPr lvl="0" indent="0" marL="0">
-              <a:buNone/>
-            </a:pPr>
-            <a:r>
-              <a:rPr/>
-              <a:t>VS Codium terminal</a:t>
-            </a:r>
-          </a:p>
-          <a:p>
-            <a:pPr lvl="0" indent="0">
-              <a:buNone/>
-            </a:pPr>
-            <a:r>
-              <a:rPr>
-                <a:solidFill>
-                  <a:srgbClr val="008000"/>
-                </a:solidFill>
-                <a:latin typeface="Courier"/>
-              </a:rPr>
-              <a:t>echo</a:t>
-            </a:r>
-            <a:r>
-              <a:rPr>
-                <a:latin typeface="Courier"/>
-              </a:rPr>
-              <a:t> </a:t>
-            </a:r>
-            <a:r>
-              <a:rPr>
-                <a:solidFill>
-                  <a:srgbClr val="4070A0"/>
-                </a:solidFill>
-                <a:latin typeface="Courier"/>
-              </a:rPr>
-              <a:t>"# Group XX — MATH60033A"</a:t>
-            </a:r>
-            <a:r>
-              <a:rPr>
-                <a:latin typeface="Courier"/>
-              </a:rPr>
-              <a:t> </a:t>
-            </a:r>
-            <a:r>
-              <a:rPr>
-                <a:solidFill>
-                  <a:srgbClr val="666666"/>
-                </a:solidFill>
-                <a:latin typeface="Courier"/>
-              </a:rPr>
-              <a:t>&gt;&gt;</a:t>
-            </a:r>
-            <a:r>
-              <a:rPr>
-                <a:latin typeface="Courier"/>
-              </a:rPr>
-              <a:t> README.md</a:t>
-            </a:r>
-            <a:br/>
-            <a:r>
-              <a:rPr>
-                <a:solidFill>
-                  <a:srgbClr val="06287E"/>
-                </a:solidFill>
-                <a:latin typeface="Courier"/>
-              </a:rPr>
-              <a:t>git</a:t>
-            </a:r>
-            <a:r>
-              <a:rPr>
-                <a:latin typeface="Courier"/>
-              </a:rPr>
-              <a:t> add README.md</a:t>
-            </a:r>
-            <a:br/>
-            <a:r>
-              <a:rPr>
-                <a:solidFill>
-                  <a:srgbClr val="06287E"/>
-                </a:solidFill>
-                <a:latin typeface="Courier"/>
-              </a:rPr>
-              <a:t>git</a:t>
-            </a:r>
-            <a:r>
-              <a:rPr>
-                <a:latin typeface="Courier"/>
-              </a:rPr>
-              <a:t> commit </a:t>
-            </a:r>
-            <a:r>
-              <a:rPr>
-                <a:solidFill>
-                  <a:srgbClr val="7D9029"/>
-                </a:solidFill>
-                <a:latin typeface="Courier"/>
-              </a:rPr>
-              <a:t>-m</a:t>
-            </a:r>
-            <a:r>
-              <a:rPr>
-                <a:latin typeface="Courier"/>
-              </a:rPr>
-              <a:t> </a:t>
-            </a:r>
-            <a:r>
-              <a:rPr>
-                <a:solidFill>
-                  <a:srgbClr val="4070A0"/>
-                </a:solidFill>
-                <a:latin typeface="Courier"/>
-              </a:rPr>
-              <a:t>"Start the group log"</a:t>
-            </a:r>
-            <a:br/>
-            <a:r>
-              <a:rPr>
-                <a:solidFill>
-                  <a:srgbClr val="06287E"/>
-                </a:solidFill>
-                <a:latin typeface="Courier"/>
-              </a:rPr>
-              <a:t>git</a:t>
-            </a:r>
-            <a:r>
-              <a:rPr>
-                <a:latin typeface="Courier"/>
-              </a:rPr>
-              <a:t> push</a:t>
-            </a:r>
-          </a:p>
-          <a:p>
-            <a:pPr lvl="0" indent="0" marL="0">
-              <a:buNone/>
-            </a:pPr>
-            <a:r>
-              <a:rPr/>
-              <a:t>Refresh your repository page in the browser. Your line is there.</a:t>
-            </a:r>
-          </a:p>
-          <a:p>
-            <a:pPr lvl="0" indent="0" marL="0">
-              <a:buNone/>
-            </a:pPr>
-            <a:r>
-              <a:rPr b="1"/>
-              <a:t>Check.</a:t>
-            </a:r>
-            <a:r>
-              <a:rPr/>
-              <a:t> You have now completed the full loop: edit locally → commit → push → visible on GitHub. Everything else this term is a variation on that loop.</a:t>
-            </a:r>
-          </a:p>
-        </p:txBody>
-      </p:sp>
-    </p:spTree>
-  </p:cSld>
-</p:sld>
-</file>
-
-<file path=ppt/slides/slide49.xml><?xml version="1.0" encoding="utf-8"?>
-<p:sld xmlns:a="http://schemas.openxmlformats.org/drawingml/2006/main" xmlns:r="http://schemas.openxmlformats.org/officeDocument/2006/relationships" xmlns:p="http://schemas.openxmlformats.org/presentationml/2006/main">
-  <p:cSld>
-    <p:spTree>
-      <p:nvGrpSpPr>
-        <p:cNvPr id="1" name=""/>
-        <p:cNvGrpSpPr/>
-        <p:nvPr/>
-      </p:nvGrpSpPr>
-      <p:grpSpPr>
-        <a:xfrm>
-          <a:off x="0" y="0"/>
-          <a:ext cx="0" cy="0"/>
-          <a:chOff x="0" y="0"/>
-          <a:chExt cx="0" cy="0"/>
-        </a:xfrm>
-      </p:grpSpPr>
-      <p:sp>
-        <p:nvSpPr>
-          <p:cNvPr id="2" name="Title 1"/>
-          <p:cNvSpPr>
-            <a:spLocks noGrp="1"/>
-          </p:cNvSpPr>
-          <p:nvPr>
-            <p:ph type="title"/>
-          </p:nvPr>
-        </p:nvSpPr>
-        <p:spPr>
-          <a:xfrm>
-            <a:off x="722313" y="3305176"/>
-            <a:ext cx="7772400" cy="1021556"/>
-          </a:xfrm>
-        </p:spPr>
-        <p:txBody>
-          <a:bodyPr/>
-          <a:lstStyle/>
-          <a:p>
-            <a:pPr lvl="0" indent="0" marL="0">
-              <a:buNone/>
-            </a:pPr>
-            <a:r>
-              <a:rPr/>
-              <a:t>The worked example</a:t>
+              <a:t>See you in Session 1.</a:t>
+            </a:r>
+          </a:p>
+          <a:p>
+            <a:pPr lvl="0" indent="0" marL="0">
+              <a:buNone/>
+            </a:pPr>
+            <a:r>
+              <a:rPr/>
+              <a:t>Bring the machine you set up. Everything this term runs on it.</a:t>
             </a:r>
           </a:p>
         </p:txBody>
@@ -9489,1301 +8934,6 @@
           </a:graphicData>
         </a:graphic>
       </p:graphicFrame>
-    </p:spTree>
-  </p:cSld>
-</p:sld>
-</file>
-
-<file path=ppt/slides/slide50.xml><?xml version="1.0" encoding="utf-8"?>
-<p:sld xmlns:a="http://schemas.openxmlformats.org/drawingml/2006/main" xmlns:r="http://schemas.openxmlformats.org/officeDocument/2006/relationships" xmlns:p="http://schemas.openxmlformats.org/presentationml/2006/main">
-  <p:cSld>
-    <p:spTree>
-      <p:nvGrpSpPr>
-        <p:cNvPr id="1" name=""/>
-        <p:cNvGrpSpPr/>
-        <p:nvPr/>
-      </p:nvGrpSpPr>
-      <p:grpSpPr>
-        <a:xfrm>
-          <a:off x="0" y="0"/>
-          <a:ext cx="0" cy="0"/>
-          <a:chOff x="0" y="0"/>
-          <a:chExt cx="0" cy="0"/>
-        </a:xfrm>
-      </p:grpSpPr>
-      <p:sp>
-        <p:nvSpPr>
-          <p:cNvPr id="2" name="Title 1"/>
-          <p:cNvSpPr>
-            <a:spLocks noGrp="1"/>
-          </p:cNvSpPr>
-          <p:nvPr>
-            <p:ph type="title"/>
-          </p:nvPr>
-        </p:nvSpPr>
-        <p:spPr/>
-        <p:txBody>
-          <a:bodyPr/>
-          <a:lstStyle/>
-          <a:p>
-            <a:pPr lvl="0" indent="0" marL="0">
-              <a:buNone/>
-            </a:pPr>
-            <a:r>
-              <a:rPr/>
-              <a:t>Two terminals</a:t>
-            </a:r>
-          </a:p>
-        </p:txBody>
-      </p:sp>
-      <p:sp>
-        <p:nvSpPr>
-          <p:cNvPr id="3" name="Content Placeholder 2"/>
-          <p:cNvSpPr>
-            <a:spLocks noGrp="1"/>
-          </p:cNvSpPr>
-          <p:nvPr>
-            <p:ph idx="1"/>
-          </p:nvPr>
-        </p:nvSpPr>
-        <p:spPr/>
-        <p:txBody>
-          <a:bodyPr/>
-          <a:lstStyle/>
-          <a:p>
-            <a:pPr lvl="0" indent="0" marL="0">
-              <a:buNone/>
-            </a:pPr>
-            <a:r>
-              <a:rPr b="1"/>
-              <a:t>Terminal 1</a:t>
-            </a:r>
-            <a:r>
-              <a:rPr/>
-              <a:t> — the model server, left running:</a:t>
-            </a:r>
-          </a:p>
-          <a:p>
-            <a:pPr lvl="0" indent="0" marL="0">
-              <a:buNone/>
-            </a:pPr>
-            <a:r>
-              <a:rPr/>
-              <a:t>VS Codium terminal 1</a:t>
-            </a:r>
-          </a:p>
-          <a:p>
-            <a:pPr lvl="0" indent="0">
-              <a:buNone/>
-            </a:pPr>
-            <a:r>
-              <a:rPr>
-                <a:solidFill>
-                  <a:srgbClr val="19177C"/>
-                </a:solidFill>
-                <a:latin typeface="Courier"/>
-              </a:rPr>
-              <a:t>OLLAMA_CONTEXT_LENGTH</a:t>
-            </a:r>
-            <a:r>
-              <a:rPr>
-                <a:solidFill>
-                  <a:srgbClr val="666666"/>
-                </a:solidFill>
-                <a:latin typeface="Courier"/>
-              </a:rPr>
-              <a:t>=</a:t>
-            </a:r>
-            <a:r>
-              <a:rPr>
-                <a:latin typeface="Courier"/>
-              </a:rPr>
-              <a:t>8192 ollama serve</a:t>
-            </a:r>
-          </a:p>
-          <a:p>
-            <a:pPr lvl="0" indent="0" marL="0">
-              <a:buNone/>
-            </a:pPr>
-            <a:r>
-              <a:rPr b="1"/>
-              <a:t>Terminal 2</a:t>
-            </a:r>
-            <a:r>
-              <a:rPr/>
-              <a:t> — inside your repository:</a:t>
-            </a:r>
-          </a:p>
-          <a:p>
-            <a:pPr lvl="0" indent="0" marL="0">
-              <a:buNone/>
-            </a:pPr>
-            <a:r>
-              <a:rPr/>
-              <a:t>VS Codium terminal 2</a:t>
-            </a:r>
-          </a:p>
-          <a:p>
-            <a:pPr lvl="0" indent="0">
-              <a:buNone/>
-            </a:pPr>
-            <a:r>
-              <a:rPr>
-                <a:solidFill>
-                  <a:srgbClr val="008000"/>
-                </a:solidFill>
-                <a:latin typeface="Courier"/>
-              </a:rPr>
-              <a:t>cd</a:t>
-            </a:r>
-            <a:r>
-              <a:rPr>
-                <a:latin typeface="Courier"/>
-              </a:rPr>
-              <a:t> math60033a-gXX</a:t>
-            </a:r>
-            <a:br/>
-            <a:r>
-              <a:rPr>
-                <a:solidFill>
-                  <a:srgbClr val="008000"/>
-                </a:solidFill>
-                <a:latin typeface="Courier"/>
-              </a:rPr>
-              <a:t>source</a:t>
-            </a:r>
-            <a:r>
-              <a:rPr>
-                <a:latin typeface="Courier"/>
-              </a:rPr>
-              <a:t> .venv/bin/activate</a:t>
-            </a:r>
-            <a:br/>
-            <a:r>
-              <a:rPr>
-                <a:latin typeface="Courier"/>
-              </a:rPr>
-              <a:t>aider </a:t>
-            </a:r>
-            <a:r>
-              <a:rPr>
-                <a:solidFill>
-                  <a:srgbClr val="7D9029"/>
-                </a:solidFill>
-                <a:latin typeface="Courier"/>
-              </a:rPr>
-              <a:t>--model</a:t>
-            </a:r>
-            <a:r>
-              <a:rPr>
-                <a:latin typeface="Courier"/>
-              </a:rPr>
-              <a:t> ollama_chat/qwen2.5-coder:7b</a:t>
-            </a:r>
-          </a:p>
-        </p:txBody>
-      </p:sp>
-    </p:spTree>
-  </p:cSld>
-</p:sld>
-</file>
-
-<file path=ppt/slides/slide51.xml><?xml version="1.0" encoding="utf-8"?>
-<p:sld xmlns:a="http://schemas.openxmlformats.org/drawingml/2006/main" xmlns:r="http://schemas.openxmlformats.org/officeDocument/2006/relationships" xmlns:p="http://schemas.openxmlformats.org/presentationml/2006/main">
-  <p:cSld>
-    <p:spTree>
-      <p:nvGrpSpPr>
-        <p:cNvPr id="1" name=""/>
-        <p:cNvGrpSpPr/>
-        <p:nvPr/>
-      </p:nvGrpSpPr>
-      <p:grpSpPr>
-        <a:xfrm>
-          <a:off x="0" y="0"/>
-          <a:ext cx="0" cy="0"/>
-          <a:chOff x="0" y="0"/>
-          <a:chExt cx="0" cy="0"/>
-        </a:xfrm>
-      </p:grpSpPr>
-      <p:sp>
-        <p:nvSpPr>
-          <p:cNvPr id="2" name="Title 1"/>
-          <p:cNvSpPr>
-            <a:spLocks noGrp="1"/>
-          </p:cNvSpPr>
-          <p:nvPr>
-            <p:ph type="title"/>
-          </p:nvPr>
-        </p:nvSpPr>
-        <p:spPr/>
-        <p:txBody>
-          <a:bodyPr/>
-          <a:lstStyle/>
-          <a:p>
-            <a:pPr lvl="0" indent="0" marL="0">
-              <a:buNone/>
-            </a:pPr>
-            <a:r>
-              <a:rPr/>
-              <a:t>Ask for something real</a:t>
-            </a:r>
-          </a:p>
-        </p:txBody>
-      </p:sp>
-      <p:sp>
-        <p:nvSpPr>
-          <p:cNvPr id="3" name="Content Placeholder 2"/>
-          <p:cNvSpPr>
-            <a:spLocks noGrp="1"/>
-          </p:cNvSpPr>
-          <p:nvPr>
-            <p:ph idx="1"/>
-          </p:nvPr>
-        </p:nvSpPr>
-        <p:spPr/>
-        <p:txBody>
-          <a:bodyPr/>
-          <a:lstStyle/>
-          <a:p>
-            <a:pPr lvl="0" indent="0" marL="0">
-              <a:buNone/>
-            </a:pPr>
-            <a:r>
-              <a:rPr/>
-              <a:t>At the aider prompt</a:t>
-            </a:r>
-          </a:p>
-          <a:p>
-            <a:pPr lvl="0" indent="0">
-              <a:buNone/>
-            </a:pPr>
-            <a:r>
-              <a:rPr>
-                <a:latin typeface="Courier"/>
-              </a:rPr>
-              <a:t>&gt; create explore.py that loads data/spine/core.parquet,
-  prints the shape, and shows mean gdp_pc_eur by year</a:t>
-            </a:r>
-          </a:p>
-          <a:p>
-            <a:pPr lvl="0" indent="0" marL="0">
-              <a:buNone/>
-            </a:pPr>
-            <a:r>
-              <a:rPr/>
-              <a:t>aider proposes a diff. You read it. You accept it.</a:t>
-            </a:r>
-          </a:p>
-          <a:p>
-            <a:pPr lvl="0" indent="0">
-              <a:buNone/>
-            </a:pPr>
-            <a:r>
-              <a:rPr>
-                <a:latin typeface="Courier"/>
-              </a:rPr>
-              <a:t>python explore.py</a:t>
-            </a:r>
-            <a:br/>
-            <a:r>
-              <a:rPr>
-                <a:solidFill>
-                  <a:srgbClr val="06287E"/>
-                </a:solidFill>
-                <a:latin typeface="Courier"/>
-              </a:rPr>
-              <a:t>git</a:t>
-            </a:r>
-            <a:r>
-              <a:rPr>
-                <a:latin typeface="Courier"/>
-              </a:rPr>
-              <a:t> push</a:t>
-            </a:r>
-          </a:p>
-        </p:txBody>
-      </p:sp>
-    </p:spTree>
-  </p:cSld>
-</p:sld>
-</file>
-
-<file path=ppt/slides/slide52.xml><?xml version="1.0" encoding="utf-8"?>
-<p:sld xmlns:a="http://schemas.openxmlformats.org/drawingml/2006/main" xmlns:r="http://schemas.openxmlformats.org/officeDocument/2006/relationships" xmlns:p="http://schemas.openxmlformats.org/presentationml/2006/main">
-  <p:cSld>
-    <p:spTree>
-      <p:nvGrpSpPr>
-        <p:cNvPr id="1" name=""/>
-        <p:cNvGrpSpPr/>
-        <p:nvPr/>
-      </p:nvGrpSpPr>
-      <p:grpSpPr>
-        <a:xfrm>
-          <a:off x="0" y="0"/>
-          <a:ext cx="0" cy="0"/>
-          <a:chOff x="0" y="0"/>
-          <a:chExt cx="0" cy="0"/>
-        </a:xfrm>
-      </p:grpSpPr>
-      <p:sp>
-        <p:nvSpPr>
-          <p:cNvPr id="2" name="Title 1"/>
-          <p:cNvSpPr>
-            <a:spLocks noGrp="1"/>
-          </p:cNvSpPr>
-          <p:nvPr>
-            <p:ph type="title"/>
-          </p:nvPr>
-        </p:nvSpPr>
-        <p:spPr/>
-        <p:txBody>
-          <a:bodyPr/>
-          <a:lstStyle/>
-          <a:p>
-            <a:pPr lvl="0" indent="0" marL="0">
-              <a:buNone/>
-            </a:pPr>
-            <a:r>
-              <a:rPr/>
-              <a:t>What just happened</a:t>
-            </a:r>
-          </a:p>
-        </p:txBody>
-      </p:sp>
-      <p:sp>
-        <p:nvSpPr>
-          <p:cNvPr id="3" name="Content Placeholder 2"/>
-          <p:cNvSpPr>
-            <a:spLocks noGrp="1"/>
-          </p:cNvSpPr>
-          <p:nvPr>
-            <p:ph idx="1"/>
-          </p:nvPr>
-        </p:nvSpPr>
-        <p:spPr/>
-        <p:txBody>
-          <a:bodyPr/>
-          <a:lstStyle/>
-          <a:p>
-            <a:pPr lvl="0" indent="0" marL="0">
-              <a:buNone/>
-            </a:pPr>
-            <a:r>
-              <a:rPr/>
-              <a:t>You ran a model </a:t>
-            </a:r>
-            <a:r>
-              <a:rPr b="1"/>
-              <a:t>on your own hardware</a:t>
-            </a:r>
-            <a:r>
-              <a:rPr/>
-              <a:t>, had it write code against real data, reviewed the change, committed it under your name, and published it — </a:t>
-            </a:r>
-            <a:r>
-              <a:rPr b="1"/>
-              <a:t>without sending one byte to anyone’s API.</a:t>
-            </a:r>
-          </a:p>
-          <a:p>
-            <a:pPr lvl="0" indent="0" marL="0">
-              <a:buNone/>
-            </a:pPr>
-            <a:r>
-              <a:rPr/>
-              <a:t>Every lab this term is a variation on those two terminals.</a:t>
-            </a:r>
-          </a:p>
-        </p:txBody>
-      </p:sp>
-    </p:spTree>
-  </p:cSld>
-</p:sld>
-</file>
-
-<file path=ppt/slides/slide53.xml><?xml version="1.0" encoding="utf-8"?>
-<p:sld xmlns:a="http://schemas.openxmlformats.org/drawingml/2006/main" xmlns:r="http://schemas.openxmlformats.org/officeDocument/2006/relationships" xmlns:p="http://schemas.openxmlformats.org/presentationml/2006/main">
-  <p:cSld>
-    <p:spTree>
-      <p:nvGrpSpPr>
-        <p:cNvPr id="1" name=""/>
-        <p:cNvGrpSpPr/>
-        <p:nvPr/>
-      </p:nvGrpSpPr>
-      <p:grpSpPr>
-        <a:xfrm>
-          <a:off x="0" y="0"/>
-          <a:ext cx="0" cy="0"/>
-          <a:chOff x="0" y="0"/>
-          <a:chExt cx="0" cy="0"/>
-        </a:xfrm>
-      </p:grpSpPr>
-      <p:sp>
-        <p:nvSpPr>
-          <p:cNvPr id="2" name="Title 1"/>
-          <p:cNvSpPr>
-            <a:spLocks noGrp="1"/>
-          </p:cNvSpPr>
-          <p:nvPr>
-            <p:ph type="title"/>
-          </p:nvPr>
-        </p:nvSpPr>
-        <p:spPr/>
-        <p:txBody>
-          <a:bodyPr/>
-          <a:lstStyle/>
-          <a:p>
-            <a:pPr lvl="0" indent="0" marL="0">
-              <a:buNone/>
-            </a:pPr>
-            <a:r>
-              <a:rPr/>
-              <a:t>Why we do it this way</a:t>
-            </a:r>
-          </a:p>
-        </p:txBody>
-      </p:sp>
-      <p:sp>
-        <p:nvSpPr>
-          <p:cNvPr id="3" name="Content Placeholder 2"/>
-          <p:cNvSpPr>
-            <a:spLocks noGrp="1"/>
-          </p:cNvSpPr>
-          <p:nvPr>
-            <p:ph idx="1"/>
-          </p:nvPr>
-        </p:nvSpPr>
-        <p:spPr/>
-        <p:txBody>
-          <a:bodyPr/>
-          <a:lstStyle/>
-          <a:p>
-            <a:pPr lvl="0"/>
-            <a:r>
-              <a:rPr b="1"/>
-              <a:t>The data stay put.</a:t>
-            </a:r>
-            <a:r>
-              <a:rPr/>
-              <a:t> Some of what you use this term cannot legally be uploaded.</a:t>
-            </a:r>
-          </a:p>
-          <a:p>
-            <a:pPr lvl="0"/>
-            <a:r>
-              <a:rPr b="1"/>
-              <a:t>The cost is zero.</a:t>
-            </a:r>
-            <a:r>
-              <a:rPr/>
-              <a:t> No key, no quota, no bill at the end of the month.</a:t>
-            </a:r>
-          </a:p>
-          <a:p>
-            <a:pPr lvl="0"/>
-            <a:r>
-              <a:rPr b="1"/>
-              <a:t>The record is honest.</a:t>
-            </a:r>
-            <a:r>
-              <a:rPr/>
-              <a:t> Commits carry your name; the diff carries the reasoning.</a:t>
-            </a:r>
-          </a:p>
-          <a:p>
-            <a:pPr lvl="0"/>
-            <a:r>
-              <a:rPr b="1"/>
-              <a:t>The skill transfers.</a:t>
-            </a:r>
-            <a:r>
-              <a:rPr/>
-              <a:t> This is how the work is actually done now.</a:t>
-            </a:r>
-          </a:p>
-          <a:p>
-            <a:pPr lvl="0" indent="0" marL="0">
-              <a:buNone/>
-            </a:pPr>
-            <a:r>
-              <a:rPr/>
-              <a:t>The model is a </a:t>
-            </a:r>
-            <a:r>
-              <a:rPr b="1"/>
-              <a:t>junior collaborator with no accountability.</a:t>
-            </a:r>
-            <a:r>
-              <a:rPr/>
-              <a:t> It will produce confident, wrong code. Every line you commit is a line you are claiming as correct. Read the diff.</a:t>
-            </a:r>
-          </a:p>
-        </p:txBody>
-      </p:sp>
-    </p:spTree>
-  </p:cSld>
-</p:sld>
-</file>
-
-<file path=ppt/slides/slide54.xml><?xml version="1.0" encoding="utf-8"?>
-<p:sld xmlns:a="http://schemas.openxmlformats.org/drawingml/2006/main" xmlns:r="http://schemas.openxmlformats.org/officeDocument/2006/relationships" xmlns:p="http://schemas.openxmlformats.org/presentationml/2006/main">
-  <p:cSld>
-    <p:spTree>
-      <p:nvGrpSpPr>
-        <p:cNvPr id="1" name=""/>
-        <p:cNvGrpSpPr/>
-        <p:nvPr/>
-      </p:nvGrpSpPr>
-      <p:grpSpPr>
-        <a:xfrm>
-          <a:off x="0" y="0"/>
-          <a:ext cx="0" cy="0"/>
-          <a:chOff x="0" y="0"/>
-          <a:chExt cx="0" cy="0"/>
-        </a:xfrm>
-      </p:grpSpPr>
-      <p:sp>
-        <p:nvSpPr>
-          <p:cNvPr id="2" name="Title 1"/>
-          <p:cNvSpPr>
-            <a:spLocks noGrp="1"/>
-          </p:cNvSpPr>
-          <p:nvPr>
-            <p:ph type="title"/>
-          </p:nvPr>
-        </p:nvSpPr>
-        <p:spPr>
-          <a:xfrm>
-            <a:off x="722313" y="3305176"/>
-            <a:ext cx="7772400" cy="1021556"/>
-          </a:xfrm>
-        </p:spPr>
-        <p:txBody>
-          <a:bodyPr/>
-          <a:lstStyle/>
-          <a:p>
-            <a:pPr lvl="0" indent="0" marL="0">
-              <a:buNone/>
-            </a:pPr>
-            <a:r>
-              <a:rPr/>
-              <a:t>If it breaks</a:t>
-            </a:r>
-          </a:p>
-        </p:txBody>
-      </p:sp>
-    </p:spTree>
-  </p:cSld>
-</p:sld>
-</file>
-
-<file path=ppt/slides/slide55.xml><?xml version="1.0" encoding="utf-8"?>
-<p:sld xmlns:a="http://schemas.openxmlformats.org/drawingml/2006/main" xmlns:r="http://schemas.openxmlformats.org/officeDocument/2006/relationships" xmlns:p="http://schemas.openxmlformats.org/presentationml/2006/main">
-  <p:cSld>
-    <p:spTree>
-      <p:nvGrpSpPr>
-        <p:cNvPr id="1" name=""/>
-        <p:cNvGrpSpPr/>
-        <p:nvPr/>
-      </p:nvGrpSpPr>
-      <p:grpSpPr>
-        <a:xfrm>
-          <a:off x="0" y="0"/>
-          <a:ext cx="0" cy="0"/>
-          <a:chOff x="0" y="0"/>
-          <a:chExt cx="0" cy="0"/>
-        </a:xfrm>
-      </p:grpSpPr>
-      <p:sp>
-        <p:nvSpPr>
-          <p:cNvPr id="2" name="Title 1"/>
-          <p:cNvSpPr>
-            <a:spLocks noGrp="1"/>
-          </p:cNvSpPr>
-          <p:nvPr>
-            <p:ph type="title"/>
-          </p:nvPr>
-        </p:nvSpPr>
-        <p:spPr/>
-        <p:txBody>
-          <a:bodyPr/>
-          <a:lstStyle/>
-          <a:p>
-            <a:pPr lvl="0" indent="0" marL="0">
-              <a:buNone/>
-            </a:pPr>
-            <a:r>
-              <a:rPr/>
-              <a:t>Troubleshooting</a:t>
-            </a:r>
-          </a:p>
-        </p:txBody>
-      </p:sp>
-      <p:graphicFrame>
-        <p:nvGraphicFramePr>
-          <p:cNvPr id="6" name="Content Placeholder 5"/>
-          <p:cNvGraphicFramePr>
-            <a:graphicFrameLocks noGrp="1"/>
-          </p:cNvGraphicFramePr>
-          <p:nvPr>
-            <p:ph idx="1"/>
-          </p:nvPr>
-        </p:nvGraphicFramePr>
-        <p:xfrm>
-          <a:off x="457200" y="1193800"/>
-          <a:ext cx="8229600" cy="3390900"/>
-        </p:xfrm>
-        <a:graphic>
-          <a:graphicData uri="http://schemas.openxmlformats.org/drawingml/2006/table">
-            <a:tbl>
-              <a:tblPr firstRow="1" bandRow="1">
-                <a:tableStyleId>{5C22544A-7EE6-4342-B048-85BDC9FD1C3A}</a:tableStyleId>
-              </a:tblPr>
-              <a:tblGrid>
-                <a:gridCol w="4114800"/>
-                <a:gridCol w="4114800"/>
-              </a:tblGrid>
-              <a:tr h="0">
-                <a:tc>
-                  <a:txBody>
-                    <a:bodyPr/>
-                    <a:lstStyle/>
-                    <a:p>
-                      <a:pPr lvl="0" indent="0" marL="0">
-                        <a:buNone/>
-                      </a:pPr>
-                      <a:r>
-                        <a:rPr/>
-                        <a:t>Symptom</a:t>
-                      </a:r>
-                    </a:p>
-                  </a:txBody>
-                  <a:tcPr/>
-                </a:tc>
-                <a:tc>
-                  <a:txBody>
-                    <a:bodyPr/>
-                    <a:lstStyle/>
-                    <a:p>
-                      <a:pPr lvl="0" indent="0" marL="0">
-                        <a:buNone/>
-                      </a:pPr>
-                      <a:r>
-                        <a:rPr/>
-                        <a:t>Fix</a:t>
-                      </a:r>
-                    </a:p>
-                  </a:txBody>
-                  <a:tcPr/>
-                </a:tc>
-              </a:tr>
-              <a:tr h="0">
-                <a:tc>
-                  <a:txBody>
-                    <a:bodyPr/>
-                    <a:lstStyle/>
-                    <a:p>
-                      <a:pPr lvl="0" indent="0" marL="0">
-                        <a:buNone/>
-                      </a:pPr>
-                      <a:r>
-                        <a:rPr>
-                          <a:latin typeface="Courier"/>
-                        </a:rPr>
-                        <a:t>ollama: command not found</a:t>
-                      </a:r>
-                    </a:p>
-                  </a:txBody>
-                </a:tc>
-                <a:tc>
-                  <a:txBody>
-                    <a:bodyPr/>
-                    <a:lstStyle/>
-                    <a:p>
-                      <a:pPr lvl="0" indent="0" marL="0">
-                        <a:buNone/>
-                      </a:pPr>
-                      <a:r>
-                        <a:rPr/>
-                        <a:t>Reopen the terminal; on Windows, restart VS Codium</a:t>
-                      </a:r>
-                    </a:p>
-                  </a:txBody>
-                </a:tc>
-              </a:tr>
-              <a:tr h="0">
-                <a:tc>
-                  <a:txBody>
-                    <a:bodyPr/>
-                    <a:lstStyle/>
-                    <a:p>
-                      <a:pPr lvl="0" indent="0" marL="0">
-                        <a:buNone/>
-                      </a:pPr>
-                      <a:r>
-                        <a:rPr/>
-                        <a:t>Model answers very slowly</a:t>
-                      </a:r>
-                    </a:p>
-                  </a:txBody>
-                </a:tc>
-                <a:tc>
-                  <a:txBody>
-                    <a:bodyPr/>
-                    <a:lstStyle/>
-                    <a:p>
-                      <a:pPr lvl="0" indent="0" marL="0">
-                        <a:buNone/>
-                      </a:pPr>
-                      <a:r>
-                        <a:rPr/>
-                        <a:t>Use a smaller model (</a:t>
-                      </a:r>
-                      <a:r>
-                        <a:rPr>
-                          <a:latin typeface="Courier"/>
-                        </a:rPr>
-                        <a:t>:3b</a:t>
-                      </a:r>
-                      <a:r>
-                        <a:rPr/>
-                        <a:t>); close other applications</a:t>
-                      </a:r>
-                    </a:p>
-                  </a:txBody>
-                </a:tc>
-              </a:tr>
-              <a:tr h="0">
-                <a:tc>
-                  <a:txBody>
-                    <a:bodyPr/>
-                    <a:lstStyle/>
-                    <a:p>
-                      <a:pPr lvl="0" indent="0" marL="0">
-                        <a:buNone/>
-                      </a:pPr>
-                      <a:r>
-                        <a:rPr/>
-                        <a:t>aider “forgets” your file</a:t>
-                      </a:r>
-                    </a:p>
-                  </a:txBody>
-                </a:tc>
-                <a:tc>
-                  <a:txBody>
-                    <a:bodyPr/>
-                    <a:lstStyle/>
-                    <a:p>
-                      <a:pPr lvl="0" indent="0" marL="0">
-                        <a:buNone/>
-                      </a:pPr>
-                      <a:r>
-                        <a:rPr/>
-                        <a:t>You skipped </a:t>
-                      </a:r>
-                      <a:r>
-                        <a:rPr>
-                          <a:latin typeface="Courier"/>
-                        </a:rPr>
-                        <a:t>OLLAMA_CONTEXT_LENGTH=8192 ollama serve</a:t>
-                      </a:r>
-                    </a:p>
-                  </a:txBody>
-                </a:tc>
-              </a:tr>
-              <a:tr h="0">
-                <a:tc>
-                  <a:txBody>
-                    <a:bodyPr/>
-                    <a:lstStyle/>
-                    <a:p>
-                      <a:pPr lvl="0" indent="0" marL="0">
-                        <a:buNone/>
-                      </a:pPr>
-                      <a:r>
-                        <a:rPr>
-                          <a:latin typeface="Courier"/>
-                        </a:rPr>
-                        <a:t>connection refused</a:t>
-                      </a:r>
-                      <a:r>
-                        <a:rPr/>
-                        <a:t> from aider</a:t>
-                      </a:r>
-                    </a:p>
-                  </a:txBody>
-                </a:tc>
-                <a:tc>
-                  <a:txBody>
-                    <a:bodyPr/>
-                    <a:lstStyle/>
-                    <a:p>
-                      <a:pPr lvl="0" indent="0" marL="0">
-                        <a:buNone/>
-                      </a:pPr>
-                      <a:r>
-                        <a:rPr/>
-                        <a:t>The </a:t>
-                      </a:r>
-                      <a:r>
-                        <a:rPr>
-                          <a:latin typeface="Courier"/>
-                        </a:rPr>
-                        <a:t>ollama serve</a:t>
-                      </a:r>
-                      <a:r>
-                        <a:rPr/>
-                        <a:t> terminal is not running</a:t>
-                      </a:r>
-                    </a:p>
-                  </a:txBody>
-                </a:tc>
-              </a:tr>
-              <a:tr h="0">
-                <a:tc>
-                  <a:txBody>
-                    <a:bodyPr/>
-                    <a:lstStyle/>
-                    <a:p>
-                      <a:pPr lvl="0" indent="0" marL="0">
-                        <a:buNone/>
-                      </a:pPr>
-                      <a:r>
-                        <a:rPr>
-                          <a:latin typeface="Courier"/>
-                        </a:rPr>
-                        <a:t>git push</a:t>
-                      </a:r>
-                      <a:r>
-                        <a:rPr/>
-                        <a:t> rejects your password</a:t>
-                      </a:r>
-                    </a:p>
-                  </a:txBody>
-                </a:tc>
-                <a:tc>
-                  <a:txBody>
-                    <a:bodyPr/>
-                    <a:lstStyle/>
-                    <a:p>
-                      <a:pPr lvl="0" indent="0" marL="0">
-                        <a:buNone/>
-                      </a:pPr>
-                      <a:r>
-                        <a:rPr/>
-                        <a:t>Use a personal access token, not the password</a:t>
-                      </a:r>
-                    </a:p>
-                  </a:txBody>
-                </a:tc>
-              </a:tr>
-              <a:tr h="0">
-                <a:tc>
-                  <a:txBody>
-                    <a:bodyPr/>
-                    <a:lstStyle/>
-                    <a:p>
-                      <a:pPr lvl="0" indent="0" marL="0">
-                        <a:buNone/>
-                      </a:pPr>
-                      <a:r>
-                        <a:rPr>
-                          <a:latin typeface="Courier"/>
-                        </a:rPr>
-                        <a:t>pip</a:t>
-                      </a:r>
-                      <a:r>
-                        <a:rPr/>
-                        <a:t> fails on install</a:t>
-                      </a:r>
-                    </a:p>
-                  </a:txBody>
-                </a:tc>
-                <a:tc>
-                  <a:txBody>
-                    <a:bodyPr/>
-                    <a:lstStyle/>
-                    <a:p>
-                      <a:pPr lvl="0" indent="0" marL="0">
-                        <a:buNone/>
-                      </a:pPr>
-                      <a:r>
-                        <a:rPr/>
-                        <a:t>Check </a:t>
-                      </a:r>
-                      <a:r>
-                        <a:rPr>
-                          <a:latin typeface="Courier"/>
-                        </a:rPr>
-                        <a:t>(.venv)</a:t>
-                      </a:r>
-                      <a:r>
-                        <a:rPr/>
-                        <a:t> is in your prompt</a:t>
-                      </a:r>
-                    </a:p>
-                  </a:txBody>
-                </a:tc>
-              </a:tr>
-            </a:tbl>
-          </a:graphicData>
-        </a:graphic>
-      </p:graphicFrame>
-    </p:spTree>
-  </p:cSld>
-</p:sld>
-</file>
-
-<file path=ppt/slides/slide56.xml><?xml version="1.0" encoding="utf-8"?>
-<p:sld xmlns:a="http://schemas.openxmlformats.org/drawingml/2006/main" xmlns:r="http://schemas.openxmlformats.org/officeDocument/2006/relationships" xmlns:p="http://schemas.openxmlformats.org/presentationml/2006/main">
-  <p:cSld>
-    <p:spTree>
-      <p:nvGrpSpPr>
-        <p:cNvPr id="1" name=""/>
-        <p:cNvGrpSpPr/>
-        <p:nvPr/>
-      </p:nvGrpSpPr>
-      <p:grpSpPr>
-        <a:xfrm>
-          <a:off x="0" y="0"/>
-          <a:ext cx="0" cy="0"/>
-          <a:chOff x="0" y="0"/>
-          <a:chExt cx="0" cy="0"/>
-        </a:xfrm>
-      </p:grpSpPr>
-      <p:sp>
-        <p:nvSpPr>
-          <p:cNvPr id="3" name="Content Placeholder 2"/>
-          <p:cNvSpPr>
-            <a:spLocks noGrp="1"/>
-          </p:cNvSpPr>
-          <p:nvPr>
-            <p:ph idx="1"/>
-          </p:nvPr>
-        </p:nvSpPr>
-        <p:spPr/>
-        <p:txBody>
-          <a:bodyPr/>
-          <a:lstStyle/>
-          <a:p>
-            <a:pPr lvl="0" indent="0" marL="0">
-              <a:buNone/>
-            </a:pPr>
-            <a:r>
-              <a:rPr/>
-              <a:t>Still stuck? Ask Qwen — that is itself a test of whether your setup works.</a:t>
-            </a:r>
-          </a:p>
-        </p:txBody>
-      </p:sp>
-    </p:spTree>
-  </p:cSld>
-</p:sld>
-</file>
-
-<file path=ppt/slides/slide57.xml><?xml version="1.0" encoding="utf-8"?>
-<p:sld xmlns:a="http://schemas.openxmlformats.org/drawingml/2006/main" xmlns:r="http://schemas.openxmlformats.org/officeDocument/2006/relationships" xmlns:p="http://schemas.openxmlformats.org/presentationml/2006/main">
-  <p:cSld>
-    <p:spTree>
-      <p:nvGrpSpPr>
-        <p:cNvPr id="1" name=""/>
-        <p:cNvGrpSpPr/>
-        <p:nvPr/>
-      </p:nvGrpSpPr>
-      <p:grpSpPr>
-        <a:xfrm>
-          <a:off x="0" y="0"/>
-          <a:ext cx="0" cy="0"/>
-          <a:chOff x="0" y="0"/>
-          <a:chExt cx="0" cy="0"/>
-        </a:xfrm>
-      </p:grpSpPr>
-      <p:sp>
-        <p:nvSpPr>
-          <p:cNvPr id="2" name="Title 1"/>
-          <p:cNvSpPr>
-            <a:spLocks noGrp="1"/>
-          </p:cNvSpPr>
-          <p:nvPr>
-            <p:ph type="title"/>
-          </p:nvPr>
-        </p:nvSpPr>
-        <p:spPr/>
-        <p:txBody>
-          <a:bodyPr/>
-          <a:lstStyle/>
-          <a:p>
-            <a:pPr lvl="0" indent="0" marL="0">
-              <a:buNone/>
-            </a:pPr>
-            <a:r>
-              <a:rPr/>
-              <a:t>The last check</a:t>
-            </a:r>
-          </a:p>
-        </p:txBody>
-      </p:sp>
-      <p:sp>
-        <p:nvSpPr>
-          <p:cNvPr id="3" name="Content Placeholder 2"/>
-          <p:cNvSpPr>
-            <a:spLocks noGrp="1"/>
-          </p:cNvSpPr>
-          <p:nvPr>
-            <p:ph idx="1"/>
-          </p:nvPr>
-        </p:nvSpPr>
-        <p:spPr/>
-        <p:txBody>
-          <a:bodyPr/>
-          <a:lstStyle/>
-          <a:p>
-            <a:pPr lvl="0" indent="0" marL="0">
-              <a:buNone/>
-            </a:pPr>
-            <a:r>
-              <a:rPr/>
-              <a:t>VS Codium terminal · with </a:t>
-            </a:r>
-            <a:r>
-              <a:rPr>
-                <a:latin typeface="Courier"/>
-              </a:rPr>
-              <a:t>(.venv)</a:t>
-            </a:r>
-            <a:r>
-              <a:rPr/>
-              <a:t> showing</a:t>
-            </a:r>
-          </a:p>
-          <a:p>
-            <a:pPr lvl="0" indent="0">
-              <a:buNone/>
-            </a:pPr>
-            <a:r>
-              <a:rPr>
-                <a:latin typeface="Courier"/>
-              </a:rPr>
-              <a:t>python 01-foundations-scenarios-and-tools/00-pre-session/verify_environment.py</a:t>
-            </a:r>
-          </a:p>
-          <a:p>
-            <a:pPr lvl="0" indent="0" marL="0">
-              <a:buNone/>
-            </a:pPr>
-            <a:r>
-              <a:rPr/>
-              <a:t>You should see five checks pass.</a:t>
-            </a:r>
-          </a:p>
-          <a:p>
-            <a:pPr lvl="0" indent="0" marL="0">
-              <a:buNone/>
-            </a:pPr>
-            <a:r>
-              <a:rPr b="1"/>
-              <a:t>Bring the output to class</a:t>
-            </a:r>
-            <a:r>
-              <a:rPr/>
-              <a:t> — a screenshot or a paste into your notes.</a:t>
-            </a:r>
-          </a:p>
-        </p:txBody>
-      </p:sp>
-    </p:spTree>
-  </p:cSld>
-</p:sld>
-</file>
-
-<file path=ppt/slides/slide58.xml><?xml version="1.0" encoding="utf-8"?>
-<p:sld xmlns:a="http://schemas.openxmlformats.org/drawingml/2006/main" xmlns:r="http://schemas.openxmlformats.org/officeDocument/2006/relationships" xmlns:p="http://schemas.openxmlformats.org/presentationml/2006/main">
-  <p:cSld>
-    <p:spTree>
-      <p:nvGrpSpPr>
-        <p:cNvPr id="1" name=""/>
-        <p:cNvGrpSpPr/>
-        <p:nvPr/>
-      </p:nvGrpSpPr>
-      <p:grpSpPr>
-        <a:xfrm>
-          <a:off x="0" y="0"/>
-          <a:ext cx="0" cy="0"/>
-          <a:chOff x="0" y="0"/>
-          <a:chExt cx="0" cy="0"/>
-        </a:xfrm>
-      </p:grpSpPr>
-      <p:sp>
-        <p:nvSpPr>
-          <p:cNvPr id="2" name="Title 1"/>
-          <p:cNvSpPr>
-            <a:spLocks noGrp="1"/>
-          </p:cNvSpPr>
-          <p:nvPr>
-            <p:ph type="title"/>
-          </p:nvPr>
-        </p:nvSpPr>
-        <p:spPr/>
-        <p:txBody>
-          <a:bodyPr/>
-          <a:lstStyle/>
-          <a:p>
-            <a:pPr lvl="0" indent="0" marL="0">
-              <a:buNone/>
-            </a:pPr>
-            <a:r>
-              <a:rPr/>
-              <a:t>Before Session 1</a:t>
-            </a:r>
-          </a:p>
-        </p:txBody>
-      </p:sp>
-      <p:sp>
-        <p:nvSpPr>
-          <p:cNvPr id="3" name="Content Placeholder 2"/>
-          <p:cNvSpPr>
-            <a:spLocks noGrp="1"/>
-          </p:cNvSpPr>
-          <p:nvPr>
-            <p:ph idx="1"/>
-          </p:nvPr>
-        </p:nvSpPr>
-        <p:spPr/>
-        <p:txBody>
-          <a:bodyPr/>
-          <a:lstStyle/>
-          <a:p>
-            <a:pPr lvl="0"/>
-            <a:r>
-              <a:rPr/>
-              <a:t>✅ VS Codium installed, Python environment built</a:t>
-            </a:r>
-          </a:p>
-          <a:p>
-            <a:pPr lvl="0"/>
-            <a:r>
-              <a:rPr/>
-              <a:t>✅ Ollama running Qwen 2.5 Coder, verified </a:t>
-            </a:r>
-            <a:r>
-              <a:rPr b="1"/>
-              <a:t>with the wifi off</a:t>
-            </a:r>
-          </a:p>
-          <a:p>
-            <a:pPr lvl="0"/>
-            <a:r>
-              <a:rPr/>
-              <a:t>✅ aider talking to your local model</a:t>
-            </a:r>
-          </a:p>
-          <a:p>
-            <a:pPr lvl="0"/>
-            <a:r>
-              <a:rPr/>
-              <a:t>✅ GitHub account, private group repository, teammates added</a:t>
-            </a:r>
-          </a:p>
-          <a:p>
-            <a:pPr lvl="0"/>
-            <a:r>
-              <a:rPr/>
-              <a:t>✅ One commit pushed from your machine</a:t>
-            </a:r>
-          </a:p>
-          <a:p>
-            <a:pPr lvl="0"/>
-            <a:r>
-              <a:rPr/>
-              <a:t>✅ </a:t>
-            </a:r>
-            <a:r>
-              <a:rPr i="1"/>
-              <a:t>Europe 2031</a:t>
-            </a:r>
-            <a:r>
-              <a:rPr/>
-              <a:t> read as a stress test, not a prediction</a:t>
-            </a:r>
-          </a:p>
-          <a:p>
-            <a:pPr lvl="0"/>
-            <a:r>
-              <a:rPr/>
-              <a:t>✅ </a:t>
-            </a:r>
-            <a:r>
-              <a:rPr>
-                <a:latin typeface="Courier"/>
-              </a:rPr>
-              <a:t>verify_environment.py</a:t>
-            </a:r>
-            <a:r>
-              <a:rPr/>
-              <a:t> output in hand</a:t>
-            </a:r>
-          </a:p>
-        </p:txBody>
-      </p:sp>
-    </p:spTree>
-  </p:cSld>
-</p:sld>
-</file>
-
-<file path=ppt/slides/slide59.xml><?xml version="1.0" encoding="utf-8"?>
-<p:sld xmlns:a="http://schemas.openxmlformats.org/drawingml/2006/main" xmlns:r="http://schemas.openxmlformats.org/officeDocument/2006/relationships" xmlns:p="http://schemas.openxmlformats.org/presentationml/2006/main">
-  <p:cSld>
-    <p:spTree>
-      <p:nvGrpSpPr>
-        <p:cNvPr id="1" name=""/>
-        <p:cNvGrpSpPr/>
-        <p:nvPr/>
-      </p:nvGrpSpPr>
-      <p:grpSpPr>
-        <a:xfrm>
-          <a:off x="0" y="0"/>
-          <a:ext cx="0" cy="0"/>
-          <a:chOff x="0" y="0"/>
-          <a:chExt cx="0" cy="0"/>
-        </a:xfrm>
-      </p:grpSpPr>
-      <p:sp>
-        <p:nvSpPr>
-          <p:cNvPr id="3" name="Content Placeholder 2"/>
-          <p:cNvSpPr>
-            <a:spLocks noGrp="1"/>
-          </p:cNvSpPr>
-          <p:nvPr>
-            <p:ph idx="1"/>
-          </p:nvPr>
-        </p:nvSpPr>
-        <p:spPr/>
-        <p:txBody>
-          <a:bodyPr/>
-          <a:lstStyle/>
-          <a:p>
-            <a:pPr lvl="0" indent="0" marL="0">
-              <a:spcBef>
-                <a:spcPts val="3000"/>
-              </a:spcBef>
-              <a:buNone/>
-            </a:pPr>
-            <a:r>
-              <a:rPr b="1"/>
-              <a:t>See you in Session 1.</a:t>
-            </a:r>
-          </a:p>
-          <a:p>
-            <a:pPr lvl="0" indent="0" marL="0">
-              <a:buNone/>
-            </a:pPr>
-            <a:r>
-              <a:rPr/>
-              <a:t>Bring the machine you set up. Everything this term runs on it.</a:t>
-            </a:r>
-          </a:p>
-        </p:txBody>
-      </p:sp>
     </p:spTree>
   </p:cSld>
 </p:sld>
@@ -11247,53 +9397,6 @@
                       <a:r>
                         <a:rPr/>
                         <a:t>Reads and edits your files, and commits.</a:t>
-                      </a:r>
-                    </a:p>
-                  </a:txBody>
-                </a:tc>
-              </a:tr>
-              <a:tr h="0">
-                <a:tc>
-                  <a:txBody>
-                    <a:bodyPr/>
-                    <a:lstStyle/>
-                    <a:p>
-                      <a:pPr lvl="0" indent="0" marL="0">
-                        <a:buNone/>
-                      </a:pPr>
-                      <a:r>
-                        <a:rPr b="1"/>
-                        <a:t>Git + GitHub</a:t>
-                      </a:r>
-                    </a:p>
-                  </a:txBody>
-                </a:tc>
-                <a:tc>
-                  <a:txBody>
-                    <a:bodyPr/>
-                    <a:lstStyle/>
-                    <a:p>
-                      <a:pPr lvl="0" indent="0" marL="0">
-                        <a:buNone/>
-                      </a:pPr>
-                      <a:r>
-                        <a:rPr/>
-                        <a:t>Version control</a:t>
-                      </a:r>
-                    </a:p>
-                  </a:txBody>
-                </a:tc>
-                <a:tc>
-                  <a:txBody>
-                    <a:bodyPr/>
-                    <a:lstStyle/>
-                    <a:p>
-                      <a:pPr lvl="0" indent="0" marL="0">
-                        <a:buNone/>
-                      </a:pPr>
-                      <a:r>
-                        <a:rPr/>
-                        <a:t>The record of who did what.</a:t>
                       </a:r>
                     </a:p>
                   </a:txBody>

--- a/01-foundations-scenarios-and-tools/00-pre-session/slides-welcome-and-setup.pptx
+++ b/01-foundations-scenarios-and-tools/00-pre-session/slides-welcome-and-setup.pptx
@@ -960,7 +960,7 @@
           <a:bodyPr anchor="t"/>
           <a:lstStyle>
             <a:lvl1pPr algn="l">
-              <a:defRPr sz="2350" b="1" cap="all"/>
+              <a:defRPr sz="1850" b="1" cap="all"/>
             </a:lvl1pPr>
           </a:lstStyle>
           <a:p>
@@ -992,7 +992,7 @@
           <a:lstStyle>
             <a:lvl1pPr marL="0" indent="0">
               <a:buNone/>
-              <a:defRPr sz="1150">
+              <a:defRPr sz="950">
                 <a:solidFill>
                   <a:schemeClr val="tx1">
                     <a:tint val="75000"/>
@@ -1002,7 +1002,7 @@
             </a:lvl1pPr>
             <a:lvl2pPr marL="342900" indent="0">
               <a:buNone/>
-              <a:defRPr sz="1050">
+              <a:defRPr sz="850">
                 <a:solidFill>
                   <a:schemeClr val="tx1">
                     <a:tint val="75000"/>
@@ -1012,7 +1012,7 @@
             </a:lvl2pPr>
             <a:lvl3pPr marL="685800" indent="0">
               <a:buNone/>
-              <a:defRPr sz="950">
+              <a:defRPr sz="750">
                 <a:solidFill>
                   <a:schemeClr val="tx1">
                     <a:tint val="75000"/>
@@ -1022,7 +1022,7 @@
             </a:lvl3pPr>
             <a:lvl4pPr marL="1028700" indent="0">
               <a:buNone/>
-              <a:defRPr sz="800">
+              <a:defRPr sz="650">
                 <a:solidFill>
                   <a:schemeClr val="tx1">
                     <a:tint val="75000"/>
@@ -1032,7 +1032,7 @@
             </a:lvl4pPr>
             <a:lvl5pPr marL="1371600" indent="0">
               <a:buNone/>
-              <a:defRPr sz="800">
+              <a:defRPr sz="650">
                 <a:solidFill>
                   <a:schemeClr val="tx1">
                     <a:tint val="75000"/>
@@ -1042,7 +1042,7 @@
             </a:lvl5pPr>
             <a:lvl6pPr marL="1714500" indent="0">
               <a:buNone/>
-              <a:defRPr sz="800">
+              <a:defRPr sz="650">
                 <a:solidFill>
                   <a:schemeClr val="tx1">
                     <a:tint val="75000"/>
@@ -1052,7 +1052,7 @@
             </a:lvl6pPr>
             <a:lvl7pPr marL="2057400" indent="0">
               <a:buNone/>
-              <a:defRPr sz="800">
+              <a:defRPr sz="650">
                 <a:solidFill>
                   <a:schemeClr val="tx1">
                     <a:tint val="75000"/>
@@ -1062,7 +1062,7 @@
             </a:lvl7pPr>
             <a:lvl8pPr marL="2400300" indent="0">
               <a:buNone/>
-              <a:defRPr sz="800">
+              <a:defRPr sz="650">
                 <a:solidFill>
                   <a:schemeClr val="tx1">
                     <a:tint val="75000"/>
@@ -1072,7 +1072,7 @@
             </a:lvl8pPr>
             <a:lvl9pPr marL="2743200" indent="0">
               <a:buNone/>
-              <a:defRPr sz="800">
+              <a:defRPr sz="650">
                 <a:solidFill>
                   <a:schemeClr val="tx1">
                     <a:tint val="75000"/>
@@ -1227,31 +1227,31 @@
           <a:bodyPr/>
           <a:lstStyle>
             <a:lvl1pPr>
-              <a:defRPr sz="1650"/>
+              <a:defRPr sz="1300"/>
             </a:lvl1pPr>
             <a:lvl2pPr>
-              <a:defRPr sz="1400"/>
+              <a:defRPr sz="1100"/>
             </a:lvl2pPr>
             <a:lvl3pPr>
-              <a:defRPr sz="1150"/>
+              <a:defRPr sz="950"/>
             </a:lvl3pPr>
             <a:lvl4pPr>
-              <a:defRPr sz="1050"/>
+              <a:defRPr sz="850"/>
             </a:lvl4pPr>
             <a:lvl5pPr>
-              <a:defRPr sz="1050"/>
+              <a:defRPr sz="850"/>
             </a:lvl5pPr>
             <a:lvl6pPr>
-              <a:defRPr sz="1050"/>
+              <a:defRPr sz="850"/>
             </a:lvl6pPr>
             <a:lvl7pPr>
-              <a:defRPr sz="1050"/>
+              <a:defRPr sz="850"/>
             </a:lvl7pPr>
             <a:lvl8pPr>
-              <a:defRPr sz="1050"/>
+              <a:defRPr sz="850"/>
             </a:lvl8pPr>
             <a:lvl9pPr>
-              <a:defRPr sz="1050"/>
+              <a:defRPr sz="850"/>
             </a:lvl9pPr>
           </a:lstStyle>
           <a:p>
@@ -1311,31 +1311,31 @@
           <a:bodyPr/>
           <a:lstStyle>
             <a:lvl1pPr>
-              <a:defRPr sz="1650"/>
+              <a:defRPr sz="1300"/>
             </a:lvl1pPr>
             <a:lvl2pPr>
-              <a:defRPr sz="1400"/>
+              <a:defRPr sz="1100"/>
             </a:lvl2pPr>
             <a:lvl3pPr>
-              <a:defRPr sz="1150"/>
+              <a:defRPr sz="950"/>
             </a:lvl3pPr>
             <a:lvl4pPr>
-              <a:defRPr sz="1050"/>
+              <a:defRPr sz="850"/>
             </a:lvl4pPr>
             <a:lvl5pPr>
-              <a:defRPr sz="1050"/>
+              <a:defRPr sz="850"/>
             </a:lvl5pPr>
             <a:lvl6pPr>
-              <a:defRPr sz="1050"/>
+              <a:defRPr sz="850"/>
             </a:lvl6pPr>
             <a:lvl7pPr>
-              <a:defRPr sz="1050"/>
+              <a:defRPr sz="850"/>
             </a:lvl7pPr>
             <a:lvl8pPr>
-              <a:defRPr sz="1050"/>
+              <a:defRPr sz="850"/>
             </a:lvl8pPr>
             <a:lvl9pPr>
-              <a:defRPr sz="1050"/>
+              <a:defRPr sz="850"/>
             </a:lvl9pPr>
           </a:lstStyle>
           <a:p>
@@ -1517,39 +1517,39 @@
           <a:lstStyle>
             <a:lvl1pPr marL="0" indent="0">
               <a:buNone/>
-              <a:defRPr sz="1400" b="1"/>
+              <a:defRPr sz="1100" b="1"/>
             </a:lvl1pPr>
             <a:lvl2pPr marL="342900" indent="0">
               <a:buNone/>
-              <a:defRPr sz="1150" b="1"/>
+              <a:defRPr sz="950" b="1"/>
             </a:lvl2pPr>
             <a:lvl3pPr marL="685800" indent="0">
               <a:buNone/>
-              <a:defRPr sz="1050" b="1"/>
+              <a:defRPr sz="850" b="1"/>
             </a:lvl3pPr>
             <a:lvl4pPr marL="1028700" indent="0">
               <a:buNone/>
-              <a:defRPr sz="950" b="1"/>
+              <a:defRPr sz="750" b="1"/>
             </a:lvl4pPr>
             <a:lvl5pPr marL="1371600" indent="0">
               <a:buNone/>
-              <a:defRPr sz="950" b="1"/>
+              <a:defRPr sz="750" b="1"/>
             </a:lvl5pPr>
             <a:lvl6pPr marL="1714500" indent="0">
               <a:buNone/>
-              <a:defRPr sz="950" b="1"/>
+              <a:defRPr sz="750" b="1"/>
             </a:lvl6pPr>
             <a:lvl7pPr marL="2057400" indent="0">
               <a:buNone/>
-              <a:defRPr sz="950" b="1"/>
+              <a:defRPr sz="750" b="1"/>
             </a:lvl7pPr>
             <a:lvl8pPr marL="2400300" indent="0">
               <a:buNone/>
-              <a:defRPr sz="950" b="1"/>
+              <a:defRPr sz="750" b="1"/>
             </a:lvl8pPr>
             <a:lvl9pPr marL="2743200" indent="0">
               <a:buNone/>
-              <a:defRPr sz="950" b="1"/>
+              <a:defRPr sz="750" b="1"/>
             </a:lvl9pPr>
           </a:lstStyle>
           <a:p>
@@ -1581,31 +1581,31 @@
           <a:bodyPr/>
           <a:lstStyle>
             <a:lvl1pPr>
-              <a:defRPr sz="1400"/>
+              <a:defRPr sz="1100"/>
             </a:lvl1pPr>
             <a:lvl2pPr>
-              <a:defRPr sz="1150"/>
+              <a:defRPr sz="950"/>
             </a:lvl2pPr>
             <a:lvl3pPr>
-              <a:defRPr sz="1050"/>
+              <a:defRPr sz="850"/>
             </a:lvl3pPr>
             <a:lvl4pPr>
-              <a:defRPr sz="950"/>
+              <a:defRPr sz="750"/>
             </a:lvl4pPr>
             <a:lvl5pPr>
-              <a:defRPr sz="950"/>
+              <a:defRPr sz="750"/>
             </a:lvl5pPr>
             <a:lvl6pPr>
-              <a:defRPr sz="950"/>
+              <a:defRPr sz="750"/>
             </a:lvl6pPr>
             <a:lvl7pPr>
-              <a:defRPr sz="950"/>
+              <a:defRPr sz="750"/>
             </a:lvl7pPr>
             <a:lvl8pPr>
-              <a:defRPr sz="950"/>
+              <a:defRPr sz="750"/>
             </a:lvl8pPr>
             <a:lvl9pPr>
-              <a:defRPr sz="950"/>
+              <a:defRPr sz="750"/>
             </a:lvl9pPr>
           </a:lstStyle>
           <a:p>
@@ -1666,39 +1666,39 @@
           <a:lstStyle>
             <a:lvl1pPr marL="0" indent="0">
               <a:buNone/>
-              <a:defRPr sz="1400" b="1"/>
+              <a:defRPr sz="1100" b="1"/>
             </a:lvl1pPr>
             <a:lvl2pPr marL="342900" indent="0">
               <a:buNone/>
-              <a:defRPr sz="1150" b="1"/>
+              <a:defRPr sz="950" b="1"/>
             </a:lvl2pPr>
             <a:lvl3pPr marL="685800" indent="0">
               <a:buNone/>
-              <a:defRPr sz="1050" b="1"/>
+              <a:defRPr sz="850" b="1"/>
             </a:lvl3pPr>
             <a:lvl4pPr marL="1028700" indent="0">
               <a:buNone/>
-              <a:defRPr sz="950" b="1"/>
+              <a:defRPr sz="750" b="1"/>
             </a:lvl4pPr>
             <a:lvl5pPr marL="1371600" indent="0">
               <a:buNone/>
-              <a:defRPr sz="950" b="1"/>
+              <a:defRPr sz="750" b="1"/>
             </a:lvl5pPr>
             <a:lvl6pPr marL="1714500" indent="0">
               <a:buNone/>
-              <a:defRPr sz="950" b="1"/>
+              <a:defRPr sz="750" b="1"/>
             </a:lvl6pPr>
             <a:lvl7pPr marL="2057400" indent="0">
               <a:buNone/>
-              <a:defRPr sz="950" b="1"/>
+              <a:defRPr sz="750" b="1"/>
             </a:lvl7pPr>
             <a:lvl8pPr marL="2400300" indent="0">
               <a:buNone/>
-              <a:defRPr sz="950" b="1"/>
+              <a:defRPr sz="750" b="1"/>
             </a:lvl8pPr>
             <a:lvl9pPr marL="2743200" indent="0">
               <a:buNone/>
-              <a:defRPr sz="950" b="1"/>
+              <a:defRPr sz="750" b="1"/>
             </a:lvl9pPr>
           </a:lstStyle>
           <a:p>
@@ -1730,31 +1730,31 @@
           <a:bodyPr/>
           <a:lstStyle>
             <a:lvl1pPr>
-              <a:defRPr sz="1400"/>
+              <a:defRPr sz="1100"/>
             </a:lvl1pPr>
             <a:lvl2pPr>
-              <a:defRPr sz="1150"/>
+              <a:defRPr sz="950"/>
             </a:lvl2pPr>
             <a:lvl3pPr>
-              <a:defRPr sz="1050"/>
+              <a:defRPr sz="850"/>
             </a:lvl3pPr>
             <a:lvl4pPr>
-              <a:defRPr sz="950"/>
+              <a:defRPr sz="750"/>
             </a:lvl4pPr>
             <a:lvl5pPr>
-              <a:defRPr sz="950"/>
+              <a:defRPr sz="750"/>
             </a:lvl5pPr>
             <a:lvl6pPr>
-              <a:defRPr sz="950"/>
+              <a:defRPr sz="750"/>
             </a:lvl6pPr>
             <a:lvl7pPr>
-              <a:defRPr sz="950"/>
+              <a:defRPr sz="750"/>
             </a:lvl7pPr>
             <a:lvl8pPr>
-              <a:defRPr sz="950"/>
+              <a:defRPr sz="750"/>
             </a:lvl8pPr>
             <a:lvl9pPr>
-              <a:defRPr sz="950"/>
+              <a:defRPr sz="750"/>
             </a:lvl9pPr>
           </a:lstStyle>
           <a:p>
@@ -2121,7 +2121,7 @@
           <a:bodyPr anchor="b"/>
           <a:lstStyle>
             <a:lvl1pPr algn="l">
-              <a:defRPr sz="1150" b="1"/>
+              <a:defRPr sz="950" b="1"/>
             </a:lvl1pPr>
           </a:lstStyle>
           <a:p>
@@ -2152,31 +2152,31 @@
           <a:bodyPr/>
           <a:lstStyle>
             <a:lvl1pPr>
-              <a:defRPr sz="1850"/>
+              <a:defRPr sz="1500"/>
             </a:lvl1pPr>
             <a:lvl2pPr>
-              <a:defRPr sz="1650"/>
+              <a:defRPr sz="1300"/>
             </a:lvl2pPr>
             <a:lvl3pPr>
-              <a:defRPr sz="1400"/>
+              <a:defRPr sz="1100"/>
             </a:lvl3pPr>
             <a:lvl4pPr>
-              <a:defRPr sz="1150"/>
+              <a:defRPr sz="950"/>
             </a:lvl4pPr>
             <a:lvl5pPr>
-              <a:defRPr sz="1150"/>
+              <a:defRPr sz="950"/>
             </a:lvl5pPr>
             <a:lvl6pPr>
-              <a:defRPr sz="1150"/>
+              <a:defRPr sz="950"/>
             </a:lvl6pPr>
             <a:lvl7pPr>
-              <a:defRPr sz="1150"/>
+              <a:defRPr sz="950"/>
             </a:lvl7pPr>
             <a:lvl8pPr>
-              <a:defRPr sz="1150"/>
+              <a:defRPr sz="950"/>
             </a:lvl8pPr>
             <a:lvl9pPr>
-              <a:defRPr sz="1150"/>
+              <a:defRPr sz="950"/>
             </a:lvl9pPr>
           </a:lstStyle>
           <a:p>
@@ -2237,39 +2237,39 @@
           <a:lstStyle>
             <a:lvl1pPr marL="0" indent="0">
               <a:buNone/>
-              <a:defRPr sz="800"/>
+              <a:defRPr sz="650"/>
             </a:lvl1pPr>
             <a:lvl2pPr marL="342900" indent="0">
               <a:buNone/>
-              <a:defRPr sz="700"/>
+              <a:defRPr sz="550"/>
             </a:lvl2pPr>
             <a:lvl3pPr marL="685800" indent="0">
               <a:buNone/>
-              <a:defRPr sz="700"/>
+              <a:defRPr sz="550"/>
             </a:lvl3pPr>
             <a:lvl4pPr marL="1028700" indent="0">
               <a:buNone/>
-              <a:defRPr sz="700"/>
+              <a:defRPr sz="550"/>
             </a:lvl4pPr>
             <a:lvl5pPr marL="1371600" indent="0">
               <a:buNone/>
-              <a:defRPr sz="700"/>
+              <a:defRPr sz="550"/>
             </a:lvl5pPr>
             <a:lvl6pPr marL="1714500" indent="0">
               <a:buNone/>
-              <a:defRPr sz="700"/>
+              <a:defRPr sz="550"/>
             </a:lvl6pPr>
             <a:lvl7pPr marL="2057400" indent="0">
               <a:buNone/>
-              <a:defRPr sz="700"/>
+              <a:defRPr sz="550"/>
             </a:lvl7pPr>
             <a:lvl8pPr marL="2400300" indent="0">
               <a:buNone/>
-              <a:defRPr sz="700"/>
+              <a:defRPr sz="550"/>
             </a:lvl8pPr>
             <a:lvl9pPr marL="2743200" indent="0">
               <a:buNone/>
-              <a:defRPr sz="700"/>
+              <a:defRPr sz="550"/>
             </a:lvl9pPr>
           </a:lstStyle>
           <a:p>
@@ -2396,7 +2396,7 @@
           <a:bodyPr anchor="b"/>
           <a:lstStyle>
             <a:lvl1pPr algn="l">
-              <a:defRPr sz="1150" b="1"/>
+              <a:defRPr sz="950" b="1"/>
             </a:lvl1pPr>
           </a:lstStyle>
           <a:p>
@@ -2428,39 +2428,39 @@
           <a:lstStyle>
             <a:lvl1pPr marL="0" indent="0">
               <a:buNone/>
-              <a:defRPr sz="1850"/>
+              <a:defRPr sz="1500"/>
             </a:lvl1pPr>
             <a:lvl2pPr marL="342900" indent="0">
               <a:buNone/>
-              <a:defRPr sz="1650"/>
+              <a:defRPr sz="1300"/>
             </a:lvl2pPr>
             <a:lvl3pPr marL="685800" indent="0">
               <a:buNone/>
-              <a:defRPr sz="1400"/>
+              <a:defRPr sz="1100"/>
             </a:lvl3pPr>
             <a:lvl4pPr marL="1028700" indent="0">
               <a:buNone/>
-              <a:defRPr sz="1150"/>
+              <a:defRPr sz="950"/>
             </a:lvl4pPr>
             <a:lvl5pPr marL="1371600" indent="0">
               <a:buNone/>
-              <a:defRPr sz="1150"/>
+              <a:defRPr sz="950"/>
             </a:lvl5pPr>
             <a:lvl6pPr marL="1714500" indent="0">
               <a:buNone/>
-              <a:defRPr sz="1150"/>
+              <a:defRPr sz="950"/>
             </a:lvl6pPr>
             <a:lvl7pPr marL="2057400" indent="0">
               <a:buNone/>
-              <a:defRPr sz="1150"/>
+              <a:defRPr sz="950"/>
             </a:lvl7pPr>
             <a:lvl8pPr marL="2400300" indent="0">
               <a:buNone/>
-              <a:defRPr sz="1150"/>
+              <a:defRPr sz="950"/>
             </a:lvl8pPr>
             <a:lvl9pPr marL="2743200" indent="0">
               <a:buNone/>
-              <a:defRPr sz="1150"/>
+              <a:defRPr sz="950"/>
             </a:lvl9pPr>
           </a:lstStyle>
           <a:p>
@@ -2489,39 +2489,39 @@
           <a:lstStyle>
             <a:lvl1pPr marL="0" indent="0">
               <a:buNone/>
-              <a:defRPr sz="800"/>
+              <a:defRPr sz="650"/>
             </a:lvl1pPr>
             <a:lvl2pPr marL="342900" indent="0">
               <a:buNone/>
-              <a:defRPr sz="700"/>
+              <a:defRPr sz="550"/>
             </a:lvl2pPr>
             <a:lvl3pPr marL="685800" indent="0">
               <a:buNone/>
-              <a:defRPr sz="700"/>
+              <a:defRPr sz="550"/>
             </a:lvl3pPr>
             <a:lvl4pPr marL="1028700" indent="0">
               <a:buNone/>
-              <a:defRPr sz="700"/>
+              <a:defRPr sz="550"/>
             </a:lvl4pPr>
             <a:lvl5pPr marL="1371600" indent="0">
               <a:buNone/>
-              <a:defRPr sz="700"/>
+              <a:defRPr sz="550"/>
             </a:lvl5pPr>
             <a:lvl6pPr marL="1714500" indent="0">
               <a:buNone/>
-              <a:defRPr sz="700"/>
+              <a:defRPr sz="550"/>
             </a:lvl6pPr>
             <a:lvl7pPr marL="2057400" indent="0">
               <a:buNone/>
-              <a:defRPr sz="700"/>
+              <a:defRPr sz="550"/>
             </a:lvl7pPr>
             <a:lvl8pPr marL="2400300" indent="0">
               <a:buNone/>
-              <a:defRPr sz="700"/>
+              <a:defRPr sz="550"/>
             </a:lvl8pPr>
             <a:lvl9pPr marL="2743200" indent="0">
               <a:buNone/>
-              <a:defRPr sz="700"/>
+              <a:defRPr sz="550"/>
             </a:lvl9pPr>
           </a:lstStyle>
           <a:p>
@@ -2749,7 +2749,7 @@
           <a:bodyPr anchor="ctr" bIns="45720" lIns="91440" rIns="91440" rtlCol="0" tIns="45720" vert="horz"/>
           <a:lstStyle>
             <a:lvl1pPr algn="l">
-              <a:defRPr sz="700">
+              <a:defRPr sz="550">
                 <a:solidFill>
                   <a:schemeClr val="tx1">
                     <a:tint val="75000"/>
@@ -2790,7 +2790,7 @@
           <a:bodyPr anchor="ctr" bIns="45720" lIns="91440" rIns="91440" rtlCol="0" tIns="45720" vert="horz"/>
           <a:lstStyle>
             <a:lvl1pPr algn="ctr">
-              <a:defRPr sz="700">
+              <a:defRPr sz="550">
                 <a:solidFill>
                   <a:schemeClr val="tx1">
                     <a:tint val="75000"/>
@@ -2827,7 +2827,7 @@
           <a:bodyPr anchor="ctr" bIns="45720" lIns="91440" rIns="91440" rtlCol="0" tIns="45720" vert="horz"/>
           <a:lstStyle>
             <a:lvl1pPr algn="r">
-              <a:defRPr sz="700">
+              <a:defRPr sz="550">
                 <a:solidFill>
                   <a:schemeClr val="tx1">
                     <a:tint val="75000"/>
@@ -2873,7 +2873,7 @@
           <a:spcPct val="0"/>
         </a:spcBef>
         <a:buNone/>
-        <a:defRPr kern="1200" sz="2550">
+        <a:defRPr kern="1200" sz="2050">
           <a:solidFill>
             <a:schemeClr val="tx1"/>
           </a:solidFill>
@@ -2890,7 +2890,7 @@
         </a:spcBef>
         <a:buFont typeface="Arial"/>
         <a:buChar char="•"/>
-        <a:defRPr kern="1200" sz="1850">
+        <a:defRPr kern="1200" sz="1500">
           <a:solidFill>
             <a:schemeClr val="tx1"/>
           </a:solidFill>
@@ -2905,7 +2905,7 @@
         </a:spcBef>
         <a:buFont typeface="Arial"/>
         <a:buChar char="–"/>
-        <a:defRPr kern="1200" sz="1650">
+        <a:defRPr kern="1200" sz="1300">
           <a:solidFill>
             <a:schemeClr val="tx1"/>
           </a:solidFill>
@@ -2920,7 +2920,7 @@
         </a:spcBef>
         <a:buFont typeface="Arial"/>
         <a:buChar char="•"/>
-        <a:defRPr kern="1200" sz="1400">
+        <a:defRPr kern="1200" sz="1100">
           <a:solidFill>
             <a:schemeClr val="tx1"/>
           </a:solidFill>
@@ -2935,7 +2935,7 @@
         </a:spcBef>
         <a:buFont typeface="Arial"/>
         <a:buChar char="–"/>
-        <a:defRPr kern="1200" sz="1150">
+        <a:defRPr kern="1200" sz="950">
           <a:solidFill>
             <a:schemeClr val="tx1"/>
           </a:solidFill>
@@ -2950,7 +2950,7 @@
         </a:spcBef>
         <a:buFont typeface="Arial"/>
         <a:buChar char="»"/>
-        <a:defRPr kern="1200" sz="1150">
+        <a:defRPr kern="1200" sz="950">
           <a:solidFill>
             <a:schemeClr val="tx1"/>
           </a:solidFill>
@@ -2965,7 +2965,7 @@
         </a:spcBef>
         <a:buFont typeface="Arial"/>
         <a:buChar char="•"/>
-        <a:defRPr kern="1200" sz="1150">
+        <a:defRPr kern="1200" sz="950">
           <a:solidFill>
             <a:schemeClr val="tx1"/>
           </a:solidFill>
@@ -2980,7 +2980,7 @@
         </a:spcBef>
         <a:buFont typeface="Arial"/>
         <a:buChar char="•"/>
-        <a:defRPr kern="1200" sz="1150">
+        <a:defRPr kern="1200" sz="950">
           <a:solidFill>
             <a:schemeClr val="tx1"/>
           </a:solidFill>
@@ -2995,7 +2995,7 @@
         </a:spcBef>
         <a:buFont typeface="Arial"/>
         <a:buChar char="•"/>
-        <a:defRPr kern="1200" sz="1150">
+        <a:defRPr kern="1200" sz="950">
           <a:solidFill>
             <a:schemeClr val="tx1"/>
           </a:solidFill>
@@ -3010,7 +3010,7 @@
         </a:spcBef>
         <a:buFont typeface="Arial"/>
         <a:buChar char="•"/>
-        <a:defRPr kern="1200" sz="1150">
+        <a:defRPr kern="1200" sz="950">
           <a:solidFill>
             <a:schemeClr val="tx1"/>
           </a:solidFill>
@@ -3025,7 +3025,7 @@
         <a:defRPr lang="en-US"/>
       </a:defPPr>
       <a:lvl1pPr algn="l" defTabSz="342900" eaLnBrk="1" hangingPunct="1" latinLnBrk="0" marL="0" rtl="0">
-        <a:defRPr kern="1200" sz="1050">
+        <a:defRPr kern="1200" sz="850">
           <a:solidFill>
             <a:schemeClr val="tx1"/>
           </a:solidFill>
@@ -3035,7 +3035,7 @@
         </a:defRPr>
       </a:lvl1pPr>
       <a:lvl2pPr algn="l" defTabSz="342900" eaLnBrk="1" hangingPunct="1" latinLnBrk="0" marL="342900" rtl="0">
-        <a:defRPr kern="1200" sz="1050">
+        <a:defRPr kern="1200" sz="850">
           <a:solidFill>
             <a:schemeClr val="tx1"/>
           </a:solidFill>
@@ -3045,7 +3045,7 @@
         </a:defRPr>
       </a:lvl2pPr>
       <a:lvl3pPr algn="l" defTabSz="342900" eaLnBrk="1" hangingPunct="1" latinLnBrk="0" marL="685800" rtl="0">
-        <a:defRPr kern="1200" sz="1050">
+        <a:defRPr kern="1200" sz="850">
           <a:solidFill>
             <a:schemeClr val="tx1"/>
           </a:solidFill>
@@ -3055,7 +3055,7 @@
         </a:defRPr>
       </a:lvl3pPr>
       <a:lvl4pPr algn="l" defTabSz="342900" eaLnBrk="1" hangingPunct="1" latinLnBrk="0" marL="1028700" rtl="0">
-        <a:defRPr kern="1200" sz="1050">
+        <a:defRPr kern="1200" sz="850">
           <a:solidFill>
             <a:schemeClr val="tx1"/>
           </a:solidFill>
@@ -3065,7 +3065,7 @@
         </a:defRPr>
       </a:lvl4pPr>
       <a:lvl5pPr algn="l" defTabSz="342900" eaLnBrk="1" hangingPunct="1" latinLnBrk="0" marL="1371600" rtl="0">
-        <a:defRPr kern="1200" sz="1050">
+        <a:defRPr kern="1200" sz="850">
           <a:solidFill>
             <a:schemeClr val="tx1"/>
           </a:solidFill>
@@ -3075,7 +3075,7 @@
         </a:defRPr>
       </a:lvl5pPr>
       <a:lvl6pPr algn="l" defTabSz="342900" eaLnBrk="1" hangingPunct="1" latinLnBrk="0" marL="1714500" rtl="0">
-        <a:defRPr kern="1200" sz="1050">
+        <a:defRPr kern="1200" sz="850">
           <a:solidFill>
             <a:schemeClr val="tx1"/>
           </a:solidFill>
@@ -3085,7 +3085,7 @@
         </a:defRPr>
       </a:lvl6pPr>
       <a:lvl7pPr algn="l" defTabSz="342900" eaLnBrk="1" hangingPunct="1" latinLnBrk="0" marL="2057400" rtl="0">
-        <a:defRPr kern="1200" sz="1050">
+        <a:defRPr kern="1200" sz="850">
           <a:solidFill>
             <a:schemeClr val="tx1"/>
           </a:solidFill>
@@ -3095,7 +3095,7 @@
         </a:defRPr>
       </a:lvl7pPr>
       <a:lvl8pPr algn="l" defTabSz="342900" eaLnBrk="1" hangingPunct="1" latinLnBrk="0" marL="2400300" rtl="0">
-        <a:defRPr kern="1200" sz="1050">
+        <a:defRPr kern="1200" sz="850">
           <a:solidFill>
             <a:schemeClr val="tx1"/>
           </a:solidFill>
@@ -3105,7 +3105,7 @@
         </a:defRPr>
       </a:lvl8pPr>
       <a:lvl9pPr algn="l" defTabSz="342900" eaLnBrk="1" hangingPunct="1" latinLnBrk="0" marL="2743200" rtl="0">
-        <a:defRPr kern="1200" sz="1050">
+        <a:defRPr kern="1200" sz="850">
           <a:solidFill>
             <a:schemeClr val="tx1"/>
           </a:solidFill>

--- a/01-foundations-scenarios-and-tools/00-pre-session/slides-welcome-and-setup.pptx
+++ b/01-foundations-scenarios-and-tools/00-pre-session/slides-welcome-and-setup.pptx
@@ -52,6 +52,10 @@
     <p:sldId id="300" r:id="rId46"/>
     <p:sldId id="301" r:id="rId47"/>
     <p:sldId id="302" r:id="rId48"/>
+    <p:sldId id="303" r:id="rId49"/>
+    <p:sldId id="304" r:id="rId50"/>
+    <p:sldId id="305" r:id="rId51"/>
+    <p:sldId id="306" r:id="rId52"/>
   </p:sldIdLst>
   <p:sldSz cx="9144000" cy="5143500" type="screen16x9"/>
   <p:notesSz cx="6858000" cy="9144000"/>
@@ -3222,7 +3226,7 @@
             </a:pPr>
             <a:r>
               <a:rPr/>
-              <a:t>18 August 2026</a:t>
+              <a:t>19 August 2026</a:t>
             </a:r>
           </a:p>
         </p:txBody>
@@ -3611,6 +3615,13 @@
             <a:r>
               <a:rPr/>
               <a:t> (16 GB is much more comfortable)</a:t>
+            </a:r>
+          </a:p>
+          <a:p>
+            <a:pPr lvl="0"/>
+            <a:r>
+              <a:rPr/>
+              <a:t>A browser — you will download the course folder, no account needed</a:t>
             </a:r>
           </a:p>
           <a:p>
@@ -4563,7 +4574,7 @@
             </a:pPr>
             <a:r>
               <a:rPr/>
-              <a:t>Step 3 — Python</a:t>
+              <a:t>Step 3 — The course materials</a:t>
             </a:r>
           </a:p>
         </p:txBody>
@@ -4610,7 +4621,7 @@
             </a:pPr>
             <a:r>
               <a:rPr/>
-              <a:t>Install Python</a:t>
+              <a:t>Get the course folder</a:t>
             </a:r>
           </a:p>
         </p:txBody>
@@ -4635,12 +4646,29 @@
             </a:pPr>
             <a:r>
               <a:rPr/>
+              <a:t>Everything from here on runs </a:t>
+            </a:r>
+            <a:r>
+              <a:rPr b="1"/>
+              <a:t>inside the course folder</a:t>
+            </a:r>
+            <a:r>
+              <a:rPr/>
+              <a:t>, so you need it on your machine before anything else works.</a:t>
+            </a:r>
+          </a:p>
+          <a:p>
+            <a:pPr lvl="0" indent="0" marL="0">
+              <a:buNone/>
+            </a:pPr>
+            <a:r>
+              <a:rPr/>
               <a:t>download</a:t>
             </a:r>
           </a:p>
           <a:p>
-            <a:pPr lvl="0" indent="0" marL="0">
-              <a:buNone/>
+            <a:pPr lvl="0" indent="-342900" marL="342900">
+              <a:buAutoNum type="arabicPeriod"/>
             </a:pPr>
             <a:r>
               <a:rPr/>
@@ -4648,41 +4676,55 @@
             </a:r>
             <a:r>
               <a:rPr b="1"/>
-              <a:t>python.org/downloads</a:t>
-            </a:r>
-            <a:r>
-              <a:rPr/>
-              <a:t> and install </a:t>
+              <a:t>github.com/warint/quantitative-methods</a:t>
+            </a:r>
+          </a:p>
+          <a:p>
+            <a:pPr lvl="0" indent="-342900" marL="342900">
+              <a:buAutoNum type="arabicPeriod"/>
+            </a:pPr>
+            <a:r>
+              <a:rPr/>
+              <a:t>Click the green </a:t>
             </a:r>
             <a:r>
               <a:rPr b="1"/>
-              <a:t>Python 3.11 or 3.12</a:t>
-            </a:r>
-            <a:r>
-              <a:rPr/>
-              <a:t>.</a:t>
-            </a:r>
-          </a:p>
-          <a:p>
-            <a:pPr lvl="0" indent="0" marL="0">
-              <a:buNone/>
-            </a:pPr>
+              <a:t>Code</a:t>
+            </a:r>
+            <a:r>
+              <a:rPr/>
+              <a:t> button</a:t>
+            </a:r>
+          </a:p>
+          <a:p>
+            <a:pPr lvl="0" indent="-342900" marL="342900">
+              <a:buAutoNum type="arabicPeriod"/>
+            </a:pPr>
+            <a:r>
+              <a:rPr/>
+              <a:t>Choose </a:t>
+            </a:r>
             <a:r>
               <a:rPr b="1"/>
-              <a:t>Windows: tick “Add python.exe to PATH”</a:t>
-            </a:r>
-            <a:r>
-              <a:rPr/>
-              <a:t> on the first installer screen. It is easy to miss, and without it nothing below works.</a:t>
-            </a:r>
-          </a:p>
-          <a:p>
-            <a:pPr lvl="0" indent="0" marL="0">
-              <a:buNone/>
-            </a:pPr>
-            <a:r>
-              <a:rPr/>
-              <a:t>macOS ships an old Python that is not suitable. Install a current one anyway.</a:t>
+              <a:t>Download ZIP</a:t>
+            </a:r>
+          </a:p>
+          <a:p>
+            <a:pPr lvl="0" indent="-342900" marL="342900">
+              <a:buAutoNum type="arabicPeriod"/>
+            </a:pPr>
+            <a:r>
+              <a:rPr/>
+              <a:t>Unzip it somewhere you will find again — Documents, not Downloads</a:t>
+            </a:r>
+          </a:p>
+          <a:p>
+            <a:pPr lvl="0" indent="0" marL="0">
+              <a:buNone/>
+            </a:pPr>
+            <a:r>
+              <a:rPr/>
+              <a:t>No account needed. You are just downloading a folder.</a:t>
             </a:r>
           </a:p>
         </p:txBody>
@@ -4781,7 +4823,7 @@
             </a:pPr>
             <a:r>
               <a:rPr/>
-              <a:t>Check Python is there</a:t>
+              <a:t>Open it in VS Codium</a:t>
             </a:r>
           </a:p>
         </p:txBody>
@@ -4802,106 +4844,65 @@
           <a:lstStyle/>
           <a:p>
             <a:pPr lvl="0" indent="0" marL="0">
-              <a:buNone/>
-            </a:pPr>
-            <a:r>
-              <a:rPr/>
-              <a:t>VS Codium terminal</a:t>
-            </a:r>
-          </a:p>
-          <a:p>
-            <a:pPr lvl="0" indent="0">
               <a:buNone/>
             </a:pPr>
             <a:r>
               <a:rPr>
                 <a:latin typeface="Courier"/>
               </a:rPr>
-              <a:t>python3 </a:t>
-            </a:r>
-            <a:r>
-              <a:rPr>
-                <a:solidFill>
-                  <a:srgbClr val="7D9029"/>
-                </a:solidFill>
-                <a:latin typeface="Courier"/>
-              </a:rPr>
-              <a:t>--version</a:t>
-            </a:r>
-          </a:p>
-          <a:p>
-            <a:pPr lvl="0" indent="0" marL="0">
-              <a:buNone/>
-            </a:pPr>
-            <a:r>
-              <a:rPr/>
-              <a:t>Prints </a:t>
+              <a:t>File → Open Folder…</a:t>
+            </a:r>
+            <a:r>
+              <a:rPr/>
+              <a:t> and choose the unzipped folder.</a:t>
+            </a:r>
+          </a:p>
+          <a:p>
+            <a:pPr lvl="0" indent="0" marL="0">
+              <a:buNone/>
+            </a:pPr>
+            <a:r>
+              <a:rPr/>
+              <a:t>The Explorer on the left should show </a:t>
             </a:r>
             <a:r>
               <a:rPr>
                 <a:latin typeface="Courier"/>
               </a:rPr>
-              <a:t>Python 3.11.x</a:t>
-            </a:r>
-            <a:r>
-              <a:rPr/>
-              <a:t> or </a:t>
+              <a:t>README.md</a:t>
+            </a:r>
+            <a:r>
+              <a:rPr/>
+              <a:t>, </a:t>
             </a:r>
             <a:r>
               <a:rPr>
                 <a:latin typeface="Courier"/>
               </a:rPr>
-              <a:t>3.12.x</a:t>
-            </a:r>
-            <a:r>
-              <a:rPr/>
-              <a:t>.</a:t>
-            </a:r>
-          </a:p>
-          <a:p>
-            <a:pPr lvl="0" indent="0" marL="0">
-              <a:buNone/>
-            </a:pPr>
-            <a:r>
-              <a:rPr/>
-              <a:t>On Windows, if </a:t>
+              <a:t>requirements.txt</a:t>
+            </a:r>
+            <a:r>
+              <a:rPr/>
+              <a:t>, a </a:t>
             </a:r>
             <a:r>
               <a:rPr>
                 <a:latin typeface="Courier"/>
               </a:rPr>
-              <a:t>python3</a:t>
-            </a:r>
-            <a:r>
-              <a:rPr/>
-              <a:t> is not found, try </a:t>
-            </a:r>
-            <a:r>
-              <a:rPr>
-                <a:latin typeface="Courier"/>
-              </a:rPr>
-              <a:t>python --version</a:t>
-            </a:r>
-            <a:r>
-              <a:rPr/>
-              <a:t>.</a:t>
-            </a:r>
-          </a:p>
-          <a:p>
-            <a:pPr lvl="0" indent="0" marL="0">
-              <a:buNone/>
-            </a:pPr>
-            <a:r>
-              <a:rPr/>
-              <a:t>If it says </a:t>
-            </a:r>
-            <a:r>
-              <a:rPr i="1"/>
-              <a:t>command not found</a:t>
-            </a:r>
-            <a:r>
-              <a:rPr/>
-              <a:t>, the PATH box was not ticked. Re-run the installer — do not try to work around it.</a:t>
+              <a:t>data/</a:t>
+            </a:r>
+            <a:r>
+              <a:rPr/>
+              <a:t> folder and the numbered session folders. If it shows a single folder you have to click into, you picked the level above — go one deeper.</a:t>
+            </a:r>
+          </a:p>
+          <a:p>
+            <a:pPr lvl="0" indent="0" marL="0">
+              <a:buNone/>
+            </a:pPr>
+            <a:r>
+              <a:rPr/>
+              <a:t>Keep it there. Every command in these slides is relative to this folder, and the terminal you opened is already sitting in it.</a:t>
             </a:r>
           </a:p>
         </p:txBody>
@@ -4948,7 +4949,7 @@
             </a:pPr>
             <a:r>
               <a:rPr/>
-              <a:t>Create the environment</a:t>
+              <a:t>In Session 2 you will do this properly</a:t>
             </a:r>
           </a:p>
         </p:txBody>
@@ -4973,61 +4974,55 @@
             </a:pPr>
             <a:r>
               <a:rPr/>
-              <a:t>VS Codium terminal</a:t>
-            </a:r>
-          </a:p>
-          <a:p>
-            <a:pPr lvl="0" indent="0" marL="0">
-              <a:buNone/>
-            </a:pPr>
-            <a:r>
-              <a:rPr/>
-              <a:t>First </a:t>
+              <a:t>Downloading a ZIP gets you a </a:t>
+            </a:r>
+            <a:r>
+              <a:rPr b="1"/>
+              <a:t>snapshot</a:t>
+            </a:r>
+            <a:r>
+              <a:rPr/>
+              <a:t>. It cannot receive corrections, and it has no history.</a:t>
+            </a:r>
+          </a:p>
+          <a:p>
+            <a:pPr lvl="0"/>
+            <a:r>
+              <a:rPr/>
+              <a:t>Before Session 2 you install git and clone the repository instead</a:t>
+            </a:r>
+          </a:p>
+          <a:p>
+            <a:pPr lvl="0"/>
+            <a:r>
+              <a:rPr/>
+              <a:t>That version updates with </a:t>
             </a:r>
             <a:r>
               <a:rPr>
                 <a:latin typeface="Courier"/>
               </a:rPr>
-              <a:t>File → Open Folder…</a:t>
-            </a:r>
-            <a:r>
-              <a:rPr/>
-              <a:t> and choose your course folder. Then:</a:t>
-            </a:r>
-          </a:p>
-          <a:p>
-            <a:pPr lvl="0" indent="0">
-              <a:buNone/>
-            </a:pPr>
-            <a:r>
-              <a:rPr>
-                <a:latin typeface="Courier"/>
-              </a:rPr>
-              <a:t>python3 </a:t>
-            </a:r>
-            <a:r>
-              <a:rPr>
-                <a:solidFill>
-                  <a:srgbClr val="7D9029"/>
-                </a:solidFill>
-                <a:latin typeface="Courier"/>
-              </a:rPr>
-              <a:t>-m</a:t>
-            </a:r>
-            <a:r>
-              <a:rPr>
-                <a:latin typeface="Courier"/>
-              </a:rPr>
-              <a:t> venv .venv</a:t>
-            </a:r>
-          </a:p>
-          <a:p>
-            <a:pPr lvl="0" indent="0" marL="0">
-              <a:buNone/>
-            </a:pPr>
-            <a:r>
-              <a:rPr/>
-              <a:t>This makes a private package folder for this course, so it cannot break your other work.</a:t>
+              <a:t>git pull</a:t>
+            </a:r>
+            <a:r>
+              <a:rPr/>
+              <a:t> when I fix something</a:t>
+            </a:r>
+          </a:p>
+          <a:p>
+            <a:pPr lvl="0"/>
+            <a:r>
+              <a:rPr/>
+              <a:t>It is also where your group’s own work will live</a:t>
+            </a:r>
+          </a:p>
+          <a:p>
+            <a:pPr lvl="0" indent="0" marL="0">
+              <a:buNone/>
+            </a:pPr>
+            <a:r>
+              <a:rPr/>
+              <a:t>For today the snapshot is enough, and it saves you creating an account before you have seen the course.</a:t>
             </a:r>
           </a:p>
         </p:txBody>
@@ -5064,113 +5059,22 @@
             <p:ph type="title"/>
           </p:nvPr>
         </p:nvSpPr>
-        <p:spPr/>
-        <p:txBody>
-          <a:bodyPr/>
-          <a:lstStyle/>
-          <a:p>
-            <a:pPr lvl="0" indent="0" marL="0">
-              <a:buNone/>
-            </a:pPr>
-            <a:r>
-              <a:rPr/>
-              <a:t>Activate it</a:t>
-            </a:r>
-          </a:p>
-        </p:txBody>
-      </p:sp>
-      <p:sp>
-        <p:nvSpPr>
-          <p:cNvPr id="3" name="Content Placeholder 2"/>
-          <p:cNvSpPr>
-            <a:spLocks noGrp="1"/>
-          </p:cNvSpPr>
-          <p:nvPr>
-            <p:ph idx="1"/>
-          </p:nvPr>
-        </p:nvSpPr>
-        <p:spPr/>
-        <p:txBody>
-          <a:bodyPr/>
-          <a:lstStyle/>
-          <a:p>
-            <a:pPr lvl="0" indent="0" marL="0">
-              <a:buNone/>
-            </a:pPr>
-            <a:r>
-              <a:rPr/>
-              <a:t>VS Codium terminal</a:t>
-            </a:r>
-          </a:p>
-          <a:p>
-            <a:pPr lvl="0" indent="0">
-              <a:buNone/>
-            </a:pPr>
-            <a:r>
-              <a:rPr i="1">
-                <a:solidFill>
-                  <a:srgbClr val="60A0B0"/>
-                </a:solidFill>
-                <a:latin typeface="Courier"/>
-              </a:rPr>
-              <a:t># macOS / Linux</a:t>
-            </a:r>
-            <a:br/>
-            <a:r>
-              <a:rPr>
-                <a:solidFill>
-                  <a:srgbClr val="008000"/>
-                </a:solidFill>
-                <a:latin typeface="Courier"/>
-              </a:rPr>
-              <a:t>source</a:t>
-            </a:r>
-            <a:r>
-              <a:rPr>
-                <a:latin typeface="Courier"/>
-              </a:rPr>
-              <a:t> .venv/bin/activate</a:t>
-            </a:r>
-            <a:br/>
-            <a:br/>
-            <a:r>
-              <a:rPr i="1">
-                <a:solidFill>
-                  <a:srgbClr val="60A0B0"/>
-                </a:solidFill>
-                <a:latin typeface="Courier"/>
-              </a:rPr>
-              <a:t># Windows (PowerShell)</a:t>
-            </a:r>
-            <a:br/>
-            <a:r>
-              <a:rPr>
-                <a:latin typeface="Courier"/>
-              </a:rPr>
-              <a:t>.venv\Scripts\Activate.ps1</a:t>
-            </a:r>
-          </a:p>
-          <a:p>
-            <a:pPr lvl="0" indent="0" marL="0">
-              <a:buNone/>
-            </a:pPr>
-            <a:r>
-              <a:rPr/>
-              <a:t>Your prompt now starts with </a:t>
-            </a:r>
-            <a:r>
-              <a:rPr>
-                <a:latin typeface="Courier"/>
-              </a:rPr>
-              <a:t>(.venv)</a:t>
-            </a:r>
-            <a:r>
-              <a:rPr/>
-              <a:t>. </a:t>
-            </a:r>
-            <a:r>
-              <a:rPr b="1"/>
-              <a:t>Every command from here on assumes you see that.</a:t>
+        <p:spPr>
+          <a:xfrm>
+            <a:off x="722313" y="3305176"/>
+            <a:ext cx="7772400" cy="1021556"/>
+          </a:xfrm>
+        </p:spPr>
+        <p:txBody>
+          <a:bodyPr/>
+          <a:lstStyle/>
+          <a:p>
+            <a:pPr lvl="0" indent="0" marL="0">
+              <a:buNone/>
+            </a:pPr>
+            <a:r>
+              <a:rPr/>
+              <a:t>Step 4 — Python</a:t>
             </a:r>
           </a:p>
         </p:txBody>
@@ -5217,7 +5121,7 @@
             </a:pPr>
             <a:r>
               <a:rPr/>
-              <a:t>Install the packages</a:t>
+              <a:t>Install Python</a:t>
             </a:r>
           </a:p>
         </p:txBody>
@@ -5242,106 +5146,54 @@
             </a:pPr>
             <a:r>
               <a:rPr/>
-              <a:t>VS Codium terminal · with </a:t>
-            </a:r>
-            <a:r>
-              <a:rPr>
-                <a:latin typeface="Courier"/>
-              </a:rPr>
-              <a:t>(.venv)</a:t>
-            </a:r>
-            <a:r>
-              <a:rPr/>
-              <a:t> showing</a:t>
-            </a:r>
-          </a:p>
-          <a:p>
-            <a:pPr lvl="0" indent="0">
-              <a:buNone/>
-            </a:pPr>
-            <a:r>
-              <a:rPr>
-                <a:latin typeface="Courier"/>
-              </a:rPr>
-              <a:t>pip install </a:t>
-            </a:r>
-            <a:r>
-              <a:rPr>
-                <a:solidFill>
-                  <a:srgbClr val="7D9029"/>
-                </a:solidFill>
-                <a:latin typeface="Courier"/>
-              </a:rPr>
-              <a:t>-r</a:t>
-            </a:r>
-            <a:r>
-              <a:rPr>
-                <a:latin typeface="Courier"/>
-              </a:rPr>
-              <a:t> requirements.txt</a:t>
-            </a:r>
-          </a:p>
-          <a:p>
-            <a:pPr lvl="0" indent="0" marL="0">
-              <a:buNone/>
-            </a:pPr>
-            <a:r>
-              <a:rPr/>
-              <a:t>numpy, pandas, scikit-learn, statsmodels, matplotlib and the rest. A few minutes.</a:t>
-            </a:r>
-          </a:p>
-          <a:p>
-            <a:pPr lvl="0" indent="0">
-              <a:buNone/>
-            </a:pPr>
-            <a:r>
-              <a:rPr>
-                <a:latin typeface="Courier"/>
-              </a:rPr>
-              <a:t>python </a:t>
-            </a:r>
-            <a:r>
-              <a:rPr>
-                <a:solidFill>
-                  <a:srgbClr val="7D9029"/>
-                </a:solidFill>
-                <a:latin typeface="Courier"/>
-              </a:rPr>
-              <a:t>-c</a:t>
-            </a:r>
-            <a:r>
-              <a:rPr>
-                <a:latin typeface="Courier"/>
-              </a:rPr>
-              <a:t> </a:t>
-            </a:r>
-            <a:r>
-              <a:rPr>
-                <a:solidFill>
-                  <a:srgbClr val="4070A0"/>
-                </a:solidFill>
-                <a:latin typeface="Courier"/>
-              </a:rPr>
-              <a:t>"import numpy, pandas, sklearn; print('ok')"</a:t>
-            </a:r>
-          </a:p>
-          <a:p>
-            <a:pPr lvl="0" indent="0" marL="0">
-              <a:buNone/>
-            </a:pPr>
-            <a:r>
-              <a:rPr/>
-              <a:t>prints </a:t>
-            </a:r>
-            <a:r>
-              <a:rPr>
-                <a:latin typeface="Courier"/>
-              </a:rPr>
-              <a:t>ok</a:t>
+              <a:t>download</a:t>
+            </a:r>
+          </a:p>
+          <a:p>
+            <a:pPr lvl="0" indent="0" marL="0">
+              <a:buNone/>
+            </a:pPr>
+            <a:r>
+              <a:rPr/>
+              <a:t>Go to </a:t>
+            </a:r>
+            <a:r>
+              <a:rPr b="1"/>
+              <a:t>python.org/downloads</a:t>
+            </a:r>
+            <a:r>
+              <a:rPr/>
+              <a:t> and install </a:t>
+            </a:r>
+            <a:r>
+              <a:rPr b="1"/>
+              <a:t>Python 3.11 or 3.12</a:t>
             </a:r>
             <a:r>
               <a:rPr/>
               <a:t>.</a:t>
+            </a:r>
+          </a:p>
+          <a:p>
+            <a:pPr lvl="0" indent="0" marL="0">
+              <a:buNone/>
+            </a:pPr>
+            <a:r>
+              <a:rPr b="1"/>
+              <a:t>Windows: tick “Add python.exe to PATH”</a:t>
+            </a:r>
+            <a:r>
+              <a:rPr/>
+              <a:t> on the first installer screen. It is easy to miss, and without it nothing below works.</a:t>
+            </a:r>
+          </a:p>
+          <a:p>
+            <a:pPr lvl="0" indent="0" marL="0">
+              <a:buNone/>
+            </a:pPr>
+            <a:r>
+              <a:rPr/>
+              <a:t>macOS ships an old Python that is not suitable. Install a current one anyway.</a:t>
             </a:r>
           </a:p>
         </p:txBody>
@@ -5378,22 +5230,137 @@
             <p:ph type="title"/>
           </p:nvPr>
         </p:nvSpPr>
-        <p:spPr>
-          <a:xfrm>
-            <a:off x="722313" y="3305176"/>
-            <a:ext cx="7772400" cy="1021556"/>
-          </a:xfrm>
-        </p:spPr>
-        <p:txBody>
-          <a:bodyPr/>
-          <a:lstStyle/>
-          <a:p>
-            <a:pPr lvl="0" indent="0" marL="0">
-              <a:buNone/>
-            </a:pPr>
-            <a:r>
-              <a:rPr/>
-              <a:t>Step 4 — Ollama and Qwen</a:t>
+        <p:spPr/>
+        <p:txBody>
+          <a:bodyPr/>
+          <a:lstStyle/>
+          <a:p>
+            <a:pPr lvl="0" indent="0" marL="0">
+              <a:buNone/>
+            </a:pPr>
+            <a:r>
+              <a:rPr/>
+              <a:t>Check Python is there</a:t>
+            </a:r>
+          </a:p>
+        </p:txBody>
+      </p:sp>
+      <p:sp>
+        <p:nvSpPr>
+          <p:cNvPr id="3" name="Content Placeholder 2"/>
+          <p:cNvSpPr>
+            <a:spLocks noGrp="1"/>
+          </p:cNvSpPr>
+          <p:nvPr>
+            <p:ph idx="1"/>
+          </p:nvPr>
+        </p:nvSpPr>
+        <p:spPr/>
+        <p:txBody>
+          <a:bodyPr/>
+          <a:lstStyle/>
+          <a:p>
+            <a:pPr lvl="0" indent="0" marL="0">
+              <a:buNone/>
+            </a:pPr>
+            <a:r>
+              <a:rPr/>
+              <a:t>VS Codium terminal</a:t>
+            </a:r>
+          </a:p>
+          <a:p>
+            <a:pPr lvl="0" indent="0">
+              <a:buNone/>
+            </a:pPr>
+            <a:r>
+              <a:rPr>
+                <a:latin typeface="Courier"/>
+              </a:rPr>
+              <a:t>python3 </a:t>
+            </a:r>
+            <a:r>
+              <a:rPr>
+                <a:solidFill>
+                  <a:srgbClr val="7D9029"/>
+                </a:solidFill>
+                <a:latin typeface="Courier"/>
+              </a:rPr>
+              <a:t>--version</a:t>
+            </a:r>
+          </a:p>
+          <a:p>
+            <a:pPr lvl="0" indent="0" marL="0">
+              <a:buNone/>
+            </a:pPr>
+            <a:r>
+              <a:rPr/>
+              <a:t>Prints </a:t>
+            </a:r>
+            <a:r>
+              <a:rPr>
+                <a:latin typeface="Courier"/>
+              </a:rPr>
+              <a:t>Python 3.11.x</a:t>
+            </a:r>
+            <a:r>
+              <a:rPr/>
+              <a:t> or </a:t>
+            </a:r>
+            <a:r>
+              <a:rPr>
+                <a:latin typeface="Courier"/>
+              </a:rPr>
+              <a:t>3.12.x</a:t>
+            </a:r>
+            <a:r>
+              <a:rPr/>
+              <a:t>.</a:t>
+            </a:r>
+          </a:p>
+          <a:p>
+            <a:pPr lvl="0" indent="0" marL="0">
+              <a:buNone/>
+            </a:pPr>
+            <a:r>
+              <a:rPr/>
+              <a:t>On Windows, if </a:t>
+            </a:r>
+            <a:r>
+              <a:rPr>
+                <a:latin typeface="Courier"/>
+              </a:rPr>
+              <a:t>python3</a:t>
+            </a:r>
+            <a:r>
+              <a:rPr/>
+              <a:t> is not found, try </a:t>
+            </a:r>
+            <a:r>
+              <a:rPr>
+                <a:latin typeface="Courier"/>
+              </a:rPr>
+              <a:t>python --version</a:t>
+            </a:r>
+            <a:r>
+              <a:rPr/>
+              <a:t>.</a:t>
+            </a:r>
+          </a:p>
+          <a:p>
+            <a:pPr lvl="0" indent="0" marL="0">
+              <a:buNone/>
+            </a:pPr>
+            <a:r>
+              <a:rPr/>
+              <a:t>If it says </a:t>
+            </a:r>
+            <a:r>
+              <a:rPr i="1"/>
+              <a:t>command not found</a:t>
+            </a:r>
+            <a:r>
+              <a:rPr/>
+              <a:t>, the PATH box was not ticked. Re-run the installer — do not try to work around it.</a:t>
             </a:r>
           </a:p>
         </p:txBody>
@@ -5440,7 +5407,7 @@
             </a:pPr>
             <a:r>
               <a:rPr/>
-              <a:t>Install Ollama</a:t>
+              <a:t>Create the environment</a:t>
             </a:r>
           </a:p>
         </p:txBody>
@@ -5465,70 +5432,51 @@
             </a:pPr>
             <a:r>
               <a:rPr/>
-              <a:t>download</a:t>
-            </a:r>
-          </a:p>
-          <a:p>
-            <a:pPr lvl="0" indent="0" marL="0">
-              <a:buNone/>
-            </a:pPr>
-            <a:r>
-              <a:rPr/>
-              <a:t>Go to </a:t>
-            </a:r>
-            <a:r>
-              <a:rPr b="1"/>
-              <a:t>ollama.com/download</a:t>
-            </a:r>
-            <a:r>
-              <a:rPr/>
-              <a:t>, choose your operating system, and run the installer. This works on macOS, Windows and Linux.</a:t>
-            </a:r>
-          </a:p>
-          <a:p>
-            <a:pPr lvl="0" indent="0" marL="0">
-              <a:buNone/>
-            </a:pPr>
-            <a:r>
-              <a:rPr/>
-              <a:t>You may see a one-line </a:t>
-            </a:r>
+              <a:t>VS Codium terminal</a:t>
+            </a:r>
+          </a:p>
+          <a:p>
+            <a:pPr lvl="0" indent="0" marL="0">
+              <a:buNone/>
+            </a:pPr>
+            <a:r>
+              <a:rPr/>
+              <a:t>With the course folder open (Step 3), run:</a:t>
+            </a:r>
+          </a:p>
+          <a:p>
+            <a:pPr lvl="0" indent="0">
+              <a:buNone/>
+            </a:pPr>
             <a:r>
               <a:rPr>
                 <a:latin typeface="Courier"/>
               </a:rPr>
-              <a:t>curl … | sh</a:t>
-            </a:r>
-            <a:r>
-              <a:rPr/>
-              <a:t> command on the web. Ignore it — the installer does the same thing and there is nothing to mistype.</a:t>
-            </a:r>
-          </a:p>
-          <a:p>
-            <a:pPr lvl="0" indent="0" marL="0">
-              <a:buNone/>
-            </a:pPr>
-            <a:r>
-              <a:rPr/>
-              <a:t>On macOS, </a:t>
-            </a:r>
-            <a:r>
-              <a:rPr b="1"/>
-              <a:t>open the app once</a:t>
-            </a:r>
-            <a:r>
-              <a:rPr/>
-              <a:t> after installing. It puts the </a:t>
+              <a:t>python3 </a:t>
+            </a:r>
+            <a:r>
+              <a:rPr>
+                <a:solidFill>
+                  <a:srgbClr val="7D9029"/>
+                </a:solidFill>
+                <a:latin typeface="Courier"/>
+              </a:rPr>
+              <a:t>-m</a:t>
             </a:r>
             <a:r>
               <a:rPr>
                 <a:latin typeface="Courier"/>
               </a:rPr>
-              <a:t>ollama</a:t>
-            </a:r>
-            <a:r>
-              <a:rPr/>
-              <a:t> command in place and starts the background service.</a:t>
+              <a:t> venv .venv</a:t>
+            </a:r>
+          </a:p>
+          <a:p>
+            <a:pPr lvl="0" indent="0" marL="0">
+              <a:buNone/>
+            </a:pPr>
+            <a:r>
+              <a:rPr/>
+              <a:t>This makes a private package folder for this course, so it cannot break your other work.</a:t>
             </a:r>
           </a:p>
         </p:txBody>
@@ -5575,6 +5523,622 @@
             </a:pPr>
             <a:r>
               <a:rPr/>
+              <a:t>Activate it</a:t>
+            </a:r>
+          </a:p>
+        </p:txBody>
+      </p:sp>
+      <p:sp>
+        <p:nvSpPr>
+          <p:cNvPr id="3" name="Content Placeholder 2"/>
+          <p:cNvSpPr>
+            <a:spLocks noGrp="1"/>
+          </p:cNvSpPr>
+          <p:nvPr>
+            <p:ph idx="1"/>
+          </p:nvPr>
+        </p:nvSpPr>
+        <p:spPr/>
+        <p:txBody>
+          <a:bodyPr/>
+          <a:lstStyle/>
+          <a:p>
+            <a:pPr lvl="0" indent="0" marL="0">
+              <a:buNone/>
+            </a:pPr>
+            <a:r>
+              <a:rPr/>
+              <a:t>VS Codium terminal</a:t>
+            </a:r>
+          </a:p>
+          <a:p>
+            <a:pPr lvl="0" indent="0">
+              <a:buNone/>
+            </a:pPr>
+            <a:r>
+              <a:rPr i="1">
+                <a:solidFill>
+                  <a:srgbClr val="60A0B0"/>
+                </a:solidFill>
+                <a:latin typeface="Courier"/>
+              </a:rPr>
+              <a:t># macOS / Linux</a:t>
+            </a:r>
+            <a:br/>
+            <a:r>
+              <a:rPr>
+                <a:solidFill>
+                  <a:srgbClr val="008000"/>
+                </a:solidFill>
+                <a:latin typeface="Courier"/>
+              </a:rPr>
+              <a:t>source</a:t>
+            </a:r>
+            <a:r>
+              <a:rPr>
+                <a:latin typeface="Courier"/>
+              </a:rPr>
+              <a:t> .venv/bin/activate</a:t>
+            </a:r>
+            <a:br/>
+            <a:br/>
+            <a:r>
+              <a:rPr i="1">
+                <a:solidFill>
+                  <a:srgbClr val="60A0B0"/>
+                </a:solidFill>
+                <a:latin typeface="Courier"/>
+              </a:rPr>
+              <a:t># Windows (PowerShell)</a:t>
+            </a:r>
+            <a:br/>
+            <a:r>
+              <a:rPr>
+                <a:latin typeface="Courier"/>
+              </a:rPr>
+              <a:t>.venv\Scripts\Activate.ps1</a:t>
+            </a:r>
+          </a:p>
+          <a:p>
+            <a:pPr lvl="0" indent="0" marL="0">
+              <a:buNone/>
+            </a:pPr>
+            <a:r>
+              <a:rPr/>
+              <a:t>Your prompt now starts with </a:t>
+            </a:r>
+            <a:r>
+              <a:rPr>
+                <a:latin typeface="Courier"/>
+              </a:rPr>
+              <a:t>(.venv)</a:t>
+            </a:r>
+            <a:r>
+              <a:rPr/>
+              <a:t>. </a:t>
+            </a:r>
+            <a:r>
+              <a:rPr b="1"/>
+              <a:t>Every command from here on assumes you see that.</a:t>
+            </a:r>
+          </a:p>
+        </p:txBody>
+      </p:sp>
+    </p:spTree>
+  </p:cSld>
+</p:sld>
+</file>
+
+<file path=ppt/slides/slide27.xml><?xml version="1.0" encoding="utf-8"?>
+<p:sld xmlns:a="http://schemas.openxmlformats.org/drawingml/2006/main" xmlns:r="http://schemas.openxmlformats.org/officeDocument/2006/relationships" xmlns:p="http://schemas.openxmlformats.org/presentationml/2006/main">
+  <p:cSld>
+    <p:spTree>
+      <p:nvGrpSpPr>
+        <p:cNvPr id="1" name=""/>
+        <p:cNvGrpSpPr/>
+        <p:nvPr/>
+      </p:nvGrpSpPr>
+      <p:grpSpPr>
+        <a:xfrm>
+          <a:off x="0" y="0"/>
+          <a:ext cx="0" cy="0"/>
+          <a:chOff x="0" y="0"/>
+          <a:chExt cx="0" cy="0"/>
+        </a:xfrm>
+      </p:grpSpPr>
+      <p:sp>
+        <p:nvSpPr>
+          <p:cNvPr id="2" name="Title 1"/>
+          <p:cNvSpPr>
+            <a:spLocks noGrp="1"/>
+          </p:cNvSpPr>
+          <p:nvPr>
+            <p:ph type="title"/>
+          </p:nvPr>
+        </p:nvSpPr>
+        <p:spPr/>
+        <p:txBody>
+          <a:bodyPr/>
+          <a:lstStyle/>
+          <a:p>
+            <a:pPr lvl="0" indent="0" marL="0">
+              <a:buNone/>
+            </a:pPr>
+            <a:r>
+              <a:rPr/>
+              <a:t>Install the packages</a:t>
+            </a:r>
+          </a:p>
+        </p:txBody>
+      </p:sp>
+      <p:sp>
+        <p:nvSpPr>
+          <p:cNvPr id="3" name="Content Placeholder 2"/>
+          <p:cNvSpPr>
+            <a:spLocks noGrp="1"/>
+          </p:cNvSpPr>
+          <p:nvPr>
+            <p:ph idx="1"/>
+          </p:nvPr>
+        </p:nvSpPr>
+        <p:spPr/>
+        <p:txBody>
+          <a:bodyPr/>
+          <a:lstStyle/>
+          <a:p>
+            <a:pPr lvl="0" indent="0" marL="0">
+              <a:buNone/>
+            </a:pPr>
+            <a:r>
+              <a:rPr/>
+              <a:t>VS Codium terminal · with </a:t>
+            </a:r>
+            <a:r>
+              <a:rPr>
+                <a:latin typeface="Courier"/>
+              </a:rPr>
+              <a:t>(.venv)</a:t>
+            </a:r>
+            <a:r>
+              <a:rPr/>
+              <a:t> showing</a:t>
+            </a:r>
+          </a:p>
+          <a:p>
+            <a:pPr lvl="0" indent="0">
+              <a:buNone/>
+            </a:pPr>
+            <a:r>
+              <a:rPr>
+                <a:latin typeface="Courier"/>
+              </a:rPr>
+              <a:t>pip install </a:t>
+            </a:r>
+            <a:r>
+              <a:rPr>
+                <a:solidFill>
+                  <a:srgbClr val="7D9029"/>
+                </a:solidFill>
+                <a:latin typeface="Courier"/>
+              </a:rPr>
+              <a:t>-r</a:t>
+            </a:r>
+            <a:r>
+              <a:rPr>
+                <a:latin typeface="Courier"/>
+              </a:rPr>
+              <a:t> requirements.txt</a:t>
+            </a:r>
+          </a:p>
+          <a:p>
+            <a:pPr lvl="0" indent="0" marL="0">
+              <a:buNone/>
+            </a:pPr>
+            <a:r>
+              <a:rPr/>
+              <a:t>numpy, pandas, scikit-learn, statsmodels, matplotlib and the rest. A few minutes.</a:t>
+            </a:r>
+          </a:p>
+          <a:p>
+            <a:pPr lvl="0" indent="0">
+              <a:buNone/>
+            </a:pPr>
+            <a:r>
+              <a:rPr>
+                <a:latin typeface="Courier"/>
+              </a:rPr>
+              <a:t>python </a:t>
+            </a:r>
+            <a:r>
+              <a:rPr>
+                <a:solidFill>
+                  <a:srgbClr val="7D9029"/>
+                </a:solidFill>
+                <a:latin typeface="Courier"/>
+              </a:rPr>
+              <a:t>-c</a:t>
+            </a:r>
+            <a:r>
+              <a:rPr>
+                <a:latin typeface="Courier"/>
+              </a:rPr>
+              <a:t> </a:t>
+            </a:r>
+            <a:r>
+              <a:rPr>
+                <a:solidFill>
+                  <a:srgbClr val="4070A0"/>
+                </a:solidFill>
+                <a:latin typeface="Courier"/>
+              </a:rPr>
+              <a:t>"import numpy, pandas, sklearn; print('ok')"</a:t>
+            </a:r>
+          </a:p>
+          <a:p>
+            <a:pPr lvl="0" indent="0" marL="0">
+              <a:buNone/>
+            </a:pPr>
+            <a:r>
+              <a:rPr/>
+              <a:t>prints </a:t>
+            </a:r>
+            <a:r>
+              <a:rPr>
+                <a:latin typeface="Courier"/>
+              </a:rPr>
+              <a:t>ok</a:t>
+            </a:r>
+            <a:r>
+              <a:rPr/>
+              <a:t>.</a:t>
+            </a:r>
+          </a:p>
+        </p:txBody>
+      </p:sp>
+    </p:spTree>
+  </p:cSld>
+</p:sld>
+</file>
+
+<file path=ppt/slides/slide28.xml><?xml version="1.0" encoding="utf-8"?>
+<p:sld xmlns:a="http://schemas.openxmlformats.org/drawingml/2006/main" xmlns:r="http://schemas.openxmlformats.org/officeDocument/2006/relationships" xmlns:p="http://schemas.openxmlformats.org/presentationml/2006/main">
+  <p:cSld>
+    <p:spTree>
+      <p:nvGrpSpPr>
+        <p:cNvPr id="1" name=""/>
+        <p:cNvGrpSpPr/>
+        <p:nvPr/>
+      </p:nvGrpSpPr>
+      <p:grpSpPr>
+        <a:xfrm>
+          <a:off x="0" y="0"/>
+          <a:ext cx="0" cy="0"/>
+          <a:chOff x="0" y="0"/>
+          <a:chExt cx="0" cy="0"/>
+        </a:xfrm>
+      </p:grpSpPr>
+      <p:sp>
+        <p:nvSpPr>
+          <p:cNvPr id="2" name="Title 1"/>
+          <p:cNvSpPr>
+            <a:spLocks noGrp="1"/>
+          </p:cNvSpPr>
+          <p:nvPr>
+            <p:ph type="title"/>
+          </p:nvPr>
+        </p:nvSpPr>
+        <p:spPr>
+          <a:xfrm>
+            <a:off x="722313" y="3305176"/>
+            <a:ext cx="7772400" cy="1021556"/>
+          </a:xfrm>
+        </p:spPr>
+        <p:txBody>
+          <a:bodyPr/>
+          <a:lstStyle/>
+          <a:p>
+            <a:pPr lvl="0" indent="0" marL="0">
+              <a:buNone/>
+            </a:pPr>
+            <a:r>
+              <a:rPr/>
+              <a:t>Step 5 — Ollama and Qwen</a:t>
+            </a:r>
+          </a:p>
+        </p:txBody>
+      </p:sp>
+    </p:spTree>
+  </p:cSld>
+</p:sld>
+</file>
+
+<file path=ppt/slides/slide29.xml><?xml version="1.0" encoding="utf-8"?>
+<p:sld xmlns:a="http://schemas.openxmlformats.org/drawingml/2006/main" xmlns:r="http://schemas.openxmlformats.org/officeDocument/2006/relationships" xmlns:p="http://schemas.openxmlformats.org/presentationml/2006/main">
+  <p:cSld>
+    <p:spTree>
+      <p:nvGrpSpPr>
+        <p:cNvPr id="1" name=""/>
+        <p:cNvGrpSpPr/>
+        <p:nvPr/>
+      </p:nvGrpSpPr>
+      <p:grpSpPr>
+        <a:xfrm>
+          <a:off x="0" y="0"/>
+          <a:ext cx="0" cy="0"/>
+          <a:chOff x="0" y="0"/>
+          <a:chExt cx="0" cy="0"/>
+        </a:xfrm>
+      </p:grpSpPr>
+      <p:sp>
+        <p:nvSpPr>
+          <p:cNvPr id="2" name="Title 1"/>
+          <p:cNvSpPr>
+            <a:spLocks noGrp="1"/>
+          </p:cNvSpPr>
+          <p:nvPr>
+            <p:ph type="title"/>
+          </p:nvPr>
+        </p:nvSpPr>
+        <p:spPr/>
+        <p:txBody>
+          <a:bodyPr/>
+          <a:lstStyle/>
+          <a:p>
+            <a:pPr lvl="0" indent="0" marL="0">
+              <a:buNone/>
+            </a:pPr>
+            <a:r>
+              <a:rPr/>
+              <a:t>Install Ollama</a:t>
+            </a:r>
+          </a:p>
+        </p:txBody>
+      </p:sp>
+      <p:sp>
+        <p:nvSpPr>
+          <p:cNvPr id="3" name="Content Placeholder 2"/>
+          <p:cNvSpPr>
+            <a:spLocks noGrp="1"/>
+          </p:cNvSpPr>
+          <p:nvPr>
+            <p:ph idx="1"/>
+          </p:nvPr>
+        </p:nvSpPr>
+        <p:spPr/>
+        <p:txBody>
+          <a:bodyPr/>
+          <a:lstStyle/>
+          <a:p>
+            <a:pPr lvl="0" indent="0" marL="0">
+              <a:buNone/>
+            </a:pPr>
+            <a:r>
+              <a:rPr/>
+              <a:t>download</a:t>
+            </a:r>
+          </a:p>
+          <a:p>
+            <a:pPr lvl="0" indent="0" marL="0">
+              <a:buNone/>
+            </a:pPr>
+            <a:r>
+              <a:rPr/>
+              <a:t>Go to </a:t>
+            </a:r>
+            <a:r>
+              <a:rPr b="1"/>
+              <a:t>ollama.com/download</a:t>
+            </a:r>
+            <a:r>
+              <a:rPr/>
+              <a:t>, choose your operating system, and run the installer. This works on macOS, Windows and Linux.</a:t>
+            </a:r>
+          </a:p>
+          <a:p>
+            <a:pPr lvl="0" indent="0" marL="0">
+              <a:buNone/>
+            </a:pPr>
+            <a:r>
+              <a:rPr/>
+              <a:t>You may see a one-line </a:t>
+            </a:r>
+            <a:r>
+              <a:rPr>
+                <a:latin typeface="Courier"/>
+              </a:rPr>
+              <a:t>curl … | sh</a:t>
+            </a:r>
+            <a:r>
+              <a:rPr/>
+              <a:t> command on the web. Ignore it — the installer does the same thing and there is nothing to mistype.</a:t>
+            </a:r>
+          </a:p>
+          <a:p>
+            <a:pPr lvl="0" indent="0" marL="0">
+              <a:buNone/>
+            </a:pPr>
+            <a:r>
+              <a:rPr/>
+              <a:t>On macOS, </a:t>
+            </a:r>
+            <a:r>
+              <a:rPr b="1"/>
+              <a:t>open the app once</a:t>
+            </a:r>
+            <a:r>
+              <a:rPr/>
+              <a:t> after installing. It puts the </a:t>
+            </a:r>
+            <a:r>
+              <a:rPr>
+                <a:latin typeface="Courier"/>
+              </a:rPr>
+              <a:t>ollama</a:t>
+            </a:r>
+            <a:r>
+              <a:rPr/>
+              <a:t> command in place and starts the background service.</a:t>
+            </a:r>
+          </a:p>
+        </p:txBody>
+      </p:sp>
+    </p:spTree>
+  </p:cSld>
+</p:sld>
+</file>
+
+<file path=ppt/slides/slide3.xml><?xml version="1.0" encoding="utf-8"?>
+<p:sld xmlns:a="http://schemas.openxmlformats.org/drawingml/2006/main" xmlns:r="http://schemas.openxmlformats.org/officeDocument/2006/relationships" xmlns:p="http://schemas.openxmlformats.org/presentationml/2006/main">
+  <p:cSld>
+    <p:spTree>
+      <p:nvGrpSpPr>
+        <p:cNvPr id="1" name=""/>
+        <p:cNvGrpSpPr/>
+        <p:nvPr/>
+      </p:nvGrpSpPr>
+      <p:grpSpPr>
+        <a:xfrm>
+          <a:off x="0" y="0"/>
+          <a:ext cx="0" cy="0"/>
+          <a:chOff x="0" y="0"/>
+          <a:chExt cx="0" cy="0"/>
+        </a:xfrm>
+      </p:grpSpPr>
+      <p:sp>
+        <p:nvSpPr>
+          <p:cNvPr id="2" name="Title 1"/>
+          <p:cNvSpPr>
+            <a:spLocks noGrp="1"/>
+          </p:cNvSpPr>
+          <p:nvPr>
+            <p:ph type="title"/>
+          </p:nvPr>
+        </p:nvSpPr>
+        <p:spPr/>
+        <p:txBody>
+          <a:bodyPr/>
+          <a:lstStyle/>
+          <a:p>
+            <a:pPr lvl="0" indent="0" marL="0">
+              <a:buNone/>
+            </a:pPr>
+            <a:r>
+              <a:rPr/>
+              <a:t>What you are walking into</a:t>
+            </a:r>
+          </a:p>
+        </p:txBody>
+      </p:sp>
+      <p:sp>
+        <p:nvSpPr>
+          <p:cNvPr id="3" name="Content Placeholder 2"/>
+          <p:cNvSpPr>
+            <a:spLocks noGrp="1"/>
+          </p:cNvSpPr>
+          <p:nvPr>
+            <p:ph idx="1"/>
+          </p:nvPr>
+        </p:nvSpPr>
+        <p:spPr/>
+        <p:txBody>
+          <a:bodyPr/>
+          <a:lstStyle/>
+          <a:p>
+            <a:pPr lvl="0" indent="0" marL="0">
+              <a:buNone/>
+            </a:pPr>
+            <a:r>
+              <a:rPr/>
+              <a:t>This course asks one question in ten different ways:</a:t>
+            </a:r>
+          </a:p>
+          <a:p>
+            <a:pPr lvl="0" indent="0" marL="1270000">
+              <a:buNone/>
+            </a:pPr>
+            <a:r>
+              <a:rPr sz="2000" b="1"/>
+              <a:t>When can a number about the past be used to make a claim about the future?</a:t>
+            </a:r>
+          </a:p>
+          <a:p>
+            <a:pPr lvl="0"/>
+            <a:r>
+              <a:rPr/>
+              <a:t>The methods are standard: least squares, penalisation, trees, factors, causal ML.</a:t>
+            </a:r>
+          </a:p>
+          <a:p>
+            <a:pPr lvl="0"/>
+            <a:r>
+              <a:rPr/>
+              <a:t>The data are European, international, and messy on purpose.</a:t>
+            </a:r>
+          </a:p>
+          <a:p>
+            <a:pPr lvl="0"/>
+            <a:r>
+              <a:rPr/>
+              <a:t>The discipline is knowing </a:t>
+            </a:r>
+            <a:r>
+              <a:rPr b="1"/>
+              <a:t>what your estimate does not entitle you to say.</a:t>
+            </a:r>
+          </a:p>
+          <a:p>
+            <a:pPr lvl="0" indent="0" marL="0">
+              <a:buNone/>
+            </a:pPr>
+            <a:r>
+              <a:rPr/>
+              <a:t>Ten sessions of method. One question throughout.</a:t>
+            </a:r>
+          </a:p>
+        </p:txBody>
+      </p:sp>
+    </p:spTree>
+  </p:cSld>
+</p:sld>
+</file>
+
+<file path=ppt/slides/slide30.xml><?xml version="1.0" encoding="utf-8"?>
+<p:sld xmlns:a="http://schemas.openxmlformats.org/drawingml/2006/main" xmlns:r="http://schemas.openxmlformats.org/officeDocument/2006/relationships" xmlns:p="http://schemas.openxmlformats.org/presentationml/2006/main">
+  <p:cSld>
+    <p:spTree>
+      <p:nvGrpSpPr>
+        <p:cNvPr id="1" name=""/>
+        <p:cNvGrpSpPr/>
+        <p:nvPr/>
+      </p:nvGrpSpPr>
+      <p:grpSpPr>
+        <a:xfrm>
+          <a:off x="0" y="0"/>
+          <a:ext cx="0" cy="0"/>
+          <a:chOff x="0" y="0"/>
+          <a:chExt cx="0" cy="0"/>
+        </a:xfrm>
+      </p:grpSpPr>
+      <p:sp>
+        <p:nvSpPr>
+          <p:cNvPr id="2" name="Title 1"/>
+          <p:cNvSpPr>
+            <a:spLocks noGrp="1"/>
+          </p:cNvSpPr>
+          <p:nvPr>
+            <p:ph type="title"/>
+          </p:nvPr>
+        </p:nvSpPr>
+        <p:spPr/>
+        <p:txBody>
+          <a:bodyPr/>
+          <a:lstStyle/>
+          <a:p>
+            <a:pPr lvl="0" indent="0" marL="0">
+              <a:buNone/>
+            </a:pPr>
+            <a:r>
+              <a:rPr/>
               <a:t>Check Ollama is there</a:t>
             </a:r>
           </a:p>
@@ -5652,7 +6216,7 @@
 </p:sld>
 </file>
 
-<file path=ppt/slides/slide27.xml><?xml version="1.0" encoding="utf-8"?>
+<file path=ppt/slides/slide31.xml><?xml version="1.0" encoding="utf-8"?>
 <p:sld xmlns:a="http://schemas.openxmlformats.org/drawingml/2006/main" xmlns:r="http://schemas.openxmlformats.org/officeDocument/2006/relationships" xmlns:p="http://schemas.openxmlformats.org/presentationml/2006/main">
   <p:cSld>
     <p:spTree>
@@ -5978,507 +6542,6 @@
 </p:sld>
 </file>
 
-<file path=ppt/slides/slide28.xml><?xml version="1.0" encoding="utf-8"?>
-<p:sld xmlns:a="http://schemas.openxmlformats.org/drawingml/2006/main" xmlns:r="http://schemas.openxmlformats.org/officeDocument/2006/relationships" xmlns:p="http://schemas.openxmlformats.org/presentationml/2006/main">
-  <p:cSld>
-    <p:spTree>
-      <p:nvGrpSpPr>
-        <p:cNvPr id="1" name=""/>
-        <p:cNvGrpSpPr/>
-        <p:nvPr/>
-      </p:nvGrpSpPr>
-      <p:grpSpPr>
-        <a:xfrm>
-          <a:off x="0" y="0"/>
-          <a:ext cx="0" cy="0"/>
-          <a:chOff x="0" y="0"/>
-          <a:chExt cx="0" cy="0"/>
-        </a:xfrm>
-      </p:grpSpPr>
-      <p:sp>
-        <p:nvSpPr>
-          <p:cNvPr id="3" name="Content Placeholder 2"/>
-          <p:cNvSpPr>
-            <a:spLocks noGrp="1"/>
-          </p:cNvSpPr>
-          <p:nvPr>
-            <p:ph idx="1"/>
-          </p:nvPr>
-        </p:nvSpPr>
-        <p:spPr/>
-        <p:txBody>
-          <a:bodyPr/>
-          <a:lstStyle/>
-          <a:p>
-            <a:pPr lvl="0" indent="0" marL="0">
-              <a:buNone/>
-            </a:pPr>
-            <a:r>
-              <a:rPr/>
-              <a:t>You also need the embedding model for Session 10:</a:t>
-            </a:r>
-          </a:p>
-          <a:p>
-            <a:pPr lvl="0" indent="0">
-              <a:buNone/>
-            </a:pPr>
-            <a:r>
-              <a:rPr>
-                <a:latin typeface="Courier"/>
-              </a:rPr>
-              <a:t>ollama pull nomic-embed-text</a:t>
-            </a:r>
-          </a:p>
-          <a:p>
-            <a:pPr lvl="0" indent="0" marL="0">
-              <a:buNone/>
-            </a:pPr>
-            <a:r>
-              <a:rPr/>
-              <a:t>This downloads several gigabytes. Do it on a good connection, </a:t>
-            </a:r>
-            <a:r>
-              <a:rPr b="1"/>
-              <a:t>not</a:t>
-            </a:r>
-            <a:r>
-              <a:rPr/>
-              <a:t> ten minutes before class.</a:t>
-            </a:r>
-          </a:p>
-        </p:txBody>
-      </p:sp>
-    </p:spTree>
-  </p:cSld>
-</p:sld>
-</file>
-
-<file path=ppt/slides/slide29.xml><?xml version="1.0" encoding="utf-8"?>
-<p:sld xmlns:a="http://schemas.openxmlformats.org/drawingml/2006/main" xmlns:r="http://schemas.openxmlformats.org/officeDocument/2006/relationships" xmlns:p="http://schemas.openxmlformats.org/presentationml/2006/main">
-  <p:cSld>
-    <p:spTree>
-      <p:nvGrpSpPr>
-        <p:cNvPr id="1" name=""/>
-        <p:cNvGrpSpPr/>
-        <p:nvPr/>
-      </p:nvGrpSpPr>
-      <p:grpSpPr>
-        <a:xfrm>
-          <a:off x="0" y="0"/>
-          <a:ext cx="0" cy="0"/>
-          <a:chOff x="0" y="0"/>
-          <a:chExt cx="0" cy="0"/>
-        </a:xfrm>
-      </p:grpSpPr>
-      <p:sp>
-        <p:nvSpPr>
-          <p:cNvPr id="2" name="Title 1"/>
-          <p:cNvSpPr>
-            <a:spLocks noGrp="1"/>
-          </p:cNvSpPr>
-          <p:nvPr>
-            <p:ph type="title"/>
-          </p:nvPr>
-        </p:nvSpPr>
-        <p:spPr/>
-        <p:txBody>
-          <a:bodyPr/>
-          <a:lstStyle/>
-          <a:p>
-            <a:pPr lvl="0" indent="0" marL="0">
-              <a:buNone/>
-            </a:pPr>
-            <a:r>
-              <a:rPr/>
-              <a:t>Verify the model</a:t>
-            </a:r>
-          </a:p>
-        </p:txBody>
-      </p:sp>
-      <p:sp>
-        <p:nvSpPr>
-          <p:cNvPr id="3" name="Content Placeholder 2"/>
-          <p:cNvSpPr>
-            <a:spLocks noGrp="1"/>
-          </p:cNvSpPr>
-          <p:nvPr>
-            <p:ph idx="1"/>
-          </p:nvPr>
-        </p:nvSpPr>
-        <p:spPr/>
-        <p:txBody>
-          <a:bodyPr/>
-          <a:lstStyle/>
-          <a:p>
-            <a:pPr lvl="0" indent="0" marL="0">
-              <a:buNone/>
-            </a:pPr>
-            <a:r>
-              <a:rPr/>
-              <a:t>VS Codium terminal</a:t>
-            </a:r>
-          </a:p>
-          <a:p>
-            <a:pPr lvl="0" indent="0">
-              <a:buNone/>
-            </a:pPr>
-            <a:r>
-              <a:rPr>
-                <a:latin typeface="Courier"/>
-              </a:rPr>
-              <a:t>ollama list</a:t>
-            </a:r>
-          </a:p>
-          <a:p>
-            <a:pPr lvl="0" indent="0" marL="0">
-              <a:buNone/>
-            </a:pPr>
-            <a:r>
-              <a:rPr/>
-              <a:t>You should see your model listed. Now talk to it:</a:t>
-            </a:r>
-          </a:p>
-          <a:p>
-            <a:pPr lvl="0" indent="0">
-              <a:buNone/>
-            </a:pPr>
-            <a:r>
-              <a:rPr>
-                <a:latin typeface="Courier"/>
-              </a:rPr>
-              <a:t>ollama run qwen2.5-coder:7b </a:t>
-            </a:r>
-            <a:r>
-              <a:rPr>
-                <a:solidFill>
-                  <a:srgbClr val="4070A0"/>
-                </a:solidFill>
-                <a:latin typeface="Courier"/>
-              </a:rPr>
-              <a:t>"Explain the bias-variance tradeoff in three sentences."</a:t>
-            </a:r>
-          </a:p>
-          <a:p>
-            <a:pPr lvl="0" indent="0" marL="0">
-              <a:buNone/>
-            </a:pPr>
-            <a:r>
-              <a:rPr/>
-              <a:t>Type </a:t>
-            </a:r>
-            <a:r>
-              <a:rPr>
-                <a:latin typeface="Courier"/>
-              </a:rPr>
-              <a:t>/bye</a:t>
-            </a:r>
-            <a:r>
-              <a:rPr/>
-              <a:t> to leave the chat.</a:t>
-            </a:r>
-          </a:p>
-          <a:p>
-            <a:pPr lvl="0" indent="0" marL="0">
-              <a:buNone/>
-            </a:pPr>
-            <a:r>
-              <a:rPr b="1"/>
-              <a:t>The real check.</a:t>
-            </a:r>
-            <a:r>
-              <a:rPr/>
-              <a:t> Turn off your wifi and run that command again. It should still answer. That is what “local” means.</a:t>
-            </a:r>
-          </a:p>
-        </p:txBody>
-      </p:sp>
-    </p:spTree>
-  </p:cSld>
-</p:sld>
-</file>
-
-<file path=ppt/slides/slide3.xml><?xml version="1.0" encoding="utf-8"?>
-<p:sld xmlns:a="http://schemas.openxmlformats.org/drawingml/2006/main" xmlns:r="http://schemas.openxmlformats.org/officeDocument/2006/relationships" xmlns:p="http://schemas.openxmlformats.org/presentationml/2006/main">
-  <p:cSld>
-    <p:spTree>
-      <p:nvGrpSpPr>
-        <p:cNvPr id="1" name=""/>
-        <p:cNvGrpSpPr/>
-        <p:nvPr/>
-      </p:nvGrpSpPr>
-      <p:grpSpPr>
-        <a:xfrm>
-          <a:off x="0" y="0"/>
-          <a:ext cx="0" cy="0"/>
-          <a:chOff x="0" y="0"/>
-          <a:chExt cx="0" cy="0"/>
-        </a:xfrm>
-      </p:grpSpPr>
-      <p:sp>
-        <p:nvSpPr>
-          <p:cNvPr id="2" name="Title 1"/>
-          <p:cNvSpPr>
-            <a:spLocks noGrp="1"/>
-          </p:cNvSpPr>
-          <p:nvPr>
-            <p:ph type="title"/>
-          </p:nvPr>
-        </p:nvSpPr>
-        <p:spPr/>
-        <p:txBody>
-          <a:bodyPr/>
-          <a:lstStyle/>
-          <a:p>
-            <a:pPr lvl="0" indent="0" marL="0">
-              <a:buNone/>
-            </a:pPr>
-            <a:r>
-              <a:rPr/>
-              <a:t>What you are walking into</a:t>
-            </a:r>
-          </a:p>
-        </p:txBody>
-      </p:sp>
-      <p:sp>
-        <p:nvSpPr>
-          <p:cNvPr id="3" name="Content Placeholder 2"/>
-          <p:cNvSpPr>
-            <a:spLocks noGrp="1"/>
-          </p:cNvSpPr>
-          <p:nvPr>
-            <p:ph idx="1"/>
-          </p:nvPr>
-        </p:nvSpPr>
-        <p:spPr/>
-        <p:txBody>
-          <a:bodyPr/>
-          <a:lstStyle/>
-          <a:p>
-            <a:pPr lvl="0" indent="0" marL="0">
-              <a:buNone/>
-            </a:pPr>
-            <a:r>
-              <a:rPr/>
-              <a:t>This course asks one question in ten different ways:</a:t>
-            </a:r>
-          </a:p>
-          <a:p>
-            <a:pPr lvl="0" indent="0" marL="1270000">
-              <a:buNone/>
-            </a:pPr>
-            <a:r>
-              <a:rPr sz="2000" b="1"/>
-              <a:t>When can a number about the past be used to make a claim about the future?</a:t>
-            </a:r>
-          </a:p>
-          <a:p>
-            <a:pPr lvl="0"/>
-            <a:r>
-              <a:rPr/>
-              <a:t>The methods are standard: least squares, penalisation, trees, factors, causal ML.</a:t>
-            </a:r>
-          </a:p>
-          <a:p>
-            <a:pPr lvl="0"/>
-            <a:r>
-              <a:rPr/>
-              <a:t>The data are European, international, and messy on purpose.</a:t>
-            </a:r>
-          </a:p>
-          <a:p>
-            <a:pPr lvl="0"/>
-            <a:r>
-              <a:rPr/>
-              <a:t>The discipline is knowing </a:t>
-            </a:r>
-            <a:r>
-              <a:rPr b="1"/>
-              <a:t>what your estimate does not entitle you to say.</a:t>
-            </a:r>
-          </a:p>
-          <a:p>
-            <a:pPr lvl="0" indent="0" marL="0">
-              <a:buNone/>
-            </a:pPr>
-            <a:r>
-              <a:rPr/>
-              <a:t>Ten sessions of method. One question throughout.</a:t>
-            </a:r>
-          </a:p>
-        </p:txBody>
-      </p:sp>
-    </p:spTree>
-  </p:cSld>
-</p:sld>
-</file>
-
-<file path=ppt/slides/slide30.xml><?xml version="1.0" encoding="utf-8"?>
-<p:sld xmlns:a="http://schemas.openxmlformats.org/drawingml/2006/main" xmlns:r="http://schemas.openxmlformats.org/officeDocument/2006/relationships" xmlns:p="http://schemas.openxmlformats.org/presentationml/2006/main">
-  <p:cSld>
-    <p:spTree>
-      <p:nvGrpSpPr>
-        <p:cNvPr id="1" name=""/>
-        <p:cNvGrpSpPr/>
-        <p:nvPr/>
-      </p:nvGrpSpPr>
-      <p:grpSpPr>
-        <a:xfrm>
-          <a:off x="0" y="0"/>
-          <a:ext cx="0" cy="0"/>
-          <a:chOff x="0" y="0"/>
-          <a:chExt cx="0" cy="0"/>
-        </a:xfrm>
-      </p:grpSpPr>
-      <p:sp>
-        <p:nvSpPr>
-          <p:cNvPr id="2" name="Title 1"/>
-          <p:cNvSpPr>
-            <a:spLocks noGrp="1"/>
-          </p:cNvSpPr>
-          <p:nvPr>
-            <p:ph type="title"/>
-          </p:nvPr>
-        </p:nvSpPr>
-        <p:spPr>
-          <a:xfrm>
-            <a:off x="722313" y="3305176"/>
-            <a:ext cx="7772400" cy="1021556"/>
-          </a:xfrm>
-        </p:spPr>
-        <p:txBody>
-          <a:bodyPr/>
-          <a:lstStyle/>
-          <a:p>
-            <a:pPr lvl="0" indent="0" marL="0">
-              <a:buNone/>
-            </a:pPr>
-            <a:r>
-              <a:rPr/>
-              <a:t>Step 5 — The CLI agent</a:t>
-            </a:r>
-          </a:p>
-        </p:txBody>
-      </p:sp>
-    </p:spTree>
-  </p:cSld>
-</p:sld>
-</file>
-
-<file path=ppt/slides/slide31.xml><?xml version="1.0" encoding="utf-8"?>
-<p:sld xmlns:a="http://schemas.openxmlformats.org/drawingml/2006/main" xmlns:r="http://schemas.openxmlformats.org/officeDocument/2006/relationships" xmlns:p="http://schemas.openxmlformats.org/presentationml/2006/main">
-  <p:cSld>
-    <p:spTree>
-      <p:nvGrpSpPr>
-        <p:cNvPr id="1" name=""/>
-        <p:cNvGrpSpPr/>
-        <p:nvPr/>
-      </p:nvGrpSpPr>
-      <p:grpSpPr>
-        <a:xfrm>
-          <a:off x="0" y="0"/>
-          <a:ext cx="0" cy="0"/>
-          <a:chOff x="0" y="0"/>
-          <a:chExt cx="0" cy="0"/>
-        </a:xfrm>
-      </p:grpSpPr>
-      <p:sp>
-        <p:nvSpPr>
-          <p:cNvPr id="2" name="Title 1"/>
-          <p:cNvSpPr>
-            <a:spLocks noGrp="1"/>
-          </p:cNvSpPr>
-          <p:nvPr>
-            <p:ph type="title"/>
-          </p:nvPr>
-        </p:nvSpPr>
-        <p:spPr/>
-        <p:txBody>
-          <a:bodyPr/>
-          <a:lstStyle/>
-          <a:p>
-            <a:pPr lvl="0" indent="0" marL="0">
-              <a:buNone/>
-            </a:pPr>
-            <a:r>
-              <a:rPr/>
-              <a:t>Talking to Qwen the way I talk to Claude</a:t>
-            </a:r>
-          </a:p>
-        </p:txBody>
-      </p:sp>
-      <p:sp>
-        <p:nvSpPr>
-          <p:cNvPr id="3" name="Content Placeholder 2"/>
-          <p:cNvSpPr>
-            <a:spLocks noGrp="1"/>
-          </p:cNvSpPr>
-          <p:nvPr>
-            <p:ph idx="1"/>
-          </p:nvPr>
-        </p:nvSpPr>
-        <p:spPr/>
-        <p:txBody>
-          <a:bodyPr/>
-          <a:lstStyle/>
-          <a:p>
-            <a:pPr lvl="0" indent="0" marL="0">
-              <a:buNone/>
-            </a:pPr>
-            <a:r>
-              <a:rPr/>
-              <a:t>The Continue sidebar is useful for questions about a selected block of code.</a:t>
-            </a:r>
-          </a:p>
-          <a:p>
-            <a:pPr lvl="0" indent="0" marL="0">
-              <a:buNone/>
-            </a:pPr>
-            <a:r>
-              <a:rPr/>
-              <a:t>But the way this course actually works — and the way I work in front of you — is an </a:t>
-            </a:r>
-            <a:r>
-              <a:rPr b="1"/>
-              <a:t>agent in the terminal</a:t>
-            </a:r>
-            <a:r>
-              <a:rPr/>
-              <a:t>: something that reads your files, edits them, and commits, while you steer it in prose.</a:t>
-            </a:r>
-          </a:p>
-          <a:p>
-            <a:pPr lvl="0" indent="0" marL="0">
-              <a:buNone/>
-            </a:pPr>
-            <a:r>
-              <a:rPr/>
-              <a:t>That tool is </a:t>
-            </a:r>
-            <a:r>
-              <a:rPr b="1"/>
-              <a:t>aider</a:t>
-            </a:r>
-            <a:r>
-              <a:rPr/>
-              <a:t>, and it runs against your local Qwen.</a:t>
-            </a:r>
-          </a:p>
-          <a:p>
-            <a:pPr lvl="0" indent="0" marL="0">
-              <a:buNone/>
-            </a:pPr>
-            <a:r>
-              <a:rPr/>
-              <a:t>Same shape as the workflow you have seen me use. Different engine, and it is running on your laptop.</a:t>
-            </a:r>
-          </a:p>
-        </p:txBody>
-      </p:sp>
-    </p:spTree>
-  </p:cSld>
-</p:sld>
-</file>
-
 <file path=ppt/slides/slide32.xml><?xml version="1.0" encoding="utf-8"?>
 <p:sld xmlns:a="http://schemas.openxmlformats.org/drawingml/2006/main" xmlns:r="http://schemas.openxmlformats.org/officeDocument/2006/relationships" xmlns:p="http://schemas.openxmlformats.org/presentationml/2006/main">
   <p:cSld>
@@ -6498,31 +6561,6 @@
       </p:grpSpPr>
       <p:sp>
         <p:nvSpPr>
-          <p:cNvPr id="2" name="Title 1"/>
-          <p:cNvSpPr>
-            <a:spLocks noGrp="1"/>
-          </p:cNvSpPr>
-          <p:nvPr>
-            <p:ph type="title"/>
-          </p:nvPr>
-        </p:nvSpPr>
-        <p:spPr/>
-        <p:txBody>
-          <a:bodyPr/>
-          <a:lstStyle/>
-          <a:p>
-            <a:pPr lvl="0" indent="0" marL="0">
-              <a:buNone/>
-            </a:pPr>
-            <a:r>
-              <a:rPr/>
-              <a:t>Install aider</a:t>
-            </a:r>
-          </a:p>
-        </p:txBody>
-      </p:sp>
-      <p:sp>
-        <p:nvSpPr>
           <p:cNvPr id="3" name="Content Placeholder 2"/>
           <p:cNvSpPr>
             <a:spLocks noGrp="1"/>
@@ -6541,50 +6579,35 @@
             </a:pPr>
             <a:r>
               <a:rPr/>
-              <a:t>VS Codium terminal · with </a:t>
-            </a:r>
+              <a:t>You also need the embedding model for Session 10:</a:t>
+            </a:r>
+          </a:p>
+          <a:p>
+            <a:pPr lvl="0" indent="0">
+              <a:buNone/>
+            </a:pPr>
             <a:r>
               <a:rPr>
                 <a:latin typeface="Courier"/>
               </a:rPr>
-              <a:t>(.venv)</a:t>
-            </a:r>
-            <a:r>
-              <a:rPr/>
-              <a:t> showing</a:t>
-            </a:r>
-          </a:p>
-          <a:p>
-            <a:pPr lvl="0" indent="0">
-              <a:buNone/>
-            </a:pPr>
-            <a:r>
-              <a:rPr>
-                <a:latin typeface="Courier"/>
-              </a:rPr>
-              <a:t>python </a:t>
-            </a:r>
-            <a:r>
-              <a:rPr>
-                <a:solidFill>
-                  <a:srgbClr val="7D9029"/>
-                </a:solidFill>
-                <a:latin typeface="Courier"/>
-              </a:rPr>
-              <a:t>-m</a:t>
-            </a:r>
-            <a:r>
-              <a:rPr>
-                <a:latin typeface="Courier"/>
-              </a:rPr>
-              <a:t> pip install aider-install</a:t>
-            </a:r>
-            <a:br/>
-            <a:r>
-              <a:rPr>
-                <a:latin typeface="Courier"/>
-              </a:rPr>
-              <a:t>aider-install</a:t>
+              <a:t>ollama pull nomic-embed-text</a:t>
+            </a:r>
+          </a:p>
+          <a:p>
+            <a:pPr lvl="0" indent="0" marL="0">
+              <a:buNone/>
+            </a:pPr>
+            <a:r>
+              <a:rPr/>
+              <a:t>This downloads several gigabytes. Do it on a good connection, </a:t>
+            </a:r>
+            <a:r>
+              <a:rPr b="1"/>
+              <a:t>not</a:t>
+            </a:r>
+            <a:r>
+              <a:rPr/>
+              <a:t> ten minutes before class.</a:t>
             </a:r>
           </a:p>
         </p:txBody>
@@ -6631,7 +6654,7 @@
             </a:pPr>
             <a:r>
               <a:rPr/>
-              <a:t>Point aider at Ollama</a:t>
+              <a:t>Verify the model</a:t>
             </a:r>
           </a:p>
         </p:txBody>
@@ -6664,71 +6687,71 @@
               <a:buNone/>
             </a:pPr>
             <a:r>
-              <a:rPr i="1">
+              <a:rPr>
+                <a:latin typeface="Courier"/>
+              </a:rPr>
+              <a:t>ollama list</a:t>
+            </a:r>
+          </a:p>
+          <a:p>
+            <a:pPr lvl="0" indent="0" marL="0">
+              <a:buNone/>
+            </a:pPr>
+            <a:r>
+              <a:rPr/>
+              <a:t>You should see your model listed. Now talk to it:</a:t>
+            </a:r>
+          </a:p>
+          <a:p>
+            <a:pPr lvl="0" indent="0">
+              <a:buNone/>
+            </a:pPr>
+            <a:r>
+              <a:rPr>
+                <a:latin typeface="Courier"/>
+              </a:rPr>
+              <a:t>ollama run qwen2.5-coder:7b </a:t>
+            </a:r>
+            <a:r>
+              <a:rPr>
                 <a:solidFill>
-                  <a:srgbClr val="60A0B0"/>
+                  <a:srgbClr val="4070A0"/>
                 </a:solidFill>
                 <a:latin typeface="Courier"/>
               </a:rPr>
-              <a:t># macOS / Linux</a:t>
-            </a:r>
-            <a:br/>
-            <a:r>
-              <a:rPr>
-                <a:solidFill>
-                  <a:srgbClr val="008000"/>
-                </a:solidFill>
-                <a:latin typeface="Courier"/>
-              </a:rPr>
-              <a:t>export</a:t>
+              <a:t>"Explain the bias-variance tradeoff in three sentences."</a:t>
+            </a:r>
+          </a:p>
+          <a:p>
+            <a:pPr lvl="0" indent="0" marL="0">
+              <a:buNone/>
+            </a:pPr>
+            <a:r>
+              <a:rPr/>
+              <a:t>Type </a:t>
             </a:r>
             <a:r>
               <a:rPr>
                 <a:latin typeface="Courier"/>
               </a:rPr>
-              <a:t> </a:t>
-            </a:r>
-            <a:r>
-              <a:rPr>
-                <a:solidFill>
-                  <a:srgbClr val="19177C"/>
-                </a:solidFill>
-                <a:latin typeface="Courier"/>
-              </a:rPr>
-              <a:t>OLLAMA_API_BASE</a:t>
-            </a:r>
-            <a:r>
-              <a:rPr>
-                <a:solidFill>
-                  <a:srgbClr val="666666"/>
-                </a:solidFill>
-                <a:latin typeface="Courier"/>
-              </a:rPr>
-              <a:t>=</a:t>
-            </a:r>
-            <a:r>
-              <a:rPr>
-                <a:latin typeface="Courier"/>
-              </a:rPr>
-              <a:t>http://127.0.0.1:11434</a:t>
-            </a:r>
-            <a:br/>
-            <a:br/>
-            <a:r>
-              <a:rPr i="1">
-                <a:solidFill>
-                  <a:srgbClr val="60A0B0"/>
-                </a:solidFill>
-                <a:latin typeface="Courier"/>
-              </a:rPr>
-              <a:t># Windows (PowerShell) — then open a new terminal</a:t>
-            </a:r>
-            <a:br/>
-            <a:r>
-              <a:rPr>
-                <a:latin typeface="Courier"/>
-              </a:rPr>
-              <a:t>setx OLLAMA_API_BASE http://127.0.0.1:11434</a:t>
+              <a:t>/bye</a:t>
+            </a:r>
+            <a:r>
+              <a:rPr/>
+              <a:t> to leave the chat.</a:t>
+            </a:r>
+          </a:p>
+          <a:p>
+            <a:pPr lvl="0" indent="0" marL="0">
+              <a:buNone/>
+            </a:pPr>
+            <a:r>
+              <a:rPr b="1"/>
+              <a:t>The real check.</a:t>
+            </a:r>
+            <a:r>
+              <a:rPr/>
+              <a:t> Turn off your wifi and run that command again. It should still answer. That is what “local” means.</a:t>
             </a:r>
           </a:p>
         </p:txBody>
@@ -6765,145 +6788,22 @@
             <p:ph type="title"/>
           </p:nvPr>
         </p:nvSpPr>
-        <p:spPr/>
-        <p:txBody>
-          <a:bodyPr/>
-          <a:lstStyle/>
-          <a:p>
-            <a:pPr lvl="0" indent="0" marL="0">
-              <a:buNone/>
-            </a:pPr>
-            <a:r>
-              <a:rPr/>
-              <a:t>Give Ollama a real context window</a:t>
-            </a:r>
-          </a:p>
-        </p:txBody>
-      </p:sp>
-      <p:sp>
-        <p:nvSpPr>
-          <p:cNvPr id="3" name="Content Placeholder 2"/>
-          <p:cNvSpPr>
-            <a:spLocks noGrp="1"/>
-          </p:cNvSpPr>
-          <p:nvPr>
-            <p:ph idx="1"/>
-          </p:nvPr>
-        </p:nvSpPr>
-        <p:spPr/>
-        <p:txBody>
-          <a:bodyPr/>
-          <a:lstStyle/>
-          <a:p>
-            <a:pPr lvl="0" indent="0" marL="0">
-              <a:buNone/>
-            </a:pPr>
-            <a:r>
-              <a:rPr b="1"/>
-              <a:t>This step is not optional.</a:t>
-            </a:r>
-            <a:r>
-              <a:rPr/>
-              <a:t> Ollama defaults to a </a:t>
-            </a:r>
-            <a:r>
-              <a:rPr b="1"/>
-              <a:t>2k</a:t>
-            </a:r>
-            <a:r>
-              <a:rPr/>
-              <a:t> context window and then </a:t>
-            </a:r>
-            <a:r>
-              <a:rPr i="1"/>
-              <a:t>silently discards</a:t>
-            </a:r>
-            <a:r>
-              <a:rPr/>
-              <a:t> whatever does not fit. Your agent will appear to “forget” the file you just gave it.</a:t>
-            </a:r>
-          </a:p>
-          <a:p>
-            <a:pPr lvl="0" indent="0" marL="0">
-              <a:buNone/>
-            </a:pPr>
-            <a:r>
-              <a:rPr/>
-              <a:t>Start the server with a larger window:</a:t>
-            </a:r>
-          </a:p>
-          <a:p>
-            <a:pPr lvl="0" indent="0" marL="0">
-              <a:buNone/>
-            </a:pPr>
-            <a:r>
-              <a:rPr/>
-              <a:t>VS Codium terminal 1</a:t>
-            </a:r>
-          </a:p>
-          <a:p>
-            <a:pPr lvl="0" indent="0">
-              <a:buNone/>
-            </a:pPr>
-            <a:r>
-              <a:rPr>
-                <a:solidFill>
-                  <a:srgbClr val="19177C"/>
-                </a:solidFill>
-                <a:latin typeface="Courier"/>
-              </a:rPr>
-              <a:t>OLLAMA_CONTEXT_LENGTH</a:t>
-            </a:r>
-            <a:r>
-              <a:rPr>
-                <a:solidFill>
-                  <a:srgbClr val="666666"/>
-                </a:solidFill>
-                <a:latin typeface="Courier"/>
-              </a:rPr>
-              <a:t>=</a:t>
-            </a:r>
-            <a:r>
-              <a:rPr>
-                <a:latin typeface="Courier"/>
-              </a:rPr>
-              <a:t>8192 ollama serve</a:t>
-            </a:r>
-          </a:p>
-          <a:p>
-            <a:pPr lvl="0" indent="0" marL="0">
-              <a:buNone/>
-            </a:pPr>
-            <a:r>
-              <a:rPr/>
-              <a:t>Leave that terminal running. Open a </a:t>
-            </a:r>
-            <a:r>
-              <a:rPr b="1"/>
-              <a:t>second</a:t>
-            </a:r>
-            <a:r>
-              <a:rPr/>
-              <a:t> terminal for aider.</a:t>
-            </a:r>
-          </a:p>
-          <a:p>
-            <a:pPr lvl="0" indent="0" marL="0">
-              <a:buNone/>
-            </a:pPr>
-            <a:r>
-              <a:rPr/>
-              <a:t>In VS Codium: the </a:t>
-            </a:r>
-            <a:r>
-              <a:rPr>
-                <a:latin typeface="Courier"/>
-              </a:rPr>
-              <a:t>+</a:t>
-            </a:r>
-            <a:r>
-              <a:rPr/>
-              <a:t> icon in the terminal panel splits off a new shell.</a:t>
+        <p:spPr>
+          <a:xfrm>
+            <a:off x="722313" y="3305176"/>
+            <a:ext cx="7772400" cy="1021556"/>
+          </a:xfrm>
+        </p:spPr>
+        <p:txBody>
+          <a:bodyPr/>
+          <a:lstStyle/>
+          <a:p>
+            <a:pPr lvl="0" indent="0" marL="0">
+              <a:buNone/>
+            </a:pPr>
+            <a:r>
+              <a:rPr/>
+              <a:t>Step 6 — The CLI agent</a:t>
             </a:r>
           </a:p>
         </p:txBody>
@@ -6950,7 +6850,7 @@
             </a:pPr>
             <a:r>
               <a:rPr/>
-              <a:t>Run the agent</a:t>
+              <a:t>Talking to Qwen the way I talk to Claude</a:t>
             </a:r>
           </a:p>
         </p:txBody>
@@ -6975,78 +6875,50 @@
             </a:pPr>
             <a:r>
               <a:rPr/>
-              <a:t>VS Codium terminal 2</a:t>
-            </a:r>
-          </a:p>
-          <a:p>
-            <a:pPr lvl="0" indent="0">
-              <a:buNone/>
-            </a:pPr>
-            <a:r>
-              <a:rPr>
-                <a:solidFill>
-                  <a:srgbClr val="008000"/>
-                </a:solidFill>
-                <a:latin typeface="Courier"/>
-              </a:rPr>
-              <a:t>cd</a:t>
-            </a:r>
-            <a:r>
-              <a:rPr>
-                <a:latin typeface="Courier"/>
-              </a:rPr>
-              <a:t> /path/to/your/repo</a:t>
-            </a:r>
-            <a:br/>
-            <a:r>
-              <a:rPr>
-                <a:latin typeface="Courier"/>
-              </a:rPr>
-              <a:t>aider </a:t>
-            </a:r>
-            <a:r>
-              <a:rPr>
-                <a:solidFill>
-                  <a:srgbClr val="7D9029"/>
-                </a:solidFill>
-                <a:latin typeface="Courier"/>
-              </a:rPr>
-              <a:t>--model</a:t>
-            </a:r>
-            <a:r>
-              <a:rPr>
-                <a:latin typeface="Courier"/>
-              </a:rPr>
-              <a:t> ollama_chat/qwen2.5-coder:7b</a:t>
-            </a:r>
-          </a:p>
-          <a:p>
-            <a:pPr lvl="0" indent="0" marL="0">
-              <a:buNone/>
-            </a:pPr>
-            <a:r>
-              <a:rPr/>
-              <a:t>Note the prefix: </a:t>
-            </a:r>
-            <a:r>
-              <a:rPr b="1">
-                <a:latin typeface="Courier"/>
-              </a:rPr>
-              <a:t>ollama_chat/</a:t>
-            </a:r>
-            <a:r>
-              <a:rPr/>
-              <a:t>, not </a:t>
-            </a:r>
-            <a:r>
-              <a:rPr>
-                <a:latin typeface="Courier"/>
-              </a:rPr>
-              <a:t>ollama/</a:t>
-            </a:r>
-            <a:r>
-              <a:rPr/>
-              <a:t>. The second one exists and behaves worse.</a:t>
+              <a:t>The Continue sidebar is useful for questions about a selected block of code.</a:t>
+            </a:r>
+          </a:p>
+          <a:p>
+            <a:pPr lvl="0" indent="0" marL="0">
+              <a:buNone/>
+            </a:pPr>
+            <a:r>
+              <a:rPr/>
+              <a:t>But the way this course actually works — and the way I work in front of you — is an </a:t>
+            </a:r>
+            <a:r>
+              <a:rPr b="1"/>
+              <a:t>agent in the terminal</a:t>
+            </a:r>
+            <a:r>
+              <a:rPr/>
+              <a:t>: something that reads your files, edits them, and commits, while you steer it in prose.</a:t>
+            </a:r>
+          </a:p>
+          <a:p>
+            <a:pPr lvl="0" indent="0" marL="0">
+              <a:buNone/>
+            </a:pPr>
+            <a:r>
+              <a:rPr/>
+              <a:t>That tool is </a:t>
+            </a:r>
+            <a:r>
+              <a:rPr b="1"/>
+              <a:t>aider</a:t>
+            </a:r>
+            <a:r>
+              <a:rPr/>
+              <a:t>, and it runs against your local Qwen.</a:t>
+            </a:r>
+          </a:p>
+          <a:p>
+            <a:pPr lvl="0" indent="0" marL="0">
+              <a:buNone/>
+            </a:pPr>
+            <a:r>
+              <a:rPr/>
+              <a:t>Same shape as the workflow you have seen me use. Different engine, and it is running on your laptop.</a:t>
             </a:r>
           </a:p>
         </p:txBody>
@@ -7093,7 +6965,7 @@
             </a:pPr>
             <a:r>
               <a:rPr/>
-              <a:t>Ask it for something</a:t>
+              <a:t>Install aider</a:t>
             </a:r>
           </a:p>
         </p:txBody>
@@ -7118,45 +6990,50 @@
             </a:pPr>
             <a:r>
               <a:rPr/>
-              <a:t>You are now at a prompt. Ask in plain language:</a:t>
-            </a:r>
-          </a:p>
-          <a:p>
-            <a:pPr lvl="0" indent="0">
-              <a:buNone/>
-            </a:pPr>
+              <a:t>VS Codium terminal · with </a:t>
+            </a:r>
             <a:r>
               <a:rPr>
                 <a:latin typeface="Courier"/>
               </a:rPr>
-              <a:t>&gt; add a function that loads data/spine/core.parquet
-  and prints the number of rows per country</a:t>
-            </a:r>
-          </a:p>
-          <a:p>
-            <a:pPr lvl="0" indent="0" marL="0">
-              <a:buNone/>
-            </a:pPr>
-            <a:r>
-              <a:rPr/>
-              <a:t>aider writes the code, shows you a </a:t>
-            </a:r>
-            <a:r>
-              <a:rPr b="1"/>
-              <a:t>diff</a:t>
-            </a:r>
-            <a:r>
-              <a:rPr/>
-              <a:t>, and asks to apply it.</a:t>
-            </a:r>
-          </a:p>
-          <a:p>
-            <a:pPr lvl="0" indent="0" marL="0">
-              <a:buNone/>
-            </a:pPr>
-            <a:r>
-              <a:rPr/>
-              <a:t>Read the diff before you accept. That habit is the whole skill.</a:t>
+              <a:t>(.venv)</a:t>
+            </a:r>
+            <a:r>
+              <a:rPr/>
+              <a:t> showing</a:t>
+            </a:r>
+          </a:p>
+          <a:p>
+            <a:pPr lvl="0" indent="0">
+              <a:buNone/>
+            </a:pPr>
+            <a:r>
+              <a:rPr>
+                <a:latin typeface="Courier"/>
+              </a:rPr>
+              <a:t>python </a:t>
+            </a:r>
+            <a:r>
+              <a:rPr>
+                <a:solidFill>
+                  <a:srgbClr val="7D9029"/>
+                </a:solidFill>
+                <a:latin typeface="Courier"/>
+              </a:rPr>
+              <a:t>-m</a:t>
+            </a:r>
+            <a:r>
+              <a:rPr>
+                <a:latin typeface="Courier"/>
+              </a:rPr>
+              <a:t> pip install aider-install</a:t>
+            </a:r>
+            <a:br/>
+            <a:r>
+              <a:rPr>
+                <a:latin typeface="Courier"/>
+              </a:rPr>
+              <a:t>aider-install</a:t>
             </a:r>
           </a:p>
         </p:txBody>
@@ -7193,22 +7070,114 @@
             <p:ph type="title"/>
           </p:nvPr>
         </p:nvSpPr>
-        <p:spPr>
-          <a:xfrm>
-            <a:off x="722313" y="3305176"/>
-            <a:ext cx="7772400" cy="1021556"/>
-          </a:xfrm>
-        </p:spPr>
-        <p:txBody>
-          <a:bodyPr/>
-          <a:lstStyle/>
-          <a:p>
-            <a:pPr lvl="0" indent="0" marL="0">
-              <a:buNone/>
-            </a:pPr>
-            <a:r>
-              <a:rPr/>
-              <a:t>The worked example</a:t>
+        <p:spPr/>
+        <p:txBody>
+          <a:bodyPr/>
+          <a:lstStyle/>
+          <a:p>
+            <a:pPr lvl="0" indent="0" marL="0">
+              <a:buNone/>
+            </a:pPr>
+            <a:r>
+              <a:rPr/>
+              <a:t>Point aider at Ollama</a:t>
+            </a:r>
+          </a:p>
+        </p:txBody>
+      </p:sp>
+      <p:sp>
+        <p:nvSpPr>
+          <p:cNvPr id="3" name="Content Placeholder 2"/>
+          <p:cNvSpPr>
+            <a:spLocks noGrp="1"/>
+          </p:cNvSpPr>
+          <p:nvPr>
+            <p:ph idx="1"/>
+          </p:nvPr>
+        </p:nvSpPr>
+        <p:spPr/>
+        <p:txBody>
+          <a:bodyPr/>
+          <a:lstStyle/>
+          <a:p>
+            <a:pPr lvl="0" indent="0" marL="0">
+              <a:buNone/>
+            </a:pPr>
+            <a:r>
+              <a:rPr/>
+              <a:t>VS Codium terminal</a:t>
+            </a:r>
+          </a:p>
+          <a:p>
+            <a:pPr lvl="0" indent="0">
+              <a:buNone/>
+            </a:pPr>
+            <a:r>
+              <a:rPr i="1">
+                <a:solidFill>
+                  <a:srgbClr val="60A0B0"/>
+                </a:solidFill>
+                <a:latin typeface="Courier"/>
+              </a:rPr>
+              <a:t># macOS / Linux</a:t>
+            </a:r>
+            <a:br/>
+            <a:r>
+              <a:rPr>
+                <a:solidFill>
+                  <a:srgbClr val="008000"/>
+                </a:solidFill>
+                <a:latin typeface="Courier"/>
+              </a:rPr>
+              <a:t>export</a:t>
+            </a:r>
+            <a:r>
+              <a:rPr>
+                <a:latin typeface="Courier"/>
+              </a:rPr>
+              <a:t> </a:t>
+            </a:r>
+            <a:r>
+              <a:rPr>
+                <a:solidFill>
+                  <a:srgbClr val="19177C"/>
+                </a:solidFill>
+                <a:latin typeface="Courier"/>
+              </a:rPr>
+              <a:t>OLLAMA_API_BASE</a:t>
+            </a:r>
+            <a:r>
+              <a:rPr>
+                <a:solidFill>
+                  <a:srgbClr val="666666"/>
+                </a:solidFill>
+                <a:latin typeface="Courier"/>
+              </a:rPr>
+              <a:t>=</a:t>
+            </a:r>
+            <a:r>
+              <a:rPr>
+                <a:latin typeface="Courier"/>
+              </a:rPr>
+              <a:t>http://127.0.0.1:11434</a:t>
+            </a:r>
+            <a:br/>
+            <a:br/>
+            <a:r>
+              <a:rPr i="1">
+                <a:solidFill>
+                  <a:srgbClr val="60A0B0"/>
+                </a:solidFill>
+                <a:latin typeface="Courier"/>
+              </a:rPr>
+              <a:t># Windows (PowerShell) — then open a new terminal</a:t>
+            </a:r>
+            <a:br/>
+            <a:r>
+              <a:rPr>
+                <a:latin typeface="Courier"/>
+              </a:rPr>
+              <a:t>setx OLLAMA_API_BASE http://127.0.0.1:11434</a:t>
             </a:r>
           </a:p>
         </p:txBody>
@@ -7255,7 +7224,7 @@
             </a:pPr>
             <a:r>
               <a:rPr/>
-              <a:t>Two terminals</a:t>
+              <a:t>Give Ollama a real context window</a:t>
             </a:r>
           </a:p>
         </p:txBody>
@@ -7280,11 +7249,36 @@
             </a:pPr>
             <a:r>
               <a:rPr b="1"/>
-              <a:t>Terminal 1</a:t>
-            </a:r>
-            <a:r>
-              <a:rPr/>
-              <a:t> — the model server, left running:</a:t>
+              <a:t>This step is not optional.</a:t>
+            </a:r>
+            <a:r>
+              <a:rPr/>
+              <a:t> Ollama defaults to a </a:t>
+            </a:r>
+            <a:r>
+              <a:rPr b="1"/>
+              <a:t>2k</a:t>
+            </a:r>
+            <a:r>
+              <a:rPr/>
+              <a:t> context window and then </a:t>
+            </a:r>
+            <a:r>
+              <a:rPr i="1"/>
+              <a:t>silently discards</a:t>
+            </a:r>
+            <a:r>
+              <a:rPr/>
+              <a:t> whatever does not fit. Your agent will appear to “forget” the file you just gave it.</a:t>
+            </a:r>
+          </a:p>
+          <a:p>
+            <a:pPr lvl="0" indent="0" marL="0">
+              <a:buNone/>
+            </a:pPr>
+            <a:r>
+              <a:rPr/>
+              <a:t>Start the server with a larger window:</a:t>
             </a:r>
           </a:p>
           <a:p>
@@ -7330,63 +7324,35 @@
               <a:buNone/>
             </a:pPr>
             <a:r>
+              <a:rPr/>
+              <a:t>Leave that terminal running. Open a </a:t>
+            </a:r>
+            <a:r>
               <a:rPr b="1"/>
-              <a:t>Terminal 2</a:t>
-            </a:r>
-            <a:r>
-              <a:rPr/>
-              <a:t> — inside your course folder:</a:t>
-            </a:r>
-          </a:p>
-          <a:p>
-            <a:pPr lvl="0" indent="0" marL="0">
-              <a:buNone/>
-            </a:pPr>
-            <a:r>
-              <a:rPr/>
-              <a:t>VS Codium terminal 2</a:t>
-            </a:r>
-          </a:p>
-          <a:p>
-            <a:pPr lvl="0" indent="0">
-              <a:buNone/>
-            </a:pPr>
-            <a:r>
-              <a:rPr>
-                <a:solidFill>
-                  <a:srgbClr val="008000"/>
-                </a:solidFill>
-                <a:latin typeface="Courier"/>
-              </a:rPr>
-              <a:t>source</a:t>
+              <a:t>second</a:t>
+            </a:r>
+            <a:r>
+              <a:rPr/>
+              <a:t> terminal for aider.</a:t>
+            </a:r>
+          </a:p>
+          <a:p>
+            <a:pPr lvl="0" indent="0" marL="0">
+              <a:buNone/>
+            </a:pPr>
+            <a:r>
+              <a:rPr/>
+              <a:t>In VS Codium: the </a:t>
             </a:r>
             <a:r>
               <a:rPr>
                 <a:latin typeface="Courier"/>
               </a:rPr>
-              <a:t> .venv/bin/activate</a:t>
-            </a:r>
-            <a:br/>
-            <a:r>
-              <a:rPr>
-                <a:latin typeface="Courier"/>
-              </a:rPr>
-              <a:t>aider </a:t>
-            </a:r>
-            <a:r>
-              <a:rPr>
-                <a:solidFill>
-                  <a:srgbClr val="7D9029"/>
-                </a:solidFill>
-                <a:latin typeface="Courier"/>
-              </a:rPr>
-              <a:t>--model</a:t>
-            </a:r>
-            <a:r>
-              <a:rPr>
-                <a:latin typeface="Courier"/>
-              </a:rPr>
-              <a:t> ollama_chat/qwen2.5-coder:7b</a:t>
+              <a:t>+</a:t>
+            </a:r>
+            <a:r>
+              <a:rPr/>
+              <a:t> icon in the terminal panel splits off a new shell.</a:t>
             </a:r>
           </a:p>
         </p:txBody>
@@ -7433,7 +7399,7 @@
             </a:pPr>
             <a:r>
               <a:rPr/>
-              <a:t>Ask for something real</a:t>
+              <a:t>Run the agent</a:t>
             </a:r>
           </a:p>
         </p:txBody>
@@ -7458,39 +7424,78 @@
             </a:pPr>
             <a:r>
               <a:rPr/>
-              <a:t>At the aider prompt</a:t>
+              <a:t>VS Codium terminal 2</a:t>
             </a:r>
           </a:p>
           <a:p>
             <a:pPr lvl="0" indent="0">
               <a:buNone/>
             </a:pPr>
+            <a:r>
+              <a:rPr>
+                <a:solidFill>
+                  <a:srgbClr val="008000"/>
+                </a:solidFill>
+                <a:latin typeface="Courier"/>
+              </a:rPr>
+              <a:t>cd</a:t>
+            </a:r>
             <a:r>
               <a:rPr>
                 <a:latin typeface="Courier"/>
               </a:rPr>
-              <a:t>&gt; create explore.py that loads data/spine/core.parquet,
-  prints the shape, and shows mean gdp_pc_eur by year</a:t>
-            </a:r>
-          </a:p>
-          <a:p>
-            <a:pPr lvl="0" indent="0" marL="0">
-              <a:buNone/>
-            </a:pPr>
-            <a:r>
-              <a:rPr/>
-              <a:t>aider proposes a diff. You read it. You accept it.</a:t>
-            </a:r>
-          </a:p>
-          <a:p>
-            <a:pPr lvl="0" indent="0">
-              <a:buNone/>
-            </a:pPr>
+              <a:t> /path/to/your/repo</a:t>
+            </a:r>
+            <a:br/>
             <a:r>
               <a:rPr>
                 <a:latin typeface="Courier"/>
               </a:rPr>
-              <a:t>python explore.py</a:t>
+              <a:t>aider </a:t>
+            </a:r>
+            <a:r>
+              <a:rPr>
+                <a:solidFill>
+                  <a:srgbClr val="7D9029"/>
+                </a:solidFill>
+                <a:latin typeface="Courier"/>
+              </a:rPr>
+              <a:t>--model</a:t>
+            </a:r>
+            <a:r>
+              <a:rPr>
+                <a:latin typeface="Courier"/>
+              </a:rPr>
+              <a:t> ollama_chat/qwen2.5-coder:7b</a:t>
+            </a:r>
+          </a:p>
+          <a:p>
+            <a:pPr lvl="0" indent="0" marL="0">
+              <a:buNone/>
+            </a:pPr>
+            <a:r>
+              <a:rPr/>
+              <a:t>Note the prefix: </a:t>
+            </a:r>
+            <a:r>
+              <a:rPr b="1">
+                <a:latin typeface="Courier"/>
+              </a:rPr>
+              <a:t>ollama_chat/</a:t>
+            </a:r>
+            <a:r>
+              <a:rPr/>
+              <a:t>, not </a:t>
+            </a:r>
+            <a:r>
+              <a:rPr>
+                <a:latin typeface="Courier"/>
+              </a:rPr>
+              <a:t>ollama/</a:t>
+            </a:r>
+            <a:r>
+              <a:rPr/>
+              <a:t>. The second one exists and behaves worse.</a:t>
             </a:r>
           </a:p>
         </p:txBody>
@@ -7647,7 +7652,7 @@
             </a:pPr>
             <a:r>
               <a:rPr/>
-              <a:t>What just happened</a:t>
+              <a:t>Ask it for something</a:t>
             </a:r>
           </a:p>
         </p:txBody>
@@ -7672,28 +7677,45 @@
             </a:pPr>
             <a:r>
               <a:rPr/>
-              <a:t>You ran a model </a:t>
+              <a:t>You are now at a prompt. Ask in plain language:</a:t>
+            </a:r>
+          </a:p>
+          <a:p>
+            <a:pPr lvl="0" indent="0">
+              <a:buNone/>
+            </a:pPr>
+            <a:r>
+              <a:rPr>
+                <a:latin typeface="Courier"/>
+              </a:rPr>
+              <a:t>&gt; add a function that loads data/spine/core.parquet
+  and prints the number of rows per country</a:t>
+            </a:r>
+          </a:p>
+          <a:p>
+            <a:pPr lvl="0" indent="0" marL="0">
+              <a:buNone/>
+            </a:pPr>
+            <a:r>
+              <a:rPr/>
+              <a:t>aider writes the code, shows you a </a:t>
             </a:r>
             <a:r>
               <a:rPr b="1"/>
-              <a:t>on your own hardware</a:t>
-            </a:r>
-            <a:r>
-              <a:rPr/>
-              <a:t>, had it write code against real data, reviewed the change, and accepted it — </a:t>
-            </a:r>
-            <a:r>
-              <a:rPr b="1"/>
-              <a:t>without sending one byte to anyone’s API.</a:t>
-            </a:r>
-          </a:p>
-          <a:p>
-            <a:pPr lvl="0" indent="0" marL="0">
-              <a:buNone/>
-            </a:pPr>
-            <a:r>
-              <a:rPr/>
-              <a:t>Every lab this term is a variation on those two terminals.</a:t>
+              <a:t>diff</a:t>
+            </a:r>
+            <a:r>
+              <a:rPr/>
+              <a:t>, and asks to apply it.</a:t>
+            </a:r>
+          </a:p>
+          <a:p>
+            <a:pPr lvl="0" indent="0" marL="0">
+              <a:buNone/>
+            </a:pPr>
+            <a:r>
+              <a:rPr/>
+              <a:t>Read the diff before you accept. That habit is the whole skill.</a:t>
             </a:r>
           </a:p>
         </p:txBody>
@@ -7730,94 +7752,22 @@
             <p:ph type="title"/>
           </p:nvPr>
         </p:nvSpPr>
-        <p:spPr/>
-        <p:txBody>
-          <a:bodyPr/>
-          <a:lstStyle/>
-          <a:p>
-            <a:pPr lvl="0" indent="0" marL="0">
-              <a:buNone/>
-            </a:pPr>
-            <a:r>
-              <a:rPr/>
-              <a:t>Why we do it this way</a:t>
-            </a:r>
-          </a:p>
-        </p:txBody>
-      </p:sp>
-      <p:sp>
-        <p:nvSpPr>
-          <p:cNvPr id="3" name="Content Placeholder 2"/>
-          <p:cNvSpPr>
-            <a:spLocks noGrp="1"/>
-          </p:cNvSpPr>
-          <p:nvPr>
-            <p:ph idx="1"/>
-          </p:nvPr>
-        </p:nvSpPr>
-        <p:spPr/>
-        <p:txBody>
-          <a:bodyPr/>
-          <a:lstStyle/>
-          <a:p>
-            <a:pPr lvl="0"/>
-            <a:r>
-              <a:rPr b="1"/>
-              <a:t>The data stay put.</a:t>
-            </a:r>
-            <a:r>
-              <a:rPr/>
-              <a:t> Some of what you use this term cannot legally be uploaded.</a:t>
-            </a:r>
-          </a:p>
-          <a:p>
-            <a:pPr lvl="0"/>
-            <a:r>
-              <a:rPr b="1"/>
-              <a:t>The cost is zero.</a:t>
-            </a:r>
-            <a:r>
-              <a:rPr/>
-              <a:t> No key, no quota, no bill at the end of the month.</a:t>
-            </a:r>
-          </a:p>
-          <a:p>
-            <a:pPr lvl="0"/>
-            <a:r>
-              <a:rPr b="1"/>
-              <a:t>The record is honest.</a:t>
-            </a:r>
-            <a:r>
-              <a:rPr/>
-              <a:t> The diff shows exactly what changed, and why.</a:t>
-            </a:r>
-          </a:p>
-          <a:p>
-            <a:pPr lvl="0"/>
-            <a:r>
-              <a:rPr b="1"/>
-              <a:t>The skill transfers.</a:t>
-            </a:r>
-            <a:r>
-              <a:rPr/>
-              <a:t> This is how the work is actually done now.</a:t>
-            </a:r>
-          </a:p>
-          <a:p>
-            <a:pPr lvl="0" indent="0" marL="0">
-              <a:buNone/>
-            </a:pPr>
-            <a:r>
-              <a:rPr/>
-              <a:t>The model is a </a:t>
-            </a:r>
-            <a:r>
-              <a:rPr b="1"/>
-              <a:t>junior collaborator with no accountability.</a:t>
-            </a:r>
-            <a:r>
-              <a:rPr/>
-              <a:t> It will produce confident, wrong code. Every line you accept is a line you are claiming as correct. Read the diff.</a:t>
+        <p:spPr>
+          <a:xfrm>
+            <a:off x="722313" y="3305176"/>
+            <a:ext cx="7772400" cy="1021556"/>
+          </a:xfrm>
+        </p:spPr>
+        <p:txBody>
+          <a:bodyPr/>
+          <a:lstStyle/>
+          <a:p>
+            <a:pPr lvl="0" indent="0" marL="0">
+              <a:buNone/>
+            </a:pPr>
+            <a:r>
+              <a:rPr/>
+              <a:t>The worked example</a:t>
             </a:r>
           </a:p>
         </p:txBody>
@@ -7854,6 +7804,505 @@
             <p:ph type="title"/>
           </p:nvPr>
         </p:nvSpPr>
+        <p:spPr/>
+        <p:txBody>
+          <a:bodyPr/>
+          <a:lstStyle/>
+          <a:p>
+            <a:pPr lvl="0" indent="0" marL="0">
+              <a:buNone/>
+            </a:pPr>
+            <a:r>
+              <a:rPr/>
+              <a:t>Two terminals</a:t>
+            </a:r>
+          </a:p>
+        </p:txBody>
+      </p:sp>
+      <p:sp>
+        <p:nvSpPr>
+          <p:cNvPr id="3" name="Content Placeholder 2"/>
+          <p:cNvSpPr>
+            <a:spLocks noGrp="1"/>
+          </p:cNvSpPr>
+          <p:nvPr>
+            <p:ph idx="1"/>
+          </p:nvPr>
+        </p:nvSpPr>
+        <p:spPr/>
+        <p:txBody>
+          <a:bodyPr/>
+          <a:lstStyle/>
+          <a:p>
+            <a:pPr lvl="0" indent="0" marL="0">
+              <a:buNone/>
+            </a:pPr>
+            <a:r>
+              <a:rPr b="1"/>
+              <a:t>Terminal 1</a:t>
+            </a:r>
+            <a:r>
+              <a:rPr/>
+              <a:t> — the model server, left running:</a:t>
+            </a:r>
+          </a:p>
+          <a:p>
+            <a:pPr lvl="0" indent="0" marL="0">
+              <a:buNone/>
+            </a:pPr>
+            <a:r>
+              <a:rPr/>
+              <a:t>VS Codium terminal 1</a:t>
+            </a:r>
+          </a:p>
+          <a:p>
+            <a:pPr lvl="0" indent="0">
+              <a:buNone/>
+            </a:pPr>
+            <a:r>
+              <a:rPr>
+                <a:solidFill>
+                  <a:srgbClr val="19177C"/>
+                </a:solidFill>
+                <a:latin typeface="Courier"/>
+              </a:rPr>
+              <a:t>OLLAMA_CONTEXT_LENGTH</a:t>
+            </a:r>
+            <a:r>
+              <a:rPr>
+                <a:solidFill>
+                  <a:srgbClr val="666666"/>
+                </a:solidFill>
+                <a:latin typeface="Courier"/>
+              </a:rPr>
+              <a:t>=</a:t>
+            </a:r>
+            <a:r>
+              <a:rPr>
+                <a:latin typeface="Courier"/>
+              </a:rPr>
+              <a:t>8192 ollama serve</a:t>
+            </a:r>
+          </a:p>
+          <a:p>
+            <a:pPr lvl="0" indent="0" marL="0">
+              <a:buNone/>
+            </a:pPr>
+            <a:r>
+              <a:rPr b="1"/>
+              <a:t>Terminal 2</a:t>
+            </a:r>
+            <a:r>
+              <a:rPr/>
+              <a:t> — inside your course folder:</a:t>
+            </a:r>
+          </a:p>
+          <a:p>
+            <a:pPr lvl="0" indent="0" marL="0">
+              <a:buNone/>
+            </a:pPr>
+            <a:r>
+              <a:rPr/>
+              <a:t>VS Codium terminal 2</a:t>
+            </a:r>
+          </a:p>
+          <a:p>
+            <a:pPr lvl="0" indent="0">
+              <a:buNone/>
+            </a:pPr>
+            <a:r>
+              <a:rPr>
+                <a:solidFill>
+                  <a:srgbClr val="008000"/>
+                </a:solidFill>
+                <a:latin typeface="Courier"/>
+              </a:rPr>
+              <a:t>source</a:t>
+            </a:r>
+            <a:r>
+              <a:rPr>
+                <a:latin typeface="Courier"/>
+              </a:rPr>
+              <a:t> .venv/bin/activate</a:t>
+            </a:r>
+            <a:br/>
+            <a:r>
+              <a:rPr>
+                <a:latin typeface="Courier"/>
+              </a:rPr>
+              <a:t>aider </a:t>
+            </a:r>
+            <a:r>
+              <a:rPr>
+                <a:solidFill>
+                  <a:srgbClr val="7D9029"/>
+                </a:solidFill>
+                <a:latin typeface="Courier"/>
+              </a:rPr>
+              <a:t>--model</a:t>
+            </a:r>
+            <a:r>
+              <a:rPr>
+                <a:latin typeface="Courier"/>
+              </a:rPr>
+              <a:t> ollama_chat/qwen2.5-coder:7b</a:t>
+            </a:r>
+          </a:p>
+        </p:txBody>
+      </p:sp>
+    </p:spTree>
+  </p:cSld>
+</p:sld>
+</file>
+
+<file path=ppt/slides/slide43.xml><?xml version="1.0" encoding="utf-8"?>
+<p:sld xmlns:a="http://schemas.openxmlformats.org/drawingml/2006/main" xmlns:r="http://schemas.openxmlformats.org/officeDocument/2006/relationships" xmlns:p="http://schemas.openxmlformats.org/presentationml/2006/main">
+  <p:cSld>
+    <p:spTree>
+      <p:nvGrpSpPr>
+        <p:cNvPr id="1" name=""/>
+        <p:cNvGrpSpPr/>
+        <p:nvPr/>
+      </p:nvGrpSpPr>
+      <p:grpSpPr>
+        <a:xfrm>
+          <a:off x="0" y="0"/>
+          <a:ext cx="0" cy="0"/>
+          <a:chOff x="0" y="0"/>
+          <a:chExt cx="0" cy="0"/>
+        </a:xfrm>
+      </p:grpSpPr>
+      <p:sp>
+        <p:nvSpPr>
+          <p:cNvPr id="2" name="Title 1"/>
+          <p:cNvSpPr>
+            <a:spLocks noGrp="1"/>
+          </p:cNvSpPr>
+          <p:nvPr>
+            <p:ph type="title"/>
+          </p:nvPr>
+        </p:nvSpPr>
+        <p:spPr/>
+        <p:txBody>
+          <a:bodyPr/>
+          <a:lstStyle/>
+          <a:p>
+            <a:pPr lvl="0" indent="0" marL="0">
+              <a:buNone/>
+            </a:pPr>
+            <a:r>
+              <a:rPr/>
+              <a:t>Ask for something real</a:t>
+            </a:r>
+          </a:p>
+        </p:txBody>
+      </p:sp>
+      <p:sp>
+        <p:nvSpPr>
+          <p:cNvPr id="3" name="Content Placeholder 2"/>
+          <p:cNvSpPr>
+            <a:spLocks noGrp="1"/>
+          </p:cNvSpPr>
+          <p:nvPr>
+            <p:ph idx="1"/>
+          </p:nvPr>
+        </p:nvSpPr>
+        <p:spPr/>
+        <p:txBody>
+          <a:bodyPr/>
+          <a:lstStyle/>
+          <a:p>
+            <a:pPr lvl="0" indent="0" marL="0">
+              <a:buNone/>
+            </a:pPr>
+            <a:r>
+              <a:rPr/>
+              <a:t>At the aider prompt</a:t>
+            </a:r>
+          </a:p>
+          <a:p>
+            <a:pPr lvl="0" indent="0">
+              <a:buNone/>
+            </a:pPr>
+            <a:r>
+              <a:rPr>
+                <a:latin typeface="Courier"/>
+              </a:rPr>
+              <a:t>&gt; create explore.py that loads data/spine/core.parquet,
+  prints the shape, and shows mean gdp_pc_eur by year</a:t>
+            </a:r>
+          </a:p>
+          <a:p>
+            <a:pPr lvl="0" indent="0" marL="0">
+              <a:buNone/>
+            </a:pPr>
+            <a:r>
+              <a:rPr/>
+              <a:t>aider proposes a diff. You read it. You accept it.</a:t>
+            </a:r>
+          </a:p>
+          <a:p>
+            <a:pPr lvl="0" indent="0">
+              <a:buNone/>
+            </a:pPr>
+            <a:r>
+              <a:rPr>
+                <a:latin typeface="Courier"/>
+              </a:rPr>
+              <a:t>python explore.py</a:t>
+            </a:r>
+          </a:p>
+        </p:txBody>
+      </p:sp>
+    </p:spTree>
+  </p:cSld>
+</p:sld>
+</file>
+
+<file path=ppt/slides/slide44.xml><?xml version="1.0" encoding="utf-8"?>
+<p:sld xmlns:a="http://schemas.openxmlformats.org/drawingml/2006/main" xmlns:r="http://schemas.openxmlformats.org/officeDocument/2006/relationships" xmlns:p="http://schemas.openxmlformats.org/presentationml/2006/main">
+  <p:cSld>
+    <p:spTree>
+      <p:nvGrpSpPr>
+        <p:cNvPr id="1" name=""/>
+        <p:cNvGrpSpPr/>
+        <p:nvPr/>
+      </p:nvGrpSpPr>
+      <p:grpSpPr>
+        <a:xfrm>
+          <a:off x="0" y="0"/>
+          <a:ext cx="0" cy="0"/>
+          <a:chOff x="0" y="0"/>
+          <a:chExt cx="0" cy="0"/>
+        </a:xfrm>
+      </p:grpSpPr>
+      <p:sp>
+        <p:nvSpPr>
+          <p:cNvPr id="2" name="Title 1"/>
+          <p:cNvSpPr>
+            <a:spLocks noGrp="1"/>
+          </p:cNvSpPr>
+          <p:nvPr>
+            <p:ph type="title"/>
+          </p:nvPr>
+        </p:nvSpPr>
+        <p:spPr/>
+        <p:txBody>
+          <a:bodyPr/>
+          <a:lstStyle/>
+          <a:p>
+            <a:pPr lvl="0" indent="0" marL="0">
+              <a:buNone/>
+            </a:pPr>
+            <a:r>
+              <a:rPr/>
+              <a:t>What just happened</a:t>
+            </a:r>
+          </a:p>
+        </p:txBody>
+      </p:sp>
+      <p:sp>
+        <p:nvSpPr>
+          <p:cNvPr id="3" name="Content Placeholder 2"/>
+          <p:cNvSpPr>
+            <a:spLocks noGrp="1"/>
+          </p:cNvSpPr>
+          <p:nvPr>
+            <p:ph idx="1"/>
+          </p:nvPr>
+        </p:nvSpPr>
+        <p:spPr/>
+        <p:txBody>
+          <a:bodyPr/>
+          <a:lstStyle/>
+          <a:p>
+            <a:pPr lvl="0" indent="0" marL="0">
+              <a:buNone/>
+            </a:pPr>
+            <a:r>
+              <a:rPr/>
+              <a:t>You ran a model </a:t>
+            </a:r>
+            <a:r>
+              <a:rPr b="1"/>
+              <a:t>on your own hardware</a:t>
+            </a:r>
+            <a:r>
+              <a:rPr/>
+              <a:t>, had it write code against real data, reviewed the change, and accepted it — </a:t>
+            </a:r>
+            <a:r>
+              <a:rPr b="1"/>
+              <a:t>without sending one byte to anyone’s API.</a:t>
+            </a:r>
+          </a:p>
+          <a:p>
+            <a:pPr lvl="0" indent="0" marL="0">
+              <a:buNone/>
+            </a:pPr>
+            <a:r>
+              <a:rPr/>
+              <a:t>Every lab this term is a variation on those two terminals.</a:t>
+            </a:r>
+          </a:p>
+        </p:txBody>
+      </p:sp>
+    </p:spTree>
+  </p:cSld>
+</p:sld>
+</file>
+
+<file path=ppt/slides/slide45.xml><?xml version="1.0" encoding="utf-8"?>
+<p:sld xmlns:a="http://schemas.openxmlformats.org/drawingml/2006/main" xmlns:r="http://schemas.openxmlformats.org/officeDocument/2006/relationships" xmlns:p="http://schemas.openxmlformats.org/presentationml/2006/main">
+  <p:cSld>
+    <p:spTree>
+      <p:nvGrpSpPr>
+        <p:cNvPr id="1" name=""/>
+        <p:cNvGrpSpPr/>
+        <p:nvPr/>
+      </p:nvGrpSpPr>
+      <p:grpSpPr>
+        <a:xfrm>
+          <a:off x="0" y="0"/>
+          <a:ext cx="0" cy="0"/>
+          <a:chOff x="0" y="0"/>
+          <a:chExt cx="0" cy="0"/>
+        </a:xfrm>
+      </p:grpSpPr>
+      <p:sp>
+        <p:nvSpPr>
+          <p:cNvPr id="2" name="Title 1"/>
+          <p:cNvSpPr>
+            <a:spLocks noGrp="1"/>
+          </p:cNvSpPr>
+          <p:nvPr>
+            <p:ph type="title"/>
+          </p:nvPr>
+        </p:nvSpPr>
+        <p:spPr/>
+        <p:txBody>
+          <a:bodyPr/>
+          <a:lstStyle/>
+          <a:p>
+            <a:pPr lvl="0" indent="0" marL="0">
+              <a:buNone/>
+            </a:pPr>
+            <a:r>
+              <a:rPr/>
+              <a:t>Why we do it this way</a:t>
+            </a:r>
+          </a:p>
+        </p:txBody>
+      </p:sp>
+      <p:sp>
+        <p:nvSpPr>
+          <p:cNvPr id="3" name="Content Placeholder 2"/>
+          <p:cNvSpPr>
+            <a:spLocks noGrp="1"/>
+          </p:cNvSpPr>
+          <p:nvPr>
+            <p:ph idx="1"/>
+          </p:nvPr>
+        </p:nvSpPr>
+        <p:spPr/>
+        <p:txBody>
+          <a:bodyPr/>
+          <a:lstStyle/>
+          <a:p>
+            <a:pPr lvl="0"/>
+            <a:r>
+              <a:rPr b="1"/>
+              <a:t>The data stay put.</a:t>
+            </a:r>
+            <a:r>
+              <a:rPr/>
+              <a:t> Some of what you use this term cannot legally be uploaded.</a:t>
+            </a:r>
+          </a:p>
+          <a:p>
+            <a:pPr lvl="0"/>
+            <a:r>
+              <a:rPr b="1"/>
+              <a:t>The cost is zero.</a:t>
+            </a:r>
+            <a:r>
+              <a:rPr/>
+              <a:t> No key, no quota, no bill at the end of the month.</a:t>
+            </a:r>
+          </a:p>
+          <a:p>
+            <a:pPr lvl="0"/>
+            <a:r>
+              <a:rPr b="1"/>
+              <a:t>The record is honest.</a:t>
+            </a:r>
+            <a:r>
+              <a:rPr/>
+              <a:t> The diff shows exactly what changed, and why.</a:t>
+            </a:r>
+          </a:p>
+          <a:p>
+            <a:pPr lvl="0"/>
+            <a:r>
+              <a:rPr b="1"/>
+              <a:t>The skill transfers.</a:t>
+            </a:r>
+            <a:r>
+              <a:rPr/>
+              <a:t> This is how the work is actually done now.</a:t>
+            </a:r>
+          </a:p>
+          <a:p>
+            <a:pPr lvl="0" indent="0" marL="0">
+              <a:buNone/>
+            </a:pPr>
+            <a:r>
+              <a:rPr/>
+              <a:t>The model is a </a:t>
+            </a:r>
+            <a:r>
+              <a:rPr b="1"/>
+              <a:t>junior collaborator with no accountability.</a:t>
+            </a:r>
+            <a:r>
+              <a:rPr/>
+              <a:t> It will produce confident, wrong code. Every line you accept is a line you are claiming as correct. Read the diff.</a:t>
+            </a:r>
+          </a:p>
+        </p:txBody>
+      </p:sp>
+    </p:spTree>
+  </p:cSld>
+</p:sld>
+</file>
+
+<file path=ppt/slides/slide46.xml><?xml version="1.0" encoding="utf-8"?>
+<p:sld xmlns:a="http://schemas.openxmlformats.org/drawingml/2006/main" xmlns:r="http://schemas.openxmlformats.org/officeDocument/2006/relationships" xmlns:p="http://schemas.openxmlformats.org/presentationml/2006/main">
+  <p:cSld>
+    <p:spTree>
+      <p:nvGrpSpPr>
+        <p:cNvPr id="1" name=""/>
+        <p:cNvGrpSpPr/>
+        <p:nvPr/>
+      </p:nvGrpSpPr>
+      <p:grpSpPr>
+        <a:xfrm>
+          <a:off x="0" y="0"/>
+          <a:ext cx="0" cy="0"/>
+          <a:chOff x="0" y="0"/>
+          <a:chExt cx="0" cy="0"/>
+        </a:xfrm>
+      </p:grpSpPr>
+      <p:sp>
+        <p:nvSpPr>
+          <p:cNvPr id="2" name="Title 1"/>
+          <p:cNvSpPr>
+            <a:spLocks noGrp="1"/>
+          </p:cNvSpPr>
+          <p:nvPr>
+            <p:ph type="title"/>
+          </p:nvPr>
+        </p:nvSpPr>
         <p:spPr>
           <a:xfrm>
             <a:off x="722313" y="3305176"/>
@@ -7879,7 +8328,7 @@
 </p:sld>
 </file>
 
-<file path=ppt/slides/slide43.xml><?xml version="1.0" encoding="utf-8"?>
+<file path=ppt/slides/slide47.xml><?xml version="1.0" encoding="utf-8"?>
 <p:sld xmlns:a="http://schemas.openxmlformats.org/drawingml/2006/main" xmlns:r="http://schemas.openxmlformats.org/officeDocument/2006/relationships" xmlns:p="http://schemas.openxmlformats.org/presentationml/2006/main">
   <p:cSld>
     <p:spTree>
@@ -8246,7 +8695,7 @@
 </p:sld>
 </file>
 
-<file path=ppt/slides/slide44.xml><?xml version="1.0" encoding="utf-8"?>
+<file path=ppt/slides/slide48.xml><?xml version="1.0" encoding="utf-8"?>
 <p:sld xmlns:a="http://schemas.openxmlformats.org/drawingml/2006/main" xmlns:r="http://schemas.openxmlformats.org/officeDocument/2006/relationships" xmlns:p="http://schemas.openxmlformats.org/presentationml/2006/main">
   <p:cSld>
     <p:spTree>
@@ -8293,7 +8742,7 @@
 </p:sld>
 </file>
 
-<file path=ppt/slides/slide45.xml><?xml version="1.0" encoding="utf-8"?>
+<file path=ppt/slides/slide49.xml><?xml version="1.0" encoding="utf-8"?>
 <p:sld xmlns:a="http://schemas.openxmlformats.org/drawingml/2006/main" xmlns:r="http://schemas.openxmlformats.org/officeDocument/2006/relationships" xmlns:p="http://schemas.openxmlformats.org/presentationml/2006/main">
   <p:cSld>
     <p:spTree>
@@ -8399,185 +8848,6 @@
             <a:r>
               <a:rPr/>
               <a:t> — a screenshot or a paste into your notes.</a:t>
-            </a:r>
-          </a:p>
-        </p:txBody>
-      </p:sp>
-    </p:spTree>
-  </p:cSld>
-</p:sld>
-</file>
-
-<file path=ppt/slides/slide46.xml><?xml version="1.0" encoding="utf-8"?>
-<p:sld xmlns:a="http://schemas.openxmlformats.org/drawingml/2006/main" xmlns:r="http://schemas.openxmlformats.org/officeDocument/2006/relationships" xmlns:p="http://schemas.openxmlformats.org/presentationml/2006/main">
-  <p:cSld>
-    <p:spTree>
-      <p:nvGrpSpPr>
-        <p:cNvPr id="1" name=""/>
-        <p:cNvGrpSpPr/>
-        <p:nvPr/>
-      </p:nvGrpSpPr>
-      <p:grpSpPr>
-        <a:xfrm>
-          <a:off x="0" y="0"/>
-          <a:ext cx="0" cy="0"/>
-          <a:chOff x="0" y="0"/>
-          <a:chExt cx="0" cy="0"/>
-        </a:xfrm>
-      </p:grpSpPr>
-      <p:sp>
-        <p:nvSpPr>
-          <p:cNvPr id="2" name="Title 1"/>
-          <p:cNvSpPr>
-            <a:spLocks noGrp="1"/>
-          </p:cNvSpPr>
-          <p:nvPr>
-            <p:ph type="title"/>
-          </p:nvPr>
-        </p:nvSpPr>
-        <p:spPr/>
-        <p:txBody>
-          <a:bodyPr/>
-          <a:lstStyle/>
-          <a:p>
-            <a:pPr lvl="0" indent="0" marL="0">
-              <a:buNone/>
-            </a:pPr>
-            <a:r>
-              <a:rPr/>
-              <a:t>Before Session 1</a:t>
-            </a:r>
-          </a:p>
-        </p:txBody>
-      </p:sp>
-      <p:sp>
-        <p:nvSpPr>
-          <p:cNvPr id="3" name="Content Placeholder 2"/>
-          <p:cNvSpPr>
-            <a:spLocks noGrp="1"/>
-          </p:cNvSpPr>
-          <p:nvPr>
-            <p:ph idx="1"/>
-          </p:nvPr>
-        </p:nvSpPr>
-        <p:spPr/>
-        <p:txBody>
-          <a:bodyPr/>
-          <a:lstStyle/>
-          <a:p>
-            <a:pPr lvl="0"/>
-            <a:r>
-              <a:rPr/>
-              <a:t>✅ VS Codium installed, Python environment built</a:t>
-            </a:r>
-          </a:p>
-          <a:p>
-            <a:pPr lvl="0"/>
-            <a:r>
-              <a:rPr/>
-              <a:t>✅ Ollama running Qwen 2.5 Coder, verified </a:t>
-            </a:r>
-            <a:r>
-              <a:rPr b="1"/>
-              <a:t>with the wifi off</a:t>
-            </a:r>
-          </a:p>
-          <a:p>
-            <a:pPr lvl="0"/>
-            <a:r>
-              <a:rPr/>
-              <a:t>✅ aider talking to your local model, editing a real file</a:t>
-            </a:r>
-          </a:p>
-          <a:p>
-            <a:pPr lvl="0"/>
-            <a:r>
-              <a:rPr/>
-              <a:t>✅ </a:t>
-            </a:r>
-            <a:r>
-              <a:rPr i="1"/>
-              <a:t>Europe 2031</a:t>
-            </a:r>
-            <a:r>
-              <a:rPr/>
-              <a:t> read as a stress test, not a prediction</a:t>
-            </a:r>
-          </a:p>
-          <a:p>
-            <a:pPr lvl="0"/>
-            <a:r>
-              <a:rPr/>
-              <a:t>✅ </a:t>
-            </a:r>
-            <a:r>
-              <a:rPr>
-                <a:latin typeface="Courier"/>
-              </a:rPr>
-              <a:t>verify_environment.py</a:t>
-            </a:r>
-            <a:r>
-              <a:rPr/>
-              <a:t> output in hand</a:t>
-            </a:r>
-          </a:p>
-        </p:txBody>
-      </p:sp>
-    </p:spTree>
-  </p:cSld>
-</p:sld>
-</file>
-
-<file path=ppt/slides/slide47.xml><?xml version="1.0" encoding="utf-8"?>
-<p:sld xmlns:a="http://schemas.openxmlformats.org/drawingml/2006/main" xmlns:r="http://schemas.openxmlformats.org/officeDocument/2006/relationships" xmlns:p="http://schemas.openxmlformats.org/presentationml/2006/main">
-  <p:cSld>
-    <p:spTree>
-      <p:nvGrpSpPr>
-        <p:cNvPr id="1" name=""/>
-        <p:cNvGrpSpPr/>
-        <p:nvPr/>
-      </p:nvGrpSpPr>
-      <p:grpSpPr>
-        <a:xfrm>
-          <a:off x="0" y="0"/>
-          <a:ext cx="0" cy="0"/>
-          <a:chOff x="0" y="0"/>
-          <a:chExt cx="0" cy="0"/>
-        </a:xfrm>
-      </p:grpSpPr>
-      <p:sp>
-        <p:nvSpPr>
-          <p:cNvPr id="3" name="Content Placeholder 2"/>
-          <p:cNvSpPr>
-            <a:spLocks noGrp="1"/>
-          </p:cNvSpPr>
-          <p:nvPr>
-            <p:ph idx="1"/>
-          </p:nvPr>
-        </p:nvSpPr>
-        <p:spPr/>
-        <p:txBody>
-          <a:bodyPr/>
-          <a:lstStyle/>
-          <a:p>
-            <a:pPr lvl="0" indent="0" marL="0">
-              <a:spcBef>
-                <a:spcPts val="3000"/>
-              </a:spcBef>
-              <a:buNone/>
-            </a:pPr>
-            <a:r>
-              <a:rPr b="1"/>
-              <a:t>See you in Session 1.</a:t>
-            </a:r>
-          </a:p>
-          <a:p>
-            <a:pPr lvl="0" indent="0" marL="0">
-              <a:buNone/>
-            </a:pPr>
-            <a:r>
-              <a:rPr/>
-              <a:t>Bring the machine you set up. Everything this term runs on it.</a:t>
             </a:r>
           </a:p>
         </p:txBody>
@@ -8934,6 +9204,185 @@
           </a:graphicData>
         </a:graphic>
       </p:graphicFrame>
+    </p:spTree>
+  </p:cSld>
+</p:sld>
+</file>
+
+<file path=ppt/slides/slide50.xml><?xml version="1.0" encoding="utf-8"?>
+<p:sld xmlns:a="http://schemas.openxmlformats.org/drawingml/2006/main" xmlns:r="http://schemas.openxmlformats.org/officeDocument/2006/relationships" xmlns:p="http://schemas.openxmlformats.org/presentationml/2006/main">
+  <p:cSld>
+    <p:spTree>
+      <p:nvGrpSpPr>
+        <p:cNvPr id="1" name=""/>
+        <p:cNvGrpSpPr/>
+        <p:nvPr/>
+      </p:nvGrpSpPr>
+      <p:grpSpPr>
+        <a:xfrm>
+          <a:off x="0" y="0"/>
+          <a:ext cx="0" cy="0"/>
+          <a:chOff x="0" y="0"/>
+          <a:chExt cx="0" cy="0"/>
+        </a:xfrm>
+      </p:grpSpPr>
+      <p:sp>
+        <p:nvSpPr>
+          <p:cNvPr id="2" name="Title 1"/>
+          <p:cNvSpPr>
+            <a:spLocks noGrp="1"/>
+          </p:cNvSpPr>
+          <p:nvPr>
+            <p:ph type="title"/>
+          </p:nvPr>
+        </p:nvSpPr>
+        <p:spPr/>
+        <p:txBody>
+          <a:bodyPr/>
+          <a:lstStyle/>
+          <a:p>
+            <a:pPr lvl="0" indent="0" marL="0">
+              <a:buNone/>
+            </a:pPr>
+            <a:r>
+              <a:rPr/>
+              <a:t>Before Session 1</a:t>
+            </a:r>
+          </a:p>
+        </p:txBody>
+      </p:sp>
+      <p:sp>
+        <p:nvSpPr>
+          <p:cNvPr id="3" name="Content Placeholder 2"/>
+          <p:cNvSpPr>
+            <a:spLocks noGrp="1"/>
+          </p:cNvSpPr>
+          <p:nvPr>
+            <p:ph idx="1"/>
+          </p:nvPr>
+        </p:nvSpPr>
+        <p:spPr/>
+        <p:txBody>
+          <a:bodyPr/>
+          <a:lstStyle/>
+          <a:p>
+            <a:pPr lvl="0"/>
+            <a:r>
+              <a:rPr/>
+              <a:t>✅ VS Codium installed, Python environment built</a:t>
+            </a:r>
+          </a:p>
+          <a:p>
+            <a:pPr lvl="0"/>
+            <a:r>
+              <a:rPr/>
+              <a:t>✅ Ollama running Qwen 2.5 Coder, verified </a:t>
+            </a:r>
+            <a:r>
+              <a:rPr b="1"/>
+              <a:t>with the wifi off</a:t>
+            </a:r>
+          </a:p>
+          <a:p>
+            <a:pPr lvl="0"/>
+            <a:r>
+              <a:rPr/>
+              <a:t>✅ aider talking to your local model, editing a real file</a:t>
+            </a:r>
+          </a:p>
+          <a:p>
+            <a:pPr lvl="0"/>
+            <a:r>
+              <a:rPr/>
+              <a:t>✅ </a:t>
+            </a:r>
+            <a:r>
+              <a:rPr i="1"/>
+              <a:t>Europe 2031</a:t>
+            </a:r>
+            <a:r>
+              <a:rPr/>
+              <a:t> read as a stress test, not a prediction</a:t>
+            </a:r>
+          </a:p>
+          <a:p>
+            <a:pPr lvl="0"/>
+            <a:r>
+              <a:rPr/>
+              <a:t>✅ </a:t>
+            </a:r>
+            <a:r>
+              <a:rPr>
+                <a:latin typeface="Courier"/>
+              </a:rPr>
+              <a:t>verify_environment.py</a:t>
+            </a:r>
+            <a:r>
+              <a:rPr/>
+              <a:t> output in hand</a:t>
+            </a:r>
+          </a:p>
+        </p:txBody>
+      </p:sp>
+    </p:spTree>
+  </p:cSld>
+</p:sld>
+</file>
+
+<file path=ppt/slides/slide51.xml><?xml version="1.0" encoding="utf-8"?>
+<p:sld xmlns:a="http://schemas.openxmlformats.org/drawingml/2006/main" xmlns:r="http://schemas.openxmlformats.org/officeDocument/2006/relationships" xmlns:p="http://schemas.openxmlformats.org/presentationml/2006/main">
+  <p:cSld>
+    <p:spTree>
+      <p:nvGrpSpPr>
+        <p:cNvPr id="1" name=""/>
+        <p:cNvGrpSpPr/>
+        <p:nvPr/>
+      </p:nvGrpSpPr>
+      <p:grpSpPr>
+        <a:xfrm>
+          <a:off x="0" y="0"/>
+          <a:ext cx="0" cy="0"/>
+          <a:chOff x="0" y="0"/>
+          <a:chExt cx="0" cy="0"/>
+        </a:xfrm>
+      </p:grpSpPr>
+      <p:sp>
+        <p:nvSpPr>
+          <p:cNvPr id="3" name="Content Placeholder 2"/>
+          <p:cNvSpPr>
+            <a:spLocks noGrp="1"/>
+          </p:cNvSpPr>
+          <p:nvPr>
+            <p:ph idx="1"/>
+          </p:nvPr>
+        </p:nvSpPr>
+        <p:spPr/>
+        <p:txBody>
+          <a:bodyPr/>
+          <a:lstStyle/>
+          <a:p>
+            <a:pPr lvl="0" indent="0" marL="0">
+              <a:spcBef>
+                <a:spcPts val="3000"/>
+              </a:spcBef>
+              <a:buNone/>
+            </a:pPr>
+            <a:r>
+              <a:rPr b="1"/>
+              <a:t>See you in Session 1.</a:t>
+            </a:r>
+          </a:p>
+          <a:p>
+            <a:pPr lvl="0" indent="0" marL="0">
+              <a:buNone/>
+            </a:pPr>
+            <a:r>
+              <a:rPr/>
+              <a:t>Bring the machine you set up. Everything this term runs on it.</a:t>
+            </a:r>
+          </a:p>
+        </p:txBody>
+      </p:sp>
     </p:spTree>
   </p:cSld>
 </p:sld>

--- a/01-foundations-scenarios-and-tools/00-pre-session/slides-welcome-and-setup.pptx
+++ b/01-foundations-scenarios-and-tools/00-pre-session/slides-welcome-and-setup.pptx
@@ -6850,7 +6850,7 @@
             </a:pPr>
             <a:r>
               <a:rPr/>
-              <a:t>Talking to Qwen the way I talk to Claude</a:t>
+              <a:t>Talking to Qwen from the terminal</a:t>
             </a:r>
           </a:p>
         </p:txBody>
@@ -6918,7 +6918,7 @@
             </a:pPr>
             <a:r>
               <a:rPr/>
-              <a:t>Same shape as the workflow you have seen me use. Different engine, and it is running on your laptop.</a:t>
+              <a:t>The same shape as the workflow you have seen me use in class — and it is running on your laptop, on a model you downloaded.</a:t>
             </a:r>
           </a:p>
         </p:txBody>

--- a/01-foundations-scenarios-and-tools/00-pre-session/slides-welcome-and-setup.pptx
+++ b/01-foundations-scenarios-and-tools/00-pre-session/slides-welcome-and-setup.pptx
@@ -2846,6 +2846,72 @@
               <a:t>‹#›</a:t>
             </a:fld>
             <a:endParaRPr lang="en-US"/>
+          </a:p>
+        </p:txBody>
+      </p:sp>
+      <p:sp>
+        <p:nvSpPr>
+          <p:cNvPr id="7" name="Author Footer"/>
+          <p:cNvSpPr txBox="1"/>
+          <p:nvPr/>
+        </p:nvSpPr>
+        <p:spPr>
+          <a:xfrm>
+            <a:off x="457200" y="4735000"/>
+            <a:ext cx="5000000" cy="260000"/>
+          </a:xfrm>
+          <a:prstGeom prst="rect">
+            <a:avLst/>
+          </a:prstGeom>
+          <a:noFill/>
+        </p:spPr>
+        <p:txBody>
+          <a:bodyPr anchor="ctr" bIns="0" lIns="0" rIns="0" tIns="0" wrap="square"/>
+          <a:lstStyle/>
+          <a:p>
+            <a:pPr algn="l"/>
+            <a:r>
+              <a:rPr dirty="0" lang="en-US" sz="900">
+                <a:solidFill>
+                  <a:srgbClr val="6E7275"/>
+                </a:solidFill>
+                <a:latin typeface="+mn-lt"/>
+              </a:rPr>
+              <a:t>Thierry Warin, PhD</a:t>
+            </a:r>
+          </a:p>
+        </p:txBody>
+      </p:sp>
+      <p:sp>
+        <p:nvSpPr>
+          <p:cNvPr id="8" name="Slide Number Footer"/>
+          <p:cNvSpPr txBox="1"/>
+          <p:nvPr/>
+        </p:nvSpPr>
+        <p:spPr>
+          <a:xfrm>
+            <a:off x="7200000" y="4735000"/>
+            <a:ext cx="1486800" cy="260000"/>
+          </a:xfrm>
+          <a:prstGeom prst="rect">
+            <a:avLst/>
+          </a:prstGeom>
+          <a:noFill/>
+        </p:spPr>
+        <p:txBody>
+          <a:bodyPr anchor="ctr" bIns="0" lIns="0" rIns="0" tIns="0" wrap="square"/>
+          <a:lstStyle/>
+          <a:p>
+            <a:pPr algn="r"/>
+            <a:fld id="{9B1A2C3D-4E5F-6A7B-8C9D-0E1F2A3B4C5D}" type="slidenum">
+              <a:rPr dirty="0" lang="en-US" sz="900">
+                <a:solidFill>
+                  <a:srgbClr val="6E7275"/>
+                </a:solidFill>
+                <a:latin typeface="+mn-lt"/>
+              </a:rPr>
+              <a:t>2</a:t>
+            </a:fld>
           </a:p>
         </p:txBody>
       </p:sp>

--- a/01-foundations-scenarios-and-tools/00-pre-session/slides-welcome-and-setup.pptx
+++ b/01-foundations-scenarios-and-tools/00-pre-session/slides-welcome-and-setup.pptx
@@ -3292,7 +3292,7 @@
             </a:pPr>
             <a:r>
               <a:rPr/>
-              <a:t>19 August 2026</a:t>
+              <a:t>20 August 2026</a:t>
             </a:r>
           </a:p>
         </p:txBody>
@@ -3729,7 +3729,7 @@
             </a:pPr>
             <a:r>
               <a:rPr/>
-              <a:t>Do this on the machine you will actually bring to class. A working setup on a desktop at home is of no use in the lab.</a:t>
+              <a:t>Do this on the machine you will actually bring to class. A working setup on a desktop at home is of no use in the practice session.</a:t>
             </a:r>
           </a:p>
         </p:txBody>
@@ -8208,7 +8208,7 @@
             </a:pPr>
             <a:r>
               <a:rPr/>
-              <a:t>Every lab this term is a variation on those two terminals.</a:t>
+              <a:t>Every practice session this term is a variation on those two terminals.</a:t>
             </a:r>
           </a:p>
         </p:txBody>
@@ -9495,7 +9495,7 @@
             </a:r>
             <a:r>
               <a:rPr/>
-              <a:t> Arriving without a working environment means you cannot take part in the lab.</a:t>
+              <a:t> Arriving without a working environment means you cannot take part in the practice session.</a:t>
             </a:r>
           </a:p>
         </p:txBody>

--- a/01-foundations-scenarios-and-tools/00-pre-session/slides-welcome-and-setup.pptx
+++ b/01-foundations-scenarios-and-tools/00-pre-session/slides-welcome-and-setup.pptx
@@ -956,15 +956,15 @@
         </p:nvSpPr>
         <p:spPr>
           <a:xfrm>
-            <a:off x="722313" y="3305176"/>
-            <a:ext cx="7772400" cy="1021556"/>
+            <a:off x="722313" y="1850000"/>
+            <a:ext cx="7772400" cy="1300000"/>
           </a:xfrm>
         </p:spPr>
         <p:txBody>
           <a:bodyPr anchor="t"/>
           <a:lstStyle>
             <a:lvl1pPr algn="l">
-              <a:defRPr sz="1850" b="1" cap="all"/>
+              <a:defRPr sz="2800" b="1" cap="none"/>
             </a:lvl1pPr>
           </a:lstStyle>
           <a:p>
@@ -987,8 +987,8 @@
         </p:nvSpPr>
         <p:spPr>
           <a:xfrm>
-            <a:off x="722313" y="2180035"/>
-            <a:ext cx="7772400" cy="1125140"/>
+            <a:off x="722313" y="3250000"/>
+            <a:ext cx="7772400" cy="700000"/>
           </a:xfrm>
         </p:spPr>
         <p:txBody>
@@ -3768,8 +3768,8 @@
         </p:nvSpPr>
         <p:spPr>
           <a:xfrm>
-            <a:off x="722313" y="3305176"/>
-            <a:ext cx="7772400" cy="1021556"/>
+            <a:off x="722313" y="1850000"/>
+            <a:ext cx="7772400" cy="1300000"/>
           </a:xfrm>
         </p:spPr>
         <p:txBody>
@@ -4627,8 +4627,8 @@
         </p:nvSpPr>
         <p:spPr>
           <a:xfrm>
-            <a:off x="722313" y="3305176"/>
-            <a:ext cx="7772400" cy="1021556"/>
+            <a:off x="722313" y="1850000"/>
+            <a:ext cx="7772400" cy="1300000"/>
           </a:xfrm>
         </p:spPr>
         <p:txBody>
@@ -4829,8 +4829,8 @@
         </p:nvSpPr>
         <p:spPr>
           <a:xfrm>
-            <a:off x="722313" y="3305176"/>
-            <a:ext cx="7772400" cy="1021556"/>
+            <a:off x="722313" y="1850000"/>
+            <a:ext cx="7772400" cy="1300000"/>
           </a:xfrm>
         </p:spPr>
         <p:txBody>
@@ -5127,8 +5127,8 @@
         </p:nvSpPr>
         <p:spPr>
           <a:xfrm>
-            <a:off x="722313" y="3305176"/>
-            <a:ext cx="7772400" cy="1021556"/>
+            <a:off x="722313" y="1850000"/>
+            <a:ext cx="7772400" cy="1300000"/>
           </a:xfrm>
         </p:spPr>
         <p:txBody>
@@ -5895,8 +5895,8 @@
         </p:nvSpPr>
         <p:spPr>
           <a:xfrm>
-            <a:off x="722313" y="3305176"/>
-            <a:ext cx="7772400" cy="1021556"/>
+            <a:off x="722313" y="1850000"/>
+            <a:ext cx="7772400" cy="1300000"/>
           </a:xfrm>
         </p:spPr>
         <p:txBody>
@@ -6856,8 +6856,8 @@
         </p:nvSpPr>
         <p:spPr>
           <a:xfrm>
-            <a:off x="722313" y="3305176"/>
-            <a:ext cx="7772400" cy="1021556"/>
+            <a:off x="722313" y="1850000"/>
+            <a:ext cx="7772400" cy="1300000"/>
           </a:xfrm>
         </p:spPr>
         <p:txBody>
@@ -7820,8 +7820,8 @@
         </p:nvSpPr>
         <p:spPr>
           <a:xfrm>
-            <a:off x="722313" y="3305176"/>
-            <a:ext cx="7772400" cy="1021556"/>
+            <a:off x="722313" y="1850000"/>
+            <a:ext cx="7772400" cy="1300000"/>
           </a:xfrm>
         </p:spPr>
         <p:txBody>
@@ -8371,8 +8371,8 @@
         </p:nvSpPr>
         <p:spPr>
           <a:xfrm>
-            <a:off x="722313" y="3305176"/>
-            <a:ext cx="7772400" cy="1021556"/>
+            <a:off x="722313" y="1850000"/>
+            <a:ext cx="7772400" cy="1300000"/>
           </a:xfrm>
         </p:spPr>
         <p:txBody>
@@ -9534,8 +9534,8 @@
         </p:nvSpPr>
         <p:spPr>
           <a:xfrm>
-            <a:off x="722313" y="3305176"/>
-            <a:ext cx="7772400" cy="1021556"/>
+            <a:off x="722313" y="1850000"/>
+            <a:ext cx="7772400" cy="1300000"/>
           </a:xfrm>
         </p:spPr>
         <p:txBody>
